--- a/HRL_International_Pitch_Deck.pptx
+++ b/HRL_International_Pitch_Deck.pptx
@@ -15,8 +15,6 @@
     <p:sldId id="263" r:id="rId14"/>
     <p:sldId id="264" r:id="rId15"/>
     <p:sldId id="265" r:id="rId16"/>
-    <p:sldId id="266" r:id="rId17"/>
-    <p:sldId id="267" r:id="rId18"/>
   </p:sldIdLst>
   <p:sldSz cx="12191695" cy="6858000" type="screen4x3"/>
   <p:notesSz cx="6858000" cy="9144000"/>
@@ -3144,23 +3142,25 @@
       </p:sp>
       <p:sp>
         <p:nvSpPr>
-          <p:cNvPr id="3" name="Rectangle 2"/>
+          <p:cNvPr id="3" name="Rounded Rectangle 2"/>
           <p:cNvSpPr/>
           <p:nvPr/>
         </p:nvSpPr>
         <p:spPr>
           <a:xfrm>
-            <a:off x="731520" y="731520"/>
-            <a:ext cx="1371600" cy="54864"/>
-          </a:xfrm>
-          <a:prstGeom prst="rect">
+            <a:off x="822960" y="1097280"/>
+            <a:ext cx="2926080" cy="320040"/>
+          </a:xfrm>
+          <a:prstGeom prst="roundRect">
             <a:avLst/>
           </a:prstGeom>
           <a:solidFill>
-            <a:srgbClr val="2563EB"/>
+            <a:srgbClr val="EFF6FF"/>
           </a:solidFill>
           <a:ln>
-            <a:noFill/>
+            <a:solidFill>
+              <a:srgbClr val="BFDBFE"/>
+            </a:solidFill>
           </a:ln>
         </p:spPr>
         <p:style>
@@ -3181,7 +3181,16 @@
           <a:bodyPr rtlCol="0" anchor="ctr"/>
           <a:lstStyle/>
           <a:p>
-            <a:pPr algn="ctr"/>
+            <a:pPr algn="ctr">
+              <a:defRPr sz="1000" b="1">
+                <a:solidFill>
+                  <a:srgbClr val="2563EB"/>
+                </a:solidFill>
+              </a:defRPr>
+            </a:pPr>
+            <a:r>
+              <a:t>DEEP-TECH &amp; AVGC INNOVATION</a:t>
+            </a:r>
           </a:p>
         </p:txBody>
       </p:sp>
@@ -3193,8 +3202,8 @@
         </p:nvSpPr>
         <p:spPr>
           <a:xfrm>
-            <a:off x="731520" y="1097280"/>
-            <a:ext cx="10698480" cy="2743200"/>
+            <a:off x="822960" y="1645920"/>
+            <a:ext cx="10515600" cy="2011680"/>
           </a:xfrm>
           <a:prstGeom prst="rect">
             <a:avLst/>
@@ -3211,48 +3220,26 @@
               <a:spcAft>
                 <a:spcPts val="1000"/>
               </a:spcAft>
-              <a:defRPr sz="1300" b="1">
-                <a:solidFill>
-                  <a:srgbClr val="2563EB"/>
-                </a:solidFill>
-                <a:latin typeface="Arial"/>
-              </a:defRPr>
-            </a:pPr>
-            <a:r>
-              <a:t>HRL INTERNATIONAL PRIVATE LIMITED</a:t>
-            </a:r>
-          </a:p>
-          <a:p>
-            <a:pPr>
-              <a:spcAft>
-                <a:spcPts val="1400"/>
-              </a:spcAft>
-              <a:defRPr sz="3200" b="1">
+              <a:defRPr sz="3600" b="1">
                 <a:solidFill>
                   <a:srgbClr val="0F172A"/>
                 </a:solidFill>
-                <a:latin typeface="Arial"/>
-              </a:defRPr>
-            </a:pPr>
-            <a:r>
-              <a:t>Next-Generation Visual Computing &amp;</a:t>
-            </a:r>
-            <a:br/>
-            <a:r>
-              <a:t>Autonomous AI Post-Production Engine</a:t>
-            </a:r>
-          </a:p>
-          <a:p>
-            <a:pPr>
-              <a:defRPr sz="1400">
+              </a:defRPr>
+            </a:pPr>
+            <a:r>
+              <a:t>HRL International Private Limited</a:t>
+            </a:r>
+          </a:p>
+          <a:p>
+            <a:pPr>
+              <a:defRPr sz="1600">
                 <a:solidFill>
                   <a:srgbClr val="64748B"/>
                 </a:solidFill>
-                <a:latin typeface="Arial"/>
-              </a:defRPr>
-            </a:pPr>
-            <a:r>
-              <a:t>Democratizing Hollywood-grade DaVinci Resolve OFX visual effects, ACES color science, and on-device AI workflows.</a:t>
+              </a:defRPr>
+            </a:pPr>
+            <a:r>
+              <a:t>Democratizing cinema-grade visual computing and autonomous AI post-production for millions of creators.</a:t>
             </a:r>
           </a:p>
         </p:txBody>
@@ -3265,8 +3252,8 @@
         </p:nvSpPr>
         <p:spPr>
           <a:xfrm>
-            <a:off x="731520" y="4114800"/>
-            <a:ext cx="3383280" cy="2011680"/>
+            <a:off x="822960" y="4206240"/>
+            <a:ext cx="3291840" cy="1645920"/>
           </a:xfrm>
           <a:prstGeom prst="roundRect">
             <a:avLst/>
@@ -3310,8 +3297,8 @@
         </p:nvSpPr>
         <p:spPr>
           <a:xfrm>
-            <a:off x="914400" y="4297680"/>
-            <a:ext cx="3017520" cy="1645920"/>
+            <a:off x="1051560" y="4389120"/>
+            <a:ext cx="2834640" cy="1280160"/>
           </a:xfrm>
           <a:prstGeom prst="rect">
             <a:avLst/>
@@ -3319,12 +3306,15 @@
           <a:noFill/>
         </p:spPr>
         <p:txBody>
-          <a:bodyPr wrap="square">
+          <a:bodyPr wrap="square" lIns="0" tIns="0" rIns="0" bIns="0">
             <a:spAutoFit/>
           </a:bodyPr>
           <a:lstStyle/>
           <a:p>
             <a:pPr>
+              <a:spcAft>
+                <a:spcPts val="400"/>
+              </a:spcAft>
               <a:defRPr sz="1000" b="1">
                 <a:solidFill>
                   <a:srgbClr val="2563EB"/>
@@ -3332,12 +3322,15 @@
               </a:defRPr>
             </a:pPr>
             <a:r>
-              <a:t>FOUNDER &amp; MANAGING DIRECTOR</a:t>
-            </a:r>
-          </a:p>
-          <a:p>
-            <a:pPr>
-              <a:defRPr sz="1500" b="1">
+              <a:t>FOUNDER &amp; ARCHITECT</a:t>
+            </a:r>
+          </a:p>
+          <a:p>
+            <a:pPr>
+              <a:spcAft>
+                <a:spcPts val="400"/>
+              </a:spcAft>
+              <a:defRPr sz="1600" b="1">
                 <a:solidFill>
                   <a:srgbClr val="0F172A"/>
                 </a:solidFill>
@@ -3351,20 +3344,12 @@
             <a:pPr>
               <a:defRPr sz="1050">
                 <a:solidFill>
-                  <a:srgbClr val="1E293B"/>
-                </a:solidFill>
-              </a:defRPr>
-            </a:pPr>
-            <a:r>
-              <a:t>B.E. Computer Science &amp; Engg (AI &amp; ML)</a:t>
-            </a:r>
-            <a:br/>
-            <a:r>
-              <a:t>Sahyadri College of Engg &amp; Management</a:t>
-            </a:r>
-            <a:br/>
-            <a:r>
-              <a:t>Mangaluru, Karnataka (Beyond Bengaluru Hub)</a:t>
+                  <a:srgbClr val="64748B"/>
+                </a:solidFill>
+              </a:defRPr>
+            </a:pPr>
+            <a:r>
+              <a:t>B.E. CSE (AI &amp; ML) • Mangaluru, Karnataka</a:t>
             </a:r>
           </a:p>
         </p:txBody>
@@ -3377,8 +3362,8 @@
         </p:nvSpPr>
         <p:spPr>
           <a:xfrm>
-            <a:off x="4389120" y="4114800"/>
-            <a:ext cx="3383280" cy="2011680"/>
+            <a:off x="4434840" y="4206240"/>
+            <a:ext cx="3291840" cy="1645920"/>
           </a:xfrm>
           <a:prstGeom prst="roundRect">
             <a:avLst/>
@@ -3422,8 +3407,8 @@
         </p:nvSpPr>
         <p:spPr>
           <a:xfrm>
-            <a:off x="4572000" y="4297680"/>
-            <a:ext cx="3017520" cy="1645920"/>
+            <a:off x="4663440" y="4389120"/>
+            <a:ext cx="2834640" cy="1280160"/>
           </a:xfrm>
           <a:prstGeom prst="rect">
             <a:avLst/>
@@ -3431,52 +3416,50 @@
           <a:noFill/>
         </p:spPr>
         <p:txBody>
-          <a:bodyPr wrap="square">
+          <a:bodyPr wrap="square" lIns="0" tIns="0" rIns="0" bIns="0">
             <a:spAutoFit/>
           </a:bodyPr>
           <a:lstStyle/>
           <a:p>
             <a:pPr>
+              <a:spcAft>
+                <a:spcPts val="400"/>
+              </a:spcAft>
               <a:defRPr sz="1000" b="1">
                 <a:solidFill>
-                  <a:srgbClr val="2563EB"/>
-                </a:solidFill>
-              </a:defRPr>
-            </a:pPr>
-            <a:r>
-              <a:t>SECTOR &amp; INITIATIVE</a:t>
-            </a:r>
-          </a:p>
-          <a:p>
-            <a:pPr>
-              <a:defRPr sz="1500" b="1">
+                  <a:srgbClr val="059669"/>
+                </a:solidFill>
+              </a:defRPr>
+            </a:pPr>
+            <a:r>
+              <a:t>KEY VALIDATION</a:t>
+            </a:r>
+          </a:p>
+          <a:p>
+            <a:pPr>
+              <a:spcAft>
+                <a:spcPts val="400"/>
+              </a:spcAft>
+              <a:defRPr sz="1600" b="1">
                 <a:solidFill>
                   <a:srgbClr val="0F172A"/>
                 </a:solidFill>
               </a:defRPr>
             </a:pPr>
             <a:r>
-              <a:t>Deep-Tech / AVGC Sector</a:t>
+              <a:t>2.5M+ Organic Reach</a:t>
             </a:r>
           </a:p>
           <a:p>
             <a:pPr>
               <a:defRPr sz="1050">
                 <a:solidFill>
-                  <a:srgbClr val="1E293B"/>
-                </a:solidFill>
-              </a:defRPr>
-            </a:pPr>
-            <a:r>
-              <a:t>Make in India Indigenous Software</a:t>
-            </a:r>
-            <a:br/>
-            <a:r>
-              <a:t>Eligible for Startup India SISFS &amp;</a:t>
-            </a:r>
-            <a:br/>
-            <a:r>
-              <a:t>Karnataka ELEVATE Idea2POC</a:t>
+                  <a:srgbClr val="64748B"/>
+                </a:solidFill>
+              </a:defRPr>
+            </a:pPr>
+            <a:r>
+              <a:t>Certified by Blackmagic Design, JPMorgan &amp; Deloitte</a:t>
             </a:r>
           </a:p>
         </p:txBody>
@@ -3489,8 +3472,8 @@
         </p:nvSpPr>
         <p:spPr>
           <a:xfrm>
-            <a:off x="8046720" y="4114800"/>
-            <a:ext cx="3383280" cy="2011680"/>
+            <a:off x="8046720" y="4206240"/>
+            <a:ext cx="3291840" cy="1645920"/>
           </a:xfrm>
           <a:prstGeom prst="roundRect">
             <a:avLst/>
@@ -3534,8 +3517,8 @@
         </p:nvSpPr>
         <p:spPr>
           <a:xfrm>
-            <a:off x="8229600" y="4297680"/>
-            <a:ext cx="3017520" cy="1645920"/>
+            <a:off x="8275320" y="4389120"/>
+            <a:ext cx="2834640" cy="1280160"/>
           </a:xfrm>
           <a:prstGeom prst="rect">
             <a:avLst/>
@@ -3543,52 +3526,50 @@
           <a:noFill/>
         </p:spPr>
         <p:txBody>
-          <a:bodyPr wrap="square">
+          <a:bodyPr wrap="square" lIns="0" tIns="0" rIns="0" bIns="0">
             <a:spAutoFit/>
           </a:bodyPr>
           <a:lstStyle/>
           <a:p>
             <a:pPr>
+              <a:spcAft>
+                <a:spcPts val="400"/>
+              </a:spcAft>
               <a:defRPr sz="1000" b="1">
                 <a:solidFill>
-                  <a:srgbClr val="059669"/>
-                </a:solidFill>
-              </a:defRPr>
-            </a:pPr>
-            <a:r>
-              <a:t>PROVEN TRACTION</a:t>
-            </a:r>
-          </a:p>
-          <a:p>
-            <a:pPr>
-              <a:defRPr sz="1500" b="1">
+                  <a:srgbClr val="7C3AED"/>
+                </a:solidFill>
+              </a:defRPr>
+            </a:pPr>
+            <a:r>
+              <a:t>TARGET GRANT</a:t>
+            </a:r>
+          </a:p>
+          <a:p>
+            <a:pPr>
+              <a:spcAft>
+                <a:spcPts val="400"/>
+              </a:spcAft>
+              <a:defRPr sz="1600" b="1">
                 <a:solidFill>
                   <a:srgbClr val="0F172A"/>
                 </a:solidFill>
               </a:defRPr>
             </a:pPr>
             <a:r>
-              <a:t>2.5M+ Organic Reach</a:t>
+              <a:t>GENESIS EIR / ELEVATE</a:t>
             </a:r>
           </a:p>
           <a:p>
             <a:pPr>
               <a:defRPr sz="1050">
                 <a:solidFill>
-                  <a:srgbClr val="1E293B"/>
-                </a:solidFill>
-              </a:defRPr>
-            </a:pPr>
-            <a:r>
-              <a:t>Blackmagic Design Certified</a:t>
-            </a:r>
-            <a:br/>
-            <a:r>
-              <a:t>JPMorgan Chase &amp; Deloitte Qualified</a:t>
-            </a:r>
-            <a:br/>
-            <a:r>
-              <a:t>Live Institutional Software Deployed</a:t>
+                  <a:srgbClr val="64748B"/>
+                </a:solidFill>
+              </a:defRPr>
+            </a:pPr>
+            <a:r>
+              <a:t>Seed Funding for GPU R&amp;D &amp; Patent Filings</a:t>
             </a:r>
           </a:p>
         </p:txBody>
@@ -3656,165 +3637,14 @@
       </p:sp>
       <p:sp>
         <p:nvSpPr>
-          <p:cNvPr id="3" name="TextBox 2"/>
-          <p:cNvSpPr txBox="1"/>
-          <p:nvPr/>
-        </p:nvSpPr>
-        <p:spPr>
-          <a:xfrm>
-            <a:off x="731520" y="411480"/>
-            <a:ext cx="10728655" cy="274320"/>
-          </a:xfrm>
-          <a:prstGeom prst="rect">
-            <a:avLst/>
-          </a:prstGeom>
-          <a:noFill/>
-        </p:spPr>
-        <p:txBody>
-          <a:bodyPr wrap="square" lIns="0" tIns="0" rIns="0" bIns="0">
-            <a:spAutoFit/>
-          </a:bodyPr>
-          <a:lstStyle/>
-          <a:p>
-            <a:pPr>
-              <a:defRPr sz="1000" b="1">
-                <a:solidFill>
-                  <a:srgbClr val="2563EB"/>
-                </a:solidFill>
-                <a:latin typeface="Arial"/>
-              </a:defRPr>
-            </a:pPr>
-            <a:r>
-              <a:t>MANAGEMENT &amp; VISION</a:t>
-            </a:r>
-          </a:p>
-        </p:txBody>
-      </p:sp>
-      <p:sp>
-        <p:nvSpPr>
-          <p:cNvPr id="4" name="TextBox 3"/>
-          <p:cNvSpPr txBox="1"/>
-          <p:nvPr/>
-        </p:nvSpPr>
-        <p:spPr>
-          <a:xfrm>
-            <a:off x="731520" y="685800"/>
-            <a:ext cx="10728655" cy="548640"/>
-          </a:xfrm>
-          <a:prstGeom prst="rect">
-            <a:avLst/>
-          </a:prstGeom>
-          <a:noFill/>
-        </p:spPr>
-        <p:txBody>
-          <a:bodyPr wrap="square" lIns="0" tIns="0" rIns="0" bIns="0">
-            <a:spAutoFit/>
-          </a:bodyPr>
-          <a:lstStyle/>
-          <a:p>
-            <a:pPr>
-              <a:defRPr sz="2200" b="1">
-                <a:solidFill>
-                  <a:srgbClr val="0F172A"/>
-                </a:solidFill>
-                <a:latin typeface="Arial"/>
-              </a:defRPr>
-            </a:pPr>
-            <a:r>
-              <a:t>Founder &amp; Leadership Profile</a:t>
-            </a:r>
-          </a:p>
-        </p:txBody>
-      </p:sp>
-      <p:sp>
-        <p:nvSpPr>
-          <p:cNvPr id="5" name="TextBox 4"/>
-          <p:cNvSpPr txBox="1"/>
-          <p:nvPr/>
-        </p:nvSpPr>
-        <p:spPr>
-          <a:xfrm>
-            <a:off x="731520" y="1234440"/>
-            <a:ext cx="10728655" cy="320040"/>
-          </a:xfrm>
-          <a:prstGeom prst="rect">
-            <a:avLst/>
-          </a:prstGeom>
-          <a:noFill/>
-        </p:spPr>
-        <p:txBody>
-          <a:bodyPr wrap="square" lIns="0" tIns="0" rIns="0" bIns="0">
-            <a:spAutoFit/>
-          </a:bodyPr>
-          <a:lstStyle/>
-          <a:p>
-            <a:pPr>
-              <a:defRPr sz="1200">
-                <a:solidFill>
-                  <a:srgbClr val="64748B"/>
-                </a:solidFill>
-                <a:latin typeface="Arial"/>
-              </a:defRPr>
-            </a:pPr>
-            <a:r>
-              <a:t>Combining deep algorithmic systems engineering with certified media post-production.</a:t>
-            </a:r>
-          </a:p>
-        </p:txBody>
-      </p:sp>
-      <p:sp>
-        <p:nvSpPr>
-          <p:cNvPr id="6" name="Rectangle 5"/>
+          <p:cNvPr id="3" name="Rounded Rectangle 2"/>
           <p:cNvSpPr/>
           <p:nvPr/>
         </p:nvSpPr>
         <p:spPr>
           <a:xfrm>
-            <a:off x="731520" y="1572768"/>
-            <a:ext cx="10728655" cy="13716"/>
-          </a:xfrm>
-          <a:prstGeom prst="rect">
-            <a:avLst/>
-          </a:prstGeom>
-          <a:solidFill>
-            <a:srgbClr val="E2E8F0"/>
-          </a:solidFill>
-          <a:ln>
-            <a:noFill/>
-          </a:ln>
-        </p:spPr>
-        <p:style>
-          <a:lnRef idx="1">
-            <a:schemeClr val="accent1"/>
-          </a:lnRef>
-          <a:fillRef idx="3">
-            <a:schemeClr val="accent1"/>
-          </a:fillRef>
-          <a:effectRef idx="2">
-            <a:schemeClr val="accent1"/>
-          </a:effectRef>
-          <a:fontRef idx="minor">
-            <a:schemeClr val="lt1"/>
-          </a:fontRef>
-        </p:style>
-        <p:txBody>
-          <a:bodyPr rtlCol="0" anchor="ctr"/>
-          <a:lstStyle/>
-          <a:p>
-            <a:pPr algn="ctr"/>
-          </a:p>
-        </p:txBody>
-      </p:sp>
-      <p:sp>
-        <p:nvSpPr>
-          <p:cNvPr id="7" name="Rounded Rectangle 6"/>
-          <p:cNvSpPr/>
-          <p:nvPr/>
-        </p:nvSpPr>
-        <p:spPr>
-          <a:xfrm>
-            <a:off x="731520" y="1737360"/>
-            <a:ext cx="4114800" cy="4572000"/>
+            <a:off x="822960" y="640080"/>
+            <a:ext cx="10515600" cy="5577840"/>
           </a:xfrm>
           <a:prstGeom prst="roundRect">
             <a:avLst/>
@@ -3852,1085 +3682,14 @@
       </p:sp>
       <p:sp>
         <p:nvSpPr>
-          <p:cNvPr id="8" name="TextBox 7"/>
-          <p:cNvSpPr txBox="1"/>
-          <p:nvPr/>
-        </p:nvSpPr>
-        <p:spPr>
-          <a:xfrm>
-            <a:off x="914400" y="1920240"/>
-            <a:ext cx="3749040" cy="4206240"/>
-          </a:xfrm>
-          <a:prstGeom prst="rect">
-            <a:avLst/>
-          </a:prstGeom>
-          <a:noFill/>
-        </p:spPr>
-        <p:txBody>
-          <a:bodyPr wrap="square" lIns="0" tIns="0" rIns="0" bIns="0">
-            <a:spAutoFit/>
-          </a:bodyPr>
-          <a:lstStyle/>
-          <a:p>
-            <a:pPr>
-              <a:defRPr sz="1000" b="1">
-                <a:solidFill>
-                  <a:srgbClr val="2563EB"/>
-                </a:solidFill>
-              </a:defRPr>
-            </a:pPr>
-            <a:r>
-              <a:t>FOUNDER &amp; MANAGING DIRECTOR</a:t>
-            </a:r>
-          </a:p>
-          <a:p>
-            <a:pPr>
-              <a:spcAft>
-                <a:spcPts val="1000"/>
-              </a:spcAft>
-              <a:defRPr sz="2000" b="1">
-                <a:solidFill>
-                  <a:srgbClr val="0F172A"/>
-                </a:solidFill>
-              </a:defRPr>
-            </a:pPr>
-            <a:r>
-              <a:t>Pavan Kumar Sadashiv</a:t>
-            </a:r>
-          </a:p>
-          <a:p>
-            <a:pPr>
-              <a:spcAft>
-                <a:spcPts val="600"/>
-              </a:spcAft>
-              <a:defRPr sz="1050">
-                <a:solidFill>
-                  <a:srgbClr val="1E293B"/>
-                </a:solidFill>
-              </a:defRPr>
-            </a:pPr>
-            <a:r>
-              <a:t>• B.E. in Computer Science &amp; Engineering (AI &amp; ML) — Sahyadri College of Engineering &amp; Management (SCEM), Mangaluru.</a:t>
-            </a:r>
-          </a:p>
-          <a:p>
-            <a:pPr>
-              <a:spcAft>
-                <a:spcPts val="600"/>
-              </a:spcAft>
-              <a:defRPr sz="1050">
-                <a:solidFill>
-                  <a:srgbClr val="1E293B"/>
-                </a:solidFill>
-              </a:defRPr>
-            </a:pPr>
-            <a:r>
-              <a:t>• Chief Architect &amp; Full-Stack Systems Engineer specializing in GPU visual computing, discrete optimization, and AI agents.</a:t>
-            </a:r>
-          </a:p>
-          <a:p>
-            <a:pPr>
-              <a:defRPr sz="1050">
-                <a:solidFill>
-                  <a:srgbClr val="1E293B"/>
-                </a:solidFill>
-              </a:defRPr>
-            </a:pPr>
-            <a:r>
-              <a:t>• Location: Mangaluru, Dakshina Kannada, Karnataka (Beyond Bengaluru Tier-2 Hub).</a:t>
-            </a:r>
-          </a:p>
-        </p:txBody>
-      </p:sp>
-      <p:sp>
-        <p:nvSpPr>
-          <p:cNvPr id="9" name="Rounded Rectangle 8"/>
-          <p:cNvSpPr/>
-          <p:nvPr/>
-        </p:nvSpPr>
-        <p:spPr>
-          <a:xfrm>
-            <a:off x="5120640" y="1737360"/>
-            <a:ext cx="6309360" cy="1371600"/>
-          </a:xfrm>
-          <a:prstGeom prst="roundRect">
-            <a:avLst/>
-          </a:prstGeom>
-          <a:solidFill>
-            <a:srgbClr val="F8FAFC"/>
-          </a:solidFill>
-          <a:ln w="12700">
-            <a:solidFill>
-              <a:srgbClr val="E2E8F0"/>
-            </a:solidFill>
-          </a:ln>
-        </p:spPr>
-        <p:style>
-          <a:lnRef idx="1">
-            <a:schemeClr val="accent1"/>
-          </a:lnRef>
-          <a:fillRef idx="3">
-            <a:schemeClr val="accent1"/>
-          </a:fillRef>
-          <a:effectRef idx="2">
-            <a:schemeClr val="accent1"/>
-          </a:effectRef>
-          <a:fontRef idx="minor">
-            <a:schemeClr val="lt1"/>
-          </a:fontRef>
-        </p:style>
-        <p:txBody>
-          <a:bodyPr rtlCol="0" anchor="ctr"/>
-          <a:lstStyle/>
-          <a:p>
-            <a:pPr algn="ctr"/>
-          </a:p>
-        </p:txBody>
-      </p:sp>
-      <p:sp>
-        <p:nvSpPr>
-          <p:cNvPr id="10" name="TextBox 9"/>
-          <p:cNvSpPr txBox="1"/>
-          <p:nvPr/>
-        </p:nvSpPr>
-        <p:spPr>
-          <a:xfrm>
-            <a:off x="5349240" y="1874520"/>
-            <a:ext cx="5852160" cy="1097280"/>
-          </a:xfrm>
-          <a:prstGeom prst="rect">
-            <a:avLst/>
-          </a:prstGeom>
-          <a:noFill/>
-        </p:spPr>
-        <p:txBody>
-          <a:bodyPr wrap="square" lIns="0" tIns="0" rIns="0" bIns="0">
-            <a:spAutoFit/>
-          </a:bodyPr>
-          <a:lstStyle/>
-          <a:p>
-            <a:pPr>
-              <a:spcAft>
-                <a:spcPts val="400"/>
-              </a:spcAft>
-              <a:defRPr sz="1200" b="1">
-                <a:solidFill>
-                  <a:srgbClr val="2563EB"/>
-                </a:solidFill>
-              </a:defRPr>
-            </a:pPr>
-            <a:r>
-              <a:t>Blackmagic Design — DaVinci Resolve Certified</a:t>
-            </a:r>
-          </a:p>
-          <a:p>
-            <a:pPr>
-              <a:defRPr sz="1050">
-                <a:solidFill>
-                  <a:srgbClr val="1E293B"/>
-                </a:solidFill>
-              </a:defRPr>
-            </a:pPr>
-            <a:r>
-              <a:t>Validated technical mastery of Hollywood ACES color science, Node graph architectures, and OpenFX visual plugin integration.</a:t>
-            </a:r>
-          </a:p>
-        </p:txBody>
-      </p:sp>
-      <p:sp>
-        <p:nvSpPr>
-          <p:cNvPr id="11" name="Rounded Rectangle 10"/>
-          <p:cNvSpPr/>
-          <p:nvPr/>
-        </p:nvSpPr>
-        <p:spPr>
-          <a:xfrm>
-            <a:off x="5120640" y="3246120"/>
-            <a:ext cx="6309360" cy="1371600"/>
-          </a:xfrm>
-          <a:prstGeom prst="roundRect">
-            <a:avLst/>
-          </a:prstGeom>
-          <a:solidFill>
-            <a:srgbClr val="F8FAFC"/>
-          </a:solidFill>
-          <a:ln w="12700">
-            <a:solidFill>
-              <a:srgbClr val="E2E8F0"/>
-            </a:solidFill>
-          </a:ln>
-        </p:spPr>
-        <p:style>
-          <a:lnRef idx="1">
-            <a:schemeClr val="accent1"/>
-          </a:lnRef>
-          <a:fillRef idx="3">
-            <a:schemeClr val="accent1"/>
-          </a:fillRef>
-          <a:effectRef idx="2">
-            <a:schemeClr val="accent1"/>
-          </a:effectRef>
-          <a:fontRef idx="minor">
-            <a:schemeClr val="lt1"/>
-          </a:fontRef>
-        </p:style>
-        <p:txBody>
-          <a:bodyPr rtlCol="0" anchor="ctr"/>
-          <a:lstStyle/>
-          <a:p>
-            <a:pPr algn="ctr"/>
-          </a:p>
-        </p:txBody>
-      </p:sp>
-      <p:sp>
-        <p:nvSpPr>
-          <p:cNvPr id="12" name="TextBox 11"/>
-          <p:cNvSpPr txBox="1"/>
-          <p:nvPr/>
-        </p:nvSpPr>
-        <p:spPr>
-          <a:xfrm>
-            <a:off x="5349240" y="3383280"/>
-            <a:ext cx="5852160" cy="1097280"/>
-          </a:xfrm>
-          <a:prstGeom prst="rect">
-            <a:avLst/>
-          </a:prstGeom>
-          <a:noFill/>
-        </p:spPr>
-        <p:txBody>
-          <a:bodyPr wrap="square" lIns="0" tIns="0" rIns="0" bIns="0">
-            <a:spAutoFit/>
-          </a:bodyPr>
-          <a:lstStyle/>
-          <a:p>
-            <a:pPr>
-              <a:spcAft>
-                <a:spcPts val="400"/>
-              </a:spcAft>
-              <a:defRPr sz="1200" b="1">
-                <a:solidFill>
-                  <a:srgbClr val="4F46E5"/>
-                </a:solidFill>
-              </a:defRPr>
-            </a:pPr>
-            <a:r>
-              <a:t>JPMorgan Chase &amp; Co. — Distributed Systems</a:t>
-            </a:r>
-          </a:p>
-          <a:p>
-            <a:pPr>
-              <a:defRPr sz="1050">
-                <a:solidFill>
-                  <a:srgbClr val="1E293B"/>
-                </a:solidFill>
-              </a:defRPr>
-            </a:pPr>
-            <a:r>
-              <a:t>Software engineering simulation qualification in Kafka distributed streaming, low-latency REST API design, and transaction integrity.</a:t>
-            </a:r>
-          </a:p>
-        </p:txBody>
-      </p:sp>
-      <p:sp>
-        <p:nvSpPr>
-          <p:cNvPr id="13" name="Rounded Rectangle 12"/>
-          <p:cNvSpPr/>
-          <p:nvPr/>
-        </p:nvSpPr>
-        <p:spPr>
-          <a:xfrm>
-            <a:off x="5120640" y="4754880"/>
-            <a:ext cx="6309360" cy="1371600"/>
-          </a:xfrm>
-          <a:prstGeom prst="roundRect">
-            <a:avLst/>
-          </a:prstGeom>
-          <a:solidFill>
-            <a:srgbClr val="F8FAFC"/>
-          </a:solidFill>
-          <a:ln w="12700">
-            <a:solidFill>
-              <a:srgbClr val="E2E8F0"/>
-            </a:solidFill>
-          </a:ln>
-        </p:spPr>
-        <p:style>
-          <a:lnRef idx="1">
-            <a:schemeClr val="accent1"/>
-          </a:lnRef>
-          <a:fillRef idx="3">
-            <a:schemeClr val="accent1"/>
-          </a:fillRef>
-          <a:effectRef idx="2">
-            <a:schemeClr val="accent1"/>
-          </a:effectRef>
-          <a:fontRef idx="minor">
-            <a:schemeClr val="lt1"/>
-          </a:fontRef>
-        </p:style>
-        <p:txBody>
-          <a:bodyPr rtlCol="0" anchor="ctr"/>
-          <a:lstStyle/>
-          <a:p>
-            <a:pPr algn="ctr"/>
-          </a:p>
-        </p:txBody>
-      </p:sp>
-      <p:sp>
-        <p:nvSpPr>
-          <p:cNvPr id="14" name="TextBox 13"/>
-          <p:cNvSpPr txBox="1"/>
-          <p:nvPr/>
-        </p:nvSpPr>
-        <p:spPr>
-          <a:xfrm>
-            <a:off x="5349240" y="4892040"/>
-            <a:ext cx="5852160" cy="1097280"/>
-          </a:xfrm>
-          <a:prstGeom prst="rect">
-            <a:avLst/>
-          </a:prstGeom>
-          <a:noFill/>
-        </p:spPr>
-        <p:txBody>
-          <a:bodyPr wrap="square" lIns="0" tIns="0" rIns="0" bIns="0">
-            <a:spAutoFit/>
-          </a:bodyPr>
-          <a:lstStyle/>
-          <a:p>
-            <a:pPr>
-              <a:spcAft>
-                <a:spcPts val="400"/>
-              </a:spcAft>
-              <a:defRPr sz="1200" b="1">
-                <a:solidFill>
-                  <a:srgbClr val="059669"/>
-                </a:solidFill>
-              </a:defRPr>
-            </a:pPr>
-            <a:r>
-              <a:t>Deloitte Australia — Cyber Defense &amp; Governance</a:t>
-            </a:r>
-          </a:p>
-          <a:p>
-            <a:pPr>
-              <a:defRPr sz="1050">
-                <a:solidFill>
-                  <a:srgbClr val="1E293B"/>
-                </a:solidFill>
-              </a:defRPr>
-            </a:pPr>
-            <a:r>
-              <a:t>Enterprise cybersecurity qualification in threat modeling, perimeter defense, and intellectual property access governance.</a:t>
-            </a:r>
-          </a:p>
-        </p:txBody>
-      </p:sp>
-    </p:spTree>
-  </p:cSld>
-  <p:clrMapOvr>
-    <a:masterClrMapping/>
-  </p:clrMapOvr>
-</p:sld>
-</file>
-
-<file path=ppt/slides/slide11.xml><?xml version="1.0" encoding="utf-8"?>
-<p:sld xmlns:a="http://schemas.openxmlformats.org/drawingml/2006/main" xmlns:p="http://schemas.openxmlformats.org/presentationml/2006/main" xmlns:r="http://schemas.openxmlformats.org/officeDocument/2006/relationships">
-  <p:cSld>
-    <p:spTree>
-      <p:nvGrpSpPr>
-        <p:cNvPr id="1" name=""/>
-        <p:cNvGrpSpPr/>
-        <p:nvPr/>
-      </p:nvGrpSpPr>
-      <p:grpSpPr/>
-      <p:sp>
-        <p:nvSpPr>
-          <p:cNvPr id="2" name="Rectangle 1"/>
-          <p:cNvSpPr/>
-          <p:nvPr/>
-        </p:nvSpPr>
-        <p:spPr>
-          <a:xfrm>
-            <a:off x="0" y="0"/>
-            <a:ext cx="12191695" cy="6858000"/>
-          </a:xfrm>
-          <a:prstGeom prst="rect">
-            <a:avLst/>
-          </a:prstGeom>
-          <a:solidFill>
-            <a:srgbClr val="FFFFFF"/>
-          </a:solidFill>
-          <a:ln>
-            <a:noFill/>
-          </a:ln>
-        </p:spPr>
-        <p:style>
-          <a:lnRef idx="1">
-            <a:schemeClr val="accent1"/>
-          </a:lnRef>
-          <a:fillRef idx="3">
-            <a:schemeClr val="accent1"/>
-          </a:fillRef>
-          <a:effectRef idx="2">
-            <a:schemeClr val="accent1"/>
-          </a:effectRef>
-          <a:fontRef idx="minor">
-            <a:schemeClr val="lt1"/>
-          </a:fontRef>
-        </p:style>
-        <p:txBody>
-          <a:bodyPr rtlCol="0" anchor="ctr"/>
-          <a:lstStyle/>
-          <a:p>
-            <a:pPr algn="ctr"/>
-          </a:p>
-        </p:txBody>
-      </p:sp>
-      <p:sp>
-        <p:nvSpPr>
-          <p:cNvPr id="3" name="TextBox 2"/>
-          <p:cNvSpPr txBox="1"/>
-          <p:nvPr/>
-        </p:nvSpPr>
-        <p:spPr>
-          <a:xfrm>
-            <a:off x="731520" y="411480"/>
-            <a:ext cx="10728655" cy="274320"/>
-          </a:xfrm>
-          <a:prstGeom prst="rect">
-            <a:avLst/>
-          </a:prstGeom>
-          <a:noFill/>
-        </p:spPr>
-        <p:txBody>
-          <a:bodyPr wrap="square" lIns="0" tIns="0" rIns="0" bIns="0">
-            <a:spAutoFit/>
-          </a:bodyPr>
-          <a:lstStyle/>
-          <a:p>
-            <a:pPr>
-              <a:defRPr sz="1000" b="1">
-                <a:solidFill>
-                  <a:srgbClr val="2563EB"/>
-                </a:solidFill>
-                <a:latin typeface="Arial"/>
-              </a:defRPr>
-            </a:pPr>
-            <a:r>
-              <a:t>FINANCIAL PLAN &amp; GRANT ASK</a:t>
-            </a:r>
-          </a:p>
-        </p:txBody>
-      </p:sp>
-      <p:sp>
-        <p:nvSpPr>
           <p:cNvPr id="4" name="TextBox 3"/>
           <p:cNvSpPr txBox="1"/>
           <p:nvPr/>
         </p:nvSpPr>
         <p:spPr>
           <a:xfrm>
-            <a:off x="731520" y="685800"/>
-            <a:ext cx="10728655" cy="548640"/>
-          </a:xfrm>
-          <a:prstGeom prst="rect">
-            <a:avLst/>
-          </a:prstGeom>
-          <a:noFill/>
-        </p:spPr>
-        <p:txBody>
-          <a:bodyPr wrap="square" lIns="0" tIns="0" rIns="0" bIns="0">
-            <a:spAutoFit/>
-          </a:bodyPr>
-          <a:lstStyle/>
-          <a:p>
-            <a:pPr>
-              <a:defRPr sz="2200" b="1">
-                <a:solidFill>
-                  <a:srgbClr val="0F172A"/>
-                </a:solidFill>
-                <a:latin typeface="Arial"/>
-              </a:defRPr>
-            </a:pPr>
-            <a:r>
-              <a:t>Fund Utilization &amp; Milestone Roadmap</a:t>
-            </a:r>
-          </a:p>
-        </p:txBody>
-      </p:sp>
-      <p:sp>
-        <p:nvSpPr>
-          <p:cNvPr id="5" name="TextBox 4"/>
-          <p:cNvSpPr txBox="1"/>
-          <p:nvPr/>
-        </p:nvSpPr>
-        <p:spPr>
-          <a:xfrm>
-            <a:off x="731520" y="1234440"/>
-            <a:ext cx="10728655" cy="320040"/>
-          </a:xfrm>
-          <a:prstGeom prst="rect">
-            <a:avLst/>
-          </a:prstGeom>
-          <a:noFill/>
-        </p:spPr>
-        <p:txBody>
-          <a:bodyPr wrap="square" lIns="0" tIns="0" rIns="0" bIns="0">
-            <a:spAutoFit/>
-          </a:bodyPr>
-          <a:lstStyle/>
-          <a:p>
-            <a:pPr>
-              <a:defRPr sz="1200">
-                <a:solidFill>
-                  <a:srgbClr val="64748B"/>
-                </a:solidFill>
-                <a:latin typeface="Arial"/>
-              </a:defRPr>
-            </a:pPr>
-            <a:r>
-              <a:t>Targeting ₹20L – ₹50L non-dilutive grant support (SISFS / Karnataka ELEVATE / EIR).</a:t>
-            </a:r>
-          </a:p>
-        </p:txBody>
-      </p:sp>
-      <p:sp>
-        <p:nvSpPr>
-          <p:cNvPr id="6" name="Rectangle 5"/>
-          <p:cNvSpPr/>
-          <p:nvPr/>
-        </p:nvSpPr>
-        <p:spPr>
-          <a:xfrm>
-            <a:off x="731520" y="1572768"/>
-            <a:ext cx="10728655" cy="13716"/>
-          </a:xfrm>
-          <a:prstGeom prst="rect">
-            <a:avLst/>
-          </a:prstGeom>
-          <a:solidFill>
-            <a:srgbClr val="E2E8F0"/>
-          </a:solidFill>
-          <a:ln>
-            <a:noFill/>
-          </a:ln>
-        </p:spPr>
-        <p:style>
-          <a:lnRef idx="1">
-            <a:schemeClr val="accent1"/>
-          </a:lnRef>
-          <a:fillRef idx="3">
-            <a:schemeClr val="accent1"/>
-          </a:fillRef>
-          <a:effectRef idx="2">
-            <a:schemeClr val="accent1"/>
-          </a:effectRef>
-          <a:fontRef idx="minor">
-            <a:schemeClr val="lt1"/>
-          </a:fontRef>
-        </p:style>
-        <p:txBody>
-          <a:bodyPr rtlCol="0" anchor="ctr"/>
-          <a:lstStyle/>
-          <a:p>
-            <a:pPr algn="ctr"/>
-          </a:p>
-        </p:txBody>
-      </p:sp>
-      <p:sp>
-        <p:nvSpPr>
-          <p:cNvPr id="7" name="Rounded Rectangle 6"/>
-          <p:cNvSpPr/>
-          <p:nvPr/>
-        </p:nvSpPr>
-        <p:spPr>
-          <a:xfrm>
-            <a:off x="731520" y="1737360"/>
-            <a:ext cx="5486400" cy="4572000"/>
-          </a:xfrm>
-          <a:prstGeom prst="roundRect">
-            <a:avLst/>
-          </a:prstGeom>
-          <a:solidFill>
-            <a:srgbClr val="F8FAFC"/>
-          </a:solidFill>
-          <a:ln w="12700">
-            <a:solidFill>
-              <a:srgbClr val="E2E8F0"/>
-            </a:solidFill>
-          </a:ln>
-        </p:spPr>
-        <p:style>
-          <a:lnRef idx="1">
-            <a:schemeClr val="accent1"/>
-          </a:lnRef>
-          <a:fillRef idx="3">
-            <a:schemeClr val="accent1"/>
-          </a:fillRef>
-          <a:effectRef idx="2">
-            <a:schemeClr val="accent1"/>
-          </a:effectRef>
-          <a:fontRef idx="minor">
-            <a:schemeClr val="lt1"/>
-          </a:fontRef>
-        </p:style>
-        <p:txBody>
-          <a:bodyPr rtlCol="0" anchor="ctr"/>
-          <a:lstStyle/>
-          <a:p>
-            <a:pPr algn="ctr"/>
-          </a:p>
-        </p:txBody>
-      </p:sp>
-      <p:sp>
-        <p:nvSpPr>
-          <p:cNvPr id="8" name="TextBox 7"/>
-          <p:cNvSpPr txBox="1"/>
-          <p:nvPr/>
-        </p:nvSpPr>
-        <p:spPr>
-          <a:xfrm>
-            <a:off x="914400" y="1920240"/>
-            <a:ext cx="5120640" cy="4206240"/>
-          </a:xfrm>
-          <a:prstGeom prst="rect">
-            <a:avLst/>
-          </a:prstGeom>
-          <a:noFill/>
-        </p:spPr>
-        <p:txBody>
-          <a:bodyPr wrap="square" lIns="0" tIns="0" rIns="0" bIns="0">
-            <a:spAutoFit/>
-          </a:bodyPr>
-          <a:lstStyle/>
-          <a:p>
-            <a:pPr>
-              <a:spcAft>
-                <a:spcPts val="1000"/>
-              </a:spcAft>
-              <a:defRPr sz="1200" b="1">
-                <a:solidFill>
-                  <a:srgbClr val="2563EB"/>
-                </a:solidFill>
-              </a:defRPr>
-            </a:pPr>
-            <a:r>
-              <a:t>GRANT ALLOCATION BREAKDOWN (₹50 LAKHS)</a:t>
-            </a:r>
-          </a:p>
-          <a:p>
-            <a:pPr>
-              <a:spcAft>
-                <a:spcPts val="100"/>
-              </a:spcAft>
-              <a:defRPr sz="1100" b="1">
-                <a:solidFill>
-                  <a:srgbClr val="0F172A"/>
-                </a:solidFill>
-              </a:defRPr>
-            </a:pPr>
-            <a:r>
-              <a:t>• Core R&amp;D &amp; Plugin Engineering (40%) — ₹20,00,000</a:t>
-            </a:r>
-          </a:p>
-          <a:p>
-            <a:pPr>
-              <a:spcAft>
-                <a:spcPts val="600"/>
-              </a:spcAft>
-              <a:defRPr sz="950">
-                <a:solidFill>
-                  <a:srgbClr val="1E293B"/>
-                </a:solidFill>
-              </a:defRPr>
-            </a:pPr>
-            <a:r>
-              <a:t>DaVinci Resolve OFX C++/CUDA engine, ONNX depth models, and cross-platform packaging.</a:t>
-            </a:r>
-          </a:p>
-          <a:p>
-            <a:pPr>
-              <a:spcAft>
-                <a:spcPts val="100"/>
-              </a:spcAft>
-              <a:defRPr sz="1100" b="1">
-                <a:solidFill>
-                  <a:srgbClr val="0F172A"/>
-                </a:solidFill>
-              </a:defRPr>
-            </a:pPr>
-            <a:r>
-              <a:t>• GPU Hardware &amp; Compute Lab (30%) — ₹15,00,000</a:t>
-            </a:r>
-          </a:p>
-          <a:p>
-            <a:pPr>
-              <a:spcAft>
-                <a:spcPts val="600"/>
-              </a:spcAft>
-              <a:defRPr sz="950">
-                <a:solidFill>
-                  <a:srgbClr val="1E293B"/>
-                </a:solidFill>
-              </a:defRPr>
-            </a:pPr>
-            <a:r>
-              <a:t>Dedicated testbeds (Apple Silicon &amp; NVIDIA RTX) for real-time 4K 60FPS kernel optimization.</a:t>
-            </a:r>
-          </a:p>
-          <a:p>
-            <a:pPr>
-              <a:spcAft>
-                <a:spcPts val="100"/>
-              </a:spcAft>
-              <a:defRPr sz="1100" b="1">
-                <a:solidFill>
-                  <a:srgbClr val="0F172A"/>
-                </a:solidFill>
-              </a:defRPr>
-            </a:pPr>
-            <a:r>
-              <a:t>• IP, Patents &amp; Trademark Filings (10%) — ₹5,00,000</a:t>
-            </a:r>
-          </a:p>
-          <a:p>
-            <a:pPr>
-              <a:spcAft>
-                <a:spcPts val="600"/>
-              </a:spcAft>
-              <a:defRPr sz="950">
-                <a:solidFill>
-                  <a:srgbClr val="1E293B"/>
-                </a:solidFill>
-              </a:defRPr>
-            </a:pPr>
-            <a:r>
-              <a:t>Indian Patent Office (IPO) filings and Madrid Protocol international trademark protections.</a:t>
-            </a:r>
-          </a:p>
-          <a:p>
-            <a:pPr>
-              <a:spcAft>
-                <a:spcPts val="100"/>
-              </a:spcAft>
-              <a:defRPr sz="1100" b="1">
-                <a:solidFill>
-                  <a:srgbClr val="0F172A"/>
-                </a:solidFill>
-              </a:defRPr>
-            </a:pPr>
-            <a:r>
-              <a:t>• Pilot Trials &amp; Market Launch (20%) — ₹10,00,000</a:t>
-            </a:r>
-          </a:p>
-          <a:p>
-            <a:pPr>
-              <a:spcAft>
-                <a:spcPts val="600"/>
-              </a:spcAft>
-              <a:defRPr sz="950">
-                <a:solidFill>
-                  <a:srgbClr val="1E293B"/>
-                </a:solidFill>
-              </a:defRPr>
-            </a:pPr>
-            <a:r>
-              <a:t>Creator beta onboarding across Karnataka and nationwide media production houses.</a:t>
-            </a:r>
-          </a:p>
-        </p:txBody>
-      </p:sp>
-      <p:sp>
-        <p:nvSpPr>
-          <p:cNvPr id="9" name="Rounded Rectangle 8"/>
-          <p:cNvSpPr/>
-          <p:nvPr/>
-        </p:nvSpPr>
-        <p:spPr>
-          <a:xfrm>
-            <a:off x="6492240" y="1737360"/>
-            <a:ext cx="4937760" cy="4572000"/>
-          </a:xfrm>
-          <a:prstGeom prst="roundRect">
-            <a:avLst/>
-          </a:prstGeom>
-          <a:solidFill>
-            <a:srgbClr val="F8FAFC"/>
-          </a:solidFill>
-          <a:ln w="12700">
-            <a:solidFill>
-              <a:srgbClr val="E2E8F0"/>
-            </a:solidFill>
-          </a:ln>
-        </p:spPr>
-        <p:style>
-          <a:lnRef idx="1">
-            <a:schemeClr val="accent1"/>
-          </a:lnRef>
-          <a:fillRef idx="3">
-            <a:schemeClr val="accent1"/>
-          </a:fillRef>
-          <a:effectRef idx="2">
-            <a:schemeClr val="accent1"/>
-          </a:effectRef>
-          <a:fontRef idx="minor">
-            <a:schemeClr val="lt1"/>
-          </a:fontRef>
-        </p:style>
-        <p:txBody>
-          <a:bodyPr rtlCol="0" anchor="ctr"/>
-          <a:lstStyle/>
-          <a:p>
-            <a:pPr algn="ctr"/>
-          </a:p>
-        </p:txBody>
-      </p:sp>
-      <p:sp>
-        <p:nvSpPr>
-          <p:cNvPr id="10" name="TextBox 9"/>
-          <p:cNvSpPr txBox="1"/>
-          <p:nvPr/>
-        </p:nvSpPr>
-        <p:spPr>
-          <a:xfrm>
-            <a:off x="6675120" y="1920240"/>
-            <a:ext cx="4572000" cy="4206240"/>
-          </a:xfrm>
-          <a:prstGeom prst="rect">
-            <a:avLst/>
-          </a:prstGeom>
-          <a:noFill/>
-        </p:spPr>
-        <p:txBody>
-          <a:bodyPr wrap="square" lIns="0" tIns="0" rIns="0" bIns="0">
-            <a:spAutoFit/>
-          </a:bodyPr>
-          <a:lstStyle/>
-          <a:p>
-            <a:pPr>
-              <a:spcAft>
-                <a:spcPts val="1000"/>
-              </a:spcAft>
-              <a:defRPr sz="1200" b="1">
-                <a:solidFill>
-                  <a:srgbClr val="4F46E5"/>
-                </a:solidFill>
-              </a:defRPr>
-            </a:pPr>
-            <a:r>
-              <a:t>18-MONTH EXECUTION ROADMAP</a:t>
-            </a:r>
-          </a:p>
-          <a:p>
-            <a:pPr>
-              <a:spcAft>
-                <a:spcPts val="200"/>
-              </a:spcAft>
-              <a:defRPr sz="1100" b="1">
-                <a:solidFill>
-                  <a:srgbClr val="0F172A"/>
-                </a:solidFill>
-              </a:defRPr>
-            </a:pPr>
-            <a:r>
-              <a:t>★ Months 1 – 6: Alpha Engine &amp; IP Filing</a:t>
-            </a:r>
-          </a:p>
-          <a:p>
-            <a:pPr>
-              <a:spcAft>
-                <a:spcPts val="1000"/>
-              </a:spcAft>
-              <a:defRPr sz="950">
-                <a:solidFill>
-                  <a:srgbClr val="1E293B"/>
-                </a:solidFill>
-              </a:defRPr>
-            </a:pPr>
-            <a:r>
-              <a:t>Complete C++/Metal/CUDA OFX plugin builds; file provisional Indian patents on volumetric neural depth rendering.</a:t>
-            </a:r>
-          </a:p>
-          <a:p>
-            <a:pPr>
-              <a:spcAft>
-                <a:spcPts val="200"/>
-              </a:spcAft>
-              <a:defRPr sz="1100" b="1">
-                <a:solidFill>
-                  <a:srgbClr val="0F172A"/>
-                </a:solidFill>
-              </a:defRPr>
-            </a:pPr>
-            <a:r>
-              <a:t>★ Months 7 – 12: Closed Beta &amp; 1,000 Creators</a:t>
-            </a:r>
-          </a:p>
-          <a:p>
-            <a:pPr>
-              <a:spcAft>
-                <a:spcPts val="1000"/>
-              </a:spcAft>
-              <a:defRPr sz="950">
-                <a:solidFill>
-                  <a:srgbClr val="1E293B"/>
-                </a:solidFill>
-              </a:defRPr>
-            </a:pPr>
-            <a:r>
-              <a:t>Deploy beta testing to 1,000+ video editors across Karnataka &amp; India; validate stability and benchmark 4K FPS.</a:t>
-            </a:r>
-          </a:p>
-          <a:p>
-            <a:pPr>
-              <a:spcAft>
-                <a:spcPts val="200"/>
-              </a:spcAft>
-              <a:defRPr sz="1100" b="1">
-                <a:solidFill>
-                  <a:srgbClr val="0F172A"/>
-                </a:solidFill>
-              </a:defRPr>
-            </a:pPr>
-            <a:r>
-              <a:t>★ Months 13 – 18: Commercial SaaS Launch</a:t>
-            </a:r>
-          </a:p>
-          <a:p>
-            <a:pPr>
-              <a:spcAft>
-                <a:spcPts val="1000"/>
-              </a:spcAft>
-              <a:defRPr sz="950">
-                <a:solidFill>
-                  <a:srgbClr val="1E293B"/>
-                </a:solidFill>
-              </a:defRPr>
-            </a:pPr>
-            <a:r>
-              <a:t>Launch commercial marketplace and SaaS tier; onboard 50+ studios and achieve ₹50L+ annualized run-rate (ARR).</a:t>
-            </a:r>
-          </a:p>
-        </p:txBody>
-      </p:sp>
-    </p:spTree>
-  </p:cSld>
-  <p:clrMapOvr>
-    <a:masterClrMapping/>
-  </p:clrMapOvr>
-</p:sld>
-</file>
-
-<file path=ppt/slides/slide12.xml><?xml version="1.0" encoding="utf-8"?>
-<p:sld xmlns:a="http://schemas.openxmlformats.org/drawingml/2006/main" xmlns:p="http://schemas.openxmlformats.org/presentationml/2006/main" xmlns:r="http://schemas.openxmlformats.org/officeDocument/2006/relationships">
-  <p:cSld>
-    <p:spTree>
-      <p:nvGrpSpPr>
-        <p:cNvPr id="1" name=""/>
-        <p:cNvGrpSpPr/>
-        <p:nvPr/>
-      </p:nvGrpSpPr>
-      <p:grpSpPr/>
-      <p:sp>
-        <p:nvSpPr>
-          <p:cNvPr id="2" name="Rectangle 1"/>
-          <p:cNvSpPr/>
-          <p:nvPr/>
-        </p:nvSpPr>
-        <p:spPr>
-          <a:xfrm>
-            <a:off x="0" y="0"/>
-            <a:ext cx="12191695" cy="6858000"/>
-          </a:xfrm>
-          <a:prstGeom prst="rect">
-            <a:avLst/>
-          </a:prstGeom>
-          <a:solidFill>
-            <a:srgbClr val="FFFFFF"/>
-          </a:solidFill>
-          <a:ln>
-            <a:noFill/>
-          </a:ln>
-        </p:spPr>
-        <p:style>
-          <a:lnRef idx="1">
-            <a:schemeClr val="accent1"/>
-          </a:lnRef>
-          <a:fillRef idx="3">
-            <a:schemeClr val="accent1"/>
-          </a:fillRef>
-          <a:effectRef idx="2">
-            <a:schemeClr val="accent1"/>
-          </a:effectRef>
-          <a:fontRef idx="minor">
-            <a:schemeClr val="lt1"/>
-          </a:fontRef>
-        </p:style>
-        <p:txBody>
-          <a:bodyPr rtlCol="0" anchor="ctr"/>
-          <a:lstStyle/>
-          <a:p>
-            <a:pPr algn="ctr"/>
-          </a:p>
-        </p:txBody>
-      </p:sp>
-      <p:sp>
-        <p:nvSpPr>
-          <p:cNvPr id="3" name="Rounded Rectangle 2"/>
-          <p:cNvSpPr/>
-          <p:nvPr/>
-        </p:nvSpPr>
-        <p:spPr>
-          <a:xfrm>
-            <a:off x="731520" y="548640"/>
-            <a:ext cx="10728655" cy="5760720"/>
-          </a:xfrm>
-          <a:prstGeom prst="roundRect">
-            <a:avLst/>
-          </a:prstGeom>
-          <a:solidFill>
-            <a:srgbClr val="F8FAFC"/>
-          </a:solidFill>
-          <a:ln w="12700">
-            <a:solidFill>
-              <a:srgbClr val="E2E8F0"/>
-            </a:solidFill>
-          </a:ln>
-        </p:spPr>
-        <p:style>
-          <a:lnRef idx="1">
-            <a:schemeClr val="accent1"/>
-          </a:lnRef>
-          <a:fillRef idx="3">
-            <a:schemeClr val="accent1"/>
-          </a:fillRef>
-          <a:effectRef idx="2">
-            <a:schemeClr val="accent1"/>
-          </a:effectRef>
-          <a:fontRef idx="minor">
-            <a:schemeClr val="lt1"/>
-          </a:fontRef>
-        </p:style>
-        <p:txBody>
-          <a:bodyPr rtlCol="0" anchor="ctr"/>
-          <a:lstStyle/>
-          <a:p>
-            <a:pPr algn="ctr"/>
-          </a:p>
-        </p:txBody>
-      </p:sp>
-      <p:sp>
-        <p:nvSpPr>
-          <p:cNvPr id="4" name="TextBox 3"/>
-          <p:cNvSpPr txBox="1"/>
-          <p:nvPr/>
-        </p:nvSpPr>
-        <p:spPr>
-          <a:xfrm>
-            <a:off x="1097280" y="822960"/>
-            <a:ext cx="9997135" cy="5212080"/>
+            <a:off x="1188720" y="1005840"/>
+            <a:ext cx="9784080" cy="4846320"/>
           </a:xfrm>
           <a:prstGeom prst="rect">
             <a:avLst/>
@@ -4947,7 +3706,7 @@
               <a:spcAft>
                 <a:spcPts val="600"/>
               </a:spcAft>
-              <a:defRPr sz="1300" b="1">
+              <a:defRPr sz="1200" b="1">
                 <a:solidFill>
                   <a:srgbClr val="2563EB"/>
                 </a:solidFill>
@@ -4962,24 +3721,24 @@
               <a:spcAft>
                 <a:spcPts val="1000"/>
               </a:spcAft>
-              <a:defRPr sz="2600" b="1">
+              <a:defRPr sz="2800" b="1">
                 <a:solidFill>
                   <a:srgbClr val="0F172A"/>
                 </a:solidFill>
               </a:defRPr>
             </a:pPr>
             <a:r>
-              <a:t>Building India's Sovereign Deep-Tech Media Infrastructure</a:t>
+              <a:t>Democratizing Cinema-Grade Visual Computing</a:t>
             </a:r>
           </a:p>
           <a:p>
             <a:pPr algn="ctr">
               <a:spcAft>
-                <a:spcPts val="2000"/>
+                <a:spcPts val="2400"/>
               </a:spcAft>
               <a:defRPr sz="1400" i="1">
                 <a:solidFill>
-                  <a:srgbClr val="4F46E5"/>
+                  <a:srgbClr val="7C3AED"/>
                 </a:solidFill>
               </a:defRPr>
             </a:pPr>
@@ -4991,57 +3750,14 @@
       </p:sp>
       <p:sp>
         <p:nvSpPr>
-          <p:cNvPr id="5" name="Rectangle 4"/>
-          <p:cNvSpPr/>
-          <p:nvPr/>
-        </p:nvSpPr>
-        <p:spPr>
-          <a:xfrm>
-            <a:off x="2743200" y="2377440"/>
-            <a:ext cx="6705295" cy="13716"/>
-          </a:xfrm>
-          <a:prstGeom prst="rect">
-            <a:avLst/>
-          </a:prstGeom>
-          <a:solidFill>
-            <a:srgbClr val="E2E8F0"/>
-          </a:solidFill>
-          <a:ln>
-            <a:noFill/>
-          </a:ln>
-        </p:spPr>
-        <p:style>
-          <a:lnRef idx="1">
-            <a:schemeClr val="accent1"/>
-          </a:lnRef>
-          <a:fillRef idx="3">
-            <a:schemeClr val="accent1"/>
-          </a:fillRef>
-          <a:effectRef idx="2">
-            <a:schemeClr val="accent1"/>
-          </a:effectRef>
-          <a:fontRef idx="minor">
-            <a:schemeClr val="lt1"/>
-          </a:fontRef>
-        </p:style>
-        <p:txBody>
-          <a:bodyPr rtlCol="0" anchor="ctr"/>
-          <a:lstStyle/>
-          <a:p>
-            <a:pPr algn="ctr"/>
-          </a:p>
-        </p:txBody>
-      </p:sp>
-      <p:sp>
-        <p:nvSpPr>
-          <p:cNvPr id="6" name="TextBox 5"/>
+          <p:cNvPr id="5" name="TextBox 4"/>
           <p:cNvSpPr txBox="1"/>
           <p:nvPr/>
         </p:nvSpPr>
         <p:spPr>
           <a:xfrm>
-            <a:off x="1371600" y="2743200"/>
-            <a:ext cx="3200400" cy="2560320"/>
+            <a:off x="1371600" y="3108960"/>
+            <a:ext cx="3108960" cy="2377440"/>
           </a:xfrm>
           <a:prstGeom prst="rect">
             <a:avLst/>
@@ -5070,9 +3786,9 @@
           </a:p>
           <a:p>
             <a:pPr>
-              <a:defRPr sz="1050">
-                <a:solidFill>
-                  <a:srgbClr val="1E293B"/>
+              <a:defRPr sz="1100">
+                <a:solidFill>
+                  <a:srgbClr val="334155"/>
                 </a:solidFill>
               </a:defRPr>
             </a:pPr>
@@ -5096,14 +3812,14 @@
       </p:sp>
       <p:sp>
         <p:nvSpPr>
-          <p:cNvPr id="7" name="TextBox 6"/>
+          <p:cNvPr id="6" name="TextBox 5"/>
           <p:cNvSpPr txBox="1"/>
           <p:nvPr/>
         </p:nvSpPr>
         <p:spPr>
           <a:xfrm>
-            <a:off x="4572000" y="2743200"/>
-            <a:ext cx="3200400" cy="2560320"/>
+            <a:off x="4572000" y="3108960"/>
+            <a:ext cx="3108960" cy="2377440"/>
           </a:xfrm>
           <a:prstGeom prst="rect">
             <a:avLst/>
@@ -5132,9 +3848,9 @@
           </a:p>
           <a:p>
             <a:pPr>
-              <a:defRPr sz="1050">
-                <a:solidFill>
-                  <a:srgbClr val="1E293B"/>
+              <a:defRPr sz="1100">
+                <a:solidFill>
+                  <a:srgbClr val="334155"/>
                 </a:solidFill>
               </a:defRPr>
             </a:pPr>
@@ -5143,29 +3859,29 @@
             </a:r>
             <a:br/>
             <a:r>
-              <a:t>Mangaluru (Mangalore), 575007</a:t>
+              <a:t>Mangaluru, Karnataka - 575007</a:t>
             </a:r>
             <a:br/>
             <a:r>
-              <a:t>Dakshina Kannada, Karnataka</a:t>
+              <a:t>Beyond Bengaluru Tier-2 Hub</a:t>
             </a:r>
             <a:br/>
             <a:r>
-              <a:t>Beyond Bengaluru Tier-2 Hub</a:t>
-            </a:r>
-          </a:p>
-        </p:txBody>
-      </p:sp>
-      <p:sp>
-        <p:nvSpPr>
-          <p:cNvPr id="8" name="TextBox 7"/>
+              <a:t>Make In India Deep-Tech Startup</a:t>
+            </a:r>
+          </a:p>
+        </p:txBody>
+      </p:sp>
+      <p:sp>
+        <p:nvSpPr>
+          <p:cNvPr id="7" name="TextBox 6"/>
           <p:cNvSpPr txBox="1"/>
           <p:nvPr/>
         </p:nvSpPr>
         <p:spPr>
           <a:xfrm>
-            <a:off x="7772400" y="2743200"/>
-            <a:ext cx="3200400" cy="2560320"/>
+            <a:off x="7772400" y="3108960"/>
+            <a:ext cx="3108960" cy="2377440"/>
           </a:xfrm>
           <a:prstGeom prst="rect">
             <a:avLst/>
@@ -5194,9 +3910,9 @@
           </a:p>
           <a:p>
             <a:pPr>
-              <a:defRPr sz="1050">
-                <a:solidFill>
-                  <a:srgbClr val="1E293B"/>
+              <a:defRPr sz="1100">
+                <a:solidFill>
+                  <a:srgbClr val="334155"/>
                 </a:solidFill>
               </a:defRPr>
             </a:pPr>
@@ -5287,8 +4003,8 @@
         </p:nvSpPr>
         <p:spPr>
           <a:xfrm>
-            <a:off x="731520" y="411480"/>
-            <a:ext cx="10728655" cy="274320"/>
+            <a:off x="822960" y="457200"/>
+            <a:ext cx="10515600" cy="274320"/>
           </a:xfrm>
           <a:prstGeom prst="rect">
             <a:avLst/>
@@ -5310,7 +4026,7 @@
               </a:defRPr>
             </a:pPr>
             <a:r>
-              <a:t>OVERVIEW</a:t>
+              <a:t>THE CHALLENGE</a:t>
             </a:r>
           </a:p>
         </p:txBody>
@@ -5323,8 +4039,8 @@
         </p:nvSpPr>
         <p:spPr>
           <a:xfrm>
-            <a:off x="731520" y="685800"/>
-            <a:ext cx="10728655" cy="548640"/>
+            <a:off x="822960" y="731520"/>
+            <a:ext cx="10515600" cy="548640"/>
           </a:xfrm>
           <a:prstGeom prst="rect">
             <a:avLst/>
@@ -5346,7 +4062,7 @@
               </a:defRPr>
             </a:pPr>
             <a:r>
-              <a:t>Executive Summary — At A Glance</a:t>
+              <a:t>The Problem We Are Solving</a:t>
             </a:r>
           </a:p>
         </p:txBody>
@@ -5359,8 +4075,8 @@
         </p:nvSpPr>
         <p:spPr>
           <a:xfrm>
-            <a:off x="731520" y="1234440"/>
-            <a:ext cx="10728655" cy="320040"/>
+            <a:off x="822960" y="1280160"/>
+            <a:ext cx="10515600" cy="274320"/>
           </a:xfrm>
           <a:prstGeom prst="rect">
             <a:avLst/>
@@ -5382,64 +4098,21 @@
               </a:defRPr>
             </a:pPr>
             <a:r>
-              <a:t>Bridging deep-tech visual computing with Hollywood-grade post-production tools.</a:t>
-            </a:r>
-          </a:p>
-        </p:txBody>
-      </p:sp>
-      <p:sp>
-        <p:nvSpPr>
-          <p:cNvPr id="6" name="Rectangle 5"/>
+              <a:t>Three critical bottlenecks stopping creators from producing broadcast-grade cinema content.</a:t>
+            </a:r>
+          </a:p>
+        </p:txBody>
+      </p:sp>
+      <p:sp>
+        <p:nvSpPr>
+          <p:cNvPr id="6" name="Rounded Rectangle 5"/>
           <p:cNvSpPr/>
           <p:nvPr/>
         </p:nvSpPr>
         <p:spPr>
           <a:xfrm>
-            <a:off x="731520" y="1572768"/>
-            <a:ext cx="10728655" cy="13716"/>
-          </a:xfrm>
-          <a:prstGeom prst="rect">
-            <a:avLst/>
-          </a:prstGeom>
-          <a:solidFill>
-            <a:srgbClr val="E2E8F0"/>
-          </a:solidFill>
-          <a:ln>
-            <a:noFill/>
-          </a:ln>
-        </p:spPr>
-        <p:style>
-          <a:lnRef idx="1">
-            <a:schemeClr val="accent1"/>
-          </a:lnRef>
-          <a:fillRef idx="3">
-            <a:schemeClr val="accent1"/>
-          </a:fillRef>
-          <a:effectRef idx="2">
-            <a:schemeClr val="accent1"/>
-          </a:effectRef>
-          <a:fontRef idx="minor">
-            <a:schemeClr val="lt1"/>
-          </a:fontRef>
-        </p:style>
-        <p:txBody>
-          <a:bodyPr rtlCol="0" anchor="ctr"/>
-          <a:lstStyle/>
-          <a:p>
-            <a:pPr algn="ctr"/>
-          </a:p>
-        </p:txBody>
-      </p:sp>
-      <p:sp>
-        <p:nvSpPr>
-          <p:cNvPr id="7" name="Rounded Rectangle 6"/>
-          <p:cNvSpPr/>
-          <p:nvPr/>
-        </p:nvSpPr>
-        <p:spPr>
-          <a:xfrm>
-            <a:off x="731520" y="1737360"/>
-            <a:ext cx="2514600" cy="4663440"/>
+            <a:off x="822960" y="1828800"/>
+            <a:ext cx="3291840" cy="4297680"/>
           </a:xfrm>
           <a:prstGeom prst="roundRect">
             <a:avLst/>
@@ -5477,20 +4150,90 @@
       </p:sp>
       <p:sp>
         <p:nvSpPr>
-          <p:cNvPr id="8" name="Rounded Rectangle 7"/>
+          <p:cNvPr id="7" name="TextBox 6"/>
+          <p:cNvSpPr txBox="1"/>
+          <p:nvPr/>
+        </p:nvSpPr>
+        <p:spPr>
+          <a:xfrm>
+            <a:off x="1051560" y="2011680"/>
+            <a:ext cx="914400" cy="548640"/>
+          </a:xfrm>
+          <a:prstGeom prst="rect">
+            <a:avLst/>
+          </a:prstGeom>
+          <a:noFill/>
+        </p:spPr>
+        <p:txBody>
+          <a:bodyPr wrap="none" lIns="0" tIns="0" rIns="0" bIns="0">
+            <a:spAutoFit/>
+          </a:bodyPr>
+          <a:lstStyle/>
+          <a:p>
+            <a:pPr>
+              <a:defRPr sz="2800" b="1">
+                <a:solidFill>
+                  <a:srgbClr val="D97706"/>
+                </a:solidFill>
+              </a:defRPr>
+            </a:pPr>
+            <a:r>
+              <a:t>01</a:t>
+            </a:r>
+          </a:p>
+        </p:txBody>
+      </p:sp>
+      <p:sp>
+        <p:nvSpPr>
+          <p:cNvPr id="8" name="TextBox 7"/>
+          <p:cNvSpPr txBox="1"/>
+          <p:nvPr/>
+        </p:nvSpPr>
+        <p:spPr>
+          <a:xfrm>
+            <a:off x="1051560" y="2651760"/>
+            <a:ext cx="2834640" cy="640080"/>
+          </a:xfrm>
+          <a:prstGeom prst="rect">
+            <a:avLst/>
+          </a:prstGeom>
+          <a:noFill/>
+        </p:spPr>
+        <p:txBody>
+          <a:bodyPr wrap="square" lIns="0" tIns="0" rIns="0" bIns="0">
+            <a:spAutoFit/>
+          </a:bodyPr>
+          <a:lstStyle/>
+          <a:p>
+            <a:pPr>
+              <a:defRPr sz="1600" b="1">
+                <a:solidFill>
+                  <a:srgbClr val="0F172A"/>
+                </a:solidFill>
+              </a:defRPr>
+            </a:pPr>
+            <a:r>
+              <a:t>₹30K+ License Barrier</a:t>
+            </a:r>
+          </a:p>
+        </p:txBody>
+      </p:sp>
+      <p:sp>
+        <p:nvSpPr>
+          <p:cNvPr id="9" name="Rectangle 8"/>
           <p:cNvSpPr/>
           <p:nvPr/>
         </p:nvSpPr>
         <p:spPr>
           <a:xfrm>
-            <a:off x="868680" y="1874519"/>
-            <a:ext cx="2240280" cy="411480"/>
-          </a:xfrm>
-          <a:prstGeom prst="roundRect">
+            <a:off x="1051560" y="3383280"/>
+            <a:ext cx="2834640" cy="13716"/>
+          </a:xfrm>
+          <a:prstGeom prst="rect">
             <a:avLst/>
           </a:prstGeom>
           <a:solidFill>
-            <a:srgbClr val="D97706"/>
+            <a:srgbClr val="E2E8F0"/>
           </a:solidFill>
           <a:ln>
             <a:noFill/>
@@ -5514,29 +4257,20 @@
           <a:bodyPr rtlCol="0" anchor="ctr"/>
           <a:lstStyle/>
           <a:p>
-            <a:pPr algn="ctr">
-              <a:defRPr sz="1100" b="1">
-                <a:solidFill>
-                  <a:srgbClr val="FFFFFF"/>
-                </a:solidFill>
-              </a:defRPr>
-            </a:pPr>
-            <a:r>
-              <a:t>THE PROBLEM</a:t>
-            </a:r>
-          </a:p>
-        </p:txBody>
-      </p:sp>
-      <p:sp>
-        <p:nvSpPr>
-          <p:cNvPr id="9" name="TextBox 8"/>
+            <a:pPr algn="ctr"/>
+          </a:p>
+        </p:txBody>
+      </p:sp>
+      <p:sp>
+        <p:nvSpPr>
+          <p:cNvPr id="10" name="TextBox 9"/>
           <p:cNvSpPr txBox="1"/>
           <p:nvPr/>
         </p:nvSpPr>
         <p:spPr>
           <a:xfrm>
-            <a:off x="868680" y="2377440"/>
-            <a:ext cx="2240280" cy="3840480"/>
+            <a:off x="1051560" y="3566160"/>
+            <a:ext cx="2834640" cy="2286000"/>
           </a:xfrm>
           <a:prstGeom prst="rect">
             <a:avLst/>
@@ -5551,111 +4285,60 @@
           <a:p>
             <a:pPr>
               <a:spcAft>
-                <a:spcPts val="200"/>
+                <a:spcPts val="1200"/>
               </a:spcAft>
-              <a:defRPr sz="1150" b="1">
-                <a:solidFill>
-                  <a:srgbClr val="0F172A"/>
-                </a:solidFill>
-              </a:defRPr>
-            </a:pPr>
-            <a:r>
-              <a:t>• ₹30k+ Cost Barrier</a:t>
+              <a:defRPr sz="1200">
+                <a:solidFill>
+                  <a:srgbClr val="334155"/>
+                </a:solidFill>
+              </a:defRPr>
+            </a:pPr>
+            <a:r>
+              <a:t>• Studio-grade VFX plugins cost ₹30,000–₹1,00,000 per seat.</a:t>
             </a:r>
           </a:p>
           <a:p>
             <a:pPr>
               <a:spcAft>
-                <a:spcPts val="400"/>
+                <a:spcPts val="1200"/>
               </a:spcAft>
-              <a:defRPr sz="1000">
-                <a:solidFill>
-                  <a:srgbClr val="1E293B"/>
-                </a:solidFill>
-              </a:defRPr>
-            </a:pPr>
-            <a:r>
-              <a:t>Studio-grade visual plugins &amp; VFX tools are prohibitively expensive for 95% of creators.</a:t>
-            </a:r>
-          </a:p>
-          <a:p>
-            <a:pPr>
-              <a:spcBef>
-                <a:spcPts val="800"/>
-              </a:spcBef>
+              <a:defRPr sz="1200">
+                <a:solidFill>
+                  <a:srgbClr val="334155"/>
+                </a:solidFill>
+              </a:defRPr>
+            </a:pPr>
+            <a:r>
+              <a:t>• Locks out 95% of indie creators, students, and regional studios.</a:t>
+            </a:r>
+          </a:p>
+          <a:p>
+            <a:pPr>
               <a:spcAft>
-                <a:spcPts val="200"/>
+                <a:spcPts val="1200"/>
               </a:spcAft>
-              <a:defRPr sz="1150" b="1">
-                <a:solidFill>
-                  <a:srgbClr val="0F172A"/>
-                </a:solidFill>
-              </a:defRPr>
-            </a:pPr>
-            <a:r>
-              <a:t>• Compression Loss</a:t>
-            </a:r>
-          </a:p>
-          <a:p>
-            <a:pPr>
-              <a:spcAft>
-                <a:spcPts val="400"/>
-              </a:spcAft>
-              <a:defRPr sz="1000">
-                <a:solidFill>
-                  <a:srgbClr val="1E293B"/>
-                </a:solidFill>
-              </a:defRPr>
-            </a:pPr>
-            <a:r>
-              <a:t>Streaming &amp; render pipelines compress 4K 60FPS video, losing dynamic range.</a:t>
-            </a:r>
-          </a:p>
-          <a:p>
-            <a:pPr>
-              <a:spcBef>
-                <a:spcPts val="800"/>
-              </a:spcBef>
-              <a:spcAft>
-                <a:spcPts val="200"/>
-              </a:spcAft>
-              <a:defRPr sz="1150" b="1">
-                <a:solidFill>
-                  <a:srgbClr val="0F172A"/>
-                </a:solidFill>
-              </a:defRPr>
-            </a:pPr>
-            <a:r>
-              <a:t>• Isolated Tools</a:t>
-            </a:r>
-          </a:p>
-          <a:p>
-            <a:pPr>
-              <a:spcAft>
-                <a:spcPts val="400"/>
-              </a:spcAft>
-              <a:defRPr sz="1000">
-                <a:solidFill>
-                  <a:srgbClr val="1E293B"/>
-                </a:solidFill>
-              </a:defRPr>
-            </a:pPr>
-            <a:r>
-              <a:t>Web AI tools lack native integration into editors like DaVinci Resolve.</a:t>
-            </a:r>
-          </a:p>
-        </p:txBody>
-      </p:sp>
-      <p:sp>
-        <p:nvSpPr>
-          <p:cNvPr id="10" name="Rounded Rectangle 9"/>
+              <a:defRPr sz="1200">
+                <a:solidFill>
+                  <a:srgbClr val="334155"/>
+                </a:solidFill>
+              </a:defRPr>
+            </a:pPr>
+            <a:r>
+              <a:t>• Creates heavy reliance on pirated or outdated tools.</a:t>
+            </a:r>
+          </a:p>
+        </p:txBody>
+      </p:sp>
+      <p:sp>
+        <p:nvSpPr>
+          <p:cNvPr id="11" name="Rounded Rectangle 10"/>
           <p:cNvSpPr/>
           <p:nvPr/>
         </p:nvSpPr>
         <p:spPr>
           <a:xfrm>
-            <a:off x="3465576" y="1737360"/>
-            <a:ext cx="2514600" cy="4663440"/>
+            <a:off x="4434840" y="1828800"/>
+            <a:ext cx="3291840" cy="4297680"/>
           </a:xfrm>
           <a:prstGeom prst="roundRect">
             <a:avLst/>
@@ -5693,20 +4376,90 @@
       </p:sp>
       <p:sp>
         <p:nvSpPr>
-          <p:cNvPr id="11" name="Rounded Rectangle 10"/>
+          <p:cNvPr id="12" name="TextBox 11"/>
+          <p:cNvSpPr txBox="1"/>
+          <p:nvPr/>
+        </p:nvSpPr>
+        <p:spPr>
+          <a:xfrm>
+            <a:off x="4663440" y="2011680"/>
+            <a:ext cx="914400" cy="548640"/>
+          </a:xfrm>
+          <a:prstGeom prst="rect">
+            <a:avLst/>
+          </a:prstGeom>
+          <a:noFill/>
+        </p:spPr>
+        <p:txBody>
+          <a:bodyPr wrap="none" lIns="0" tIns="0" rIns="0" bIns="0">
+            <a:spAutoFit/>
+          </a:bodyPr>
+          <a:lstStyle/>
+          <a:p>
+            <a:pPr>
+              <a:defRPr sz="2800" b="1">
+                <a:solidFill>
+                  <a:srgbClr val="2563EB"/>
+                </a:solidFill>
+              </a:defRPr>
+            </a:pPr>
+            <a:r>
+              <a:t>02</a:t>
+            </a:r>
+          </a:p>
+        </p:txBody>
+      </p:sp>
+      <p:sp>
+        <p:nvSpPr>
+          <p:cNvPr id="13" name="TextBox 12"/>
+          <p:cNvSpPr txBox="1"/>
+          <p:nvPr/>
+        </p:nvSpPr>
+        <p:spPr>
+          <a:xfrm>
+            <a:off x="4663440" y="2651760"/>
+            <a:ext cx="2834640" cy="640080"/>
+          </a:xfrm>
+          <a:prstGeom prst="rect">
+            <a:avLst/>
+          </a:prstGeom>
+          <a:noFill/>
+        </p:spPr>
+        <p:txBody>
+          <a:bodyPr wrap="square" lIns="0" tIns="0" rIns="0" bIns="0">
+            <a:spAutoFit/>
+          </a:bodyPr>
+          <a:lstStyle/>
+          <a:p>
+            <a:pPr>
+              <a:defRPr sz="1600" b="1">
+                <a:solidFill>
+                  <a:srgbClr val="0F172A"/>
+                </a:solidFill>
+              </a:defRPr>
+            </a:pPr>
+            <a:r>
+              <a:t>4K Video Compression Loss</a:t>
+            </a:r>
+          </a:p>
+        </p:txBody>
+      </p:sp>
+      <p:sp>
+        <p:nvSpPr>
+          <p:cNvPr id="14" name="Rectangle 13"/>
           <p:cNvSpPr/>
           <p:nvPr/>
         </p:nvSpPr>
         <p:spPr>
           <a:xfrm>
-            <a:off x="3602736" y="1874519"/>
-            <a:ext cx="2240280" cy="411480"/>
-          </a:xfrm>
-          <a:prstGeom prst="roundRect">
+            <a:off x="4663440" y="3383280"/>
+            <a:ext cx="2834640" cy="13716"/>
+          </a:xfrm>
+          <a:prstGeom prst="rect">
             <a:avLst/>
           </a:prstGeom>
           <a:solidFill>
-            <a:srgbClr val="2563EB"/>
+            <a:srgbClr val="E2E8F0"/>
           </a:solidFill>
           <a:ln>
             <a:noFill/>
@@ -5730,29 +4483,20 @@
           <a:bodyPr rtlCol="0" anchor="ctr"/>
           <a:lstStyle/>
           <a:p>
-            <a:pPr algn="ctr">
-              <a:defRPr sz="1100" b="1">
-                <a:solidFill>
-                  <a:srgbClr val="FFFFFF"/>
-                </a:solidFill>
-              </a:defRPr>
-            </a:pPr>
-            <a:r>
-              <a:t>THE SOLUTION</a:t>
-            </a:r>
-          </a:p>
-        </p:txBody>
-      </p:sp>
-      <p:sp>
-        <p:nvSpPr>
-          <p:cNvPr id="12" name="TextBox 11"/>
+            <a:pPr algn="ctr"/>
+          </a:p>
+        </p:txBody>
+      </p:sp>
+      <p:sp>
+        <p:nvSpPr>
+          <p:cNvPr id="15" name="TextBox 14"/>
           <p:cNvSpPr txBox="1"/>
           <p:nvPr/>
         </p:nvSpPr>
         <p:spPr>
           <a:xfrm>
-            <a:off x="3602736" y="2377440"/>
-            <a:ext cx="2240280" cy="3840480"/>
+            <a:off x="4663440" y="3566160"/>
+            <a:ext cx="2834640" cy="2286000"/>
           </a:xfrm>
           <a:prstGeom prst="rect">
             <a:avLst/>
@@ -5767,111 +4511,60 @@
           <a:p>
             <a:pPr>
               <a:spcAft>
-                <a:spcPts val="200"/>
+                <a:spcPts val="1200"/>
               </a:spcAft>
-              <a:defRPr sz="1150" b="1">
-                <a:solidFill>
-                  <a:srgbClr val="0F172A"/>
-                </a:solidFill>
-              </a:defRPr>
-            </a:pPr>
-            <a:r>
-              <a:t>• Native OFX Plugins</a:t>
+              <a:defRPr sz="1200">
+                <a:solidFill>
+                  <a:srgbClr val="334155"/>
+                </a:solidFill>
+              </a:defRPr>
+            </a:pPr>
+            <a:r>
+              <a:t>• Mainstream pipelines compress 4K 60FPS video heavily.</a:t>
             </a:r>
           </a:p>
           <a:p>
             <a:pPr>
               <a:spcAft>
-                <a:spcPts val="400"/>
+                <a:spcPts val="1200"/>
               </a:spcAft>
-              <a:defRPr sz="1000">
-                <a:solidFill>
-                  <a:srgbClr val="1E293B"/>
-                </a:solidFill>
-              </a:defRPr>
-            </a:pPr>
-            <a:r>
-              <a:t>C++/CUDA/Metal plugins running inside DaVinci Resolve with zero cloud lag.</a:t>
-            </a:r>
-          </a:p>
-          <a:p>
-            <a:pPr>
-              <a:spcBef>
-                <a:spcPts val="800"/>
-              </a:spcBef>
+              <a:defRPr sz="1200">
+                <a:solidFill>
+                  <a:srgbClr val="334155"/>
+                </a:solidFill>
+              </a:defRPr>
+            </a:pPr>
+            <a:r>
+              <a:t>• Causes motion artifacts, color banding, and sensor detail loss.</a:t>
+            </a:r>
+          </a:p>
+          <a:p>
+            <a:pPr>
               <a:spcAft>
-                <a:spcPts val="200"/>
+                <a:spcPts val="1200"/>
               </a:spcAft>
-              <a:defRPr sz="1150" b="1">
-                <a:solidFill>
-                  <a:srgbClr val="0F172A"/>
-                </a:solidFill>
-              </a:defRPr>
-            </a:pPr>
-            <a:r>
-              <a:t>• On-Device Depth AI</a:t>
-            </a:r>
-          </a:p>
-          <a:p>
-            <a:pPr>
-              <a:spcAft>
-                <a:spcPts val="400"/>
-              </a:spcAft>
-              <a:defRPr sz="1000">
-                <a:solidFill>
-                  <a:srgbClr val="1E293B"/>
-                </a:solidFill>
-              </a:defRPr>
-            </a:pPr>
-            <a:r>
-              <a:t>Neural depth estimation for real-time volumetric atmospheric effects.</a:t>
-            </a:r>
-          </a:p>
-          <a:p>
-            <a:pPr>
-              <a:spcBef>
-                <a:spcPts val="800"/>
-              </a:spcBef>
-              <a:spcAft>
-                <a:spcPts val="200"/>
-              </a:spcAft>
-              <a:defRPr sz="1150" b="1">
-                <a:solidFill>
-                  <a:srgbClr val="0F172A"/>
-                </a:solidFill>
-              </a:defRPr>
-            </a:pPr>
-            <a:r>
-              <a:t>• 12-Bit DPX Engine</a:t>
-            </a:r>
-          </a:p>
-          <a:p>
-            <a:pPr>
-              <a:spcAft>
-                <a:spcPts val="400"/>
-              </a:spcAft>
-              <a:defRPr sz="1000">
-                <a:solidFill>
-                  <a:srgbClr val="1E293B"/>
-                </a:solidFill>
-              </a:defRPr>
-            </a:pPr>
-            <a:r>
-              <a:t>Raw cinema log processing preserving Hollywood ACEScc dynamic range.</a:t>
-            </a:r>
-          </a:p>
-        </p:txBody>
-      </p:sp>
-      <p:sp>
-        <p:nvSpPr>
-          <p:cNvPr id="13" name="Rounded Rectangle 12"/>
+              <a:defRPr sz="1200">
+                <a:solidFill>
+                  <a:srgbClr val="334155"/>
+                </a:solidFill>
+              </a:defRPr>
+            </a:pPr>
+            <a:r>
+              <a:t>• Lack of accessible 12-bit uncompressed DPX frame renderers.</a:t>
+            </a:r>
+          </a:p>
+        </p:txBody>
+      </p:sp>
+      <p:sp>
+        <p:nvSpPr>
+          <p:cNvPr id="16" name="Rounded Rectangle 15"/>
           <p:cNvSpPr/>
           <p:nvPr/>
         </p:nvSpPr>
         <p:spPr>
           <a:xfrm>
-            <a:off x="6199632" y="1737360"/>
-            <a:ext cx="2514600" cy="4663440"/>
+            <a:off x="8046720" y="1828800"/>
+            <a:ext cx="3291840" cy="4297680"/>
           </a:xfrm>
           <a:prstGeom prst="roundRect">
             <a:avLst/>
@@ -5909,20 +4602,90 @@
       </p:sp>
       <p:sp>
         <p:nvSpPr>
-          <p:cNvPr id="14" name="Rounded Rectangle 13"/>
+          <p:cNvPr id="17" name="TextBox 16"/>
+          <p:cNvSpPr txBox="1"/>
+          <p:nvPr/>
+        </p:nvSpPr>
+        <p:spPr>
+          <a:xfrm>
+            <a:off x="8275320" y="2011680"/>
+            <a:ext cx="914400" cy="548640"/>
+          </a:xfrm>
+          <a:prstGeom prst="rect">
+            <a:avLst/>
+          </a:prstGeom>
+          <a:noFill/>
+        </p:spPr>
+        <p:txBody>
+          <a:bodyPr wrap="none" lIns="0" tIns="0" rIns="0" bIns="0">
+            <a:spAutoFit/>
+          </a:bodyPr>
+          <a:lstStyle/>
+          <a:p>
+            <a:pPr>
+              <a:defRPr sz="2800" b="1">
+                <a:solidFill>
+                  <a:srgbClr val="7C3AED"/>
+                </a:solidFill>
+              </a:defRPr>
+            </a:pPr>
+            <a:r>
+              <a:t>03</a:t>
+            </a:r>
+          </a:p>
+        </p:txBody>
+      </p:sp>
+      <p:sp>
+        <p:nvSpPr>
+          <p:cNvPr id="18" name="TextBox 17"/>
+          <p:cNvSpPr txBox="1"/>
+          <p:nvPr/>
+        </p:nvSpPr>
+        <p:spPr>
+          <a:xfrm>
+            <a:off x="8275320" y="2651760"/>
+            <a:ext cx="2834640" cy="640080"/>
+          </a:xfrm>
+          <a:prstGeom prst="rect">
+            <a:avLst/>
+          </a:prstGeom>
+          <a:noFill/>
+        </p:spPr>
+        <p:txBody>
+          <a:bodyPr wrap="square" lIns="0" tIns="0" rIns="0" bIns="0">
+            <a:spAutoFit/>
+          </a:bodyPr>
+          <a:lstStyle/>
+          <a:p>
+            <a:pPr>
+              <a:defRPr sz="1600" b="1">
+                <a:solidFill>
+                  <a:srgbClr val="0F172A"/>
+                </a:solidFill>
+              </a:defRPr>
+            </a:pPr>
+            <a:r>
+              <a:t>Disconnected AI Tools</a:t>
+            </a:r>
+          </a:p>
+        </p:txBody>
+      </p:sp>
+      <p:sp>
+        <p:nvSpPr>
+          <p:cNvPr id="19" name="Rectangle 18"/>
           <p:cNvSpPr/>
           <p:nvPr/>
         </p:nvSpPr>
         <p:spPr>
           <a:xfrm>
-            <a:off x="6336792" y="1874519"/>
-            <a:ext cx="2240280" cy="411480"/>
-          </a:xfrm>
-          <a:prstGeom prst="roundRect">
+            <a:off x="8275320" y="3383280"/>
+            <a:ext cx="2834640" cy="13716"/>
+          </a:xfrm>
+          <a:prstGeom prst="rect">
             <a:avLst/>
           </a:prstGeom>
           <a:solidFill>
-            <a:srgbClr val="059669"/>
+            <a:srgbClr val="E2E8F0"/>
           </a:solidFill>
           <a:ln>
             <a:noFill/>
@@ -5946,29 +4709,20 @@
           <a:bodyPr rtlCol="0" anchor="ctr"/>
           <a:lstStyle/>
           <a:p>
-            <a:pPr algn="ctr">
-              <a:defRPr sz="1100" b="1">
-                <a:solidFill>
-                  <a:srgbClr val="FFFFFF"/>
-                </a:solidFill>
-              </a:defRPr>
-            </a:pPr>
-            <a:r>
-              <a:t>MARKET &amp; TRACTION</a:t>
-            </a:r>
-          </a:p>
-        </p:txBody>
-      </p:sp>
-      <p:sp>
-        <p:nvSpPr>
-          <p:cNvPr id="15" name="TextBox 14"/>
+            <a:pPr algn="ctr"/>
+          </a:p>
+        </p:txBody>
+      </p:sp>
+      <p:sp>
+        <p:nvSpPr>
+          <p:cNvPr id="20" name="TextBox 19"/>
           <p:cNvSpPr txBox="1"/>
           <p:nvPr/>
         </p:nvSpPr>
         <p:spPr>
           <a:xfrm>
-            <a:off x="6336792" y="2377440"/>
-            <a:ext cx="2240280" cy="3840480"/>
+            <a:off x="8275320" y="3566160"/>
+            <a:ext cx="2834640" cy="2286000"/>
           </a:xfrm>
           <a:prstGeom prst="rect">
             <a:avLst/>
@@ -5983,313 +4737,46 @@
           <a:p>
             <a:pPr>
               <a:spcAft>
-                <a:spcPts val="200"/>
+                <a:spcPts val="1200"/>
               </a:spcAft>
-              <a:defRPr sz="1150" b="1">
-                <a:solidFill>
-                  <a:srgbClr val="0F172A"/>
-                </a:solidFill>
-              </a:defRPr>
-            </a:pPr>
-            <a:r>
-              <a:t>• $250B+ Market</a:t>
+              <a:defRPr sz="1200">
+                <a:solidFill>
+                  <a:srgbClr val="334155"/>
+                </a:solidFill>
+              </a:defRPr>
+            </a:pPr>
+            <a:r>
+              <a:t>• Most AI tools are slow, standalone web wrappers with cloud lag.</a:t>
             </a:r>
           </a:p>
           <a:p>
             <a:pPr>
               <a:spcAft>
-                <a:spcPts val="400"/>
+                <a:spcPts val="1200"/>
               </a:spcAft>
-              <a:defRPr sz="1000">
-                <a:solidFill>
-                  <a:srgbClr val="1E293B"/>
-                </a:solidFill>
-              </a:defRPr>
-            </a:pPr>
-            <a:r>
-              <a:t>Expanding global creator economy + $4.2B Indian AVGC sector.</a:t>
-            </a:r>
-          </a:p>
-          <a:p>
-            <a:pPr>
-              <a:spcBef>
-                <a:spcPts val="800"/>
-              </a:spcBef>
+              <a:defRPr sz="1200">
+                <a:solidFill>
+                  <a:srgbClr val="334155"/>
+                </a:solidFill>
+              </a:defRPr>
+            </a:pPr>
+            <a:r>
+              <a:t>• No native integration inside DaVinci Resolve or Adobe Premiere.</a:t>
+            </a:r>
+          </a:p>
+          <a:p>
+            <a:pPr>
               <a:spcAft>
-                <a:spcPts val="200"/>
+                <a:spcPts val="1200"/>
               </a:spcAft>
-              <a:defRPr sz="1150" b="1">
-                <a:solidFill>
-                  <a:srgbClr val="0F172A"/>
-                </a:solidFill>
-              </a:defRPr>
-            </a:pPr>
-            <a:r>
-              <a:t>• 2.5M+ Reach</a:t>
-            </a:r>
-          </a:p>
-          <a:p>
-            <a:pPr>
-              <a:spcAft>
-                <a:spcPts val="400"/>
-              </a:spcAft>
-              <a:defRPr sz="1000">
-                <a:solidFill>
-                  <a:srgbClr val="1E293B"/>
-                </a:solidFill>
-              </a:defRPr>
-            </a:pPr>
-            <a:r>
-              <a:t>Proven audience retention across creator channels (@hrlpremiumstudio).</a:t>
-            </a:r>
-          </a:p>
-          <a:p>
-            <a:pPr>
-              <a:spcBef>
-                <a:spcPts val="800"/>
-              </a:spcBef>
-              <a:spcAft>
-                <a:spcPts val="200"/>
-              </a:spcAft>
-              <a:defRPr sz="1150" b="1">
-                <a:solidFill>
-                  <a:srgbClr val="0F172A"/>
-                </a:solidFill>
-              </a:defRPr>
-            </a:pPr>
-            <a:r>
-              <a:t>• SCEM Deployment</a:t>
-            </a:r>
-          </a:p>
-          <a:p>
-            <a:pPr>
-              <a:spcAft>
-                <a:spcPts val="400"/>
-              </a:spcAft>
-              <a:defRPr sz="1000">
-                <a:solidFill>
-                  <a:srgbClr val="1E293B"/>
-                </a:solidFill>
-              </a:defRPr>
-            </a:pPr>
-            <a:r>
-              <a:t>Institutional algorithmic scheduling engine deployed for 100+ faculty.</a:t>
-            </a:r>
-          </a:p>
-        </p:txBody>
-      </p:sp>
-      <p:sp>
-        <p:nvSpPr>
-          <p:cNvPr id="16" name="Rounded Rectangle 15"/>
-          <p:cNvSpPr/>
-          <p:nvPr/>
-        </p:nvSpPr>
-        <p:spPr>
-          <a:xfrm>
-            <a:off x="8933688" y="1737360"/>
-            <a:ext cx="2514600" cy="4663440"/>
-          </a:xfrm>
-          <a:prstGeom prst="roundRect">
-            <a:avLst/>
-          </a:prstGeom>
-          <a:solidFill>
-            <a:srgbClr val="F8FAFC"/>
-          </a:solidFill>
-          <a:ln w="12700">
-            <a:solidFill>
-              <a:srgbClr val="E2E8F0"/>
-            </a:solidFill>
-          </a:ln>
-        </p:spPr>
-        <p:style>
-          <a:lnRef idx="1">
-            <a:schemeClr val="accent1"/>
-          </a:lnRef>
-          <a:fillRef idx="3">
-            <a:schemeClr val="accent1"/>
-          </a:fillRef>
-          <a:effectRef idx="2">
-            <a:schemeClr val="accent1"/>
-          </a:effectRef>
-          <a:fontRef idx="minor">
-            <a:schemeClr val="lt1"/>
-          </a:fontRef>
-        </p:style>
-        <p:txBody>
-          <a:bodyPr rtlCol="0" anchor="ctr"/>
-          <a:lstStyle/>
-          <a:p>
-            <a:pPr algn="ctr"/>
-          </a:p>
-        </p:txBody>
-      </p:sp>
-      <p:sp>
-        <p:nvSpPr>
-          <p:cNvPr id="17" name="Rounded Rectangle 16"/>
-          <p:cNvSpPr/>
-          <p:nvPr/>
-        </p:nvSpPr>
-        <p:spPr>
-          <a:xfrm>
-            <a:off x="9070848" y="1874519"/>
-            <a:ext cx="2240280" cy="411480"/>
-          </a:xfrm>
-          <a:prstGeom prst="roundRect">
-            <a:avLst/>
-          </a:prstGeom>
-          <a:solidFill>
-            <a:srgbClr val="4F46E5"/>
-          </a:solidFill>
-          <a:ln>
-            <a:noFill/>
-          </a:ln>
-        </p:spPr>
-        <p:style>
-          <a:lnRef idx="1">
-            <a:schemeClr val="accent1"/>
-          </a:lnRef>
-          <a:fillRef idx="3">
-            <a:schemeClr val="accent1"/>
-          </a:fillRef>
-          <a:effectRef idx="2">
-            <a:schemeClr val="accent1"/>
-          </a:effectRef>
-          <a:fontRef idx="minor">
-            <a:schemeClr val="lt1"/>
-          </a:fontRef>
-        </p:style>
-        <p:txBody>
-          <a:bodyPr rtlCol="0" anchor="ctr"/>
-          <a:lstStyle/>
-          <a:p>
-            <a:pPr algn="ctr">
-              <a:defRPr sz="1100" b="1">
-                <a:solidFill>
-                  <a:srgbClr val="FFFFFF"/>
-                </a:solidFill>
-              </a:defRPr>
-            </a:pPr>
-            <a:r>
-              <a:t>THE ASK &amp; IMPACT</a:t>
-            </a:r>
-          </a:p>
-        </p:txBody>
-      </p:sp>
-      <p:sp>
-        <p:nvSpPr>
-          <p:cNvPr id="18" name="TextBox 17"/>
-          <p:cNvSpPr txBox="1"/>
-          <p:nvPr/>
-        </p:nvSpPr>
-        <p:spPr>
-          <a:xfrm>
-            <a:off x="9070848" y="2377440"/>
-            <a:ext cx="2240280" cy="3840480"/>
-          </a:xfrm>
-          <a:prstGeom prst="rect">
-            <a:avLst/>
-          </a:prstGeom>
-          <a:noFill/>
-        </p:spPr>
-        <p:txBody>
-          <a:bodyPr wrap="square" lIns="0" tIns="0" rIns="0" bIns="0">
-            <a:spAutoFit/>
-          </a:bodyPr>
-          <a:lstStyle/>
-          <a:p>
-            <a:pPr>
-              <a:spcAft>
-                <a:spcPts val="200"/>
-              </a:spcAft>
-              <a:defRPr sz="1150" b="1">
-                <a:solidFill>
-                  <a:srgbClr val="0F172A"/>
-                </a:solidFill>
-              </a:defRPr>
-            </a:pPr>
-            <a:r>
-              <a:t>• Grant Focus</a:t>
-            </a:r>
-          </a:p>
-          <a:p>
-            <a:pPr>
-              <a:spcAft>
-                <a:spcPts val="400"/>
-              </a:spcAft>
-              <a:defRPr sz="1000">
-                <a:solidFill>
-                  <a:srgbClr val="1E293B"/>
-                </a:solidFill>
-              </a:defRPr>
-            </a:pPr>
-            <a:r>
-              <a:t>R&amp;D funding for GPU hardware testbeds &amp; real-time 4K optimization.</a:t>
-            </a:r>
-          </a:p>
-          <a:p>
-            <a:pPr>
-              <a:spcBef>
-                <a:spcPts val="800"/>
-              </a:spcBef>
-              <a:spcAft>
-                <a:spcPts val="200"/>
-              </a:spcAft>
-              <a:defRPr sz="1150" b="1">
-                <a:solidFill>
-                  <a:srgbClr val="0F172A"/>
-                </a:solidFill>
-              </a:defRPr>
-            </a:pPr>
-            <a:r>
-              <a:t>• IP Protection</a:t>
-            </a:r>
-          </a:p>
-          <a:p>
-            <a:pPr>
-              <a:spcAft>
-                <a:spcPts val="400"/>
-              </a:spcAft>
-              <a:defRPr sz="1000">
-                <a:solidFill>
-                  <a:srgbClr val="1E293B"/>
-                </a:solidFill>
-              </a:defRPr>
-            </a:pPr>
-            <a:r>
-              <a:t>Filing Indian patents &amp; international trademark registrations.</a:t>
-            </a:r>
-          </a:p>
-          <a:p>
-            <a:pPr>
-              <a:spcBef>
-                <a:spcPts val="800"/>
-              </a:spcBef>
-              <a:spcAft>
-                <a:spcPts val="200"/>
-              </a:spcAft>
-              <a:defRPr sz="1150" b="1">
-                <a:solidFill>
-                  <a:srgbClr val="0F172A"/>
-                </a:solidFill>
-              </a:defRPr>
-            </a:pPr>
-            <a:r>
-              <a:t>• Employment</a:t>
-            </a:r>
-          </a:p>
-          <a:p>
-            <a:pPr>
-              <a:spcAft>
-                <a:spcPts val="400"/>
-              </a:spcAft>
-              <a:defRPr sz="1000">
-                <a:solidFill>
-                  <a:srgbClr val="1E293B"/>
-                </a:solidFill>
-              </a:defRPr>
-            </a:pPr>
-            <a:r>
-              <a:t>Creating 8–12 direct high-skill C++/AI jobs in Tier-2 Karnataka.</a:t>
+              <a:defRPr sz="1200">
+                <a:solidFill>
+                  <a:srgbClr val="334155"/>
+                </a:solidFill>
+              </a:defRPr>
+            </a:pPr>
+            <a:r>
+              <a:t>• Forces tedious multi-step export and upload workflows.</a:t>
             </a:r>
           </a:p>
         </p:txBody>
@@ -6363,8 +4850,8 @@
         </p:nvSpPr>
         <p:spPr>
           <a:xfrm>
-            <a:off x="731520" y="411480"/>
-            <a:ext cx="10728655" cy="274320"/>
+            <a:off x="822960" y="457200"/>
+            <a:ext cx="10515600" cy="274320"/>
           </a:xfrm>
           <a:prstGeom prst="rect">
             <a:avLst/>
@@ -6386,7 +4873,7 @@
               </a:defRPr>
             </a:pPr>
             <a:r>
-              <a:t>MARKET PAIN POINTS</a:t>
+              <a:t>THE SOLUTION</a:t>
             </a:r>
           </a:p>
         </p:txBody>
@@ -6399,8 +4886,8 @@
         </p:nvSpPr>
         <p:spPr>
           <a:xfrm>
-            <a:off x="731520" y="685800"/>
-            <a:ext cx="10728655" cy="548640"/>
+            <a:off x="822960" y="731520"/>
+            <a:ext cx="10515600" cy="548640"/>
           </a:xfrm>
           <a:prstGeom prst="rect">
             <a:avLst/>
@@ -6422,7 +4909,7 @@
               </a:defRPr>
             </a:pPr>
             <a:r>
-              <a:t>The Problem — Bottlenecks in Modern Media Production</a:t>
+              <a:t>Our Proprietary Product Suite</a:t>
             </a:r>
           </a:p>
         </p:txBody>
@@ -6435,8 +4922,8 @@
         </p:nvSpPr>
         <p:spPr>
           <a:xfrm>
-            <a:off x="731520" y="1234440"/>
-            <a:ext cx="10728655" cy="320040"/>
+            <a:off x="822960" y="1280160"/>
+            <a:ext cx="10515600" cy="274320"/>
           </a:xfrm>
           <a:prstGeom prst="rect">
             <a:avLst/>
@@ -6458,64 +4945,21 @@
               </a:defRPr>
             </a:pPr>
             <a:r>
-              <a:t>High software costs and disconnected AI workflows are crippling independent creators.</a:t>
-            </a:r>
-          </a:p>
-        </p:txBody>
-      </p:sp>
-      <p:sp>
-        <p:nvSpPr>
-          <p:cNvPr id="6" name="Rectangle 5"/>
+              <a:t>Native GPU-accelerated tools built for local execution without cloud lag.</a:t>
+            </a:r>
+          </a:p>
+        </p:txBody>
+      </p:sp>
+      <p:sp>
+        <p:nvSpPr>
+          <p:cNvPr id="6" name="Rounded Rectangle 5"/>
           <p:cNvSpPr/>
           <p:nvPr/>
         </p:nvSpPr>
         <p:spPr>
           <a:xfrm>
-            <a:off x="731520" y="1572768"/>
-            <a:ext cx="10728655" cy="13716"/>
-          </a:xfrm>
-          <a:prstGeom prst="rect">
-            <a:avLst/>
-          </a:prstGeom>
-          <a:solidFill>
-            <a:srgbClr val="E2E8F0"/>
-          </a:solidFill>
-          <a:ln>
-            <a:noFill/>
-          </a:ln>
-        </p:spPr>
-        <p:style>
-          <a:lnRef idx="1">
-            <a:schemeClr val="accent1"/>
-          </a:lnRef>
-          <a:fillRef idx="3">
-            <a:schemeClr val="accent1"/>
-          </a:fillRef>
-          <a:effectRef idx="2">
-            <a:schemeClr val="accent1"/>
-          </a:effectRef>
-          <a:fontRef idx="minor">
-            <a:schemeClr val="lt1"/>
-          </a:fontRef>
-        </p:style>
-        <p:txBody>
-          <a:bodyPr rtlCol="0" anchor="ctr"/>
-          <a:lstStyle/>
-          <a:p>
-            <a:pPr algn="ctr"/>
-          </a:p>
-        </p:txBody>
-      </p:sp>
-      <p:sp>
-        <p:nvSpPr>
-          <p:cNvPr id="7" name="Rounded Rectangle 6"/>
-          <p:cNvSpPr/>
-          <p:nvPr/>
-        </p:nvSpPr>
-        <p:spPr>
-          <a:xfrm>
-            <a:off x="731520" y="1737360"/>
-            <a:ext cx="3383280" cy="4480560"/>
+            <a:off x="822960" y="1828800"/>
+            <a:ext cx="3291840" cy="4297680"/>
           </a:xfrm>
           <a:prstGeom prst="roundRect">
             <a:avLst/>
@@ -6553,66 +4997,49 @@
       </p:sp>
       <p:sp>
         <p:nvSpPr>
-          <p:cNvPr id="8" name="Oval 7"/>
-          <p:cNvSpPr/>
-          <p:nvPr/>
-        </p:nvSpPr>
-        <p:spPr>
-          <a:xfrm>
-            <a:off x="914400" y="1920240"/>
-            <a:ext cx="502920" cy="502920"/>
-          </a:xfrm>
-          <a:prstGeom prst="ellipse">
-            <a:avLst/>
-          </a:prstGeom>
-          <a:solidFill>
-            <a:srgbClr val="D97706"/>
-          </a:solidFill>
-          <a:ln>
-            <a:noFill/>
-          </a:ln>
-        </p:spPr>
-        <p:style>
-          <a:lnRef idx="1">
-            <a:schemeClr val="accent1"/>
-          </a:lnRef>
-          <a:fillRef idx="3">
-            <a:schemeClr val="accent1"/>
-          </a:fillRef>
-          <a:effectRef idx="2">
-            <a:schemeClr val="accent1"/>
-          </a:effectRef>
-          <a:fontRef idx="minor">
-            <a:schemeClr val="lt1"/>
-          </a:fontRef>
-        </p:style>
-        <p:txBody>
-          <a:bodyPr rtlCol="0" anchor="ctr"/>
-          <a:lstStyle/>
-          <a:p>
-            <a:pPr algn="ctr">
-              <a:defRPr sz="1300" b="1">
-                <a:solidFill>
-                  <a:srgbClr val="FFFFFF"/>
-                </a:solidFill>
-              </a:defRPr>
-            </a:pPr>
-            <a:r>
-              <a:t>01</a:t>
-            </a:r>
-          </a:p>
-        </p:txBody>
-      </p:sp>
-      <p:sp>
-        <p:nvSpPr>
-          <p:cNvPr id="9" name="TextBox 8"/>
+          <p:cNvPr id="7" name="TextBox 6"/>
           <p:cNvSpPr txBox="1"/>
           <p:nvPr/>
         </p:nvSpPr>
         <p:spPr>
           <a:xfrm>
-            <a:off x="1554480" y="1920240"/>
-            <a:ext cx="2377440" cy="548640"/>
+            <a:off x="1051560" y="2103120"/>
+            <a:ext cx="2834640" cy="274320"/>
+          </a:xfrm>
+          <a:prstGeom prst="rect">
+            <a:avLst/>
+          </a:prstGeom>
+          <a:noFill/>
+        </p:spPr>
+        <p:txBody>
+          <a:bodyPr wrap="none" lIns="0" tIns="0" rIns="0" bIns="0">
+            <a:spAutoFit/>
+          </a:bodyPr>
+          <a:lstStyle/>
+          <a:p>
+            <a:pPr>
+              <a:defRPr sz="950" b="1">
+                <a:solidFill>
+                  <a:srgbClr val="2563EB"/>
+                </a:solidFill>
+              </a:defRPr>
+            </a:pPr>
+            <a:r>
+              <a:t>DAVINCI RESOLVE OPENFX PLUGIN</a:t>
+            </a:r>
+          </a:p>
+        </p:txBody>
+      </p:sp>
+      <p:sp>
+        <p:nvSpPr>
+          <p:cNvPr id="8" name="TextBox 7"/>
+          <p:cNvSpPr txBox="1"/>
+          <p:nvPr/>
+        </p:nvSpPr>
+        <p:spPr>
+          <a:xfrm>
+            <a:off x="1051560" y="2377440"/>
+            <a:ext cx="2834640" cy="548640"/>
           </a:xfrm>
           <a:prstGeom prst="rect">
             <a:avLst/>
@@ -6626,28 +5053,28 @@
           <a:lstStyle/>
           <a:p>
             <a:pPr>
-              <a:defRPr sz="1400" b="1">
+              <a:defRPr sz="1700" b="1">
                 <a:solidFill>
                   <a:srgbClr val="0F172A"/>
                 </a:solidFill>
               </a:defRPr>
             </a:pPr>
             <a:r>
-              <a:t>Exorbitant Licensing Costs</a:t>
-            </a:r>
-          </a:p>
-        </p:txBody>
-      </p:sp>
-      <p:sp>
-        <p:nvSpPr>
-          <p:cNvPr id="10" name="Rectangle 9"/>
+              <a:t>AI Cinematic Haze</a:t>
+            </a:r>
+          </a:p>
+        </p:txBody>
+      </p:sp>
+      <p:sp>
+        <p:nvSpPr>
+          <p:cNvPr id="9" name="Rectangle 8"/>
           <p:cNvSpPr/>
           <p:nvPr/>
         </p:nvSpPr>
         <p:spPr>
           <a:xfrm>
-            <a:off x="914400" y="2560320"/>
-            <a:ext cx="3017520" cy="13716"/>
+            <a:off x="1051560" y="3017520"/>
+            <a:ext cx="2834640" cy="13716"/>
           </a:xfrm>
           <a:prstGeom prst="rect">
             <a:avLst/>
@@ -6683,14 +5110,14 @@
       </p:sp>
       <p:sp>
         <p:nvSpPr>
-          <p:cNvPr id="11" name="TextBox 10"/>
+          <p:cNvPr id="10" name="TextBox 9"/>
           <p:cNvSpPr txBox="1"/>
           <p:nvPr/>
         </p:nvSpPr>
         <p:spPr>
           <a:xfrm>
-            <a:off x="914400" y="2743200"/>
-            <a:ext cx="3017520" cy="3291840"/>
+            <a:off x="1051560" y="3200400"/>
+            <a:ext cx="2834640" cy="2651760"/>
           </a:xfrm>
           <a:prstGeom prst="rect">
             <a:avLst/>
@@ -6707,14 +5134,14 @@
               <a:spcAft>
                 <a:spcPts val="1000"/>
               </a:spcAft>
-              <a:defRPr sz="1100">
-                <a:solidFill>
-                  <a:srgbClr val="1E293B"/>
-                </a:solidFill>
-              </a:defRPr>
-            </a:pPr>
-            <a:r>
-              <a:t>• Foreign VFX &amp; color grading suites cost ₹30,000 to ₹1,00,000+ per license.</a:t>
+              <a:defRPr sz="1150">
+                <a:solidFill>
+                  <a:srgbClr val="334155"/>
+                </a:solidFill>
+              </a:defRPr>
+            </a:pPr>
+            <a:r>
+              <a:t>✔  Native C++ / Apple Metal / CUDA GPU compute.</a:t>
             </a:r>
           </a:p>
           <a:p>
@@ -6722,14 +5149,14 @@
               <a:spcAft>
                 <a:spcPts val="1000"/>
               </a:spcAft>
-              <a:defRPr sz="1100">
-                <a:solidFill>
-                  <a:srgbClr val="1E293B"/>
-                </a:solidFill>
-              </a:defRPr>
-            </a:pPr>
-            <a:r>
-              <a:t>• Creates an insurmountable economic barrier for 95% of indie creators, students, and regional studios in India.</a:t>
+              <a:defRPr sz="1150">
+                <a:solidFill>
+                  <a:srgbClr val="334155"/>
+                </a:solidFill>
+              </a:defRPr>
+            </a:pPr>
+            <a:r>
+              <a:t>✔  Embedded neural depth AI for real-time volumetric haze.</a:t>
             </a:r>
           </a:p>
           <a:p>
@@ -6737,28 +5164,43 @@
               <a:spcAft>
                 <a:spcPts val="1000"/>
               </a:spcAft>
-              <a:defRPr sz="1100">
-                <a:solidFill>
-                  <a:srgbClr val="1E293B"/>
-                </a:solidFill>
-              </a:defRPr>
-            </a:pPr>
-            <a:r>
-              <a:t>• Forces creators onto pirated, unstable, or outdated software tools.</a:t>
-            </a:r>
-          </a:p>
-        </p:txBody>
-      </p:sp>
-      <p:sp>
-        <p:nvSpPr>
-          <p:cNvPr id="12" name="Rounded Rectangle 11"/>
+              <a:defRPr sz="1150">
+                <a:solidFill>
+                  <a:srgbClr val="334155"/>
+                </a:solidFill>
+              </a:defRPr>
+            </a:pPr>
+            <a:r>
+              <a:t>✔  Preserves 12-bit uncompressed DPX sensor dynamic range.</a:t>
+            </a:r>
+          </a:p>
+          <a:p>
+            <a:pPr>
+              <a:spcAft>
+                <a:spcPts val="1000"/>
+              </a:spcAft>
+              <a:defRPr sz="1150">
+                <a:solidFill>
+                  <a:srgbClr val="334155"/>
+                </a:solidFill>
+              </a:defRPr>
+            </a:pPr>
+            <a:r>
+              <a:t>✔  100% on-device execution with zero cloud latency.</a:t>
+            </a:r>
+          </a:p>
+        </p:txBody>
+      </p:sp>
+      <p:sp>
+        <p:nvSpPr>
+          <p:cNvPr id="11" name="Rounded Rectangle 10"/>
           <p:cNvSpPr/>
           <p:nvPr/>
         </p:nvSpPr>
         <p:spPr>
           <a:xfrm>
-            <a:off x="4398264" y="1737360"/>
-            <a:ext cx="3383280" cy="4480560"/>
+            <a:off x="4434840" y="1828800"/>
+            <a:ext cx="3291840" cy="4297680"/>
           </a:xfrm>
           <a:prstGeom prst="roundRect">
             <a:avLst/>
@@ -6796,66 +5238,49 @@
       </p:sp>
       <p:sp>
         <p:nvSpPr>
-          <p:cNvPr id="13" name="Oval 12"/>
-          <p:cNvSpPr/>
-          <p:nvPr/>
-        </p:nvSpPr>
-        <p:spPr>
-          <a:xfrm>
-            <a:off x="4581144" y="1920240"/>
-            <a:ext cx="502920" cy="502920"/>
-          </a:xfrm>
-          <a:prstGeom prst="ellipse">
-            <a:avLst/>
-          </a:prstGeom>
-          <a:solidFill>
-            <a:srgbClr val="2563EB"/>
-          </a:solidFill>
-          <a:ln>
-            <a:noFill/>
-          </a:ln>
-        </p:spPr>
-        <p:style>
-          <a:lnRef idx="1">
-            <a:schemeClr val="accent1"/>
-          </a:lnRef>
-          <a:fillRef idx="3">
-            <a:schemeClr val="accent1"/>
-          </a:fillRef>
-          <a:effectRef idx="2">
-            <a:schemeClr val="accent1"/>
-          </a:effectRef>
-          <a:fontRef idx="minor">
-            <a:schemeClr val="lt1"/>
-          </a:fontRef>
-        </p:style>
-        <p:txBody>
-          <a:bodyPr rtlCol="0" anchor="ctr"/>
-          <a:lstStyle/>
-          <a:p>
-            <a:pPr algn="ctr">
-              <a:defRPr sz="1300" b="1">
-                <a:solidFill>
-                  <a:srgbClr val="FFFFFF"/>
-                </a:solidFill>
-              </a:defRPr>
-            </a:pPr>
-            <a:r>
-              <a:t>02</a:t>
-            </a:r>
-          </a:p>
-        </p:txBody>
-      </p:sp>
-      <p:sp>
-        <p:nvSpPr>
-          <p:cNvPr id="14" name="TextBox 13"/>
+          <p:cNvPr id="12" name="TextBox 11"/>
           <p:cNvSpPr txBox="1"/>
           <p:nvPr/>
         </p:nvSpPr>
         <p:spPr>
           <a:xfrm>
-            <a:off x="5221224" y="1920240"/>
-            <a:ext cx="2377440" cy="548640"/>
+            <a:off x="4663440" y="2103120"/>
+            <a:ext cx="2834640" cy="274320"/>
+          </a:xfrm>
+          <a:prstGeom prst="rect">
+            <a:avLst/>
+          </a:prstGeom>
+          <a:noFill/>
+        </p:spPr>
+        <p:txBody>
+          <a:bodyPr wrap="none" lIns="0" tIns="0" rIns="0" bIns="0">
+            <a:spAutoFit/>
+          </a:bodyPr>
+          <a:lstStyle/>
+          <a:p>
+            <a:pPr>
+              <a:defRPr sz="950" b="1">
+                <a:solidFill>
+                  <a:srgbClr val="059669"/>
+                </a:solidFill>
+              </a:defRPr>
+            </a:pPr>
+            <a:r>
+              <a:t>INSTITUTIONAL OPTIMIZATION SOLVER</a:t>
+            </a:r>
+          </a:p>
+        </p:txBody>
+      </p:sp>
+      <p:sp>
+        <p:nvSpPr>
+          <p:cNvPr id="13" name="TextBox 12"/>
+          <p:cNvSpPr txBox="1"/>
+          <p:nvPr/>
+        </p:nvSpPr>
+        <p:spPr>
+          <a:xfrm>
+            <a:off x="4663440" y="2377440"/>
+            <a:ext cx="2834640" cy="548640"/>
           </a:xfrm>
           <a:prstGeom prst="rect">
             <a:avLst/>
@@ -6869,28 +5294,28 @@
           <a:lstStyle/>
           <a:p>
             <a:pPr>
-              <a:defRPr sz="1400" b="1">
+              <a:defRPr sz="1700" b="1">
                 <a:solidFill>
                   <a:srgbClr val="0F172A"/>
                 </a:solidFill>
               </a:defRPr>
             </a:pPr>
             <a:r>
-              <a:t>Severe Video Quality Loss</a:t>
-            </a:r>
-          </a:p>
-        </p:txBody>
-      </p:sp>
-      <p:sp>
-        <p:nvSpPr>
-          <p:cNvPr id="15" name="Rectangle 14"/>
+              <a:t>InvigiMatrix</a:t>
+            </a:r>
+          </a:p>
+        </p:txBody>
+      </p:sp>
+      <p:sp>
+        <p:nvSpPr>
+          <p:cNvPr id="14" name="Rectangle 13"/>
           <p:cNvSpPr/>
           <p:nvPr/>
         </p:nvSpPr>
         <p:spPr>
           <a:xfrm>
-            <a:off x="4581144" y="2560320"/>
-            <a:ext cx="3017520" cy="13716"/>
+            <a:off x="4663440" y="3017520"/>
+            <a:ext cx="2834640" cy="13716"/>
           </a:xfrm>
           <a:prstGeom prst="rect">
             <a:avLst/>
@@ -6926,14 +5351,14 @@
       </p:sp>
       <p:sp>
         <p:nvSpPr>
-          <p:cNvPr id="16" name="TextBox 15"/>
+          <p:cNvPr id="15" name="TextBox 14"/>
           <p:cNvSpPr txBox="1"/>
           <p:nvPr/>
         </p:nvSpPr>
         <p:spPr>
           <a:xfrm>
-            <a:off x="4581144" y="2743200"/>
-            <a:ext cx="3017520" cy="3291840"/>
+            <a:off x="4663440" y="3200400"/>
+            <a:ext cx="2834640" cy="2651760"/>
           </a:xfrm>
           <a:prstGeom prst="rect">
             <a:avLst/>
@@ -6950,14 +5375,14 @@
               <a:spcAft>
                 <a:spcPts val="1000"/>
               </a:spcAft>
-              <a:defRPr sz="1100">
-                <a:solidFill>
-                  <a:srgbClr val="1E293B"/>
-                </a:solidFill>
-              </a:defRPr>
-            </a:pPr>
-            <a:r>
-              <a:t>• Standard video workflows heavily compress 4K 60FPS high-framerate media.</a:t>
+              <a:defRPr sz="1150">
+                <a:solidFill>
+                  <a:srgbClr val="334155"/>
+                </a:solidFill>
+              </a:defRPr>
+            </a:pPr>
+            <a:r>
+              <a:t>✔  Combinatorial NP-hard CSP backtracking solver.</a:t>
             </a:r>
           </a:p>
           <a:p>
@@ -6965,14 +5390,14 @@
               <a:spcAft>
                 <a:spcPts val="1000"/>
               </a:spcAft>
-              <a:defRPr sz="1100">
-                <a:solidFill>
-                  <a:srgbClr val="1E293B"/>
-                </a:solidFill>
-              </a:defRPr>
-            </a:pPr>
-            <a:r>
-              <a:t>• Causes severe motion artifacts, jitter, and loss of cinema sensor dynamic range.</a:t>
+              <a:defRPr sz="1150">
+                <a:solidFill>
+                  <a:srgbClr val="334155"/>
+                </a:solidFill>
+              </a:defRPr>
+            </a:pPr>
+            <a:r>
+              <a:t>✔  AI/ML Smart Batch Planner with dynamic K-Means (k=3).</a:t>
             </a:r>
           </a:p>
           <a:p>
@@ -6980,28 +5405,43 @@
               <a:spcAft>
                 <a:spcPts val="1000"/>
               </a:spcAft>
-              <a:defRPr sz="1100">
-                <a:solidFill>
-                  <a:srgbClr val="1E293B"/>
-                </a:solidFill>
-              </a:defRPr>
-            </a:pPr>
-            <a:r>
-              <a:t>• Lacks uncompressed 12-bit DPX raw frame processing on accessible creator machines.</a:t>
-            </a:r>
-          </a:p>
-        </p:txBody>
-      </p:sp>
-      <p:sp>
-        <p:nvSpPr>
-          <p:cNvPr id="17" name="Rounded Rectangle 16"/>
+              <a:defRPr sz="1150">
+                <a:solidFill>
+                  <a:srgbClr val="334155"/>
+                </a:solidFill>
+              </a:defRPr>
+            </a:pPr>
+            <a:r>
+              <a:t>✔  Zero-framework native Node.js + SQLite ACID transactions.</a:t>
+            </a:r>
+          </a:p>
+          <a:p>
+            <a:pPr>
+              <a:spcAft>
+                <a:spcPts val="1000"/>
+              </a:spcAft>
+              <a:defRPr sz="1150">
+                <a:solidFill>
+                  <a:srgbClr val="334155"/>
+                </a:solidFill>
+              </a:defRPr>
+            </a:pPr>
+            <a:r>
+              <a:t>✔  Live institutional deployment at Sahyadri College (SCEM).</a:t>
+            </a:r>
+          </a:p>
+        </p:txBody>
+      </p:sp>
+      <p:sp>
+        <p:nvSpPr>
+          <p:cNvPr id="16" name="Rounded Rectangle 15"/>
           <p:cNvSpPr/>
           <p:nvPr/>
         </p:nvSpPr>
         <p:spPr>
           <a:xfrm>
-            <a:off x="8065008" y="1737360"/>
-            <a:ext cx="3383280" cy="4480560"/>
+            <a:off x="8046720" y="1828800"/>
+            <a:ext cx="3291840" cy="4297680"/>
           </a:xfrm>
           <a:prstGeom prst="roundRect">
             <a:avLst/>
@@ -7039,66 +5479,49 @@
       </p:sp>
       <p:sp>
         <p:nvSpPr>
-          <p:cNvPr id="18" name="Oval 17"/>
-          <p:cNvSpPr/>
-          <p:nvPr/>
-        </p:nvSpPr>
-        <p:spPr>
-          <a:xfrm>
-            <a:off x="8247888" y="1920240"/>
-            <a:ext cx="502920" cy="502920"/>
-          </a:xfrm>
-          <a:prstGeom prst="ellipse">
-            <a:avLst/>
-          </a:prstGeom>
-          <a:solidFill>
-            <a:srgbClr val="4F46E5"/>
-          </a:solidFill>
-          <a:ln>
-            <a:noFill/>
-          </a:ln>
-        </p:spPr>
-        <p:style>
-          <a:lnRef idx="1">
-            <a:schemeClr val="accent1"/>
-          </a:lnRef>
-          <a:fillRef idx="3">
-            <a:schemeClr val="accent1"/>
-          </a:fillRef>
-          <a:effectRef idx="2">
-            <a:schemeClr val="accent1"/>
-          </a:effectRef>
-          <a:fontRef idx="minor">
-            <a:schemeClr val="lt1"/>
-          </a:fontRef>
-        </p:style>
-        <p:txBody>
-          <a:bodyPr rtlCol="0" anchor="ctr"/>
-          <a:lstStyle/>
-          <a:p>
-            <a:pPr algn="ctr">
-              <a:defRPr sz="1300" b="1">
-                <a:solidFill>
-                  <a:srgbClr val="FFFFFF"/>
-                </a:solidFill>
-              </a:defRPr>
-            </a:pPr>
-            <a:r>
-              <a:t>03</a:t>
-            </a:r>
-          </a:p>
-        </p:txBody>
-      </p:sp>
-      <p:sp>
-        <p:nvSpPr>
-          <p:cNvPr id="19" name="TextBox 18"/>
+          <p:cNvPr id="17" name="TextBox 16"/>
           <p:cNvSpPr txBox="1"/>
           <p:nvPr/>
         </p:nvSpPr>
         <p:spPr>
           <a:xfrm>
-            <a:off x="8887968" y="1920240"/>
-            <a:ext cx="2377440" cy="548640"/>
+            <a:off x="8275320" y="2103120"/>
+            <a:ext cx="2834640" cy="274320"/>
+          </a:xfrm>
+          <a:prstGeom prst="rect">
+            <a:avLst/>
+          </a:prstGeom>
+          <a:noFill/>
+        </p:spPr>
+        <p:txBody>
+          <a:bodyPr wrap="none" lIns="0" tIns="0" rIns="0" bIns="0">
+            <a:spAutoFit/>
+          </a:bodyPr>
+          <a:lstStyle/>
+          <a:p>
+            <a:pPr>
+              <a:defRPr sz="950" b="1">
+                <a:solidFill>
+                  <a:srgbClr val="7C3AED"/>
+                </a:solidFill>
+              </a:defRPr>
+            </a:pPr>
+            <a:r>
+              <a:t>AUTONOMOUS MEDIA ENGINE</a:t>
+            </a:r>
+          </a:p>
+        </p:txBody>
+      </p:sp>
+      <p:sp>
+        <p:nvSpPr>
+          <p:cNvPr id="18" name="TextBox 17"/>
+          <p:cNvSpPr txBox="1"/>
+          <p:nvPr/>
+        </p:nvSpPr>
+        <p:spPr>
+          <a:xfrm>
+            <a:off x="8275320" y="2377440"/>
+            <a:ext cx="2834640" cy="548640"/>
           </a:xfrm>
           <a:prstGeom prst="rect">
             <a:avLst/>
@@ -7112,28 +5535,28 @@
           <a:lstStyle/>
           <a:p>
             <a:pPr>
-              <a:defRPr sz="1400" b="1">
+              <a:defRPr sz="1700" b="1">
                 <a:solidFill>
                   <a:srgbClr val="0F172A"/>
                 </a:solidFill>
               </a:defRPr>
             </a:pPr>
             <a:r>
-              <a:t>Fragmented AI Tooling</a:t>
-            </a:r>
-          </a:p>
-        </p:txBody>
-      </p:sp>
-      <p:sp>
-        <p:nvSpPr>
-          <p:cNvPr id="20" name="Rectangle 19"/>
+              <a:t>OmniTransform AI</a:t>
+            </a:r>
+          </a:p>
+        </p:txBody>
+      </p:sp>
+      <p:sp>
+        <p:nvSpPr>
+          <p:cNvPr id="19" name="Rectangle 18"/>
           <p:cNvSpPr/>
           <p:nvPr/>
         </p:nvSpPr>
         <p:spPr>
           <a:xfrm>
-            <a:off x="8247888" y="2560320"/>
-            <a:ext cx="3017520" cy="13716"/>
+            <a:off x="8275320" y="3017520"/>
+            <a:ext cx="2834640" cy="13716"/>
           </a:xfrm>
           <a:prstGeom prst="rect">
             <a:avLst/>
@@ -7169,14 +5592,14 @@
       </p:sp>
       <p:sp>
         <p:nvSpPr>
-          <p:cNvPr id="21" name="TextBox 20"/>
+          <p:cNvPr id="20" name="TextBox 19"/>
           <p:cNvSpPr txBox="1"/>
           <p:nvPr/>
         </p:nvSpPr>
         <p:spPr>
           <a:xfrm>
-            <a:off x="8247888" y="2743200"/>
-            <a:ext cx="3017520" cy="3291840"/>
+            <a:off x="8275320" y="3200400"/>
+            <a:ext cx="2834640" cy="2651760"/>
           </a:xfrm>
           <a:prstGeom prst="rect">
             <a:avLst/>
@@ -7193,14 +5616,14 @@
               <a:spcAft>
                 <a:spcPts val="1000"/>
               </a:spcAft>
-              <a:defRPr sz="1100">
-                <a:solidFill>
-                  <a:srgbClr val="1E293B"/>
-                </a:solidFill>
-              </a:defRPr>
-            </a:pPr>
-            <a:r>
-              <a:t>• Most AI video tools operate as slow, standalone web wrappers.</a:t>
+              <a:defRPr sz="1150">
+                <a:solidFill>
+                  <a:srgbClr val="334155"/>
+                </a:solidFill>
+              </a:defRPr>
+            </a:pPr>
+            <a:r>
+              <a:t>✔  Sub-75ms streaming neural voice AI synthesis.</a:t>
             </a:r>
           </a:p>
           <a:p>
@@ -7208,14 +5631,14 @@
               <a:spcAft>
                 <a:spcPts val="1000"/>
               </a:spcAft>
-              <a:defRPr sz="1100">
-                <a:solidFill>
-                  <a:srgbClr val="1E293B"/>
-                </a:solidFill>
-              </a:defRPr>
-            </a:pPr>
-            <a:r>
-              <a:t>• Zero native integration into industry-standard Non-Linear Editors (NLEs) like DaVinci Resolve.</a:t>
+              <a:defRPr sz="1150">
+                <a:solidFill>
+                  <a:srgbClr val="334155"/>
+                </a:solidFill>
+              </a:defRPr>
+            </a:pPr>
+            <a:r>
+              <a:t>✔  Autonomous multi-agent workflows for media syndication.</a:t>
             </a:r>
           </a:p>
           <a:p>
@@ -7223,14 +5646,29 @@
               <a:spcAft>
                 <a:spcPts val="1000"/>
               </a:spcAft>
-              <a:defRPr sz="1100">
-                <a:solidFill>
-                  <a:srgbClr val="1E293B"/>
-                </a:solidFill>
-              </a:defRPr>
-            </a:pPr>
-            <a:r>
-              <a:t>• Forces tedious multi-step manual export and upload workflows with high cloud latency.</a:t>
+              <a:defRPr sz="1150">
+                <a:solidFill>
+                  <a:srgbClr val="334155"/>
+                </a:solidFill>
+              </a:defRPr>
+            </a:pPr>
+            <a:r>
+              <a:t>✔  High-throughput distributed stream architecture.</a:t>
+            </a:r>
+          </a:p>
+          <a:p>
+            <a:pPr>
+              <a:spcAft>
+                <a:spcPts val="1000"/>
+              </a:spcAft>
+              <a:defRPr sz="1150">
+                <a:solidFill>
+                  <a:srgbClr val="334155"/>
+                </a:solidFill>
+              </a:defRPr>
+            </a:pPr>
+            <a:r>
+              <a:t>✔  Built-in client-side code security and anti-tamper shields.</a:t>
             </a:r>
           </a:p>
         </p:txBody>
@@ -7304,8 +5742,8 @@
         </p:nvSpPr>
         <p:spPr>
           <a:xfrm>
-            <a:off x="731520" y="411480"/>
-            <a:ext cx="10728655" cy="274320"/>
+            <a:off x="822960" y="457200"/>
+            <a:ext cx="10515600" cy="274320"/>
           </a:xfrm>
           <a:prstGeom prst="rect">
             <a:avLst/>
@@ -7327,7 +5765,7 @@
               </a:defRPr>
             </a:pPr>
             <a:r>
-              <a:t>PROPRIETARY PRODUCTS</a:t>
+              <a:t>TRACTION &amp; PROOF</a:t>
             </a:r>
           </a:p>
         </p:txBody>
@@ -7340,8 +5778,8 @@
         </p:nvSpPr>
         <p:spPr>
           <a:xfrm>
-            <a:off x="731520" y="685800"/>
-            <a:ext cx="10728655" cy="548640"/>
+            <a:off x="822960" y="731520"/>
+            <a:ext cx="10515600" cy="548640"/>
           </a:xfrm>
           <a:prstGeom prst="rect">
             <a:avLst/>
@@ -7363,7 +5801,7 @@
               </a:defRPr>
             </a:pPr>
             <a:r>
-              <a:t>The Solution — Symmetrical Media-Tech Infrastructure</a:t>
+              <a:t>Proven Traction &amp; Real-World Validation</a:t>
             </a:r>
           </a:p>
         </p:txBody>
@@ -7376,8 +5814,8 @@
         </p:nvSpPr>
         <p:spPr>
           <a:xfrm>
-            <a:off x="731520" y="1234440"/>
-            <a:ext cx="10728655" cy="320040"/>
+            <a:off x="822960" y="1280160"/>
+            <a:ext cx="10515600" cy="274320"/>
           </a:xfrm>
           <a:prstGeom prst="rect">
             <a:avLst/>
@@ -7399,64 +5837,21 @@
               </a:defRPr>
             </a:pPr>
             <a:r>
-              <a:t>High-performance, hardware-accelerated software engineered for local GPU execution.</a:t>
-            </a:r>
-          </a:p>
-        </p:txBody>
-      </p:sp>
-      <p:sp>
-        <p:nvSpPr>
-          <p:cNvPr id="6" name="Rectangle 5"/>
+              <a:t>Demonstrated user engagement, live deployment, and accredited engineering standards.</a:t>
+            </a:r>
+          </a:p>
+        </p:txBody>
+      </p:sp>
+      <p:sp>
+        <p:nvSpPr>
+          <p:cNvPr id="6" name="Rounded Rectangle 5"/>
           <p:cNvSpPr/>
           <p:nvPr/>
         </p:nvSpPr>
         <p:spPr>
           <a:xfrm>
-            <a:off x="731520" y="1572768"/>
-            <a:ext cx="10728655" cy="13716"/>
-          </a:xfrm>
-          <a:prstGeom prst="rect">
-            <a:avLst/>
-          </a:prstGeom>
-          <a:solidFill>
-            <a:srgbClr val="E2E8F0"/>
-          </a:solidFill>
-          <a:ln>
-            <a:noFill/>
-          </a:ln>
-        </p:spPr>
-        <p:style>
-          <a:lnRef idx="1">
-            <a:schemeClr val="accent1"/>
-          </a:lnRef>
-          <a:fillRef idx="3">
-            <a:schemeClr val="accent1"/>
-          </a:fillRef>
-          <a:effectRef idx="2">
-            <a:schemeClr val="accent1"/>
-          </a:effectRef>
-          <a:fontRef idx="minor">
-            <a:schemeClr val="lt1"/>
-          </a:fontRef>
-        </p:style>
-        <p:txBody>
-          <a:bodyPr rtlCol="0" anchor="ctr"/>
-          <a:lstStyle/>
-          <a:p>
-            <a:pPr algn="ctr"/>
-          </a:p>
-        </p:txBody>
-      </p:sp>
-      <p:sp>
-        <p:nvSpPr>
-          <p:cNvPr id="7" name="Rounded Rectangle 6"/>
-          <p:cNvSpPr/>
-          <p:nvPr/>
-        </p:nvSpPr>
-        <p:spPr>
-          <a:xfrm>
-            <a:off x="731520" y="1737360"/>
-            <a:ext cx="3383280" cy="4480560"/>
+            <a:off x="822960" y="1828800"/>
+            <a:ext cx="5120640" cy="2011680"/>
           </a:xfrm>
           <a:prstGeom prst="roundRect">
             <a:avLst/>
@@ -7494,78 +5889,49 @@
       </p:sp>
       <p:sp>
         <p:nvSpPr>
-          <p:cNvPr id="8" name="Rounded Rectangle 7"/>
-          <p:cNvSpPr/>
-          <p:nvPr/>
-        </p:nvSpPr>
-        <p:spPr>
-          <a:xfrm>
-            <a:off x="914400" y="1920240"/>
-            <a:ext cx="3017520" cy="777240"/>
-          </a:xfrm>
-          <a:prstGeom prst="roundRect">
-            <a:avLst/>
-          </a:prstGeom>
-          <a:solidFill>
-            <a:srgbClr val="2563EB"/>
-          </a:solidFill>
-          <a:ln>
-            <a:noFill/>
-          </a:ln>
-        </p:spPr>
-        <p:style>
-          <a:lnRef idx="1">
-            <a:schemeClr val="accent1"/>
-          </a:lnRef>
-          <a:fillRef idx="3">
-            <a:schemeClr val="accent1"/>
-          </a:fillRef>
-          <a:effectRef idx="2">
-            <a:schemeClr val="accent1"/>
-          </a:effectRef>
-          <a:fontRef idx="minor">
-            <a:schemeClr val="lt1"/>
-          </a:fontRef>
-        </p:style>
-        <p:txBody>
-          <a:bodyPr rtlCol="0" anchor="ctr" wrap="square"/>
-          <a:lstStyle/>
-          <a:p>
-            <a:pPr algn="ctr">
-              <a:defRPr sz="1300" b="1">
-                <a:solidFill>
-                  <a:srgbClr val="FFFFFF"/>
-                </a:solidFill>
-              </a:defRPr>
-            </a:pPr>
-            <a:r>
-              <a:t>AI Cinematic Haze</a:t>
-            </a:r>
-          </a:p>
-          <a:p>
-            <a:pPr algn="ctr">
-              <a:defRPr sz="950">
-                <a:solidFill>
-                  <a:srgbClr val="E0E7FF"/>
-                </a:solidFill>
-              </a:defRPr>
-            </a:pPr>
-            <a:r>
-              <a:t>OpenFX Plugin for DaVinci Resolve</a:t>
-            </a:r>
-          </a:p>
-        </p:txBody>
-      </p:sp>
-      <p:sp>
-        <p:nvSpPr>
-          <p:cNvPr id="9" name="TextBox 8"/>
+          <p:cNvPr id="7" name="TextBox 6"/>
           <p:cNvSpPr txBox="1"/>
           <p:nvPr/>
         </p:nvSpPr>
         <p:spPr>
           <a:xfrm>
-            <a:off x="914400" y="2834640"/>
-            <a:ext cx="3017520" cy="3200400"/>
+            <a:off x="1097280" y="2103120"/>
+            <a:ext cx="1645920" cy="1463040"/>
+          </a:xfrm>
+          <a:prstGeom prst="rect">
+            <a:avLst/>
+          </a:prstGeom>
+          <a:noFill/>
+        </p:spPr>
+        <p:txBody>
+          <a:bodyPr wrap="none" lIns="0" tIns="0" rIns="0" bIns="0">
+            <a:spAutoFit/>
+          </a:bodyPr>
+          <a:lstStyle/>
+          <a:p>
+            <a:pPr>
+              <a:defRPr sz="3000" b="1">
+                <a:solidFill>
+                  <a:srgbClr val="059669"/>
+                </a:solidFill>
+              </a:defRPr>
+            </a:pPr>
+            <a:r>
+              <a:t>2.5M+</a:t>
+            </a:r>
+          </a:p>
+        </p:txBody>
+      </p:sp>
+      <p:sp>
+        <p:nvSpPr>
+          <p:cNvPr id="8" name="TextBox 7"/>
+          <p:cNvSpPr txBox="1"/>
+          <p:nvPr/>
+        </p:nvSpPr>
+        <p:spPr>
+          <a:xfrm>
+            <a:off x="2651760" y="2103120"/>
+            <a:ext cx="3017520" cy="1463040"/>
           </a:xfrm>
           <a:prstGeom prst="rect">
             <a:avLst/>
@@ -7580,75 +5946,42 @@
           <a:p>
             <a:pPr>
               <a:spcAft>
-                <a:spcPts val="800"/>
+                <a:spcPts val="400"/>
               </a:spcAft>
+              <a:defRPr sz="1400" b="1">
+                <a:solidFill>
+                  <a:srgbClr val="0F172A"/>
+                </a:solidFill>
+              </a:defRPr>
+            </a:pPr>
+            <a:r>
+              <a:t>Organic Creator Impressions</a:t>
+            </a:r>
+          </a:p>
+          <a:p>
+            <a:pPr>
               <a:defRPr sz="1100">
                 <a:solidFill>
-                  <a:srgbClr val="1E293B"/>
-                </a:solidFill>
-              </a:defRPr>
-            </a:pPr>
-            <a:r>
-              <a:t>✔ Native C++ / CUDA / Apple Metal (MSL) visual compute engine.</a:t>
-            </a:r>
-          </a:p>
-          <a:p>
-            <a:pPr>
-              <a:spcAft>
-                <a:spcPts val="800"/>
-              </a:spcAft>
-              <a:defRPr sz="1100">
-                <a:solidFill>
-                  <a:srgbClr val="1E293B"/>
-                </a:solidFill>
-              </a:defRPr>
-            </a:pPr>
-            <a:r>
-              <a:t>✔ Embedded neural depth estimation (ONNX Runtime) computing real-time volumetric atmospheric scattering.</a:t>
-            </a:r>
-          </a:p>
-          <a:p>
-            <a:pPr>
-              <a:spcAft>
-                <a:spcPts val="800"/>
-              </a:spcAft>
-              <a:defRPr sz="1100">
-                <a:solidFill>
-                  <a:srgbClr val="1E293B"/>
-                </a:solidFill>
-              </a:defRPr>
-            </a:pPr>
-            <a:r>
-              <a:t>✔ Strict Hollywood ACEScc color science &amp; 12-bit DPX sensor support.</a:t>
-            </a:r>
-          </a:p>
-          <a:p>
-            <a:pPr>
-              <a:spcAft>
-                <a:spcPts val="800"/>
-              </a:spcAft>
-              <a:defRPr sz="1100">
-                <a:solidFill>
-                  <a:srgbClr val="1E293B"/>
-                </a:solidFill>
-              </a:defRPr>
-            </a:pPr>
-            <a:r>
-              <a:t>✔ 100% real-time on-device GPU execution with zero cloud latency.</a:t>
-            </a:r>
-          </a:p>
-        </p:txBody>
-      </p:sp>
-      <p:sp>
-        <p:nvSpPr>
-          <p:cNvPr id="10" name="Rounded Rectangle 9"/>
+                  <a:srgbClr val="334155"/>
+                </a:solidFill>
+              </a:defRPr>
+            </a:pPr>
+            <a:r>
+              <a:t>Driven across active creative channels (@hrlpremiumstudio, @hrlefx) with proven viral retention.</a:t>
+            </a:r>
+          </a:p>
+        </p:txBody>
+      </p:sp>
+      <p:sp>
+        <p:nvSpPr>
+          <p:cNvPr id="9" name="Rounded Rectangle 8"/>
           <p:cNvSpPr/>
           <p:nvPr/>
         </p:nvSpPr>
         <p:spPr>
           <a:xfrm>
-            <a:off x="4398264" y="1737360"/>
-            <a:ext cx="3383280" cy="4480560"/>
+            <a:off x="6263640" y="1828800"/>
+            <a:ext cx="5120640" cy="2011680"/>
           </a:xfrm>
           <a:prstGeom prst="roundRect">
             <a:avLst/>
@@ -7686,78 +6019,49 @@
       </p:sp>
       <p:sp>
         <p:nvSpPr>
-          <p:cNvPr id="11" name="Rounded Rectangle 10"/>
-          <p:cNvSpPr/>
-          <p:nvPr/>
-        </p:nvSpPr>
-        <p:spPr>
-          <a:xfrm>
-            <a:off x="4581144" y="1920240"/>
-            <a:ext cx="3017520" cy="777240"/>
-          </a:xfrm>
-          <a:prstGeom prst="roundRect">
-            <a:avLst/>
-          </a:prstGeom>
-          <a:solidFill>
-            <a:srgbClr val="059669"/>
-          </a:solidFill>
-          <a:ln>
-            <a:noFill/>
-          </a:ln>
-        </p:spPr>
-        <p:style>
-          <a:lnRef idx="1">
-            <a:schemeClr val="accent1"/>
-          </a:lnRef>
-          <a:fillRef idx="3">
-            <a:schemeClr val="accent1"/>
-          </a:fillRef>
-          <a:effectRef idx="2">
-            <a:schemeClr val="accent1"/>
-          </a:effectRef>
-          <a:fontRef idx="minor">
-            <a:schemeClr val="lt1"/>
-          </a:fontRef>
-        </p:style>
-        <p:txBody>
-          <a:bodyPr rtlCol="0" anchor="ctr" wrap="square"/>
-          <a:lstStyle/>
-          <a:p>
-            <a:pPr algn="ctr">
-              <a:defRPr sz="1300" b="1">
-                <a:solidFill>
-                  <a:srgbClr val="FFFFFF"/>
-                </a:solidFill>
-              </a:defRPr>
-            </a:pPr>
-            <a:r>
-              <a:t>InvigiMatrix</a:t>
-            </a:r>
-          </a:p>
-          <a:p>
-            <a:pPr algn="ctr">
-              <a:defRPr sz="950">
-                <a:solidFill>
-                  <a:srgbClr val="E0E7FF"/>
-                </a:solidFill>
-              </a:defRPr>
-            </a:pPr>
-            <a:r>
-              <a:t>Institutional Optimization Platform</a:t>
-            </a:r>
-          </a:p>
-        </p:txBody>
-      </p:sp>
-      <p:sp>
-        <p:nvSpPr>
-          <p:cNvPr id="12" name="TextBox 11"/>
+          <p:cNvPr id="10" name="TextBox 9"/>
           <p:cNvSpPr txBox="1"/>
           <p:nvPr/>
         </p:nvSpPr>
         <p:spPr>
           <a:xfrm>
-            <a:off x="4581144" y="2834640"/>
-            <a:ext cx="3017520" cy="3200400"/>
+            <a:off x="6537960" y="2103120"/>
+            <a:ext cx="1645920" cy="1463040"/>
+          </a:xfrm>
+          <a:prstGeom prst="rect">
+            <a:avLst/>
+          </a:prstGeom>
+          <a:noFill/>
+        </p:spPr>
+        <p:txBody>
+          <a:bodyPr wrap="none" lIns="0" tIns="0" rIns="0" bIns="0">
+            <a:spAutoFit/>
+          </a:bodyPr>
+          <a:lstStyle/>
+          <a:p>
+            <a:pPr>
+              <a:defRPr sz="3000" b="1">
+                <a:solidFill>
+                  <a:srgbClr val="2563EB"/>
+                </a:solidFill>
+              </a:defRPr>
+            </a:pPr>
+            <a:r>
+              <a:t>100+</a:t>
+            </a:r>
+          </a:p>
+        </p:txBody>
+      </p:sp>
+      <p:sp>
+        <p:nvSpPr>
+          <p:cNvPr id="11" name="TextBox 10"/>
+          <p:cNvSpPr txBox="1"/>
+          <p:nvPr/>
+        </p:nvSpPr>
+        <p:spPr>
+          <a:xfrm>
+            <a:off x="8092440" y="2103120"/>
+            <a:ext cx="3017520" cy="1463040"/>
           </a:xfrm>
           <a:prstGeom prst="rect">
             <a:avLst/>
@@ -7772,75 +6076,42 @@
           <a:p>
             <a:pPr>
               <a:spcAft>
-                <a:spcPts val="800"/>
+                <a:spcPts val="400"/>
               </a:spcAft>
+              <a:defRPr sz="1400" b="1">
+                <a:solidFill>
+                  <a:srgbClr val="0F172A"/>
+                </a:solidFill>
+              </a:defRPr>
+            </a:pPr>
+            <a:r>
+              <a:t>Institutional Users Deployed</a:t>
+            </a:r>
+          </a:p>
+          <a:p>
+            <a:pPr>
               <a:defRPr sz="1100">
                 <a:solidFill>
-                  <a:srgbClr val="1E293B"/>
-                </a:solidFill>
-              </a:defRPr>
-            </a:pPr>
-            <a:r>
-              <a:t>✔ Combinatorial NP-hard Constraint Satisfaction Problem (CSP) solver.</a:t>
-            </a:r>
-          </a:p>
-          <a:p>
-            <a:pPr>
-              <a:spcAft>
-                <a:spcPts val="800"/>
-              </a:spcAft>
-              <a:defRPr sz="1100">
-                <a:solidFill>
-                  <a:srgbClr val="1E293B"/>
-                </a:solidFill>
-              </a:defRPr>
-            </a:pPr>
-            <a:r>
-              <a:t>✔ AI/ML Smart Batch Planner with dynamic K-Means clustering (k=3) &amp; Bayesian classifier for anti-cheating.</a:t>
-            </a:r>
-          </a:p>
-          <a:p>
-            <a:pPr>
-              <a:spcAft>
-                <a:spcPts val="800"/>
-              </a:spcAft>
-              <a:defRPr sz="1100">
-                <a:solidFill>
-                  <a:srgbClr val="1E293B"/>
-                </a:solidFill>
-              </a:defRPr>
-            </a:pPr>
-            <a:r>
-              <a:t>✔ Zero-framework native Node.js + SQLite ACID-compliant architecture.</a:t>
-            </a:r>
-          </a:p>
-          <a:p>
-            <a:pPr>
-              <a:spcAft>
-                <a:spcPts val="800"/>
-              </a:spcAft>
-              <a:defRPr sz="1100">
-                <a:solidFill>
-                  <a:srgbClr val="1E293B"/>
-                </a:solidFill>
-              </a:defRPr>
-            </a:pPr>
-            <a:r>
-              <a:t>✔ Live deployment at Sahyadri College (SCEM) for 100+ faculty.</a:t>
-            </a:r>
-          </a:p>
-        </p:txBody>
-      </p:sp>
-      <p:sp>
-        <p:nvSpPr>
-          <p:cNvPr id="13" name="Rounded Rectangle 12"/>
+                  <a:srgbClr val="334155"/>
+                </a:solidFill>
+              </a:defRPr>
+            </a:pPr>
+            <a:r>
+              <a:t>Live exam scheduling and batch allocation solver deployed and running at Sahyadri College (SCEM).</a:t>
+            </a:r>
+          </a:p>
+        </p:txBody>
+      </p:sp>
+      <p:sp>
+        <p:nvSpPr>
+          <p:cNvPr id="12" name="Rounded Rectangle 11"/>
           <p:cNvSpPr/>
           <p:nvPr/>
         </p:nvSpPr>
         <p:spPr>
           <a:xfrm>
-            <a:off x="8065008" y="1737360"/>
-            <a:ext cx="3383280" cy="4480560"/>
+            <a:off x="822960" y="4114800"/>
+            <a:ext cx="5120640" cy="2011680"/>
           </a:xfrm>
           <a:prstGeom prst="roundRect">
             <a:avLst/>
@@ -7878,23 +6149,110 @@
       </p:sp>
       <p:sp>
         <p:nvSpPr>
-          <p:cNvPr id="14" name="Rounded Rectangle 13"/>
+          <p:cNvPr id="13" name="TextBox 12"/>
+          <p:cNvSpPr txBox="1"/>
+          <p:nvPr/>
+        </p:nvSpPr>
+        <p:spPr>
+          <a:xfrm>
+            <a:off x="1097280" y="4389120"/>
+            <a:ext cx="1645920" cy="1463040"/>
+          </a:xfrm>
+          <a:prstGeom prst="rect">
+            <a:avLst/>
+          </a:prstGeom>
+          <a:noFill/>
+        </p:spPr>
+        <p:txBody>
+          <a:bodyPr wrap="none" lIns="0" tIns="0" rIns="0" bIns="0">
+            <a:spAutoFit/>
+          </a:bodyPr>
+          <a:lstStyle/>
+          <a:p>
+            <a:pPr>
+              <a:defRPr sz="3000" b="1">
+                <a:solidFill>
+                  <a:srgbClr val="7C3AED"/>
+                </a:solidFill>
+              </a:defRPr>
+            </a:pPr>
+            <a:r>
+              <a:t>100%</a:t>
+            </a:r>
+          </a:p>
+        </p:txBody>
+      </p:sp>
+      <p:sp>
+        <p:nvSpPr>
+          <p:cNvPr id="14" name="TextBox 13"/>
+          <p:cNvSpPr txBox="1"/>
+          <p:nvPr/>
+        </p:nvSpPr>
+        <p:spPr>
+          <a:xfrm>
+            <a:off x="2651760" y="4389120"/>
+            <a:ext cx="3017520" cy="1463040"/>
+          </a:xfrm>
+          <a:prstGeom prst="rect">
+            <a:avLst/>
+          </a:prstGeom>
+          <a:noFill/>
+        </p:spPr>
+        <p:txBody>
+          <a:bodyPr wrap="square" lIns="0" tIns="0" rIns="0" bIns="0">
+            <a:spAutoFit/>
+          </a:bodyPr>
+          <a:lstStyle/>
+          <a:p>
+            <a:pPr>
+              <a:spcAft>
+                <a:spcPts val="400"/>
+              </a:spcAft>
+              <a:defRPr sz="1400" b="1">
+                <a:solidFill>
+                  <a:srgbClr val="0F172A"/>
+                </a:solidFill>
+              </a:defRPr>
+            </a:pPr>
+            <a:r>
+              <a:t>Certified Technical Standards</a:t>
+            </a:r>
+          </a:p>
+          <a:p>
+            <a:pPr>
+              <a:defRPr sz="1100">
+                <a:solidFill>
+                  <a:srgbClr val="334155"/>
+                </a:solidFill>
+              </a:defRPr>
+            </a:pPr>
+            <a:r>
+              <a:t>Certified by Blackmagic Design (DaVinci Resolve), JPMorgan Chase (Systems), and Deloitte (Cyber).</a:t>
+            </a:r>
+          </a:p>
+        </p:txBody>
+      </p:sp>
+      <p:sp>
+        <p:nvSpPr>
+          <p:cNvPr id="15" name="Rounded Rectangle 14"/>
           <p:cNvSpPr/>
           <p:nvPr/>
         </p:nvSpPr>
         <p:spPr>
           <a:xfrm>
-            <a:off x="8247888" y="1920240"/>
-            <a:ext cx="3017520" cy="777240"/>
+            <a:off x="6263640" y="4114800"/>
+            <a:ext cx="5120640" cy="2011680"/>
           </a:xfrm>
           <a:prstGeom prst="roundRect">
             <a:avLst/>
           </a:prstGeom>
           <a:solidFill>
-            <a:srgbClr val="4F46E5"/>
+            <a:srgbClr val="F8FAFC"/>
           </a:solidFill>
-          <a:ln>
-            <a:noFill/>
+          <a:ln w="12700">
+            <a:solidFill>
+              <a:srgbClr val="E2E8F0"/>
+            </a:solidFill>
           </a:ln>
         </p:spPr>
         <p:style>
@@ -7912,44 +6270,58 @@
           </a:fontRef>
         </p:style>
         <p:txBody>
-          <a:bodyPr rtlCol="0" anchor="ctr" wrap="square"/>
-          <a:lstStyle/>
-          <a:p>
-            <a:pPr algn="ctr">
-              <a:defRPr sz="1300" b="1">
-                <a:solidFill>
-                  <a:srgbClr val="FFFFFF"/>
-                </a:solidFill>
-              </a:defRPr>
-            </a:pPr>
-            <a:r>
-              <a:t>OmniTransform AI</a:t>
-            </a:r>
-          </a:p>
-          <a:p>
-            <a:pPr algn="ctr">
-              <a:defRPr sz="950">
-                <a:solidFill>
-                  <a:srgbClr val="E0E7FF"/>
-                </a:solidFill>
-              </a:defRPr>
-            </a:pPr>
-            <a:r>
-              <a:t>Autonomous Agentic Media Studio</a:t>
-            </a:r>
-          </a:p>
-        </p:txBody>
-      </p:sp>
-      <p:sp>
-        <p:nvSpPr>
-          <p:cNvPr id="15" name="TextBox 14"/>
+          <a:bodyPr rtlCol="0" anchor="ctr"/>
+          <a:lstStyle/>
+          <a:p>
+            <a:pPr algn="ctr"/>
+          </a:p>
+        </p:txBody>
+      </p:sp>
+      <p:sp>
+        <p:nvSpPr>
+          <p:cNvPr id="16" name="TextBox 15"/>
           <p:cNvSpPr txBox="1"/>
           <p:nvPr/>
         </p:nvSpPr>
         <p:spPr>
           <a:xfrm>
-            <a:off x="8247888" y="2834640"/>
-            <a:ext cx="3017520" cy="3200400"/>
+            <a:off x="6537960" y="4389120"/>
+            <a:ext cx="1645920" cy="1463040"/>
+          </a:xfrm>
+          <a:prstGeom prst="rect">
+            <a:avLst/>
+          </a:prstGeom>
+          <a:noFill/>
+        </p:spPr>
+        <p:txBody>
+          <a:bodyPr wrap="none" lIns="0" tIns="0" rIns="0" bIns="0">
+            <a:spAutoFit/>
+          </a:bodyPr>
+          <a:lstStyle/>
+          <a:p>
+            <a:pPr>
+              <a:defRPr sz="3000" b="1">
+                <a:solidFill>
+                  <a:srgbClr val="D97706"/>
+                </a:solidFill>
+              </a:defRPr>
+            </a:pPr>
+            <a:r>
+              <a:t>0 ms</a:t>
+            </a:r>
+          </a:p>
+        </p:txBody>
+      </p:sp>
+      <p:sp>
+        <p:nvSpPr>
+          <p:cNvPr id="17" name="TextBox 16"/>
+          <p:cNvSpPr txBox="1"/>
+          <p:nvPr/>
+        </p:nvSpPr>
+        <p:spPr>
+          <a:xfrm>
+            <a:off x="8092440" y="4389120"/>
+            <a:ext cx="3017520" cy="1463040"/>
           </a:xfrm>
           <a:prstGeom prst="rect">
             <a:avLst/>
@@ -7964,61 +6336,28 @@
           <a:p>
             <a:pPr>
               <a:spcAft>
-                <a:spcPts val="800"/>
+                <a:spcPts val="400"/>
               </a:spcAft>
+              <a:defRPr sz="1400" b="1">
+                <a:solidFill>
+                  <a:srgbClr val="0F172A"/>
+                </a:solidFill>
+              </a:defRPr>
+            </a:pPr>
+            <a:r>
+              <a:t>Cloud Rendering Latency</a:t>
+            </a:r>
+          </a:p>
+          <a:p>
+            <a:pPr>
               <a:defRPr sz="1100">
                 <a:solidFill>
-                  <a:srgbClr val="1E293B"/>
-                </a:solidFill>
-              </a:defRPr>
-            </a:pPr>
-            <a:r>
-              <a:t>✔ Sub-75ms streaming neural voice synthesis (ElevenLabs integration).</a:t>
-            </a:r>
-          </a:p>
-          <a:p>
-            <a:pPr>
-              <a:spcAft>
-                <a:spcPts val="800"/>
-              </a:spcAft>
-              <a:defRPr sz="1100">
-                <a:solidFill>
-                  <a:srgbClr val="1E293B"/>
-                </a:solidFill>
-              </a:defRPr>
-            </a:pPr>
-            <a:r>
-              <a:t>✔ Multi-agent autonomous fleet automating timeline sequencing, audio resonance, and syndication.</a:t>
-            </a:r>
-          </a:p>
-          <a:p>
-            <a:pPr>
-              <a:spcAft>
-                <a:spcPts val="800"/>
-              </a:spcAft>
-              <a:defRPr sz="1100">
-                <a:solidFill>
-                  <a:srgbClr val="1E293B"/>
-                </a:solidFill>
-              </a:defRPr>
-            </a:pPr>
-            <a:r>
-              <a:t>✔ High-throughput REST API controllers &amp; distributed stream architecture.</a:t>
-            </a:r>
-          </a:p>
-          <a:p>
-            <a:pPr>
-              <a:spcAft>
-                <a:spcPts val="800"/>
-              </a:spcAft>
-              <a:defRPr sz="1100">
-                <a:solidFill>
-                  <a:srgbClr val="1E293B"/>
-                </a:solidFill>
-              </a:defRPr>
-            </a:pPr>
-            <a:r>
-              <a:t>✔ Built-in client-side code security and reverse-engineering shields.</a:t>
+                  <a:srgbClr val="334155"/>
+                </a:solidFill>
+              </a:defRPr>
+            </a:pPr>
+            <a:r>
+              <a:t>100% on-device GPU acceleration delivering real-time 4K 60FPS execution with zero server cost.</a:t>
             </a:r>
           </a:p>
         </p:txBody>
@@ -8092,8 +6431,8 @@
         </p:nvSpPr>
         <p:spPr>
           <a:xfrm>
-            <a:off x="731520" y="411480"/>
-            <a:ext cx="10728655" cy="274320"/>
+            <a:off x="822960" y="457200"/>
+            <a:ext cx="10515600" cy="274320"/>
           </a:xfrm>
           <a:prstGeom prst="rect">
             <a:avLst/>
@@ -8115,7 +6454,7 @@
               </a:defRPr>
             </a:pPr>
             <a:r>
-              <a:t>DEEP-TECH EXCELLENCE</a:t>
+              <a:t>MARKET POTENTIAL</a:t>
             </a:r>
           </a:p>
         </p:txBody>
@@ -8128,8 +6467,8 @@
         </p:nvSpPr>
         <p:spPr>
           <a:xfrm>
-            <a:off x="731520" y="685800"/>
-            <a:ext cx="10728655" cy="548640"/>
+            <a:off x="822960" y="731520"/>
+            <a:ext cx="10515600" cy="548640"/>
           </a:xfrm>
           <a:prstGeom prst="rect">
             <a:avLst/>
@@ -8151,7 +6490,7 @@
               </a:defRPr>
             </a:pPr>
             <a:r>
-              <a:t>Technical Architecture &amp; Core Innovation</a:t>
+              <a:t>Market Opportunity — Sizing &amp; Expansion</a:t>
             </a:r>
           </a:p>
         </p:txBody>
@@ -8164,8 +6503,8 @@
         </p:nvSpPr>
         <p:spPr>
           <a:xfrm>
-            <a:off x="731520" y="1234440"/>
-            <a:ext cx="10728655" cy="320040"/>
+            <a:off x="822960" y="1280160"/>
+            <a:ext cx="10515600" cy="274320"/>
           </a:xfrm>
           <a:prstGeom prst="rect">
             <a:avLst/>
@@ -8187,64 +6526,21 @@
               </a:defRPr>
             </a:pPr>
             <a:r>
-              <a:t>Direct GPU-level execution combined with certified color science and enterprise security.</a:t>
-            </a:r>
-          </a:p>
-        </p:txBody>
-      </p:sp>
-      <p:sp>
-        <p:nvSpPr>
-          <p:cNvPr id="6" name="Rectangle 5"/>
+              <a:t>Positioned at the intersection of the creator economy and high-growth Indian AVGC.</a:t>
+            </a:r>
+          </a:p>
+        </p:txBody>
+      </p:sp>
+      <p:sp>
+        <p:nvSpPr>
+          <p:cNvPr id="6" name="Rounded Rectangle 5"/>
           <p:cNvSpPr/>
           <p:nvPr/>
         </p:nvSpPr>
         <p:spPr>
           <a:xfrm>
-            <a:off x="731520" y="1572768"/>
-            <a:ext cx="10728655" cy="13716"/>
-          </a:xfrm>
-          <a:prstGeom prst="rect">
-            <a:avLst/>
-          </a:prstGeom>
-          <a:solidFill>
-            <a:srgbClr val="E2E8F0"/>
-          </a:solidFill>
-          <a:ln>
-            <a:noFill/>
-          </a:ln>
-        </p:spPr>
-        <p:style>
-          <a:lnRef idx="1">
-            <a:schemeClr val="accent1"/>
-          </a:lnRef>
-          <a:fillRef idx="3">
-            <a:schemeClr val="accent1"/>
-          </a:fillRef>
-          <a:effectRef idx="2">
-            <a:schemeClr val="accent1"/>
-          </a:effectRef>
-          <a:fontRef idx="minor">
-            <a:schemeClr val="lt1"/>
-          </a:fontRef>
-        </p:style>
-        <p:txBody>
-          <a:bodyPr rtlCol="0" anchor="ctr"/>
-          <a:lstStyle/>
-          <a:p>
-            <a:pPr algn="ctr"/>
-          </a:p>
-        </p:txBody>
-      </p:sp>
-      <p:sp>
-        <p:nvSpPr>
-          <p:cNvPr id="7" name="Rounded Rectangle 6"/>
-          <p:cNvSpPr/>
-          <p:nvPr/>
-        </p:nvSpPr>
-        <p:spPr>
-          <a:xfrm>
-            <a:off x="731520" y="1737360"/>
-            <a:ext cx="5212080" cy="1371600"/>
+            <a:off x="822960" y="1828800"/>
+            <a:ext cx="3291840" cy="4297680"/>
           </a:xfrm>
           <a:prstGeom prst="roundRect">
             <a:avLst/>
@@ -8282,14 +6578,66 @@
       </p:sp>
       <p:sp>
         <p:nvSpPr>
+          <p:cNvPr id="7" name="Rounded Rectangle 6"/>
+          <p:cNvSpPr/>
+          <p:nvPr/>
+        </p:nvSpPr>
+        <p:spPr>
+          <a:xfrm>
+            <a:off x="1051560" y="2011680"/>
+            <a:ext cx="822960" cy="320040"/>
+          </a:xfrm>
+          <a:prstGeom prst="roundRect">
+            <a:avLst/>
+          </a:prstGeom>
+          <a:solidFill>
+            <a:srgbClr val="2563EB"/>
+          </a:solidFill>
+          <a:ln>
+            <a:noFill/>
+          </a:ln>
+        </p:spPr>
+        <p:style>
+          <a:lnRef idx="1">
+            <a:schemeClr val="accent1"/>
+          </a:lnRef>
+          <a:fillRef idx="3">
+            <a:schemeClr val="accent1"/>
+          </a:fillRef>
+          <a:effectRef idx="2">
+            <a:schemeClr val="accent1"/>
+          </a:effectRef>
+          <a:fontRef idx="minor">
+            <a:schemeClr val="lt1"/>
+          </a:fontRef>
+        </p:style>
+        <p:txBody>
+          <a:bodyPr rtlCol="0" anchor="ctr"/>
+          <a:lstStyle/>
+          <a:p>
+            <a:pPr algn="ctr">
+              <a:defRPr sz="1100" b="1">
+                <a:solidFill>
+                  <a:srgbClr val="FFFFFF"/>
+                </a:solidFill>
+              </a:defRPr>
+            </a:pPr>
+            <a:r>
+              <a:t>TAM</a:t>
+            </a:r>
+          </a:p>
+        </p:txBody>
+      </p:sp>
+      <p:sp>
+        <p:nvSpPr>
           <p:cNvPr id="8" name="TextBox 7"/>
           <p:cNvSpPr txBox="1"/>
           <p:nvPr/>
         </p:nvSpPr>
         <p:spPr>
           <a:xfrm>
-            <a:off x="914400" y="1847088"/>
-            <a:ext cx="4846320" cy="1143000"/>
+            <a:off x="1051560" y="2468880"/>
+            <a:ext cx="2834640" cy="822960"/>
           </a:xfrm>
           <a:prstGeom prst="rect">
             <a:avLst/>
@@ -8303,55 +6651,151 @@
           <a:lstStyle/>
           <a:p>
             <a:pPr>
-              <a:defRPr sz="1200" b="1">
+              <a:defRPr sz="2600" b="1">
+                <a:solidFill>
+                  <a:srgbClr val="0F172A"/>
+                </a:solidFill>
+              </a:defRPr>
+            </a:pPr>
+            <a:r>
+              <a:t>$250 Billion+</a:t>
+            </a:r>
+          </a:p>
+          <a:p>
+            <a:pPr>
+              <a:defRPr sz="1100" b="1">
                 <a:solidFill>
                   <a:srgbClr val="2563EB"/>
                 </a:solidFill>
               </a:defRPr>
             </a:pPr>
             <a:r>
-              <a:t>Layer 1: Low-Level GPU Compute Core</a:t>
-            </a:r>
-          </a:p>
+              <a:t>Global Creator &amp; Video Market</a:t>
+            </a:r>
+          </a:p>
+        </p:txBody>
+      </p:sp>
+      <p:sp>
+        <p:nvSpPr>
+          <p:cNvPr id="9" name="Rectangle 8"/>
+          <p:cNvSpPr/>
+          <p:nvPr/>
+        </p:nvSpPr>
+        <p:spPr>
+          <a:xfrm>
+            <a:off x="1051560" y="3474720"/>
+            <a:ext cx="2834640" cy="13716"/>
+          </a:xfrm>
+          <a:prstGeom prst="rect">
+            <a:avLst/>
+          </a:prstGeom>
+          <a:solidFill>
+            <a:srgbClr val="E2E8F0"/>
+          </a:solidFill>
+          <a:ln>
+            <a:noFill/>
+          </a:ln>
+        </p:spPr>
+        <p:style>
+          <a:lnRef idx="1">
+            <a:schemeClr val="accent1"/>
+          </a:lnRef>
+          <a:fillRef idx="3">
+            <a:schemeClr val="accent1"/>
+          </a:fillRef>
+          <a:effectRef idx="2">
+            <a:schemeClr val="accent1"/>
+          </a:effectRef>
+          <a:fontRef idx="minor">
+            <a:schemeClr val="lt1"/>
+          </a:fontRef>
+        </p:style>
+        <p:txBody>
+          <a:bodyPr rtlCol="0" anchor="ctr"/>
+          <a:lstStyle/>
+          <a:p>
+            <a:pPr algn="ctr"/>
+          </a:p>
+        </p:txBody>
+      </p:sp>
+      <p:sp>
+        <p:nvSpPr>
+          <p:cNvPr id="10" name="TextBox 9"/>
+          <p:cNvSpPr txBox="1"/>
+          <p:nvPr/>
+        </p:nvSpPr>
+        <p:spPr>
+          <a:xfrm>
+            <a:off x="1051560" y="3657600"/>
+            <a:ext cx="2834640" cy="2286000"/>
+          </a:xfrm>
+          <a:prstGeom prst="rect">
+            <a:avLst/>
+          </a:prstGeom>
+          <a:noFill/>
+        </p:spPr>
+        <p:txBody>
+          <a:bodyPr wrap="square" lIns="0" tIns="0" rIns="0" bIns="0">
+            <a:spAutoFit/>
+          </a:bodyPr>
+          <a:lstStyle/>
           <a:p>
             <a:pPr>
               <a:spcAft>
-                <a:spcPts val="200"/>
+                <a:spcPts val="1000"/>
               </a:spcAft>
-              <a:defRPr sz="1000" b="1">
-                <a:solidFill>
-                  <a:srgbClr val="0F172A"/>
-                </a:solidFill>
-              </a:defRPr>
-            </a:pPr>
-            <a:r>
-              <a:t>C++17/20, Apple Metal Shading Language (MSL), NVIDIA CUDA</a:t>
-            </a:r>
-          </a:p>
-          <a:p>
-            <a:pPr>
-              <a:defRPr sz="950">
-                <a:solidFill>
-                  <a:srgbClr val="1E293B"/>
-                </a:solidFill>
-              </a:defRPr>
-            </a:pPr>
-            <a:r>
-              <a:t>Direct hardware acceleration on Apple Silicon &amp; NVIDIA GPUs delivering 4K 60FPS real-time rendering without dropping frames.</a:t>
-            </a:r>
-          </a:p>
-        </p:txBody>
-      </p:sp>
-      <p:sp>
-        <p:nvSpPr>
-          <p:cNvPr id="9" name="Rounded Rectangle 8"/>
+              <a:defRPr sz="1200">
+                <a:solidFill>
+                  <a:srgbClr val="334155"/>
+                </a:solidFill>
+              </a:defRPr>
+            </a:pPr>
+            <a:r>
+              <a:t>• 50M+ digital content creators worldwide.</a:t>
+            </a:r>
+          </a:p>
+          <a:p>
+            <a:pPr>
+              <a:spcAft>
+                <a:spcPts val="1000"/>
+              </a:spcAft>
+              <a:defRPr sz="1200">
+                <a:solidFill>
+                  <a:srgbClr val="334155"/>
+                </a:solidFill>
+              </a:defRPr>
+            </a:pPr>
+            <a:r>
+              <a:t>• $40B+ post-production &amp; plugin software sector.</a:t>
+            </a:r>
+          </a:p>
+          <a:p>
+            <a:pPr>
+              <a:spcAft>
+                <a:spcPts val="1000"/>
+              </a:spcAft>
+              <a:defRPr sz="1200">
+                <a:solidFill>
+                  <a:srgbClr val="334155"/>
+                </a:solidFill>
+              </a:defRPr>
+            </a:pPr>
+            <a:r>
+              <a:t>• Surge in demand for 4K 60FPS cinematic video.</a:t>
+            </a:r>
+          </a:p>
+        </p:txBody>
+      </p:sp>
+      <p:sp>
+        <p:nvSpPr>
+          <p:cNvPr id="11" name="Rounded Rectangle 10"/>
           <p:cNvSpPr/>
           <p:nvPr/>
         </p:nvSpPr>
         <p:spPr>
           <a:xfrm>
-            <a:off x="731520" y="3246120"/>
-            <a:ext cx="5212080" cy="1371600"/>
+            <a:off x="4434840" y="1828800"/>
+            <a:ext cx="3291840" cy="4297680"/>
           </a:xfrm>
           <a:prstGeom prst="roundRect">
             <a:avLst/>
@@ -8389,14 +6833,66 @@
       </p:sp>
       <p:sp>
         <p:nvSpPr>
-          <p:cNvPr id="10" name="TextBox 9"/>
+          <p:cNvPr id="12" name="Rounded Rectangle 11"/>
+          <p:cNvSpPr/>
+          <p:nvPr/>
+        </p:nvSpPr>
+        <p:spPr>
+          <a:xfrm>
+            <a:off x="4663440" y="2011680"/>
+            <a:ext cx="822960" cy="320040"/>
+          </a:xfrm>
+          <a:prstGeom prst="roundRect">
+            <a:avLst/>
+          </a:prstGeom>
+          <a:solidFill>
+            <a:srgbClr val="059669"/>
+          </a:solidFill>
+          <a:ln>
+            <a:noFill/>
+          </a:ln>
+        </p:spPr>
+        <p:style>
+          <a:lnRef idx="1">
+            <a:schemeClr val="accent1"/>
+          </a:lnRef>
+          <a:fillRef idx="3">
+            <a:schemeClr val="accent1"/>
+          </a:fillRef>
+          <a:effectRef idx="2">
+            <a:schemeClr val="accent1"/>
+          </a:effectRef>
+          <a:fontRef idx="minor">
+            <a:schemeClr val="lt1"/>
+          </a:fontRef>
+        </p:style>
+        <p:txBody>
+          <a:bodyPr rtlCol="0" anchor="ctr"/>
+          <a:lstStyle/>
+          <a:p>
+            <a:pPr algn="ctr">
+              <a:defRPr sz="1100" b="1">
+                <a:solidFill>
+                  <a:srgbClr val="FFFFFF"/>
+                </a:solidFill>
+              </a:defRPr>
+            </a:pPr>
+            <a:r>
+              <a:t>SAM</a:t>
+            </a:r>
+          </a:p>
+        </p:txBody>
+      </p:sp>
+      <p:sp>
+        <p:nvSpPr>
+          <p:cNvPr id="13" name="TextBox 12"/>
           <p:cNvSpPr txBox="1"/>
           <p:nvPr/>
         </p:nvSpPr>
         <p:spPr>
           <a:xfrm>
-            <a:off x="914400" y="3355848"/>
-            <a:ext cx="4846320" cy="1143000"/>
+            <a:off x="4663440" y="2468880"/>
+            <a:ext cx="2834640" cy="822960"/>
           </a:xfrm>
           <a:prstGeom prst="rect">
             <a:avLst/>
@@ -8410,55 +6906,151 @@
           <a:lstStyle/>
           <a:p>
             <a:pPr>
-              <a:defRPr sz="1200" b="1">
-                <a:solidFill>
-                  <a:srgbClr val="2563EB"/>
-                </a:solidFill>
-              </a:defRPr>
-            </a:pPr>
-            <a:r>
-              <a:t>Layer 2: On-Device AI Neural Inference</a:t>
-            </a:r>
-          </a:p>
+              <a:defRPr sz="2600" b="1">
+                <a:solidFill>
+                  <a:srgbClr val="0F172A"/>
+                </a:solidFill>
+              </a:defRPr>
+            </a:pPr>
+            <a:r>
+              <a:t>$4.2 Billion</a:t>
+            </a:r>
+          </a:p>
+          <a:p>
+            <a:pPr>
+              <a:defRPr sz="1100" b="1">
+                <a:solidFill>
+                  <a:srgbClr val="059669"/>
+                </a:solidFill>
+              </a:defRPr>
+            </a:pPr>
+            <a:r>
+              <a:t>Indian AVGC &amp; Media Sector</a:t>
+            </a:r>
+          </a:p>
+        </p:txBody>
+      </p:sp>
+      <p:sp>
+        <p:nvSpPr>
+          <p:cNvPr id="14" name="Rectangle 13"/>
+          <p:cNvSpPr/>
+          <p:nvPr/>
+        </p:nvSpPr>
+        <p:spPr>
+          <a:xfrm>
+            <a:off x="4663440" y="3474720"/>
+            <a:ext cx="2834640" cy="13716"/>
+          </a:xfrm>
+          <a:prstGeom prst="rect">
+            <a:avLst/>
+          </a:prstGeom>
+          <a:solidFill>
+            <a:srgbClr val="E2E8F0"/>
+          </a:solidFill>
+          <a:ln>
+            <a:noFill/>
+          </a:ln>
+        </p:spPr>
+        <p:style>
+          <a:lnRef idx="1">
+            <a:schemeClr val="accent1"/>
+          </a:lnRef>
+          <a:fillRef idx="3">
+            <a:schemeClr val="accent1"/>
+          </a:fillRef>
+          <a:effectRef idx="2">
+            <a:schemeClr val="accent1"/>
+          </a:effectRef>
+          <a:fontRef idx="minor">
+            <a:schemeClr val="lt1"/>
+          </a:fontRef>
+        </p:style>
+        <p:txBody>
+          <a:bodyPr rtlCol="0" anchor="ctr"/>
+          <a:lstStyle/>
+          <a:p>
+            <a:pPr algn="ctr"/>
+          </a:p>
+        </p:txBody>
+      </p:sp>
+      <p:sp>
+        <p:nvSpPr>
+          <p:cNvPr id="15" name="TextBox 14"/>
+          <p:cNvSpPr txBox="1"/>
+          <p:nvPr/>
+        </p:nvSpPr>
+        <p:spPr>
+          <a:xfrm>
+            <a:off x="4663440" y="3657600"/>
+            <a:ext cx="2834640" cy="2286000"/>
+          </a:xfrm>
+          <a:prstGeom prst="rect">
+            <a:avLst/>
+          </a:prstGeom>
+          <a:noFill/>
+        </p:spPr>
+        <p:txBody>
+          <a:bodyPr wrap="square" lIns="0" tIns="0" rIns="0" bIns="0">
+            <a:spAutoFit/>
+          </a:bodyPr>
+          <a:lstStyle/>
           <a:p>
             <a:pPr>
               <a:spcAft>
-                <a:spcPts val="200"/>
+                <a:spcPts val="1000"/>
               </a:spcAft>
-              <a:defRPr sz="1000" b="1">
-                <a:solidFill>
-                  <a:srgbClr val="0F172A"/>
-                </a:solidFill>
-              </a:defRPr>
-            </a:pPr>
-            <a:r>
-              <a:t>Depth Anything AI, ONNX Runtime, Zero Cloud Dependency</a:t>
-            </a:r>
-          </a:p>
-          <a:p>
-            <a:pPr>
-              <a:defRPr sz="950">
-                <a:solidFill>
-                  <a:srgbClr val="1E293B"/>
-                </a:solidFill>
-              </a:defRPr>
-            </a:pPr>
-            <a:r>
-              <a:t>Computes monocular optical depth maps locally in milliseconds, applying physically accurate volumetric haze in 3D scene space.</a:t>
-            </a:r>
-          </a:p>
-        </p:txBody>
-      </p:sp>
-      <p:sp>
-        <p:nvSpPr>
-          <p:cNvPr id="11" name="Rounded Rectangle 10"/>
+              <a:defRPr sz="1200">
+                <a:solidFill>
+                  <a:srgbClr val="334155"/>
+                </a:solidFill>
+              </a:defRPr>
+            </a:pPr>
+            <a:r>
+              <a:t>• India's Animation, VFX &amp; Gaming ecosystem.</a:t>
+            </a:r>
+          </a:p>
+          <a:p>
+            <a:pPr>
+              <a:spcAft>
+                <a:spcPts val="1000"/>
+              </a:spcAft>
+              <a:defRPr sz="1200">
+                <a:solidFill>
+                  <a:srgbClr val="334155"/>
+                </a:solidFill>
+              </a:defRPr>
+            </a:pPr>
+            <a:r>
+              <a:t>• 1.5M+ active Indian digital video creators.</a:t>
+            </a:r>
+          </a:p>
+          <a:p>
+            <a:pPr>
+              <a:spcAft>
+                <a:spcPts val="1000"/>
+              </a:spcAft>
+              <a:defRPr sz="1200">
+                <a:solidFill>
+                  <a:srgbClr val="334155"/>
+                </a:solidFill>
+              </a:defRPr>
+            </a:pPr>
+            <a:r>
+              <a:t>• Rapidly expanding OTT and digital ad production.</a:t>
+            </a:r>
+          </a:p>
+        </p:txBody>
+      </p:sp>
+      <p:sp>
+        <p:nvSpPr>
+          <p:cNvPr id="16" name="Rounded Rectangle 15"/>
           <p:cNvSpPr/>
           <p:nvPr/>
         </p:nvSpPr>
         <p:spPr>
           <a:xfrm>
-            <a:off x="731520" y="4754880"/>
-            <a:ext cx="5212080" cy="1371600"/>
+            <a:off x="8046720" y="1828800"/>
+            <a:ext cx="3291840" cy="4297680"/>
           </a:xfrm>
           <a:prstGeom prst="roundRect">
             <a:avLst/>
@@ -8496,87 +7088,23 @@
       </p:sp>
       <p:sp>
         <p:nvSpPr>
-          <p:cNvPr id="12" name="TextBox 11"/>
-          <p:cNvSpPr txBox="1"/>
-          <p:nvPr/>
-        </p:nvSpPr>
-        <p:spPr>
-          <a:xfrm>
-            <a:off x="914400" y="4864608"/>
-            <a:ext cx="4846320" cy="1143000"/>
-          </a:xfrm>
-          <a:prstGeom prst="rect">
-            <a:avLst/>
-          </a:prstGeom>
-          <a:noFill/>
-        </p:spPr>
-        <p:txBody>
-          <a:bodyPr wrap="square" lIns="0" tIns="0" rIns="0" bIns="0">
-            <a:spAutoFit/>
-          </a:bodyPr>
-          <a:lstStyle/>
-          <a:p>
-            <a:pPr>
-              <a:defRPr sz="1200" b="1">
-                <a:solidFill>
-                  <a:srgbClr val="2563EB"/>
-                </a:solidFill>
-              </a:defRPr>
-            </a:pPr>
-            <a:r>
-              <a:t>Layer 3: Hollywood ACEScc Color Science</a:t>
-            </a:r>
-          </a:p>
-          <a:p>
-            <a:pPr>
-              <a:spcAft>
-                <a:spcPts val="200"/>
-              </a:spcAft>
-              <a:defRPr sz="1000" b="1">
-                <a:solidFill>
-                  <a:srgbClr val="0F172A"/>
-                </a:solidFill>
-              </a:defRPr>
-            </a:pPr>
-            <a:r>
-              <a:t>Blackmagic DaVinci Resolve 21 Certified Architecture</a:t>
-            </a:r>
-          </a:p>
-          <a:p>
-            <a:pPr>
-              <a:defRPr sz="950">
-                <a:solidFill>
-                  <a:srgbClr val="1E293B"/>
-                </a:solidFill>
-              </a:defRPr>
-            </a:pPr>
-            <a:r>
-              <a:t>Preserves uncompressed 12-bit DPX sensor data with wide-gamut ACEScc color science, eliminating clipping and banding.</a:t>
-            </a:r>
-          </a:p>
-        </p:txBody>
-      </p:sp>
-      <p:sp>
-        <p:nvSpPr>
-          <p:cNvPr id="13" name="Rounded Rectangle 12"/>
+          <p:cNvPr id="17" name="Rounded Rectangle 16"/>
           <p:cNvSpPr/>
           <p:nvPr/>
         </p:nvSpPr>
         <p:spPr>
           <a:xfrm>
-            <a:off x="6217920" y="1737360"/>
-            <a:ext cx="5212080" cy="4572000"/>
+            <a:off x="8275320" y="2011680"/>
+            <a:ext cx="822960" cy="320040"/>
           </a:xfrm>
           <a:prstGeom prst="roundRect">
             <a:avLst/>
           </a:prstGeom>
           <a:solidFill>
-            <a:srgbClr val="F8FAFC"/>
+            <a:srgbClr val="7C3AED"/>
           </a:solidFill>
-          <a:ln w="12700">
-            <a:solidFill>
-              <a:srgbClr val="E2E8F0"/>
-            </a:solidFill>
+          <a:ln>
+            <a:noFill/>
           </a:ln>
         </p:spPr>
         <p:style>
@@ -8597,20 +7125,29 @@
           <a:bodyPr rtlCol="0" anchor="ctr"/>
           <a:lstStyle/>
           <a:p>
-            <a:pPr algn="ctr"/>
-          </a:p>
-        </p:txBody>
-      </p:sp>
-      <p:sp>
-        <p:nvSpPr>
-          <p:cNvPr id="14" name="TextBox 13"/>
+            <a:pPr algn="ctr">
+              <a:defRPr sz="1100" b="1">
+                <a:solidFill>
+                  <a:srgbClr val="FFFFFF"/>
+                </a:solidFill>
+              </a:defRPr>
+            </a:pPr>
+            <a:r>
+              <a:t>SOM</a:t>
+            </a:r>
+          </a:p>
+        </p:txBody>
+      </p:sp>
+      <p:sp>
+        <p:nvSpPr>
+          <p:cNvPr id="18" name="TextBox 17"/>
           <p:cNvSpPr txBox="1"/>
           <p:nvPr/>
         </p:nvSpPr>
         <p:spPr>
           <a:xfrm>
-            <a:off x="6492240" y="1920240"/>
-            <a:ext cx="4663440" cy="4206240"/>
+            <a:off x="8275320" y="2468880"/>
+            <a:ext cx="2834640" cy="822960"/>
           </a:xfrm>
           <a:prstGeom prst="rect">
             <a:avLst/>
@@ -8624,137 +7161,137 @@
           <a:lstStyle/>
           <a:p>
             <a:pPr>
+              <a:defRPr sz="2600" b="1">
+                <a:solidFill>
+                  <a:srgbClr val="0F172A"/>
+                </a:solidFill>
+              </a:defRPr>
+            </a:pPr>
+            <a:r>
+              <a:t>₹120 Crore</a:t>
+            </a:r>
+          </a:p>
+          <a:p>
+            <a:pPr>
+              <a:defRPr sz="1100" b="1">
+                <a:solidFill>
+                  <a:srgbClr val="7C3AED"/>
+                </a:solidFill>
+              </a:defRPr>
+            </a:pPr>
+            <a:r>
+              <a:t>36-Month Addressable Target</a:t>
+            </a:r>
+          </a:p>
+        </p:txBody>
+      </p:sp>
+      <p:sp>
+        <p:nvSpPr>
+          <p:cNvPr id="19" name="Rectangle 18"/>
+          <p:cNvSpPr/>
+          <p:nvPr/>
+        </p:nvSpPr>
+        <p:spPr>
+          <a:xfrm>
+            <a:off x="8275320" y="3474720"/>
+            <a:ext cx="2834640" cy="13716"/>
+          </a:xfrm>
+          <a:prstGeom prst="rect">
+            <a:avLst/>
+          </a:prstGeom>
+          <a:solidFill>
+            <a:srgbClr val="E2E8F0"/>
+          </a:solidFill>
+          <a:ln>
+            <a:noFill/>
+          </a:ln>
+        </p:spPr>
+        <p:style>
+          <a:lnRef idx="1">
+            <a:schemeClr val="accent1"/>
+          </a:lnRef>
+          <a:fillRef idx="3">
+            <a:schemeClr val="accent1"/>
+          </a:fillRef>
+          <a:effectRef idx="2">
+            <a:schemeClr val="accent1"/>
+          </a:effectRef>
+          <a:fontRef idx="minor">
+            <a:schemeClr val="lt1"/>
+          </a:fontRef>
+        </p:style>
+        <p:txBody>
+          <a:bodyPr rtlCol="0" anchor="ctr"/>
+          <a:lstStyle/>
+          <a:p>
+            <a:pPr algn="ctr"/>
+          </a:p>
+        </p:txBody>
+      </p:sp>
+      <p:sp>
+        <p:nvSpPr>
+          <p:cNvPr id="20" name="TextBox 19"/>
+          <p:cNvSpPr txBox="1"/>
+          <p:nvPr/>
+        </p:nvSpPr>
+        <p:spPr>
+          <a:xfrm>
+            <a:off x="8275320" y="3657600"/>
+            <a:ext cx="2834640" cy="2286000"/>
+          </a:xfrm>
+          <a:prstGeom prst="rect">
+            <a:avLst/>
+          </a:prstGeom>
+          <a:noFill/>
+        </p:spPr>
+        <p:txBody>
+          <a:bodyPr wrap="square" lIns="0" tIns="0" rIns="0" bIns="0">
+            <a:spAutoFit/>
+          </a:bodyPr>
+          <a:lstStyle/>
+          <a:p>
+            <a:pPr>
               <a:spcAft>
-                <a:spcPts val="1200"/>
+                <a:spcPts val="1000"/>
               </a:spcAft>
-              <a:defRPr sz="1200" b="1">
-                <a:solidFill>
-                  <a:srgbClr val="4F46E5"/>
-                </a:solidFill>
-              </a:defRPr>
-            </a:pPr>
-            <a:r>
-              <a:t>ARCHITECTURAL ADVANTAGE OVER INCUMBENTS</a:t>
+              <a:defRPr sz="1200">
+                <a:solidFill>
+                  <a:srgbClr val="334155"/>
+                </a:solidFill>
+              </a:defRPr>
+            </a:pPr>
+            <a:r>
+              <a:t>• Targeting 50,000+ indie editors &amp; studios in India.</a:t>
             </a:r>
           </a:p>
           <a:p>
             <a:pPr>
               <a:spcAft>
-                <a:spcPts val="200"/>
+                <a:spcPts val="1000"/>
               </a:spcAft>
-              <a:defRPr sz="1100" b="1">
-                <a:solidFill>
-                  <a:srgbClr val="0F172A"/>
-                </a:solidFill>
-              </a:defRPr>
-            </a:pPr>
-            <a:r>
-              <a:t>★ Zero Cloud Latency</a:t>
+              <a:defRPr sz="1200">
+                <a:solidFill>
+                  <a:srgbClr val="334155"/>
+                </a:solidFill>
+              </a:defRPr>
+            </a:pPr>
+            <a:r>
+              <a:t>• Disruptive ₹499–₹2,499/mo accessible pricing.</a:t>
             </a:r>
           </a:p>
           <a:p>
             <a:pPr>
               <a:spcAft>
-                <a:spcPts val="800"/>
+                <a:spcPts val="1000"/>
               </a:spcAft>
-              <a:defRPr sz="1000">
-                <a:solidFill>
-                  <a:srgbClr val="1E293B"/>
-                </a:solidFill>
-              </a:defRPr>
-            </a:pPr>
-            <a:r>
-              <a:t>Executes 100% on local user GPUs via Metal/CUDA, ensuring zero subscription server fees and instantaneous scrubbing.</a:t>
-            </a:r>
-          </a:p>
-          <a:p>
-            <a:pPr>
-              <a:spcAft>
-                <a:spcPts val="200"/>
-              </a:spcAft>
-              <a:defRPr sz="1100" b="1">
-                <a:solidFill>
-                  <a:srgbClr val="0F172A"/>
-                </a:solidFill>
-              </a:defRPr>
-            </a:pPr>
-            <a:r>
-              <a:t>★ No Bloatware / Zero-Framework</a:t>
-            </a:r>
-          </a:p>
-          <a:p>
-            <a:pPr>
-              <a:spcAft>
-                <a:spcPts val="800"/>
-              </a:spcAft>
-              <a:defRPr sz="1000">
-                <a:solidFill>
-                  <a:srgbClr val="1E293B"/>
-                </a:solidFill>
-              </a:defRPr>
-            </a:pPr>
-            <a:r>
-              <a:t>Clean C++ and native Node.js microservices avoiding bloated layers for maximum throughput and ACID compliance.</a:t>
-            </a:r>
-          </a:p>
-          <a:p>
-            <a:pPr>
-              <a:spcAft>
-                <a:spcPts val="200"/>
-              </a:spcAft>
-              <a:defRPr sz="1100" b="1">
-                <a:solidFill>
-                  <a:srgbClr val="0F172A"/>
-                </a:solidFill>
-              </a:defRPr>
-            </a:pPr>
-            <a:r>
-              <a:t>★ Enterprise Security Shield</a:t>
-            </a:r>
-          </a:p>
-          <a:p>
-            <a:pPr>
-              <a:spcAft>
-                <a:spcPts val="800"/>
-              </a:spcAft>
-              <a:defRPr sz="1000">
-                <a:solidFill>
-                  <a:srgbClr val="1E293B"/>
-                </a:solidFill>
-              </a:defRPr>
-            </a:pPr>
-            <a:r>
-              <a:t>Deloitte Australia-standard threat modeling with client-side anti-tamper shields protecting proprietary shader math.</a:t>
-            </a:r>
-          </a:p>
-          <a:p>
-            <a:pPr>
-              <a:spcAft>
-                <a:spcPts val="200"/>
-              </a:spcAft>
-              <a:defRPr sz="1100" b="1">
-                <a:solidFill>
-                  <a:srgbClr val="0F172A"/>
-                </a:solidFill>
-              </a:defRPr>
-            </a:pPr>
-            <a:r>
-              <a:t>★ Make in India Deep-Tech IP</a:t>
-            </a:r>
-          </a:p>
-          <a:p>
-            <a:pPr>
-              <a:spcAft>
-                <a:spcPts val="800"/>
-              </a:spcAft>
-              <a:defRPr sz="1000">
-                <a:solidFill>
-                  <a:srgbClr val="1E293B"/>
-                </a:solidFill>
-              </a:defRPr>
-            </a:pPr>
-            <a:r>
-              <a:t>Indigenous architecture replacing expensive foreign imports with domestic intellectual property.</a:t>
+              <a:defRPr sz="1200">
+                <a:solidFill>
+                  <a:srgbClr val="334155"/>
+                </a:solidFill>
+              </a:defRPr>
+            </a:pPr>
+            <a:r>
+              <a:t>• 15%+ annual adoption in Tier-1 &amp; Tier-2 hubs.</a:t>
             </a:r>
           </a:p>
         </p:txBody>
@@ -8828,8 +7365,8 @@
         </p:nvSpPr>
         <p:spPr>
           <a:xfrm>
-            <a:off x="731520" y="411480"/>
-            <a:ext cx="10728655" cy="274320"/>
+            <a:off x="822960" y="457200"/>
+            <a:ext cx="10515600" cy="274320"/>
           </a:xfrm>
           <a:prstGeom prst="rect">
             <a:avLst/>
@@ -8851,7 +7388,7 @@
               </a:defRPr>
             </a:pPr>
             <a:r>
-              <a:t>MARKET POTENTIAL</a:t>
+              <a:t>BUSINESS MODEL</a:t>
             </a:r>
           </a:p>
         </p:txBody>
@@ -8864,8 +7401,8 @@
         </p:nvSpPr>
         <p:spPr>
           <a:xfrm>
-            <a:off x="731520" y="685800"/>
-            <a:ext cx="10728655" cy="548640"/>
+            <a:off x="822960" y="731520"/>
+            <a:ext cx="10515600" cy="548640"/>
           </a:xfrm>
           <a:prstGeom prst="rect">
             <a:avLst/>
@@ -8887,7 +7424,7 @@
               </a:defRPr>
             </a:pPr>
             <a:r>
-              <a:t>Market Opportunity — Sizing &amp; Growth Vectors</a:t>
+              <a:t>Commercial Business &amp; Revenue Model</a:t>
             </a:r>
           </a:p>
         </p:txBody>
@@ -8900,8 +7437,8 @@
         </p:nvSpPr>
         <p:spPr>
           <a:xfrm>
-            <a:off x="731520" y="1234440"/>
-            <a:ext cx="10728655" cy="320040"/>
+            <a:off x="822960" y="1280160"/>
+            <a:ext cx="10515600" cy="274320"/>
           </a:xfrm>
           <a:prstGeom prst="rect">
             <a:avLst/>
@@ -8923,64 +7460,21 @@
               </a:defRPr>
             </a:pPr>
             <a:r>
-              <a:t>Riding the explosive wave of Indian and global creator economy expansion.</a:t>
-            </a:r>
-          </a:p>
-        </p:txBody>
-      </p:sp>
-      <p:sp>
-        <p:nvSpPr>
-          <p:cNvPr id="6" name="Rectangle 5"/>
+              <a:t>A multi-tiered monetization strategy capturing individual creators and enterprise studios.</a:t>
+            </a:r>
+          </a:p>
+        </p:txBody>
+      </p:sp>
+      <p:sp>
+        <p:nvSpPr>
+          <p:cNvPr id="6" name="Rounded Rectangle 5"/>
           <p:cNvSpPr/>
           <p:nvPr/>
         </p:nvSpPr>
         <p:spPr>
           <a:xfrm>
-            <a:off x="731520" y="1572768"/>
-            <a:ext cx="10728655" cy="13716"/>
-          </a:xfrm>
-          <a:prstGeom prst="rect">
-            <a:avLst/>
-          </a:prstGeom>
-          <a:solidFill>
-            <a:srgbClr val="E2E8F0"/>
-          </a:solidFill>
-          <a:ln>
-            <a:noFill/>
-          </a:ln>
-        </p:spPr>
-        <p:style>
-          <a:lnRef idx="1">
-            <a:schemeClr val="accent1"/>
-          </a:lnRef>
-          <a:fillRef idx="3">
-            <a:schemeClr val="accent1"/>
-          </a:fillRef>
-          <a:effectRef idx="2">
-            <a:schemeClr val="accent1"/>
-          </a:effectRef>
-          <a:fontRef idx="minor">
-            <a:schemeClr val="lt1"/>
-          </a:fontRef>
-        </p:style>
-        <p:txBody>
-          <a:bodyPr rtlCol="0" anchor="ctr"/>
-          <a:lstStyle/>
-          <a:p>
-            <a:pPr algn="ctr"/>
-          </a:p>
-        </p:txBody>
-      </p:sp>
-      <p:sp>
-        <p:nvSpPr>
-          <p:cNvPr id="7" name="Rounded Rectangle 6"/>
-          <p:cNvSpPr/>
-          <p:nvPr/>
-        </p:nvSpPr>
-        <p:spPr>
-          <a:xfrm>
-            <a:off x="731520" y="1737360"/>
-            <a:ext cx="3383280" cy="4480560"/>
+            <a:off x="822960" y="1828800"/>
+            <a:ext cx="3291840" cy="4297680"/>
           </a:xfrm>
           <a:prstGeom prst="roundRect">
             <a:avLst/>
@@ -9018,66 +7512,49 @@
       </p:sp>
       <p:sp>
         <p:nvSpPr>
-          <p:cNvPr id="8" name="Rounded Rectangle 7"/>
-          <p:cNvSpPr/>
-          <p:nvPr/>
-        </p:nvSpPr>
-        <p:spPr>
-          <a:xfrm>
-            <a:off x="914400" y="1920240"/>
-            <a:ext cx="914400" cy="365760"/>
-          </a:xfrm>
-          <a:prstGeom prst="roundRect">
-            <a:avLst/>
-          </a:prstGeom>
-          <a:solidFill>
-            <a:srgbClr val="2563EB"/>
-          </a:solidFill>
-          <a:ln>
-            <a:noFill/>
-          </a:ln>
-        </p:spPr>
-        <p:style>
-          <a:lnRef idx="1">
-            <a:schemeClr val="accent1"/>
-          </a:lnRef>
-          <a:fillRef idx="3">
-            <a:schemeClr val="accent1"/>
-          </a:fillRef>
-          <a:effectRef idx="2">
-            <a:schemeClr val="accent1"/>
-          </a:effectRef>
-          <a:fontRef idx="minor">
-            <a:schemeClr val="lt1"/>
-          </a:fontRef>
-        </p:style>
-        <p:txBody>
-          <a:bodyPr rtlCol="0" anchor="ctr"/>
-          <a:lstStyle/>
-          <a:p>
-            <a:pPr algn="ctr">
-              <a:defRPr sz="1100" b="1">
-                <a:solidFill>
-                  <a:srgbClr val="FFFFFF"/>
-                </a:solidFill>
-              </a:defRPr>
-            </a:pPr>
-            <a:r>
-              <a:t>TAM</a:t>
-            </a:r>
-          </a:p>
-        </p:txBody>
-      </p:sp>
-      <p:sp>
-        <p:nvSpPr>
-          <p:cNvPr id="9" name="TextBox 8"/>
+          <p:cNvPr id="7" name="TextBox 6"/>
           <p:cNvSpPr txBox="1"/>
           <p:nvPr/>
         </p:nvSpPr>
         <p:spPr>
           <a:xfrm>
-            <a:off x="914400" y="2377440"/>
-            <a:ext cx="3017520" cy="914400"/>
+            <a:off x="1051560" y="2103120"/>
+            <a:ext cx="2834640" cy="274320"/>
+          </a:xfrm>
+          <a:prstGeom prst="rect">
+            <a:avLst/>
+          </a:prstGeom>
+          <a:noFill/>
+        </p:spPr>
+        <p:txBody>
+          <a:bodyPr wrap="none" lIns="0" tIns="0" rIns="0" bIns="0">
+            <a:spAutoFit/>
+          </a:bodyPr>
+          <a:lstStyle/>
+          <a:p>
+            <a:pPr>
+              <a:defRPr sz="950" b="1">
+                <a:solidFill>
+                  <a:srgbClr val="2563EB"/>
+                </a:solidFill>
+              </a:defRPr>
+            </a:pPr>
+            <a:r>
+              <a:t>ONE-TIME ASSET SALES</a:t>
+            </a:r>
+          </a:p>
+        </p:txBody>
+      </p:sp>
+      <p:sp>
+        <p:nvSpPr>
+          <p:cNvPr id="8" name="TextBox 7"/>
+          <p:cNvSpPr txBox="1"/>
+          <p:nvPr/>
+        </p:nvSpPr>
+        <p:spPr>
+          <a:xfrm>
+            <a:off x="1051560" y="2377440"/>
+            <a:ext cx="2834640" cy="548640"/>
           </a:xfrm>
           <a:prstGeom prst="rect">
             <a:avLst/>
@@ -9091,40 +7568,28 @@
           <a:lstStyle/>
           <a:p>
             <a:pPr>
-              <a:defRPr sz="2400" b="1">
+              <a:defRPr sz="1700" b="1">
                 <a:solidFill>
                   <a:srgbClr val="0F172A"/>
                 </a:solidFill>
               </a:defRPr>
             </a:pPr>
             <a:r>
-              <a:t>$250 Billion+</a:t>
-            </a:r>
-          </a:p>
-          <a:p>
-            <a:pPr>
-              <a:defRPr sz="1100" b="1">
-                <a:solidFill>
-                  <a:srgbClr val="2563EB"/>
-                </a:solidFill>
-              </a:defRPr>
-            </a:pPr>
-            <a:r>
-              <a:t>Global Creator &amp; Video Market</a:t>
-            </a:r>
-          </a:p>
-        </p:txBody>
-      </p:sp>
-      <p:sp>
-        <p:nvSpPr>
-          <p:cNvPr id="10" name="Rectangle 9"/>
+              <a:t>Direct Plugin Sales</a:t>
+            </a:r>
+          </a:p>
+        </p:txBody>
+      </p:sp>
+      <p:sp>
+        <p:nvSpPr>
+          <p:cNvPr id="9" name="Rectangle 8"/>
           <p:cNvSpPr/>
           <p:nvPr/>
         </p:nvSpPr>
         <p:spPr>
           <a:xfrm>
-            <a:off x="914400" y="3383280"/>
-            <a:ext cx="3017520" cy="13716"/>
+            <a:off x="1051560" y="3017520"/>
+            <a:ext cx="2834640" cy="13716"/>
           </a:xfrm>
           <a:prstGeom prst="rect">
             <a:avLst/>
@@ -9160,14 +7625,14 @@
       </p:sp>
       <p:sp>
         <p:nvSpPr>
-          <p:cNvPr id="11" name="TextBox 10"/>
+          <p:cNvPr id="10" name="TextBox 9"/>
           <p:cNvSpPr txBox="1"/>
           <p:nvPr/>
         </p:nvSpPr>
         <p:spPr>
           <a:xfrm>
-            <a:off x="914400" y="3520440"/>
-            <a:ext cx="3017520" cy="2560320"/>
+            <a:off x="1051560" y="3200400"/>
+            <a:ext cx="2834640" cy="2651760"/>
           </a:xfrm>
           <a:prstGeom prst="rect">
             <a:avLst/>
@@ -9182,60 +7647,75 @@
           <a:p>
             <a:pPr>
               <a:spcAft>
-                <a:spcPts val="800"/>
+                <a:spcPts val="1000"/>
               </a:spcAft>
-              <a:defRPr sz="1100">
-                <a:solidFill>
-                  <a:srgbClr val="1E293B"/>
-                </a:solidFill>
-              </a:defRPr>
-            </a:pPr>
-            <a:r>
-              <a:t>• Over 50M+ digital content creators worldwide.</a:t>
+              <a:defRPr sz="1150">
+                <a:solidFill>
+                  <a:srgbClr val="334155"/>
+                </a:solidFill>
+              </a:defRPr>
+            </a:pPr>
+            <a:r>
+              <a:t>✔  Affordable perpetual licenses for DaVinci Resolve &amp; After Effects OFX plugins.</a:t>
             </a:r>
           </a:p>
           <a:p>
             <a:pPr>
               <a:spcAft>
-                <a:spcPts val="800"/>
+                <a:spcPts val="1000"/>
               </a:spcAft>
-              <a:defRPr sz="1100">
-                <a:solidFill>
-                  <a:srgbClr val="1E293B"/>
-                </a:solidFill>
-              </a:defRPr>
-            </a:pPr>
-            <a:r>
-              <a:t>• $40B+ dedicated video editing and VFX plugin software sector.</a:t>
+              <a:defRPr sz="1150">
+                <a:solidFill>
+                  <a:srgbClr val="334155"/>
+                </a:solidFill>
+              </a:defRPr>
+            </a:pPr>
+            <a:r>
+              <a:t>✔  Priced at ₹1,499 – ₹4,999 (vs. ₹30,000+ foreign suites).</a:t>
             </a:r>
           </a:p>
           <a:p>
             <a:pPr>
               <a:spcAft>
-                <a:spcPts val="800"/>
+                <a:spcPts val="1000"/>
               </a:spcAft>
-              <a:defRPr sz="1100">
-                <a:solidFill>
-                  <a:srgbClr val="1E293B"/>
-                </a:solidFill>
-              </a:defRPr>
-            </a:pPr>
-            <a:r>
-              <a:t>• Surge in demand for cinematic 4K 60FPS high-retention video production.</a:t>
-            </a:r>
-          </a:p>
-        </p:txBody>
-      </p:sp>
-      <p:sp>
-        <p:nvSpPr>
-          <p:cNvPr id="12" name="Rounded Rectangle 11"/>
+              <a:defRPr sz="1150">
+                <a:solidFill>
+                  <a:srgbClr val="334155"/>
+                </a:solidFill>
+              </a:defRPr>
+            </a:pPr>
+            <a:r>
+              <a:t>✔  Targeting freelance video editors and creators.</a:t>
+            </a:r>
+          </a:p>
+          <a:p>
+            <a:pPr>
+              <a:spcAft>
+                <a:spcPts val="1000"/>
+              </a:spcAft>
+              <a:defRPr sz="1150">
+                <a:solidFill>
+                  <a:srgbClr val="334155"/>
+                </a:solidFill>
+              </a:defRPr>
+            </a:pPr>
+            <a:r>
+              <a:t>✔  High gross margin (&gt;90%) digital software delivery.</a:t>
+            </a:r>
+          </a:p>
+        </p:txBody>
+      </p:sp>
+      <p:sp>
+        <p:nvSpPr>
+          <p:cNvPr id="11" name="Rounded Rectangle 10"/>
           <p:cNvSpPr/>
           <p:nvPr/>
         </p:nvSpPr>
         <p:spPr>
           <a:xfrm>
-            <a:off x="4398264" y="1737360"/>
-            <a:ext cx="3383280" cy="4480560"/>
+            <a:off x="4434840" y="1828800"/>
+            <a:ext cx="3291840" cy="4297680"/>
           </a:xfrm>
           <a:prstGeom prst="roundRect">
             <a:avLst/>
@@ -9273,66 +7753,49 @@
       </p:sp>
       <p:sp>
         <p:nvSpPr>
-          <p:cNvPr id="13" name="Rounded Rectangle 12"/>
-          <p:cNvSpPr/>
-          <p:nvPr/>
-        </p:nvSpPr>
-        <p:spPr>
-          <a:xfrm>
-            <a:off x="4581144" y="1920240"/>
-            <a:ext cx="914400" cy="365760"/>
-          </a:xfrm>
-          <a:prstGeom prst="roundRect">
-            <a:avLst/>
-          </a:prstGeom>
-          <a:solidFill>
-            <a:srgbClr val="059669"/>
-          </a:solidFill>
-          <a:ln>
-            <a:noFill/>
-          </a:ln>
-        </p:spPr>
-        <p:style>
-          <a:lnRef idx="1">
-            <a:schemeClr val="accent1"/>
-          </a:lnRef>
-          <a:fillRef idx="3">
-            <a:schemeClr val="accent1"/>
-          </a:fillRef>
-          <a:effectRef idx="2">
-            <a:schemeClr val="accent1"/>
-          </a:effectRef>
-          <a:fontRef idx="minor">
-            <a:schemeClr val="lt1"/>
-          </a:fontRef>
-        </p:style>
-        <p:txBody>
-          <a:bodyPr rtlCol="0" anchor="ctr"/>
-          <a:lstStyle/>
-          <a:p>
-            <a:pPr algn="ctr">
-              <a:defRPr sz="1100" b="1">
-                <a:solidFill>
-                  <a:srgbClr val="FFFFFF"/>
-                </a:solidFill>
-              </a:defRPr>
-            </a:pPr>
-            <a:r>
-              <a:t>SAM</a:t>
-            </a:r>
-          </a:p>
-        </p:txBody>
-      </p:sp>
-      <p:sp>
-        <p:nvSpPr>
-          <p:cNvPr id="14" name="TextBox 13"/>
+          <p:cNvPr id="12" name="TextBox 11"/>
           <p:cNvSpPr txBox="1"/>
           <p:nvPr/>
         </p:nvSpPr>
         <p:spPr>
           <a:xfrm>
-            <a:off x="4581144" y="2377440"/>
-            <a:ext cx="3017520" cy="914400"/>
+            <a:off x="4663440" y="2103120"/>
+            <a:ext cx="2834640" cy="274320"/>
+          </a:xfrm>
+          <a:prstGeom prst="rect">
+            <a:avLst/>
+          </a:prstGeom>
+          <a:noFill/>
+        </p:spPr>
+        <p:txBody>
+          <a:bodyPr wrap="none" lIns="0" tIns="0" rIns="0" bIns="0">
+            <a:spAutoFit/>
+          </a:bodyPr>
+          <a:lstStyle/>
+          <a:p>
+            <a:pPr>
+              <a:defRPr sz="950" b="1">
+                <a:solidFill>
+                  <a:srgbClr val="7C3AED"/>
+                </a:solidFill>
+              </a:defRPr>
+            </a:pPr>
+            <a:r>
+              <a:t>RECURRING SUBSCRIPTION</a:t>
+            </a:r>
+          </a:p>
+        </p:txBody>
+      </p:sp>
+      <p:sp>
+        <p:nvSpPr>
+          <p:cNvPr id="13" name="TextBox 12"/>
+          <p:cNvSpPr txBox="1"/>
+          <p:nvPr/>
+        </p:nvSpPr>
+        <p:spPr>
+          <a:xfrm>
+            <a:off x="4663440" y="2377440"/>
+            <a:ext cx="2834640" cy="548640"/>
           </a:xfrm>
           <a:prstGeom prst="rect">
             <a:avLst/>
@@ -9346,40 +7809,28 @@
           <a:lstStyle/>
           <a:p>
             <a:pPr>
-              <a:defRPr sz="2400" b="1">
+              <a:defRPr sz="1700" b="1">
                 <a:solidFill>
                   <a:srgbClr val="0F172A"/>
                 </a:solidFill>
               </a:defRPr>
             </a:pPr>
             <a:r>
-              <a:t>$4.2 Billion</a:t>
-            </a:r>
-          </a:p>
-          <a:p>
-            <a:pPr>
-              <a:defRPr sz="1100" b="1">
-                <a:solidFill>
-                  <a:srgbClr val="059669"/>
-                </a:solidFill>
-              </a:defRPr>
-            </a:pPr>
-            <a:r>
-              <a:t>Indian AVGC &amp; Media Sector</a:t>
-            </a:r>
-          </a:p>
-        </p:txBody>
-      </p:sp>
-      <p:sp>
-        <p:nvSpPr>
-          <p:cNvPr id="15" name="Rectangle 14"/>
+              <a:t>Creator All-Access SaaS</a:t>
+            </a:r>
+          </a:p>
+        </p:txBody>
+      </p:sp>
+      <p:sp>
+        <p:nvSpPr>
+          <p:cNvPr id="14" name="Rectangle 13"/>
           <p:cNvSpPr/>
           <p:nvPr/>
         </p:nvSpPr>
         <p:spPr>
           <a:xfrm>
-            <a:off x="4581144" y="3383280"/>
-            <a:ext cx="3017520" cy="13716"/>
+            <a:off x="4663440" y="3017520"/>
+            <a:ext cx="2834640" cy="13716"/>
           </a:xfrm>
           <a:prstGeom prst="rect">
             <a:avLst/>
@@ -9415,14 +7866,14 @@
       </p:sp>
       <p:sp>
         <p:nvSpPr>
-          <p:cNvPr id="16" name="TextBox 15"/>
+          <p:cNvPr id="15" name="TextBox 14"/>
           <p:cNvSpPr txBox="1"/>
           <p:nvPr/>
         </p:nvSpPr>
         <p:spPr>
           <a:xfrm>
-            <a:off x="4581144" y="3520440"/>
-            <a:ext cx="3017520" cy="2560320"/>
+            <a:off x="4663440" y="3200400"/>
+            <a:ext cx="2834640" cy="2651760"/>
           </a:xfrm>
           <a:prstGeom prst="rect">
             <a:avLst/>
@@ -9437,60 +7888,75 @@
           <a:p>
             <a:pPr>
               <a:spcAft>
-                <a:spcPts val="800"/>
+                <a:spcPts val="1000"/>
               </a:spcAft>
-              <a:defRPr sz="1100">
-                <a:solidFill>
-                  <a:srgbClr val="1E293B"/>
-                </a:solidFill>
-              </a:defRPr>
-            </a:pPr>
-            <a:r>
-              <a:t>• India's Animation, Visual Effects, Gaming &amp; Comics (AVGC) ecosystem.</a:t>
+              <a:defRPr sz="1150">
+                <a:solidFill>
+                  <a:srgbClr val="334155"/>
+                </a:solidFill>
+              </a:defRPr>
+            </a:pPr>
+            <a:r>
+              <a:t>✔  Monthly (₹499/mo) and Annual (₹4,999/yr) plans.</a:t>
             </a:r>
           </a:p>
           <a:p>
             <a:pPr>
               <a:spcAft>
-                <a:spcPts val="800"/>
+                <a:spcPts val="1000"/>
               </a:spcAft>
-              <a:defRPr sz="1100">
-                <a:solidFill>
-                  <a:srgbClr val="1E293B"/>
-                </a:solidFill>
-              </a:defRPr>
-            </a:pPr>
-            <a:r>
-              <a:t>• 1.5M+ active digital video creators, YouTubers, and commercial editors in India.</a:t>
+              <a:defRPr sz="1150">
+                <a:solidFill>
+                  <a:srgbClr val="334155"/>
+                </a:solidFill>
+              </a:defRPr>
+            </a:pPr>
+            <a:r>
+              <a:t>✔  Unlimited access to new VFX packs and neural AI tools.</a:t>
             </a:r>
           </a:p>
           <a:p>
             <a:pPr>
               <a:spcAft>
-                <a:spcPts val="800"/>
+                <a:spcPts val="1000"/>
               </a:spcAft>
-              <a:defRPr sz="1100">
-                <a:solidFill>
-                  <a:srgbClr val="1E293B"/>
-                </a:solidFill>
-              </a:defRPr>
-            </a:pPr>
-            <a:r>
-              <a:t>• Booming regional OTT and digital advertising industries.</a:t>
-            </a:r>
-          </a:p>
-        </p:txBody>
-      </p:sp>
-      <p:sp>
-        <p:nvSpPr>
-          <p:cNvPr id="17" name="Rounded Rectangle 16"/>
+              <a:defRPr sz="1150">
+                <a:solidFill>
+                  <a:srgbClr val="334155"/>
+                </a:solidFill>
+              </a:defRPr>
+            </a:pPr>
+            <a:r>
+              <a:t>✔  Predictable recurring MRR and high lifetime value.</a:t>
+            </a:r>
+          </a:p>
+          <a:p>
+            <a:pPr>
+              <a:spcAft>
+                <a:spcPts val="1000"/>
+              </a:spcAft>
+              <a:defRPr sz="1150">
+                <a:solidFill>
+                  <a:srgbClr val="334155"/>
+                </a:solidFill>
+              </a:defRPr>
+            </a:pPr>
+            <a:r>
+              <a:t>✔  Continuous automated preset &amp; model updates.</a:t>
+            </a:r>
+          </a:p>
+        </p:txBody>
+      </p:sp>
+      <p:sp>
+        <p:nvSpPr>
+          <p:cNvPr id="16" name="Rounded Rectangle 15"/>
           <p:cNvSpPr/>
           <p:nvPr/>
         </p:nvSpPr>
         <p:spPr>
           <a:xfrm>
-            <a:off x="8065008" y="1737360"/>
-            <a:ext cx="3383280" cy="4480560"/>
+            <a:off x="8046720" y="1828800"/>
+            <a:ext cx="3291840" cy="4297680"/>
           </a:xfrm>
           <a:prstGeom prst="roundRect">
             <a:avLst/>
@@ -9528,66 +7994,49 @@
       </p:sp>
       <p:sp>
         <p:nvSpPr>
-          <p:cNvPr id="18" name="Rounded Rectangle 17"/>
-          <p:cNvSpPr/>
-          <p:nvPr/>
-        </p:nvSpPr>
-        <p:spPr>
-          <a:xfrm>
-            <a:off x="8247888" y="1920240"/>
-            <a:ext cx="914400" cy="365760"/>
-          </a:xfrm>
-          <a:prstGeom prst="roundRect">
-            <a:avLst/>
-          </a:prstGeom>
-          <a:solidFill>
-            <a:srgbClr val="4F46E5"/>
-          </a:solidFill>
-          <a:ln>
-            <a:noFill/>
-          </a:ln>
-        </p:spPr>
-        <p:style>
-          <a:lnRef idx="1">
-            <a:schemeClr val="accent1"/>
-          </a:lnRef>
-          <a:fillRef idx="3">
-            <a:schemeClr val="accent1"/>
-          </a:fillRef>
-          <a:effectRef idx="2">
-            <a:schemeClr val="accent1"/>
-          </a:effectRef>
-          <a:fontRef idx="minor">
-            <a:schemeClr val="lt1"/>
-          </a:fontRef>
-        </p:style>
-        <p:txBody>
-          <a:bodyPr rtlCol="0" anchor="ctr"/>
-          <a:lstStyle/>
-          <a:p>
-            <a:pPr algn="ctr">
-              <a:defRPr sz="1100" b="1">
-                <a:solidFill>
-                  <a:srgbClr val="FFFFFF"/>
-                </a:solidFill>
-              </a:defRPr>
-            </a:pPr>
-            <a:r>
-              <a:t>SOM</a:t>
-            </a:r>
-          </a:p>
-        </p:txBody>
-      </p:sp>
-      <p:sp>
-        <p:nvSpPr>
-          <p:cNvPr id="19" name="TextBox 18"/>
+          <p:cNvPr id="17" name="TextBox 16"/>
           <p:cNvSpPr txBox="1"/>
           <p:nvPr/>
         </p:nvSpPr>
         <p:spPr>
           <a:xfrm>
-            <a:off x="8247888" y="2377440"/>
-            <a:ext cx="3017520" cy="914400"/>
+            <a:off x="8275320" y="2103120"/>
+            <a:ext cx="2834640" cy="274320"/>
+          </a:xfrm>
+          <a:prstGeom prst="rect">
+            <a:avLst/>
+          </a:prstGeom>
+          <a:noFill/>
+        </p:spPr>
+        <p:txBody>
+          <a:bodyPr wrap="none" lIns="0" tIns="0" rIns="0" bIns="0">
+            <a:spAutoFit/>
+          </a:bodyPr>
+          <a:lstStyle/>
+          <a:p>
+            <a:pPr>
+              <a:defRPr sz="950" b="1">
+                <a:solidFill>
+                  <a:srgbClr val="059669"/>
+                </a:solidFill>
+              </a:defRPr>
+            </a:pPr>
+            <a:r>
+              <a:t>STUDIO ENGINEERING</a:t>
+            </a:r>
+          </a:p>
+        </p:txBody>
+      </p:sp>
+      <p:sp>
+        <p:nvSpPr>
+          <p:cNvPr id="18" name="TextBox 17"/>
+          <p:cNvSpPr txBox="1"/>
+          <p:nvPr/>
+        </p:nvSpPr>
+        <p:spPr>
+          <a:xfrm>
+            <a:off x="8275320" y="2377440"/>
+            <a:ext cx="2834640" cy="548640"/>
           </a:xfrm>
           <a:prstGeom prst="rect">
             <a:avLst/>
@@ -9601,40 +8050,28 @@
           <a:lstStyle/>
           <a:p>
             <a:pPr>
-              <a:defRPr sz="2400" b="1">
+              <a:defRPr sz="1700" b="1">
                 <a:solidFill>
                   <a:srgbClr val="0F172A"/>
                 </a:solidFill>
               </a:defRPr>
             </a:pPr>
             <a:r>
-              <a:t>₹120 Crore</a:t>
-            </a:r>
-          </a:p>
-          <a:p>
-            <a:pPr>
-              <a:defRPr sz="1100" b="1">
-                <a:solidFill>
-                  <a:srgbClr val="4F46E5"/>
-                </a:solidFill>
-              </a:defRPr>
-            </a:pPr>
-            <a:r>
-              <a:t>36-Month Target Addressable</a:t>
-            </a:r>
-          </a:p>
-        </p:txBody>
-      </p:sp>
-      <p:sp>
-        <p:nvSpPr>
-          <p:cNvPr id="20" name="Rectangle 19"/>
+              <a:t>Enterprise B2B Retainers</a:t>
+            </a:r>
+          </a:p>
+        </p:txBody>
+      </p:sp>
+      <p:sp>
+        <p:nvSpPr>
+          <p:cNvPr id="19" name="Rectangle 18"/>
           <p:cNvSpPr/>
           <p:nvPr/>
         </p:nvSpPr>
         <p:spPr>
           <a:xfrm>
-            <a:off x="8247888" y="3383280"/>
-            <a:ext cx="3017520" cy="13716"/>
+            <a:off x="8275320" y="3017520"/>
+            <a:ext cx="2834640" cy="13716"/>
           </a:xfrm>
           <a:prstGeom prst="rect">
             <a:avLst/>
@@ -9670,14 +8107,14 @@
       </p:sp>
       <p:sp>
         <p:nvSpPr>
-          <p:cNvPr id="21" name="TextBox 20"/>
+          <p:cNvPr id="20" name="TextBox 19"/>
           <p:cNvSpPr txBox="1"/>
           <p:nvPr/>
         </p:nvSpPr>
         <p:spPr>
           <a:xfrm>
-            <a:off x="8247888" y="3520440"/>
-            <a:ext cx="3017520" cy="2560320"/>
+            <a:off x="8275320" y="3200400"/>
+            <a:ext cx="2834640" cy="2651760"/>
           </a:xfrm>
           <a:prstGeom prst="rect">
             <a:avLst/>
@@ -9692,46 +8129,61 @@
           <a:p>
             <a:pPr>
               <a:spcAft>
-                <a:spcPts val="800"/>
+                <a:spcPts val="1000"/>
               </a:spcAft>
-              <a:defRPr sz="1100">
-                <a:solidFill>
-                  <a:srgbClr val="1E293B"/>
-                </a:solidFill>
-              </a:defRPr>
-            </a:pPr>
-            <a:r>
-              <a:t>• Targeting 50,000+ indie editors, post-production studios, and agencies in India.</a:t>
+              <a:defRPr sz="1150">
+                <a:solidFill>
+                  <a:srgbClr val="334155"/>
+                </a:solidFill>
+              </a:defRPr>
+            </a:pPr>
+            <a:r>
+              <a:t>✔  Custom OFX pipeline builds for film &amp; ad production.</a:t>
             </a:r>
           </a:p>
           <a:p>
             <a:pPr>
               <a:spcAft>
-                <a:spcPts val="800"/>
+                <a:spcPts val="1000"/>
               </a:spcAft>
-              <a:defRPr sz="1100">
-                <a:solidFill>
-                  <a:srgbClr val="1E293B"/>
-                </a:solidFill>
-              </a:defRPr>
-            </a:pPr>
-            <a:r>
-              <a:t>• Replacing ₹30,000+ foreign suites with accessible ₹499–₹2,499/mo subscriptions.</a:t>
+              <a:defRPr sz="1150">
+                <a:solidFill>
+                  <a:srgbClr val="334155"/>
+                </a:solidFill>
+              </a:defRPr>
+            </a:pPr>
+            <a:r>
+              <a:t>✔  Viral media syndication contracts (@hrlflix).</a:t>
             </a:r>
           </a:p>
           <a:p>
             <a:pPr>
               <a:spcAft>
-                <a:spcPts val="800"/>
+                <a:spcPts val="1000"/>
               </a:spcAft>
-              <a:defRPr sz="1100">
-                <a:solidFill>
-                  <a:srgbClr val="1E293B"/>
-                </a:solidFill>
-              </a:defRPr>
-            </a:pPr>
-            <a:r>
-              <a:t>• 15% annual adoption growth across Tier-1 and Tier-2 Indian creative hubs.</a:t>
+              <a:defRPr sz="1150">
+                <a:solidFill>
+                  <a:srgbClr val="334155"/>
+                </a:solidFill>
+              </a:defRPr>
+            </a:pPr>
+            <a:r>
+              <a:t>✔  Enterprise software licensing for media academies.</a:t>
+            </a:r>
+          </a:p>
+          <a:p>
+            <a:pPr>
+              <a:spcAft>
+                <a:spcPts val="1000"/>
+              </a:spcAft>
+              <a:defRPr sz="1150">
+                <a:solidFill>
+                  <a:srgbClr val="334155"/>
+                </a:solidFill>
+              </a:defRPr>
+            </a:pPr>
+            <a:r>
+              <a:t>✔  Bespoke algorithmic optimization solvers.</a:t>
             </a:r>
           </a:p>
         </p:txBody>
@@ -9805,8 +8257,8 @@
         </p:nvSpPr>
         <p:spPr>
           <a:xfrm>
-            <a:off x="731520" y="411480"/>
-            <a:ext cx="10728655" cy="274320"/>
+            <a:off x="822960" y="457200"/>
+            <a:ext cx="10515600" cy="274320"/>
           </a:xfrm>
           <a:prstGeom prst="rect">
             <a:avLst/>
@@ -9828,7 +8280,7 @@
               </a:defRPr>
             </a:pPr>
             <a:r>
-              <a:t>COMMERCIAL STRATEGY</a:t>
+              <a:t>WHY WE WIN</a:t>
             </a:r>
           </a:p>
         </p:txBody>
@@ -9841,8 +8293,8 @@
         </p:nvSpPr>
         <p:spPr>
           <a:xfrm>
-            <a:off x="731520" y="685800"/>
-            <a:ext cx="10728655" cy="548640"/>
+            <a:off x="822960" y="731520"/>
+            <a:ext cx="10515600" cy="548640"/>
           </a:xfrm>
           <a:prstGeom prst="rect">
             <a:avLst/>
@@ -9864,7 +8316,7 @@
               </a:defRPr>
             </a:pPr>
             <a:r>
-              <a:t>Business &amp; Monetization Model</a:t>
+              <a:t>Competitive Moat — Defensible Advantages</a:t>
             </a:r>
           </a:p>
         </p:txBody>
@@ -9877,8 +8329,8 @@
         </p:nvSpPr>
         <p:spPr>
           <a:xfrm>
-            <a:off x="731520" y="1234440"/>
-            <a:ext cx="10728655" cy="320040"/>
+            <a:off x="822960" y="1280160"/>
+            <a:ext cx="10515600" cy="274320"/>
           </a:xfrm>
           <a:prstGeom prst="rect">
             <a:avLst/>
@@ -9900,64 +8352,21 @@
               </a:defRPr>
             </a:pPr>
             <a:r>
-              <a:t>Diversified revenue engine combining direct marketplace sales, SaaS, and B2B contracts.</a:t>
-            </a:r>
-          </a:p>
-        </p:txBody>
-      </p:sp>
-      <p:sp>
-        <p:nvSpPr>
-          <p:cNvPr id="6" name="Rectangle 5"/>
+              <a:t>Core structural advantages that cannot be easily replicated by web apps or legacy suites.</a:t>
+            </a:r>
+          </a:p>
+        </p:txBody>
+      </p:sp>
+      <p:sp>
+        <p:nvSpPr>
+          <p:cNvPr id="6" name="Rounded Rectangle 5"/>
           <p:cNvSpPr/>
           <p:nvPr/>
         </p:nvSpPr>
         <p:spPr>
           <a:xfrm>
-            <a:off x="731520" y="1572768"/>
-            <a:ext cx="10728655" cy="13716"/>
-          </a:xfrm>
-          <a:prstGeom prst="rect">
-            <a:avLst/>
-          </a:prstGeom>
-          <a:solidFill>
-            <a:srgbClr val="E2E8F0"/>
-          </a:solidFill>
-          <a:ln>
-            <a:noFill/>
-          </a:ln>
-        </p:spPr>
-        <p:style>
-          <a:lnRef idx="1">
-            <a:schemeClr val="accent1"/>
-          </a:lnRef>
-          <a:fillRef idx="3">
-            <a:schemeClr val="accent1"/>
-          </a:fillRef>
-          <a:effectRef idx="2">
-            <a:schemeClr val="accent1"/>
-          </a:effectRef>
-          <a:fontRef idx="minor">
-            <a:schemeClr val="lt1"/>
-          </a:fontRef>
-        </p:style>
-        <p:txBody>
-          <a:bodyPr rtlCol="0" anchor="ctr"/>
-          <a:lstStyle/>
-          <a:p>
-            <a:pPr algn="ctr"/>
-          </a:p>
-        </p:txBody>
-      </p:sp>
-      <p:sp>
-        <p:nvSpPr>
-          <p:cNvPr id="7" name="Rounded Rectangle 6"/>
-          <p:cNvSpPr/>
-          <p:nvPr/>
-        </p:nvSpPr>
-        <p:spPr>
-          <a:xfrm>
-            <a:off x="731520" y="1737360"/>
-            <a:ext cx="3383280" cy="4480560"/>
+            <a:off x="822960" y="1828800"/>
+            <a:ext cx="5120640" cy="2011680"/>
           </a:xfrm>
           <a:prstGeom prst="roundRect">
             <a:avLst/>
@@ -9995,78 +8404,14 @@
       </p:sp>
       <p:sp>
         <p:nvSpPr>
-          <p:cNvPr id="8" name="Rounded Rectangle 7"/>
-          <p:cNvSpPr/>
-          <p:nvPr/>
-        </p:nvSpPr>
-        <p:spPr>
-          <a:xfrm>
-            <a:off x="914400" y="1920240"/>
-            <a:ext cx="3017520" cy="777240"/>
-          </a:xfrm>
-          <a:prstGeom prst="roundRect">
-            <a:avLst/>
-          </a:prstGeom>
-          <a:solidFill>
-            <a:srgbClr val="2563EB"/>
-          </a:solidFill>
-          <a:ln>
-            <a:noFill/>
-          </a:ln>
-        </p:spPr>
-        <p:style>
-          <a:lnRef idx="1">
-            <a:schemeClr val="accent1"/>
-          </a:lnRef>
-          <a:fillRef idx="3">
-            <a:schemeClr val="accent1"/>
-          </a:fillRef>
-          <a:effectRef idx="2">
-            <a:schemeClr val="accent1"/>
-          </a:effectRef>
-          <a:fontRef idx="minor">
-            <a:schemeClr val="lt1"/>
-          </a:fontRef>
-        </p:style>
-        <p:txBody>
-          <a:bodyPr rtlCol="0" anchor="ctr" wrap="square"/>
-          <a:lstStyle/>
-          <a:p>
-            <a:pPr algn="ctr">
-              <a:defRPr sz="1300" b="1">
-                <a:solidFill>
-                  <a:srgbClr val="FFFFFF"/>
-                </a:solidFill>
-              </a:defRPr>
-            </a:pPr>
-            <a:r>
-              <a:t>Direct Plugin Marketplace</a:t>
-            </a:r>
-          </a:p>
-          <a:p>
-            <a:pPr algn="ctr">
-              <a:defRPr sz="950">
-                <a:solidFill>
-                  <a:srgbClr val="E0E7FF"/>
-                </a:solidFill>
-              </a:defRPr>
-            </a:pPr>
-            <a:r>
-              <a:t>High-Margin Asset Sales</a:t>
-            </a:r>
-          </a:p>
-        </p:txBody>
-      </p:sp>
-      <p:sp>
-        <p:nvSpPr>
-          <p:cNvPr id="9" name="TextBox 8"/>
+          <p:cNvPr id="7" name="TextBox 6"/>
           <p:cNvSpPr txBox="1"/>
           <p:nvPr/>
         </p:nvSpPr>
         <p:spPr>
           <a:xfrm>
-            <a:off x="914400" y="2834640"/>
-            <a:ext cx="3017520" cy="3200400"/>
+            <a:off x="1097280" y="2103120"/>
+            <a:ext cx="4572000" cy="1463040"/>
           </a:xfrm>
           <a:prstGeom prst="rect">
             <a:avLst/>
@@ -10081,75 +8426,42 @@
           <a:p>
             <a:pPr>
               <a:spcAft>
-                <a:spcPts val="800"/>
+                <a:spcPts val="600"/>
               </a:spcAft>
-              <a:defRPr sz="1100">
-                <a:solidFill>
-                  <a:srgbClr val="1E293B"/>
-                </a:solidFill>
-              </a:defRPr>
-            </a:pPr>
-            <a:r>
-              <a:t>✔ Affordable one-time lifetime licenses for DaVinci Resolve &amp; After Effects OFX plugins.</a:t>
-            </a:r>
-          </a:p>
-          <a:p>
-            <a:pPr>
-              <a:spcAft>
-                <a:spcPts val="800"/>
-              </a:spcAft>
-              <a:defRPr sz="1100">
-                <a:solidFill>
-                  <a:srgbClr val="1E293B"/>
-                </a:solidFill>
-              </a:defRPr>
-            </a:pPr>
-            <a:r>
-              <a:t>✔ Priced at ₹1,499 – ₹4,999 (disrupting ₹30,000+ imported packages).</a:t>
-            </a:r>
-          </a:p>
-          <a:p>
-            <a:pPr>
-              <a:spcAft>
-                <a:spcPts val="800"/>
-              </a:spcAft>
-              <a:defRPr sz="1100">
-                <a:solidFill>
-                  <a:srgbClr val="1E293B"/>
-                </a:solidFill>
-              </a:defRPr>
-            </a:pPr>
-            <a:r>
-              <a:t>✔ Targeting freelance video editors and YouTube content creators.</a:t>
-            </a:r>
-          </a:p>
-          <a:p>
-            <a:pPr>
-              <a:spcAft>
-                <a:spcPts val="800"/>
-              </a:spcAft>
-              <a:defRPr sz="1100">
-                <a:solidFill>
-                  <a:srgbClr val="1E293B"/>
-                </a:solidFill>
-              </a:defRPr>
-            </a:pPr>
-            <a:r>
-              <a:t>✔ High gross margins (&gt;90%) on digital software delivery.</a:t>
-            </a:r>
-          </a:p>
-        </p:txBody>
-      </p:sp>
-      <p:sp>
-        <p:nvSpPr>
-          <p:cNvPr id="10" name="Rounded Rectangle 9"/>
+              <a:defRPr sz="1400" b="1">
+                <a:solidFill>
+                  <a:srgbClr val="2563EB"/>
+                </a:solidFill>
+              </a:defRPr>
+            </a:pPr>
+            <a:r>
+              <a:t>Native GPU vs. Slow Cloud Wrappers</a:t>
+            </a:r>
+          </a:p>
+          <a:p>
+            <a:pPr>
+              <a:defRPr sz="1150">
+                <a:solidFill>
+                  <a:srgbClr val="334155"/>
+                </a:solidFill>
+              </a:defRPr>
+            </a:pPr>
+            <a:r>
+              <a:t>Direct Metal/CUDA execution on user hardware. 0ms latency, zero cloud operational bills, and instant scrubbing.</a:t>
+            </a:r>
+          </a:p>
+        </p:txBody>
+      </p:sp>
+      <p:sp>
+        <p:nvSpPr>
+          <p:cNvPr id="8" name="Rounded Rectangle 7"/>
           <p:cNvSpPr/>
           <p:nvPr/>
         </p:nvSpPr>
         <p:spPr>
           <a:xfrm>
-            <a:off x="4398264" y="1737360"/>
-            <a:ext cx="3383280" cy="4480560"/>
+            <a:off x="6263640" y="1828800"/>
+            <a:ext cx="5120640" cy="2011680"/>
           </a:xfrm>
           <a:prstGeom prst="roundRect">
             <a:avLst/>
@@ -10187,78 +8499,14 @@
       </p:sp>
       <p:sp>
         <p:nvSpPr>
-          <p:cNvPr id="11" name="Rounded Rectangle 10"/>
-          <p:cNvSpPr/>
-          <p:nvPr/>
-        </p:nvSpPr>
-        <p:spPr>
-          <a:xfrm>
-            <a:off x="4581144" y="1920240"/>
-            <a:ext cx="3017520" cy="777240"/>
-          </a:xfrm>
-          <a:prstGeom prst="roundRect">
-            <a:avLst/>
-          </a:prstGeom>
-          <a:solidFill>
-            <a:srgbClr val="4F46E5"/>
-          </a:solidFill>
-          <a:ln>
-            <a:noFill/>
-          </a:ln>
-        </p:spPr>
-        <p:style>
-          <a:lnRef idx="1">
-            <a:schemeClr val="accent1"/>
-          </a:lnRef>
-          <a:fillRef idx="3">
-            <a:schemeClr val="accent1"/>
-          </a:fillRef>
-          <a:effectRef idx="2">
-            <a:schemeClr val="accent1"/>
-          </a:effectRef>
-          <a:fontRef idx="minor">
-            <a:schemeClr val="lt1"/>
-          </a:fontRef>
-        </p:style>
-        <p:txBody>
-          <a:bodyPr rtlCol="0" anchor="ctr" wrap="square"/>
-          <a:lstStyle/>
-          <a:p>
-            <a:pPr algn="ctr">
-              <a:defRPr sz="1300" b="1">
-                <a:solidFill>
-                  <a:srgbClr val="FFFFFF"/>
-                </a:solidFill>
-              </a:defRPr>
-            </a:pPr>
-            <a:r>
-              <a:t>Creator All-Access SaaS</a:t>
-            </a:r>
-          </a:p>
-          <a:p>
-            <a:pPr algn="ctr">
-              <a:defRPr sz="950">
-                <a:solidFill>
-                  <a:srgbClr val="E0E7FF"/>
-                </a:solidFill>
-              </a:defRPr>
-            </a:pPr>
-            <a:r>
-              <a:t>Recurring Subscription</a:t>
-            </a:r>
-          </a:p>
-        </p:txBody>
-      </p:sp>
-      <p:sp>
-        <p:nvSpPr>
-          <p:cNvPr id="12" name="TextBox 11"/>
+          <p:cNvPr id="9" name="TextBox 8"/>
           <p:cNvSpPr txBox="1"/>
           <p:nvPr/>
         </p:nvSpPr>
         <p:spPr>
           <a:xfrm>
-            <a:off x="4581144" y="2834640"/>
-            <a:ext cx="3017520" cy="3200400"/>
+            <a:off x="6537960" y="2103120"/>
+            <a:ext cx="4572000" cy="1463040"/>
           </a:xfrm>
           <a:prstGeom prst="rect">
             <a:avLst/>
@@ -10273,75 +8521,42 @@
           <a:p>
             <a:pPr>
               <a:spcAft>
-                <a:spcPts val="800"/>
+                <a:spcPts val="600"/>
               </a:spcAft>
-              <a:defRPr sz="1100">
-                <a:solidFill>
-                  <a:srgbClr val="1E293B"/>
-                </a:solidFill>
-              </a:defRPr>
-            </a:pPr>
-            <a:r>
-              <a:t>✔ Monthly (₹499/mo) and Annual (₹4,999/yr) all-access subscription passes.</a:t>
-            </a:r>
-          </a:p>
-          <a:p>
-            <a:pPr>
-              <a:spcAft>
-                <a:spcPts val="800"/>
-              </a:spcAft>
-              <a:defRPr sz="1100">
-                <a:solidFill>
-                  <a:srgbClr val="1E293B"/>
-                </a:solidFill>
-              </a:defRPr>
-            </a:pPr>
-            <a:r>
-              <a:t>✔ Unlimited access to new monthly VFX packs, preset updates, and neural AI tools.</a:t>
-            </a:r>
-          </a:p>
-          <a:p>
-            <a:pPr>
-              <a:spcAft>
-                <a:spcPts val="800"/>
-              </a:spcAft>
-              <a:defRPr sz="1100">
-                <a:solidFill>
-                  <a:srgbClr val="1E293B"/>
-                </a:solidFill>
-              </a:defRPr>
-            </a:pPr>
-            <a:r>
-              <a:t>✔ Continuous recurring revenue with high customer lifetime value (LTV).</a:t>
-            </a:r>
-          </a:p>
-          <a:p>
-            <a:pPr>
-              <a:spcAft>
-                <a:spcPts val="800"/>
-              </a:spcAft>
-              <a:defRPr sz="1100">
-                <a:solidFill>
-                  <a:srgbClr val="1E293B"/>
-                </a:solidFill>
-              </a:defRPr>
-            </a:pPr>
-            <a:r>
-              <a:t>✔ Automatic cloud synchronization for creative presets.</a:t>
-            </a:r>
-          </a:p>
-        </p:txBody>
-      </p:sp>
-      <p:sp>
-        <p:nvSpPr>
-          <p:cNvPr id="13" name="Rounded Rectangle 12"/>
+              <a:defRPr sz="1400" b="1">
+                <a:solidFill>
+                  <a:srgbClr val="059669"/>
+                </a:solidFill>
+              </a:defRPr>
+            </a:pPr>
+            <a:r>
+              <a:t>Certified Hollywood Color Science</a:t>
+            </a:r>
+          </a:p>
+          <a:p>
+            <a:pPr>
+              <a:defRPr sz="1150">
+                <a:solidFill>
+                  <a:srgbClr val="334155"/>
+                </a:solidFill>
+              </a:defRPr>
+            </a:pPr>
+            <a:r>
+              <a:t>Blackmagic Design certified color science preserving 12-bit DPX sensor data with ACEScc dynamic range.</a:t>
+            </a:r>
+          </a:p>
+        </p:txBody>
+      </p:sp>
+      <p:sp>
+        <p:nvSpPr>
+          <p:cNvPr id="10" name="Rounded Rectangle 9"/>
           <p:cNvSpPr/>
           <p:nvPr/>
         </p:nvSpPr>
         <p:spPr>
           <a:xfrm>
-            <a:off x="8065008" y="1737360"/>
-            <a:ext cx="3383280" cy="4480560"/>
+            <a:off x="822960" y="4114800"/>
+            <a:ext cx="5120640" cy="2011680"/>
           </a:xfrm>
           <a:prstGeom prst="roundRect">
             <a:avLst/>
@@ -10379,23 +8594,75 @@
       </p:sp>
       <p:sp>
         <p:nvSpPr>
-          <p:cNvPr id="14" name="Rounded Rectangle 13"/>
+          <p:cNvPr id="11" name="TextBox 10"/>
+          <p:cNvSpPr txBox="1"/>
+          <p:nvPr/>
+        </p:nvSpPr>
+        <p:spPr>
+          <a:xfrm>
+            <a:off x="1097280" y="4389120"/>
+            <a:ext cx="4572000" cy="1463040"/>
+          </a:xfrm>
+          <a:prstGeom prst="rect">
+            <a:avLst/>
+          </a:prstGeom>
+          <a:noFill/>
+        </p:spPr>
+        <p:txBody>
+          <a:bodyPr wrap="square" lIns="0" tIns="0" rIns="0" bIns="0">
+            <a:spAutoFit/>
+          </a:bodyPr>
+          <a:lstStyle/>
+          <a:p>
+            <a:pPr>
+              <a:spcAft>
+                <a:spcPts val="600"/>
+              </a:spcAft>
+              <a:defRPr sz="1400" b="1">
+                <a:solidFill>
+                  <a:srgbClr val="7C3AED"/>
+                </a:solidFill>
+              </a:defRPr>
+            </a:pPr>
+            <a:r>
+              <a:t>High-Velocity Zero-Bloat Architecture</a:t>
+            </a:r>
+          </a:p>
+          <a:p>
+            <a:pPr>
+              <a:defRPr sz="1150">
+                <a:solidFill>
+                  <a:srgbClr val="334155"/>
+                </a:solidFill>
+              </a:defRPr>
+            </a:pPr>
+            <a:r>
+              <a:t>Proprietary C++ engines &amp; ACID-safe backends built in-house for maximum throughput without third-party bloat.</a:t>
+            </a:r>
+          </a:p>
+        </p:txBody>
+      </p:sp>
+      <p:sp>
+        <p:nvSpPr>
+          <p:cNvPr id="12" name="Rounded Rectangle 11"/>
           <p:cNvSpPr/>
           <p:nvPr/>
         </p:nvSpPr>
         <p:spPr>
           <a:xfrm>
-            <a:off x="8247888" y="1920240"/>
-            <a:ext cx="3017520" cy="777240"/>
+            <a:off x="6263640" y="4114800"/>
+            <a:ext cx="5120640" cy="2011680"/>
           </a:xfrm>
           <a:prstGeom prst="roundRect">
             <a:avLst/>
           </a:prstGeom>
           <a:solidFill>
-            <a:srgbClr val="059669"/>
+            <a:srgbClr val="F8FAFC"/>
           </a:solidFill>
-          <a:ln>
-            <a:noFill/>
+          <a:ln w="12700">
+            <a:solidFill>
+              <a:srgbClr val="E2E8F0"/>
+            </a:solidFill>
           </a:ln>
         </p:spPr>
         <p:style>
@@ -10413,44 +8680,23 @@
           </a:fontRef>
         </p:style>
         <p:txBody>
-          <a:bodyPr rtlCol="0" anchor="ctr" wrap="square"/>
-          <a:lstStyle/>
-          <a:p>
-            <a:pPr algn="ctr">
-              <a:defRPr sz="1300" b="1">
-                <a:solidFill>
-                  <a:srgbClr val="FFFFFF"/>
-                </a:solidFill>
-              </a:defRPr>
-            </a:pPr>
-            <a:r>
-              <a:t>Enterprise Media Retainers</a:t>
-            </a:r>
-          </a:p>
-          <a:p>
-            <a:pPr algn="ctr">
-              <a:defRPr sz="950">
-                <a:solidFill>
-                  <a:srgbClr val="E0E7FF"/>
-                </a:solidFill>
-              </a:defRPr>
-            </a:pPr>
-            <a:r>
-              <a:t>B2B &amp; Studio Engineering</a:t>
-            </a:r>
-          </a:p>
-        </p:txBody>
-      </p:sp>
-      <p:sp>
-        <p:nvSpPr>
-          <p:cNvPr id="15" name="TextBox 14"/>
+          <a:bodyPr rtlCol="0" anchor="ctr"/>
+          <a:lstStyle/>
+          <a:p>
+            <a:pPr algn="ctr"/>
+          </a:p>
+        </p:txBody>
+      </p:sp>
+      <p:sp>
+        <p:nvSpPr>
+          <p:cNvPr id="13" name="TextBox 12"/>
           <p:cNvSpPr txBox="1"/>
           <p:nvPr/>
         </p:nvSpPr>
         <p:spPr>
           <a:xfrm>
-            <a:off x="8247888" y="2834640"/>
-            <a:ext cx="3017520" cy="3200400"/>
+            <a:off x="6537960" y="4389120"/>
+            <a:ext cx="4572000" cy="1463040"/>
           </a:xfrm>
           <a:prstGeom prst="rect">
             <a:avLst/>
@@ -10465,61 +8711,28 @@
           <a:p>
             <a:pPr>
               <a:spcAft>
-                <a:spcPts val="800"/>
+                <a:spcPts val="600"/>
               </a:spcAft>
-              <a:defRPr sz="1100">
-                <a:solidFill>
-                  <a:srgbClr val="1E293B"/>
-                </a:solidFill>
-              </a:defRPr>
-            </a:pPr>
-            <a:r>
-              <a:t>✔ Custom OFX pipeline development for regional film and ad production studios.</a:t>
-            </a:r>
-          </a:p>
-          <a:p>
-            <a:pPr>
-              <a:spcAft>
-                <a:spcPts val="800"/>
-              </a:spcAft>
-              <a:defRPr sz="1100">
-                <a:solidFill>
-                  <a:srgbClr val="1E293B"/>
-                </a:solidFill>
-              </a:defRPr>
-            </a:pPr>
-            <a:r>
-              <a:t>✔ Media promotion and viral distribution contracts via @hrlflix network.</a:t>
-            </a:r>
-          </a:p>
-          <a:p>
-            <a:pPr>
-              <a:spcAft>
-                <a:spcPts val="800"/>
-              </a:spcAft>
-              <a:defRPr sz="1100">
-                <a:solidFill>
-                  <a:srgbClr val="1E293B"/>
-                </a:solidFill>
-              </a:defRPr>
-            </a:pPr>
-            <a:r>
-              <a:t>✔ Enterprise software licensing for educational and training academies.</a:t>
-            </a:r>
-          </a:p>
-          <a:p>
-            <a:pPr>
-              <a:spcAft>
-                <a:spcPts val="800"/>
-              </a:spcAft>
-              <a:defRPr sz="1100">
-                <a:solidFill>
-                  <a:srgbClr val="1E293B"/>
-                </a:solidFill>
-              </a:defRPr>
-            </a:pPr>
-            <a:r>
-              <a:t>✔ Annual support and bespoke algorithmic solver deployments.</a:t>
+              <a:defRPr sz="1400" b="1">
+                <a:solidFill>
+                  <a:srgbClr val="D97706"/>
+                </a:solidFill>
+              </a:defRPr>
+            </a:pPr>
+            <a:r>
+              <a:t>Zero-CAC Creator Distribution Flywheel</a:t>
+            </a:r>
+          </a:p>
+          <a:p>
+            <a:pPr>
+              <a:defRPr sz="1150">
+                <a:solidFill>
+                  <a:srgbClr val="334155"/>
+                </a:solidFill>
+              </a:defRPr>
+            </a:pPr>
+            <a:r>
+              <a:t>2.5M+ active viewer network providing instant viral distribution and real-time product feedback loops.</a:t>
             </a:r>
           </a:p>
         </p:txBody>
@@ -10593,8 +8806,8 @@
         </p:nvSpPr>
         <p:spPr>
           <a:xfrm>
-            <a:off x="731520" y="411480"/>
-            <a:ext cx="10728655" cy="274320"/>
+            <a:off x="822960" y="457200"/>
+            <a:ext cx="10515600" cy="274320"/>
           </a:xfrm>
           <a:prstGeom prst="rect">
             <a:avLst/>
@@ -10616,7 +8829,7 @@
               </a:defRPr>
             </a:pPr>
             <a:r>
-              <a:t>PROVEN RESULTS</a:t>
+              <a:t>LEADERSHIP</a:t>
             </a:r>
           </a:p>
         </p:txBody>
@@ -10629,8 +8842,8 @@
         </p:nvSpPr>
         <p:spPr>
           <a:xfrm>
-            <a:off x="731520" y="685800"/>
-            <a:ext cx="10728655" cy="548640"/>
+            <a:off x="822960" y="731520"/>
+            <a:ext cx="10515600" cy="548640"/>
           </a:xfrm>
           <a:prstGeom prst="rect">
             <a:avLst/>
@@ -10652,7 +8865,7 @@
               </a:defRPr>
             </a:pPr>
             <a:r>
-              <a:t>Traction, Metrics &amp; Institutional Validation</a:t>
+              <a:t>Founder &amp; Leadership Profile</a:t>
             </a:r>
           </a:p>
         </p:txBody>
@@ -10665,8 +8878,8 @@
         </p:nvSpPr>
         <p:spPr>
           <a:xfrm>
-            <a:off x="731520" y="1234440"/>
-            <a:ext cx="10728655" cy="320040"/>
+            <a:off x="822960" y="1280160"/>
+            <a:ext cx="10515600" cy="274320"/>
           </a:xfrm>
           <a:prstGeom prst="rect">
             <a:avLst/>
@@ -10688,64 +8901,21 @@
               </a:defRPr>
             </a:pPr>
             <a:r>
-              <a:t>Measurable reach, certified technical rigor, and live production deployments.</a:t>
-            </a:r>
-          </a:p>
-        </p:txBody>
-      </p:sp>
-      <p:sp>
-        <p:nvSpPr>
-          <p:cNvPr id="6" name="Rectangle 5"/>
+              <a:t>Combining deep algorithmic systems engineering with certified media production.</a:t>
+            </a:r>
+          </a:p>
+        </p:txBody>
+      </p:sp>
+      <p:sp>
+        <p:nvSpPr>
+          <p:cNvPr id="6" name="Rounded Rectangle 5"/>
           <p:cNvSpPr/>
           <p:nvPr/>
         </p:nvSpPr>
         <p:spPr>
           <a:xfrm>
-            <a:off x="731520" y="1572768"/>
-            <a:ext cx="10728655" cy="13716"/>
-          </a:xfrm>
-          <a:prstGeom prst="rect">
-            <a:avLst/>
-          </a:prstGeom>
-          <a:solidFill>
-            <a:srgbClr val="E2E8F0"/>
-          </a:solidFill>
-          <a:ln>
-            <a:noFill/>
-          </a:ln>
-        </p:spPr>
-        <p:style>
-          <a:lnRef idx="1">
-            <a:schemeClr val="accent1"/>
-          </a:lnRef>
-          <a:fillRef idx="3">
-            <a:schemeClr val="accent1"/>
-          </a:fillRef>
-          <a:effectRef idx="2">
-            <a:schemeClr val="accent1"/>
-          </a:effectRef>
-          <a:fontRef idx="minor">
-            <a:schemeClr val="lt1"/>
-          </a:fontRef>
-        </p:style>
-        <p:txBody>
-          <a:bodyPr rtlCol="0" anchor="ctr"/>
-          <a:lstStyle/>
-          <a:p>
-            <a:pPr algn="ctr"/>
-          </a:p>
-        </p:txBody>
-      </p:sp>
-      <p:sp>
-        <p:nvSpPr>
-          <p:cNvPr id="7" name="Rounded Rectangle 6"/>
-          <p:cNvSpPr/>
-          <p:nvPr/>
-        </p:nvSpPr>
-        <p:spPr>
-          <a:xfrm>
-            <a:off x="731520" y="1737360"/>
-            <a:ext cx="2514600" cy="1645920"/>
+            <a:off x="822960" y="1828800"/>
+            <a:ext cx="4114800" cy="4297680"/>
           </a:xfrm>
           <a:prstGeom prst="roundRect">
             <a:avLst/>
@@ -10783,14 +8953,14 @@
       </p:sp>
       <p:sp>
         <p:nvSpPr>
-          <p:cNvPr id="8" name="TextBox 7"/>
+          <p:cNvPr id="7" name="TextBox 6"/>
           <p:cNvSpPr txBox="1"/>
           <p:nvPr/>
         </p:nvSpPr>
         <p:spPr>
           <a:xfrm>
-            <a:off x="868680" y="1828800"/>
-            <a:ext cx="2240280" cy="1463040"/>
+            <a:off x="1097280" y="2103120"/>
+            <a:ext cx="3566160" cy="3749039"/>
           </a:xfrm>
           <a:prstGeom prst="rect">
             <a:avLst/>
@@ -10804,55 +8974,106 @@
           <a:lstStyle/>
           <a:p>
             <a:pPr>
-              <a:defRPr sz="2200" b="1">
-                <a:solidFill>
-                  <a:srgbClr val="059669"/>
-                </a:solidFill>
-              </a:defRPr>
-            </a:pPr>
-            <a:r>
-              <a:t>2.5M+</a:t>
-            </a:r>
-          </a:p>
-          <a:p>
-            <a:pPr>
               <a:spcAft>
                 <a:spcPts val="200"/>
               </a:spcAft>
-              <a:defRPr sz="1100" b="1">
+              <a:defRPr sz="1000" b="1">
+                <a:solidFill>
+                  <a:srgbClr val="2563EB"/>
+                </a:solidFill>
+              </a:defRPr>
+            </a:pPr>
+            <a:r>
+              <a:t>FOUNDER &amp; MANAGING DIRECTOR</a:t>
+            </a:r>
+          </a:p>
+          <a:p>
+            <a:pPr>
+              <a:spcAft>
+                <a:spcPts val="1200"/>
+              </a:spcAft>
+              <a:defRPr sz="2200" b="1">
                 <a:solidFill>
                   <a:srgbClr val="0F172A"/>
                 </a:solidFill>
               </a:defRPr>
             </a:pPr>
             <a:r>
-              <a:t>Organic Impressions</a:t>
-            </a:r>
-          </a:p>
-          <a:p>
-            <a:pPr>
-              <a:defRPr sz="900">
-                <a:solidFill>
-                  <a:srgbClr val="64748B"/>
-                </a:solidFill>
-              </a:defRPr>
-            </a:pPr>
-            <a:r>
-              <a:t>High-retention reach across creator channels (@hrlpremiumstudio, @hrlefx)</a:t>
-            </a:r>
-          </a:p>
-        </p:txBody>
-      </p:sp>
-      <p:sp>
-        <p:nvSpPr>
-          <p:cNvPr id="9" name="Rounded Rectangle 8"/>
+              <a:t>Pavan Kumar Sadashiv</a:t>
+            </a:r>
+          </a:p>
+          <a:p>
+            <a:pPr>
+              <a:spcAft>
+                <a:spcPts val="800"/>
+              </a:spcAft>
+              <a:defRPr sz="1100">
+                <a:solidFill>
+                  <a:srgbClr val="334155"/>
+                </a:solidFill>
+              </a:defRPr>
+            </a:pPr>
+            <a:r>
+              <a:t>• B.E. Computer Science &amp; Engg (AI &amp; ML) — Sahyadri College (SCEM), Mangaluru.</a:t>
+            </a:r>
+          </a:p>
+          <a:p>
+            <a:pPr>
+              <a:spcAft>
+                <a:spcPts val="800"/>
+              </a:spcAft>
+              <a:defRPr sz="1100">
+                <a:solidFill>
+                  <a:srgbClr val="334155"/>
+                </a:solidFill>
+              </a:defRPr>
+            </a:pPr>
+            <a:r>
+              <a:t>• AI Systems Chief Architect &amp; Full-Stack Systems Engineer.</a:t>
+            </a:r>
+          </a:p>
+          <a:p>
+            <a:pPr>
+              <a:spcAft>
+                <a:spcPts val="800"/>
+              </a:spcAft>
+              <a:defRPr sz="1100">
+                <a:solidFill>
+                  <a:srgbClr val="334155"/>
+                </a:solidFill>
+              </a:defRPr>
+            </a:pPr>
+            <a:r>
+              <a:t>• Specialized in low-level GPU compute (C++, Metal, CUDA), discrete optimization, and AI agents.</a:t>
+            </a:r>
+          </a:p>
+          <a:p>
+            <a:pPr>
+              <a:spcAft>
+                <a:spcPts val="800"/>
+              </a:spcAft>
+              <a:defRPr sz="1100">
+                <a:solidFill>
+                  <a:srgbClr val="334155"/>
+                </a:solidFill>
+              </a:defRPr>
+            </a:pPr>
+            <a:r>
+              <a:t>• Tier-2 Hub: Mangaluru, Karnataka (Beyond Bengaluru Hub).</a:t>
+            </a:r>
+          </a:p>
+        </p:txBody>
+      </p:sp>
+      <p:sp>
+        <p:nvSpPr>
+          <p:cNvPr id="8" name="Rounded Rectangle 7"/>
           <p:cNvSpPr/>
           <p:nvPr/>
         </p:nvSpPr>
         <p:spPr>
           <a:xfrm>
-            <a:off x="3465576" y="1737360"/>
-            <a:ext cx="2514600" cy="1645920"/>
+            <a:off x="5303520" y="1828800"/>
+            <a:ext cx="6035040" cy="1280160"/>
           </a:xfrm>
           <a:prstGeom prst="roundRect">
             <a:avLst/>
@@ -10890,14 +9111,14 @@
       </p:sp>
       <p:sp>
         <p:nvSpPr>
-          <p:cNvPr id="10" name="TextBox 9"/>
+          <p:cNvPr id="9" name="TextBox 8"/>
           <p:cNvSpPr txBox="1"/>
           <p:nvPr/>
         </p:nvSpPr>
         <p:spPr>
           <a:xfrm>
-            <a:off x="3602736" y="1828800"/>
-            <a:ext cx="2240280" cy="1463040"/>
+            <a:off x="5577840" y="2011680"/>
+            <a:ext cx="5486400" cy="914400"/>
           </a:xfrm>
           <a:prstGeom prst="rect">
             <a:avLst/>
@@ -10911,55 +9132,43 @@
           <a:lstStyle/>
           <a:p>
             <a:pPr>
-              <a:defRPr sz="2200" b="1">
-                <a:solidFill>
-                  <a:srgbClr val="2563EB"/>
-                </a:solidFill>
-              </a:defRPr>
-            </a:pPr>
-            <a:r>
-              <a:t>100+ Faculty</a:t>
-            </a:r>
-          </a:p>
-          <a:p>
-            <a:pPr>
               <a:spcAft>
                 <a:spcPts val="200"/>
               </a:spcAft>
-              <a:defRPr sz="1100" b="1">
-                <a:solidFill>
-                  <a:srgbClr val="0F172A"/>
-                </a:solidFill>
-              </a:defRPr>
-            </a:pPr>
-            <a:r>
-              <a:t>Institutional Users</a:t>
-            </a:r>
-          </a:p>
-          <a:p>
-            <a:pPr>
-              <a:defRPr sz="900">
-                <a:solidFill>
-                  <a:srgbClr val="64748B"/>
-                </a:solidFill>
-              </a:defRPr>
-            </a:pPr>
-            <a:r>
-              <a:t>Live exam scheduling platform deployed at Sahyadri College (SCEM)</a:t>
-            </a:r>
-          </a:p>
-        </p:txBody>
-      </p:sp>
-      <p:sp>
-        <p:nvSpPr>
-          <p:cNvPr id="11" name="Rounded Rectangle 10"/>
+              <a:defRPr sz="1300" b="1">
+                <a:solidFill>
+                  <a:srgbClr val="2563EB"/>
+                </a:solidFill>
+              </a:defRPr>
+            </a:pPr>
+            <a:r>
+              <a:t>Blackmagic Design — Certified User</a:t>
+            </a:r>
+          </a:p>
+          <a:p>
+            <a:pPr>
+              <a:defRPr sz="1100">
+                <a:solidFill>
+                  <a:srgbClr val="334155"/>
+                </a:solidFill>
+              </a:defRPr>
+            </a:pPr>
+            <a:r>
+              <a:t>Validated mastery of Hollywood ACEScc color science, node graphs, and DaVinci Resolve OFX integration.</a:t>
+            </a:r>
+          </a:p>
+        </p:txBody>
+      </p:sp>
+      <p:sp>
+        <p:nvSpPr>
+          <p:cNvPr id="10" name="Rounded Rectangle 9"/>
           <p:cNvSpPr/>
           <p:nvPr/>
         </p:nvSpPr>
         <p:spPr>
           <a:xfrm>
-            <a:off x="6199632" y="1737360"/>
-            <a:ext cx="2514600" cy="1645920"/>
+            <a:off x="5303520" y="3337560"/>
+            <a:ext cx="6035040" cy="1280160"/>
           </a:xfrm>
           <a:prstGeom prst="roundRect">
             <a:avLst/>
@@ -10997,14 +9206,14 @@
       </p:sp>
       <p:sp>
         <p:nvSpPr>
-          <p:cNvPr id="12" name="TextBox 11"/>
+          <p:cNvPr id="11" name="TextBox 10"/>
           <p:cNvSpPr txBox="1"/>
           <p:nvPr/>
         </p:nvSpPr>
         <p:spPr>
           <a:xfrm>
-            <a:off x="6336792" y="1828800"/>
-            <a:ext cx="2240280" cy="1463040"/>
+            <a:off x="5577840" y="3520440"/>
+            <a:ext cx="5486400" cy="914400"/>
           </a:xfrm>
           <a:prstGeom prst="rect">
             <a:avLst/>
@@ -11018,55 +9227,43 @@
           <a:lstStyle/>
           <a:p>
             <a:pPr>
-              <a:defRPr sz="2200" b="1">
-                <a:solidFill>
-                  <a:srgbClr val="4F46E5"/>
-                </a:solidFill>
-              </a:defRPr>
-            </a:pPr>
-            <a:r>
-              <a:t>Certified</a:t>
-            </a:r>
-          </a:p>
-          <a:p>
-            <a:pPr>
               <a:spcAft>
                 <a:spcPts val="200"/>
               </a:spcAft>
-              <a:defRPr sz="1100" b="1">
-                <a:solidFill>
-                  <a:srgbClr val="0F172A"/>
-                </a:solidFill>
-              </a:defRPr>
-            </a:pPr>
-            <a:r>
-              <a:t>Blackmagic Design</a:t>
-            </a:r>
-          </a:p>
-          <a:p>
-            <a:pPr>
-              <a:defRPr sz="900">
-                <a:solidFill>
-                  <a:srgbClr val="64748B"/>
-                </a:solidFill>
-              </a:defRPr>
-            </a:pPr>
-            <a:r>
-              <a:t>Certified DaVinci Resolve practitioner in ACEScc color science</a:t>
-            </a:r>
-          </a:p>
-        </p:txBody>
-      </p:sp>
-      <p:sp>
-        <p:nvSpPr>
-          <p:cNvPr id="13" name="Rounded Rectangle 12"/>
+              <a:defRPr sz="1300" b="1">
+                <a:solidFill>
+                  <a:srgbClr val="7C3AED"/>
+                </a:solidFill>
+              </a:defRPr>
+            </a:pPr>
+            <a:r>
+              <a:t>JPMorgan Chase &amp; Co. — Software Engineering</a:t>
+            </a:r>
+          </a:p>
+          <a:p>
+            <a:pPr>
+              <a:defRPr sz="1100">
+                <a:solidFill>
+                  <a:srgbClr val="334155"/>
+                </a:solidFill>
+              </a:defRPr>
+            </a:pPr>
+            <a:r>
+              <a:t>Accreditation in Kafka distributed streaming, low-latency API design, and transaction integrity.</a:t>
+            </a:r>
+          </a:p>
+        </p:txBody>
+      </p:sp>
+      <p:sp>
+        <p:nvSpPr>
+          <p:cNvPr id="12" name="Rounded Rectangle 11"/>
           <p:cNvSpPr/>
           <p:nvPr/>
         </p:nvSpPr>
         <p:spPr>
           <a:xfrm>
-            <a:off x="8933688" y="1737360"/>
-            <a:ext cx="2514600" cy="1645920"/>
+            <a:off x="5303520" y="4846320"/>
+            <a:ext cx="6035040" cy="1280160"/>
           </a:xfrm>
           <a:prstGeom prst="roundRect">
             <a:avLst/>
@@ -11104,14 +9301,14 @@
       </p:sp>
       <p:sp>
         <p:nvSpPr>
-          <p:cNvPr id="14" name="TextBox 13"/>
+          <p:cNvPr id="13" name="TextBox 12"/>
           <p:cNvSpPr txBox="1"/>
           <p:nvPr/>
         </p:nvSpPr>
         <p:spPr>
           <a:xfrm>
-            <a:off x="9070848" y="1828800"/>
-            <a:ext cx="2240280" cy="1463040"/>
+            <a:off x="5577840" y="5029200"/>
+            <a:ext cx="5486400" cy="914400"/>
           </a:xfrm>
           <a:prstGeom prst="rect">
             <a:avLst/>
@@ -11125,327 +9322,29 @@
           <a:lstStyle/>
           <a:p>
             <a:pPr>
-              <a:defRPr sz="2200" b="1">
-                <a:solidFill>
-                  <a:srgbClr val="D97706"/>
-                </a:solidFill>
-              </a:defRPr>
-            </a:pPr>
-            <a:r>
-              <a:t>Audited Rigor</a:t>
-            </a:r>
-          </a:p>
-          <a:p>
-            <a:pPr>
               <a:spcAft>
                 <a:spcPts val="200"/>
               </a:spcAft>
-              <a:defRPr sz="1100" b="1">
-                <a:solidFill>
-                  <a:srgbClr val="0F172A"/>
-                </a:solidFill>
-              </a:defRPr>
-            </a:pPr>
-            <a:r>
-              <a:t>JPMorgan &amp; Deloitte</a:t>
-            </a:r>
-          </a:p>
-          <a:p>
-            <a:pPr>
-              <a:defRPr sz="900">
-                <a:solidFill>
-                  <a:srgbClr val="64748B"/>
-                </a:solidFill>
-              </a:defRPr>
-            </a:pPr>
-            <a:r>
-              <a:t>Software engineering &amp; cyber defense simulation qualifications</a:t>
-            </a:r>
-          </a:p>
-        </p:txBody>
-      </p:sp>
-      <p:sp>
-        <p:nvSpPr>
-          <p:cNvPr id="15" name="Rounded Rectangle 14"/>
-          <p:cNvSpPr/>
-          <p:nvPr/>
-        </p:nvSpPr>
-        <p:spPr>
-          <a:xfrm>
-            <a:off x="731520" y="3566160"/>
-            <a:ext cx="5212080" cy="2743200"/>
-          </a:xfrm>
-          <a:prstGeom prst="roundRect">
-            <a:avLst/>
-          </a:prstGeom>
-          <a:solidFill>
-            <a:srgbClr val="F8FAFC"/>
-          </a:solidFill>
-          <a:ln w="12700">
-            <a:solidFill>
-              <a:srgbClr val="E2E8F0"/>
-            </a:solidFill>
-          </a:ln>
-        </p:spPr>
-        <p:style>
-          <a:lnRef idx="1">
-            <a:schemeClr val="accent1"/>
-          </a:lnRef>
-          <a:fillRef idx="3">
-            <a:schemeClr val="accent1"/>
-          </a:fillRef>
-          <a:effectRef idx="2">
-            <a:schemeClr val="accent1"/>
-          </a:effectRef>
-          <a:fontRef idx="minor">
-            <a:schemeClr val="lt1"/>
-          </a:fontRef>
-        </p:style>
-        <p:txBody>
-          <a:bodyPr rtlCol="0" anchor="ctr"/>
-          <a:lstStyle/>
-          <a:p>
-            <a:pPr algn="ctr"/>
-          </a:p>
-        </p:txBody>
-      </p:sp>
-      <p:sp>
-        <p:nvSpPr>
-          <p:cNvPr id="16" name="TextBox 15"/>
-          <p:cNvSpPr txBox="1"/>
-          <p:nvPr/>
-        </p:nvSpPr>
-        <p:spPr>
-          <a:xfrm>
-            <a:off x="914400" y="3749039"/>
-            <a:ext cx="4846320" cy="2377440"/>
-          </a:xfrm>
-          <a:prstGeom prst="rect">
-            <a:avLst/>
-          </a:prstGeom>
-          <a:noFill/>
-        </p:spPr>
-        <p:txBody>
-          <a:bodyPr wrap="square" lIns="0" tIns="0" rIns="0" bIns="0">
-            <a:spAutoFit/>
-          </a:bodyPr>
-          <a:lstStyle/>
-          <a:p>
-            <a:pPr>
-              <a:spcAft>
-                <a:spcPts val="800"/>
-              </a:spcAft>
-              <a:defRPr sz="1200" b="1">
-                <a:solidFill>
-                  <a:srgbClr val="2563EB"/>
-                </a:solidFill>
-              </a:defRPr>
-            </a:pPr>
-            <a:r>
-              <a:t>ACADEMIC &amp; INCUBATION RECOGNITION</a:t>
-            </a:r>
-          </a:p>
-          <a:p>
-            <a:pPr>
-              <a:spcAft>
-                <a:spcPts val="400"/>
-              </a:spcAft>
-              <a:defRPr sz="1050">
-                <a:solidFill>
-                  <a:srgbClr val="1E293B"/>
-                </a:solidFill>
-              </a:defRPr>
-            </a:pPr>
-            <a:r>
-              <a:t>• E-Cell Sahyadri × IIT Bombay Eureka! 2026 pitch participant.</a:t>
-            </a:r>
-          </a:p>
-          <a:p>
-            <a:pPr>
-              <a:spcAft>
-                <a:spcPts val="400"/>
-              </a:spcAft>
-              <a:defRPr sz="1050">
-                <a:solidFill>
-                  <a:srgbClr val="1E293B"/>
-                </a:solidFill>
-              </a:defRPr>
-            </a:pPr>
-            <a:r>
-              <a:t>• End-to-end exam invigilation and anti-cheating batch planner deployed at SCEM.</a:t>
-            </a:r>
-          </a:p>
-          <a:p>
-            <a:pPr>
-              <a:spcAft>
-                <a:spcPts val="400"/>
-              </a:spcAft>
-              <a:defRPr sz="1050">
-                <a:solidFill>
-                  <a:srgbClr val="1E293B"/>
-                </a:solidFill>
-              </a:defRPr>
-            </a:pPr>
-            <a:r>
-              <a:t>• Active student and faculty beta feedback loops powering algorithm optimization.</a:t>
-            </a:r>
-          </a:p>
-          <a:p>
-            <a:pPr>
-              <a:spcAft>
-                <a:spcPts val="400"/>
-              </a:spcAft>
-              <a:defRPr sz="1050">
-                <a:solidFill>
-                  <a:srgbClr val="1E293B"/>
-                </a:solidFill>
-              </a:defRPr>
-            </a:pPr>
-            <a:r>
-              <a:t>• Eligible for Karnataka ELEVATE 2026 (Beyond Bengaluru - Mangaluru Hub).</a:t>
-            </a:r>
-          </a:p>
-        </p:txBody>
-      </p:sp>
-      <p:sp>
-        <p:nvSpPr>
-          <p:cNvPr id="17" name="Rounded Rectangle 16"/>
-          <p:cNvSpPr/>
-          <p:nvPr/>
-        </p:nvSpPr>
-        <p:spPr>
-          <a:xfrm>
-            <a:off x="6217920" y="3566160"/>
-            <a:ext cx="5212080" cy="2743200"/>
-          </a:xfrm>
-          <a:prstGeom prst="roundRect">
-            <a:avLst/>
-          </a:prstGeom>
-          <a:solidFill>
-            <a:srgbClr val="F8FAFC"/>
-          </a:solidFill>
-          <a:ln w="12700">
-            <a:solidFill>
-              <a:srgbClr val="E2E8F0"/>
-            </a:solidFill>
-          </a:ln>
-        </p:spPr>
-        <p:style>
-          <a:lnRef idx="1">
-            <a:schemeClr val="accent1"/>
-          </a:lnRef>
-          <a:fillRef idx="3">
-            <a:schemeClr val="accent1"/>
-          </a:fillRef>
-          <a:effectRef idx="2">
-            <a:schemeClr val="accent1"/>
-          </a:effectRef>
-          <a:fontRef idx="minor">
-            <a:schemeClr val="lt1"/>
-          </a:fontRef>
-        </p:style>
-        <p:txBody>
-          <a:bodyPr rtlCol="0" anchor="ctr"/>
-          <a:lstStyle/>
-          <a:p>
-            <a:pPr algn="ctr"/>
-          </a:p>
-        </p:txBody>
-      </p:sp>
-      <p:sp>
-        <p:nvSpPr>
-          <p:cNvPr id="18" name="TextBox 17"/>
-          <p:cNvSpPr txBox="1"/>
-          <p:nvPr/>
-        </p:nvSpPr>
-        <p:spPr>
-          <a:xfrm>
-            <a:off x="6400800" y="3749039"/>
-            <a:ext cx="4846320" cy="2377440"/>
-          </a:xfrm>
-          <a:prstGeom prst="rect">
-            <a:avLst/>
-          </a:prstGeom>
-          <a:noFill/>
-        </p:spPr>
-        <p:txBody>
-          <a:bodyPr wrap="square" lIns="0" tIns="0" rIns="0" bIns="0">
-            <a:spAutoFit/>
-          </a:bodyPr>
-          <a:lstStyle/>
-          <a:p>
-            <a:pPr>
-              <a:spcAft>
-                <a:spcPts val="800"/>
-              </a:spcAft>
-              <a:defRPr sz="1200" b="1">
-                <a:solidFill>
-                  <a:srgbClr val="4F46E5"/>
-                </a:solidFill>
-              </a:defRPr>
-            </a:pPr>
-            <a:r>
-              <a:t>LIVE PLATFORM &amp; ECOSYSTEM DEPLOYMENT</a:t>
-            </a:r>
-          </a:p>
-          <a:p>
-            <a:pPr>
-              <a:spcAft>
-                <a:spcPts val="400"/>
-              </a:spcAft>
-              <a:defRPr sz="1050">
-                <a:solidFill>
-                  <a:srgbClr val="1E293B"/>
-                </a:solidFill>
-              </a:defRPr>
-            </a:pPr>
-            <a:r>
-              <a:t>• Live 4K 60FPS theater showcase running live on GitHub Pages worldwide.</a:t>
-            </a:r>
-          </a:p>
-          <a:p>
-            <a:pPr>
-              <a:spcAft>
-                <a:spcPts val="400"/>
-              </a:spcAft>
-              <a:defRPr sz="1050">
-                <a:solidFill>
-                  <a:srgbClr val="1E293B"/>
-                </a:solidFill>
-              </a:defRPr>
-            </a:pPr>
-            <a:r>
-              <a:t>• SEO-dominated web infrastructure deployed at hrl-brand-seo.vercel.app.</a:t>
-            </a:r>
-          </a:p>
-          <a:p>
-            <a:pPr>
-              <a:spcAft>
-                <a:spcPts val="400"/>
-              </a:spcAft>
-              <a:defRPr sz="1050">
-                <a:solidFill>
-                  <a:srgbClr val="1E293B"/>
-                </a:solidFill>
-              </a:defRPr>
-            </a:pPr>
-            <a:r>
-              <a:t>• Proprietary repositories: exam-invigilation-dsa-app, aether-engine, omnitransform.</a:t>
-            </a:r>
-          </a:p>
-          <a:p>
-            <a:pPr>
-              <a:spcAft>
-                <a:spcPts val="400"/>
-              </a:spcAft>
-              <a:defRPr sz="1050">
-                <a:solidFill>
-                  <a:srgbClr val="1E293B"/>
-                </a:solidFill>
-              </a:defRPr>
-            </a:pPr>
-            <a:r>
-              <a:t>• Audited intellectual property filings and corporate brand registrations.</a:t>
+              <a:defRPr sz="1300" b="1">
+                <a:solidFill>
+                  <a:srgbClr val="059669"/>
+                </a:solidFill>
+              </a:defRPr>
+            </a:pPr>
+            <a:r>
+              <a:t>Deloitte Australia — Cyber Defense &amp; Governance</a:t>
+            </a:r>
+          </a:p>
+          <a:p>
+            <a:pPr>
+              <a:defRPr sz="1100">
+                <a:solidFill>
+                  <a:srgbClr val="334155"/>
+                </a:solidFill>
+              </a:defRPr>
+            </a:pPr>
+            <a:r>
+              <a:t>Accreditation in enterprise threat modeling, perimeter defense, and IP access governance.</a:t>
             </a:r>
           </a:p>
         </p:txBody>
@@ -11519,8 +9418,8 @@
         </p:nvSpPr>
         <p:spPr>
           <a:xfrm>
-            <a:off x="731520" y="411480"/>
-            <a:ext cx="10728655" cy="274320"/>
+            <a:off x="822960" y="457200"/>
+            <a:ext cx="10515600" cy="274320"/>
           </a:xfrm>
           <a:prstGeom prst="rect">
             <a:avLst/>
@@ -11542,7 +9441,7 @@
               </a:defRPr>
             </a:pPr>
             <a:r>
-              <a:t>BARRIERS TO ENTRY</a:t>
+              <a:t>FUNDING &amp; ROADMAP</a:t>
             </a:r>
           </a:p>
         </p:txBody>
@@ -11555,8 +9454,8 @@
         </p:nvSpPr>
         <p:spPr>
           <a:xfrm>
-            <a:off x="731520" y="685800"/>
-            <a:ext cx="10728655" cy="548640"/>
+            <a:off x="822960" y="731520"/>
+            <a:ext cx="10515600" cy="548640"/>
           </a:xfrm>
           <a:prstGeom prst="rect">
             <a:avLst/>
@@ -11578,7 +9477,7 @@
               </a:defRPr>
             </a:pPr>
             <a:r>
-              <a:t>Competitive Moat — Defensible Advantages</a:t>
+              <a:t>Fund Utilization &amp; Milestone Roadmap</a:t>
             </a:r>
           </a:p>
         </p:txBody>
@@ -11591,8 +9490,8 @@
         </p:nvSpPr>
         <p:spPr>
           <a:xfrm>
-            <a:off x="731520" y="1234440"/>
-            <a:ext cx="10728655" cy="320040"/>
+            <a:off x="822960" y="1280160"/>
+            <a:ext cx="10515600" cy="274320"/>
           </a:xfrm>
           <a:prstGeom prst="rect">
             <a:avLst/>
@@ -11614,64 +9513,21 @@
               </a:defRPr>
             </a:pPr>
             <a:r>
-              <a:t>Why incumbents and web wrappers cannot easily replicate our native software stack.</a:t>
-            </a:r>
-          </a:p>
-        </p:txBody>
-      </p:sp>
-      <p:sp>
-        <p:nvSpPr>
-          <p:cNvPr id="6" name="Rectangle 5"/>
+              <a:t>Targeting ₹20L – ₹50L non-dilutive grant support (GENESIS EIR / ELEVATE / SISFS).</a:t>
+            </a:r>
+          </a:p>
+        </p:txBody>
+      </p:sp>
+      <p:sp>
+        <p:nvSpPr>
+          <p:cNvPr id="6" name="Rounded Rectangle 5"/>
           <p:cNvSpPr/>
           <p:nvPr/>
         </p:nvSpPr>
         <p:spPr>
           <a:xfrm>
-            <a:off x="731520" y="1572768"/>
-            <a:ext cx="10728655" cy="13716"/>
-          </a:xfrm>
-          <a:prstGeom prst="rect">
-            <a:avLst/>
-          </a:prstGeom>
-          <a:solidFill>
-            <a:srgbClr val="E2E8F0"/>
-          </a:solidFill>
-          <a:ln>
-            <a:noFill/>
-          </a:ln>
-        </p:spPr>
-        <p:style>
-          <a:lnRef idx="1">
-            <a:schemeClr val="accent1"/>
-          </a:lnRef>
-          <a:fillRef idx="3">
-            <a:schemeClr val="accent1"/>
-          </a:fillRef>
-          <a:effectRef idx="2">
-            <a:schemeClr val="accent1"/>
-          </a:effectRef>
-          <a:fontRef idx="minor">
-            <a:schemeClr val="lt1"/>
-          </a:fontRef>
-        </p:style>
-        <p:txBody>
-          <a:bodyPr rtlCol="0" anchor="ctr"/>
-          <a:lstStyle/>
-          <a:p>
-            <a:pPr algn="ctr"/>
-          </a:p>
-        </p:txBody>
-      </p:sp>
-      <p:sp>
-        <p:nvSpPr>
-          <p:cNvPr id="7" name="Rounded Rectangle 6"/>
-          <p:cNvSpPr/>
-          <p:nvPr/>
-        </p:nvSpPr>
-        <p:spPr>
-          <a:xfrm>
-            <a:off x="731520" y="1737360"/>
-            <a:ext cx="5212080" cy="2148840"/>
+            <a:off x="822960" y="1828800"/>
+            <a:ext cx="5120640" cy="4297680"/>
           </a:xfrm>
           <a:prstGeom prst="roundRect">
             <a:avLst/>
@@ -11709,14 +9565,14 @@
       </p:sp>
       <p:sp>
         <p:nvSpPr>
-          <p:cNvPr id="8" name="TextBox 7"/>
+          <p:cNvPr id="7" name="TextBox 6"/>
           <p:cNvSpPr txBox="1"/>
           <p:nvPr/>
         </p:nvSpPr>
         <p:spPr>
           <a:xfrm>
-            <a:off x="914400" y="1874520"/>
-            <a:ext cx="4846320" cy="1828800"/>
+            <a:off x="1097280" y="2011680"/>
+            <a:ext cx="4572000" cy="3931920"/>
           </a:xfrm>
           <a:prstGeom prst="rect">
             <a:avLst/>
@@ -11731,60 +9587,138 @@
           <a:p>
             <a:pPr>
               <a:spcAft>
-                <a:spcPts val="600"/>
+                <a:spcPts val="1200"/>
               </a:spcAft>
-              <a:defRPr sz="1300" b="1">
+              <a:defRPr sz="1200" b="1">
                 <a:solidFill>
                   <a:srgbClr val="2563EB"/>
                 </a:solidFill>
               </a:defRPr>
             </a:pPr>
             <a:r>
-              <a:t>Native GPU vs. Slow Web Wrappers</a:t>
+              <a:t>BUDGET ALLOCATION (₹50 LAKHS)</a:t>
+            </a:r>
+          </a:p>
+          <a:p>
+            <a:pPr>
+              <a:defRPr sz="1200" b="1">
+                <a:solidFill>
+                  <a:srgbClr val="0F172A"/>
+                </a:solidFill>
+              </a:defRPr>
+            </a:pPr>
+            <a:r>
+              <a:t>40%  •  Core R&amp;D &amp; Plugin Engineering (₹20,00,000)</a:t>
             </a:r>
           </a:p>
           <a:p>
             <a:pPr>
               <a:spcAft>
-                <a:spcPts val="400"/>
+                <a:spcPts val="800"/>
               </a:spcAft>
-              <a:defRPr sz="1050">
-                <a:solidFill>
-                  <a:srgbClr val="1E293B"/>
-                </a:solidFill>
-              </a:defRPr>
-            </a:pPr>
-            <a:r>
-              <a:t>• Incumbents rely on slow cloud APIs with monthly recurring token fees.</a:t>
+              <a:defRPr sz="1000">
+                <a:solidFill>
+                  <a:srgbClr val="64748B"/>
+                </a:solidFill>
+              </a:defRPr>
+            </a:pPr>
+            <a:r>
+              <a:t>DaVinci Resolve OFX C++/CUDA engine &amp; ONNX depth AI.</a:t>
+            </a:r>
+          </a:p>
+          <a:p>
+            <a:pPr>
+              <a:defRPr sz="1200" b="1">
+                <a:solidFill>
+                  <a:srgbClr val="0F172A"/>
+                </a:solidFill>
+              </a:defRPr>
+            </a:pPr>
+            <a:r>
+              <a:t>30%  •  GPU Hardware &amp; Compute Lab (₹15,00,000)</a:t>
             </a:r>
           </a:p>
           <a:p>
             <a:pPr>
               <a:spcAft>
-                <a:spcPts val="400"/>
+                <a:spcPts val="800"/>
               </a:spcAft>
-              <a:defRPr sz="1050">
-                <a:solidFill>
-                  <a:srgbClr val="1E293B"/>
-                </a:solidFill>
-              </a:defRPr>
-            </a:pPr>
-            <a:r>
-              <a:t>• HRL executes directly on local Metal/CUDA GPU shaders with 0ms latency and zero server operational costs.</a:t>
-            </a:r>
-          </a:p>
-        </p:txBody>
-      </p:sp>
-      <p:sp>
-        <p:nvSpPr>
-          <p:cNvPr id="9" name="Rounded Rectangle 8"/>
+              <a:defRPr sz="1000">
+                <a:solidFill>
+                  <a:srgbClr val="64748B"/>
+                </a:solidFill>
+              </a:defRPr>
+            </a:pPr>
+            <a:r>
+              <a:t>Dedicated testbeds for real-time 4K 60FPS optimization.</a:t>
+            </a:r>
+          </a:p>
+          <a:p>
+            <a:pPr>
+              <a:defRPr sz="1200" b="1">
+                <a:solidFill>
+                  <a:srgbClr val="0F172A"/>
+                </a:solidFill>
+              </a:defRPr>
+            </a:pPr>
+            <a:r>
+              <a:t>10%  •  IP, Patents &amp; Trademark Filings (₹5,00,000)</a:t>
+            </a:r>
+          </a:p>
+          <a:p>
+            <a:pPr>
+              <a:spcAft>
+                <a:spcPts val="800"/>
+              </a:spcAft>
+              <a:defRPr sz="1000">
+                <a:solidFill>
+                  <a:srgbClr val="64748B"/>
+                </a:solidFill>
+              </a:defRPr>
+            </a:pPr>
+            <a:r>
+              <a:t>Indian Patent Office (IPO) filings &amp; international IP protection.</a:t>
+            </a:r>
+          </a:p>
+          <a:p>
+            <a:pPr>
+              <a:defRPr sz="1200" b="1">
+                <a:solidFill>
+                  <a:srgbClr val="0F172A"/>
+                </a:solidFill>
+              </a:defRPr>
+            </a:pPr>
+            <a:r>
+              <a:t>20%  •  Pilot Trials &amp; Market Launch (₹10,00,000)</a:t>
+            </a:r>
+          </a:p>
+          <a:p>
+            <a:pPr>
+              <a:spcAft>
+                <a:spcPts val="800"/>
+              </a:spcAft>
+              <a:defRPr sz="1000">
+                <a:solidFill>
+                  <a:srgbClr val="64748B"/>
+                </a:solidFill>
+              </a:defRPr>
+            </a:pPr>
+            <a:r>
+              <a:t>Beta onboarding across Karnataka and production studios.</a:t>
+            </a:r>
+          </a:p>
+        </p:txBody>
+      </p:sp>
+      <p:sp>
+        <p:nvSpPr>
+          <p:cNvPr id="8" name="Rounded Rectangle 7"/>
           <p:cNvSpPr/>
           <p:nvPr/>
         </p:nvSpPr>
         <p:spPr>
           <a:xfrm>
-            <a:off x="6245352" y="1737360"/>
-            <a:ext cx="5212080" cy="2148840"/>
+            <a:off x="6217920" y="1828800"/>
+            <a:ext cx="5120640" cy="4297680"/>
           </a:xfrm>
           <a:prstGeom prst="roundRect">
             <a:avLst/>
@@ -11822,14 +9756,14 @@
       </p:sp>
       <p:sp>
         <p:nvSpPr>
-          <p:cNvPr id="10" name="TextBox 9"/>
+          <p:cNvPr id="9" name="TextBox 8"/>
           <p:cNvSpPr txBox="1"/>
           <p:nvPr/>
         </p:nvSpPr>
         <p:spPr>
           <a:xfrm>
-            <a:off x="6428232" y="1874520"/>
-            <a:ext cx="4846320" cy="1828800"/>
+            <a:off x="6492240" y="2011680"/>
+            <a:ext cx="4572000" cy="3931920"/>
           </a:xfrm>
           <a:prstGeom prst="rect">
             <a:avLst/>
@@ -11844,272 +9778,97 @@
           <a:p>
             <a:pPr>
               <a:spcAft>
-                <a:spcPts val="600"/>
+                <a:spcPts val="1200"/>
               </a:spcAft>
-              <a:defRPr sz="1300" b="1">
-                <a:solidFill>
-                  <a:srgbClr val="059669"/>
-                </a:solidFill>
-              </a:defRPr>
-            </a:pPr>
-            <a:r>
-              <a:t>Certified Hollywood Color Science</a:t>
+              <a:defRPr sz="1200" b="1">
+                <a:solidFill>
+                  <a:srgbClr val="7C3AED"/>
+                </a:solidFill>
+              </a:defRPr>
+            </a:pPr>
+            <a:r>
+              <a:t>18-MONTH EXECUTION ROADMAP</a:t>
+            </a:r>
+          </a:p>
+          <a:p>
+            <a:pPr>
+              <a:defRPr sz="1200" b="1">
+                <a:solidFill>
+                  <a:srgbClr val="0F172A"/>
+                </a:solidFill>
+              </a:defRPr>
+            </a:pPr>
+            <a:r>
+              <a:t>★  Months 1 – 6: Alpha Engine &amp; Indian Patent Filing</a:t>
             </a:r>
           </a:p>
           <a:p>
             <a:pPr>
               <a:spcAft>
-                <a:spcPts val="400"/>
+                <a:spcPts val="1000"/>
               </a:spcAft>
-              <a:defRPr sz="1050">
-                <a:solidFill>
-                  <a:srgbClr val="1E293B"/>
-                </a:solidFill>
-              </a:defRPr>
-            </a:pPr>
-            <a:r>
-              <a:t>• Most software developers lack formal film and color science expertise.</a:t>
+              <a:defRPr sz="1000">
+                <a:solidFill>
+                  <a:srgbClr val="64748B"/>
+                </a:solidFill>
+              </a:defRPr>
+            </a:pPr>
+            <a:r>
+              <a:t>Complete C++/CUDA OFX plugin builds; file provisional patents on neural depth VFX.</a:t>
+            </a:r>
+          </a:p>
+          <a:p>
+            <a:pPr>
+              <a:defRPr sz="1200" b="1">
+                <a:solidFill>
+                  <a:srgbClr val="0F172A"/>
+                </a:solidFill>
+              </a:defRPr>
+            </a:pPr>
+            <a:r>
+              <a:t>★  Months 7 – 12: Closed Beta (1,000+ Creators)</a:t>
             </a:r>
           </a:p>
           <a:p>
             <a:pPr>
               <a:spcAft>
-                <a:spcPts val="400"/>
+                <a:spcPts val="1000"/>
               </a:spcAft>
-              <a:defRPr sz="1050">
-                <a:solidFill>
-                  <a:srgbClr val="1E293B"/>
-                </a:solidFill>
-              </a:defRPr>
-            </a:pPr>
-            <a:r>
-              <a:t>• Certified in Blackmagic Design DaVinci Resolve with strict ACEScc 12-bit DPX sensor preservation.</a:t>
-            </a:r>
-          </a:p>
-        </p:txBody>
-      </p:sp>
-      <p:sp>
-        <p:nvSpPr>
-          <p:cNvPr id="11" name="Rounded Rectangle 10"/>
-          <p:cNvSpPr/>
-          <p:nvPr/>
-        </p:nvSpPr>
-        <p:spPr>
-          <a:xfrm>
-            <a:off x="731520" y="4114800"/>
-            <a:ext cx="5212080" cy="2148840"/>
-          </a:xfrm>
-          <a:prstGeom prst="roundRect">
-            <a:avLst/>
-          </a:prstGeom>
-          <a:solidFill>
-            <a:srgbClr val="F8FAFC"/>
-          </a:solidFill>
-          <a:ln w="12700">
-            <a:solidFill>
-              <a:srgbClr val="E2E8F0"/>
-            </a:solidFill>
-          </a:ln>
-        </p:spPr>
-        <p:style>
-          <a:lnRef idx="1">
-            <a:schemeClr val="accent1"/>
-          </a:lnRef>
-          <a:fillRef idx="3">
-            <a:schemeClr val="accent1"/>
-          </a:fillRef>
-          <a:effectRef idx="2">
-            <a:schemeClr val="accent1"/>
-          </a:effectRef>
-          <a:fontRef idx="minor">
-            <a:schemeClr val="lt1"/>
-          </a:fontRef>
-        </p:style>
-        <p:txBody>
-          <a:bodyPr rtlCol="0" anchor="ctr"/>
-          <a:lstStyle/>
-          <a:p>
-            <a:pPr algn="ctr"/>
-          </a:p>
-        </p:txBody>
-      </p:sp>
-      <p:sp>
-        <p:nvSpPr>
-          <p:cNvPr id="12" name="TextBox 11"/>
-          <p:cNvSpPr txBox="1"/>
-          <p:nvPr/>
-        </p:nvSpPr>
-        <p:spPr>
-          <a:xfrm>
-            <a:off x="914400" y="4251960"/>
-            <a:ext cx="4846320" cy="1828800"/>
-          </a:xfrm>
-          <a:prstGeom prst="rect">
-            <a:avLst/>
-          </a:prstGeom>
-          <a:noFill/>
-        </p:spPr>
-        <p:txBody>
-          <a:bodyPr wrap="square" lIns="0" tIns="0" rIns="0" bIns="0">
-            <a:spAutoFit/>
-          </a:bodyPr>
-          <a:lstStyle/>
+              <a:defRPr sz="1000">
+                <a:solidFill>
+                  <a:srgbClr val="64748B"/>
+                </a:solidFill>
+              </a:defRPr>
+            </a:pPr>
+            <a:r>
+              <a:t>Deploy beta testing to video editors across Karnataka; benchmark real-time 4K FPS.</a:t>
+            </a:r>
+          </a:p>
+          <a:p>
+            <a:pPr>
+              <a:defRPr sz="1200" b="1">
+                <a:solidFill>
+                  <a:srgbClr val="0F172A"/>
+                </a:solidFill>
+              </a:defRPr>
+            </a:pPr>
+            <a:r>
+              <a:t>★  Months 13 – 18: Commercial Marketplace &amp; SaaS Launch</a:t>
+            </a:r>
+          </a:p>
           <a:p>
             <a:pPr>
               <a:spcAft>
-                <a:spcPts val="600"/>
+                <a:spcPts val="1000"/>
               </a:spcAft>
-              <a:defRPr sz="1300" b="1">
-                <a:solidFill>
-                  <a:srgbClr val="D97706"/>
-                </a:solidFill>
-              </a:defRPr>
-            </a:pPr>
-            <a:r>
-              <a:t>100x Execution Velocity &amp; Zero-Bloat</a:t>
-            </a:r>
-          </a:p>
-          <a:p>
-            <a:pPr>
-              <a:spcAft>
-                <a:spcPts val="400"/>
-              </a:spcAft>
-              <a:defRPr sz="1050">
-                <a:solidFill>
-                  <a:srgbClr val="1E293B"/>
-                </a:solidFill>
-              </a:defRPr>
-            </a:pPr>
-            <a:r>
-              <a:t>• Built without bloated third-party frameworks, ensuring hyper-fast binary execution and ACID transaction safety.</a:t>
-            </a:r>
-          </a:p>
-          <a:p>
-            <a:pPr>
-              <a:spcAft>
-                <a:spcPts val="400"/>
-              </a:spcAft>
-              <a:defRPr sz="1050">
-                <a:solidFill>
-                  <a:srgbClr val="1E293B"/>
-                </a:solidFill>
-              </a:defRPr>
-            </a:pPr>
-            <a:r>
-              <a:t>• Proprietary algorithms (NP-hard CSP solvers, dynamic K-Means) engineered in-house.</a:t>
-            </a:r>
-          </a:p>
-        </p:txBody>
-      </p:sp>
-      <p:sp>
-        <p:nvSpPr>
-          <p:cNvPr id="13" name="Rounded Rectangle 12"/>
-          <p:cNvSpPr/>
-          <p:nvPr/>
-        </p:nvSpPr>
-        <p:spPr>
-          <a:xfrm>
-            <a:off x="6245352" y="4114800"/>
-            <a:ext cx="5212080" cy="2148840"/>
-          </a:xfrm>
-          <a:prstGeom prst="roundRect">
-            <a:avLst/>
-          </a:prstGeom>
-          <a:solidFill>
-            <a:srgbClr val="F8FAFC"/>
-          </a:solidFill>
-          <a:ln w="12700">
-            <a:solidFill>
-              <a:srgbClr val="E2E8F0"/>
-            </a:solidFill>
-          </a:ln>
-        </p:spPr>
-        <p:style>
-          <a:lnRef idx="1">
-            <a:schemeClr val="accent1"/>
-          </a:lnRef>
-          <a:fillRef idx="3">
-            <a:schemeClr val="accent1"/>
-          </a:fillRef>
-          <a:effectRef idx="2">
-            <a:schemeClr val="accent1"/>
-          </a:effectRef>
-          <a:fontRef idx="minor">
-            <a:schemeClr val="lt1"/>
-          </a:fontRef>
-        </p:style>
-        <p:txBody>
-          <a:bodyPr rtlCol="0" anchor="ctr"/>
-          <a:lstStyle/>
-          <a:p>
-            <a:pPr algn="ctr"/>
-          </a:p>
-        </p:txBody>
-      </p:sp>
-      <p:sp>
-        <p:nvSpPr>
-          <p:cNvPr id="14" name="TextBox 13"/>
-          <p:cNvSpPr txBox="1"/>
-          <p:nvPr/>
-        </p:nvSpPr>
-        <p:spPr>
-          <a:xfrm>
-            <a:off x="6428232" y="4251960"/>
-            <a:ext cx="4846320" cy="1828800"/>
-          </a:xfrm>
-          <a:prstGeom prst="rect">
-            <a:avLst/>
-          </a:prstGeom>
-          <a:noFill/>
-        </p:spPr>
-        <p:txBody>
-          <a:bodyPr wrap="square" lIns="0" tIns="0" rIns="0" bIns="0">
-            <a:spAutoFit/>
-          </a:bodyPr>
-          <a:lstStyle/>
-          <a:p>
-            <a:pPr>
-              <a:spcAft>
-                <a:spcPts val="600"/>
-              </a:spcAft>
-              <a:defRPr sz="1300" b="1">
-                <a:solidFill>
-                  <a:srgbClr val="4F46E5"/>
-                </a:solidFill>
-              </a:defRPr>
-            </a:pPr>
-            <a:r>
-              <a:t>Organic Creator Distribution Flywheel</a:t>
-            </a:r>
-          </a:p>
-          <a:p>
-            <a:pPr>
-              <a:spcAft>
-                <a:spcPts val="400"/>
-              </a:spcAft>
-              <a:defRPr sz="1050">
-                <a:solidFill>
-                  <a:srgbClr val="1E293B"/>
-                </a:solidFill>
-              </a:defRPr>
-            </a:pPr>
-            <a:r>
-              <a:t>• 2.5M+ active viewer community across channels gives instant zero-CAC distribution.</a:t>
-            </a:r>
-          </a:p>
-          <a:p>
-            <a:pPr>
-              <a:spcAft>
-                <a:spcPts val="400"/>
-              </a:spcAft>
-              <a:defRPr sz="1050">
-                <a:solidFill>
-                  <a:srgbClr val="1E293B"/>
-                </a:solidFill>
-              </a:defRPr>
-            </a:pPr>
-            <a:r>
-              <a:t>• Continuous real-time creator feedback directly shapes product roadmaps and features.</a:t>
+              <a:defRPr sz="1000">
+                <a:solidFill>
+                  <a:srgbClr val="64748B"/>
+                </a:solidFill>
+              </a:defRPr>
+            </a:pPr>
+            <a:r>
+              <a:t>Launch commercial SaaS tier; onboard 50+ studios &amp; achieve ₹50L+ ARR.</a:t>
             </a:r>
           </a:p>
         </p:txBody>

--- a/HRL_International_Pitch_Deck.pptx
+++ b/HRL_International_Pitch_Deck.pptx
@@ -3099,111 +3099,14 @@
       <p:grpSpPr/>
       <p:sp>
         <p:nvSpPr>
-          <p:cNvPr id="2" name="Rectangle 1"/>
-          <p:cNvSpPr/>
+          <p:cNvPr id="2" name="TextBox 1"/>
+          <p:cNvSpPr txBox="1"/>
           <p:nvPr/>
         </p:nvSpPr>
         <p:spPr>
           <a:xfrm>
-            <a:off x="0" y="0"/>
-            <a:ext cx="12191695" cy="6858000"/>
-          </a:xfrm>
-          <a:prstGeom prst="rect">
-            <a:avLst/>
-          </a:prstGeom>
-          <a:solidFill>
-            <a:srgbClr val="FFFFFF"/>
-          </a:solidFill>
-          <a:ln>
-            <a:noFill/>
-          </a:ln>
-        </p:spPr>
-        <p:style>
-          <a:lnRef idx="1">
-            <a:schemeClr val="accent1"/>
-          </a:lnRef>
-          <a:fillRef idx="3">
-            <a:schemeClr val="accent1"/>
-          </a:fillRef>
-          <a:effectRef idx="2">
-            <a:schemeClr val="accent1"/>
-          </a:effectRef>
-          <a:fontRef idx="minor">
-            <a:schemeClr val="lt1"/>
-          </a:fontRef>
-        </p:style>
-        <p:txBody>
-          <a:bodyPr rtlCol="0" anchor="ctr"/>
-          <a:lstStyle/>
-          <a:p>
-            <a:pPr algn="ctr"/>
-          </a:p>
-        </p:txBody>
-      </p:sp>
-      <p:sp>
-        <p:nvSpPr>
-          <p:cNvPr id="3" name="Rounded Rectangle 2"/>
-          <p:cNvSpPr/>
-          <p:nvPr/>
-        </p:nvSpPr>
-        <p:spPr>
-          <a:xfrm>
-            <a:off x="822960" y="1097280"/>
-            <a:ext cx="2926080" cy="320040"/>
-          </a:xfrm>
-          <a:prstGeom prst="roundRect">
-            <a:avLst/>
-          </a:prstGeom>
-          <a:solidFill>
-            <a:srgbClr val="EFF6FF"/>
-          </a:solidFill>
-          <a:ln>
-            <a:solidFill>
-              <a:srgbClr val="BFDBFE"/>
-            </a:solidFill>
-          </a:ln>
-        </p:spPr>
-        <p:style>
-          <a:lnRef idx="1">
-            <a:schemeClr val="accent1"/>
-          </a:lnRef>
-          <a:fillRef idx="3">
-            <a:schemeClr val="accent1"/>
-          </a:fillRef>
-          <a:effectRef idx="2">
-            <a:schemeClr val="accent1"/>
-          </a:effectRef>
-          <a:fontRef idx="minor">
-            <a:schemeClr val="lt1"/>
-          </a:fontRef>
-        </p:style>
-        <p:txBody>
-          <a:bodyPr rtlCol="0" anchor="ctr"/>
-          <a:lstStyle/>
-          <a:p>
-            <a:pPr algn="ctr">
-              <a:defRPr sz="1000" b="1">
-                <a:solidFill>
-                  <a:srgbClr val="2563EB"/>
-                </a:solidFill>
-              </a:defRPr>
-            </a:pPr>
-            <a:r>
-              <a:t>DEEP-TECH &amp; AVGC INNOVATION</a:t>
-            </a:r>
-          </a:p>
-        </p:txBody>
-      </p:sp>
-      <p:sp>
-        <p:nvSpPr>
-          <p:cNvPr id="4" name="TextBox 3"/>
-          <p:cNvSpPr txBox="1"/>
-          <p:nvPr/>
-        </p:nvSpPr>
-        <p:spPr>
-          <a:xfrm>
-            <a:off x="822960" y="1645920"/>
-            <a:ext cx="10515600" cy="2011680"/>
+            <a:off x="731520" y="914400"/>
+            <a:ext cx="10728655" cy="2743200"/>
           </a:xfrm>
           <a:prstGeom prst="rect">
             <a:avLst/>
@@ -3211,49 +3114,68 @@
           <a:noFill/>
         </p:spPr>
         <p:txBody>
-          <a:bodyPr wrap="square">
+          <a:bodyPr wrap="square" lIns="0" tIns="0" rIns="0" bIns="0">
             <a:spAutoFit/>
           </a:bodyPr>
           <a:lstStyle/>
           <a:p>
             <a:pPr>
               <a:spcAft>
-                <a:spcPts val="1000"/>
-              </a:spcAft>
-              <a:defRPr sz="3600" b="1">
+                <a:spcPts val="800"/>
+              </a:spcAft>
+              <a:defRPr sz="1300" b="1">
+                <a:solidFill>
+                  <a:srgbClr val="2563EB"/>
+                </a:solidFill>
+              </a:defRPr>
+            </a:pPr>
+            <a:r>
+              <a:t>HRL INTERNATIONAL PRIVATE LIMITED</a:t>
+            </a:r>
+          </a:p>
+          <a:p>
+            <a:pPr>
+              <a:spcAft>
+                <a:spcPts val="1200"/>
+              </a:spcAft>
+              <a:defRPr sz="3200" b="1">
                 <a:solidFill>
                   <a:srgbClr val="0F172A"/>
                 </a:solidFill>
               </a:defRPr>
             </a:pPr>
             <a:r>
-              <a:t>HRL International Private Limited</a:t>
-            </a:r>
-          </a:p>
-          <a:p>
-            <a:pPr>
-              <a:defRPr sz="1600">
+              <a:t>Next-Generation Visual Computing &amp;</a:t>
+            </a:r>
+            <a:br/>
+            <a:r>
+              <a:t>Autonomous AI Post-Production Engine</a:t>
+            </a:r>
+          </a:p>
+          <a:p>
+            <a:pPr>
+              <a:defRPr sz="1400">
                 <a:solidFill>
                   <a:srgbClr val="64748B"/>
                 </a:solidFill>
               </a:defRPr>
             </a:pPr>
             <a:r>
-              <a:t>Democratizing cinema-grade visual computing and autonomous AI post-production for millions of creators.</a:t>
-            </a:r>
-          </a:p>
-        </p:txBody>
-      </p:sp>
-      <p:sp>
-        <p:nvSpPr>
-          <p:cNvPr id="5" name="Rounded Rectangle 4"/>
+              <a:t>Democratizing Hollywood-grade DaVinci Resolve OFX visual effects, ACES color science, and on-device AI workflows.</a:t>
+            </a:r>
+          </a:p>
+        </p:txBody>
+      </p:sp>
+      <p:sp>
+        <p:nvSpPr>
+          <p:cNvPr id="3" name="Rounded Rectangle 2"/>
           <p:cNvSpPr/>
           <p:nvPr/>
         </p:nvSpPr>
         <p:spPr>
           <a:xfrm>
-            <a:off x="822960" y="4206240"/>
-            <a:ext cx="3291840" cy="1645920"/>
+            <a:off x="731520" y="4114800"/>
+            <a:ext cx="3328416" cy="2011680"/>
           </a:xfrm>
           <a:prstGeom prst="roundRect">
             <a:avLst/>
@@ -3282,88 +3204,66 @@
           </a:fontRef>
         </p:style>
         <p:txBody>
-          <a:bodyPr rtlCol="0" anchor="ctr"/>
-          <a:lstStyle/>
-          <a:p>
-            <a:pPr algn="ctr"/>
-          </a:p>
-        </p:txBody>
-      </p:sp>
-      <p:sp>
-        <p:nvSpPr>
-          <p:cNvPr id="6" name="TextBox 5"/>
-          <p:cNvSpPr txBox="1"/>
+          <a:bodyPr rtlCol="0" anchor="ctr" wrap="square" lIns="182880" rIns="182880" tIns="182880" bIns="182880"/>
+          <a:lstStyle/>
+          <a:p>
+            <a:pPr algn="ctr">
+              <a:spcAft>
+                <a:spcPts val="400"/>
+              </a:spcAft>
+              <a:defRPr sz="1000" b="1">
+                <a:solidFill>
+                  <a:srgbClr val="2563EB"/>
+                </a:solidFill>
+              </a:defRPr>
+            </a:pPr>
+            <a:r>
+              <a:t>FOUNDER &amp; ARCHITECT</a:t>
+            </a:r>
+          </a:p>
+          <a:p>
+            <a:pPr>
+              <a:spcAft>
+                <a:spcPts val="400"/>
+              </a:spcAft>
+              <a:defRPr sz="1500" b="1">
+                <a:solidFill>
+                  <a:srgbClr val="0F172A"/>
+                </a:solidFill>
+              </a:defRPr>
+            </a:pPr>
+            <a:r>
+              <a:t>Pavan Kumar Sadashiv</a:t>
+            </a:r>
+          </a:p>
+          <a:p>
+            <a:pPr>
+              <a:defRPr sz="1050">
+                <a:solidFill>
+                  <a:srgbClr val="334155"/>
+                </a:solidFill>
+              </a:defRPr>
+            </a:pPr>
+            <a:r>
+              <a:t>B.E. CSE (AI &amp; ML) • Sahyadri (SCEM)</a:t>
+            </a:r>
+            <a:br/>
+            <a:r>
+              <a:t>Mangaluru, Karnataka (Beyond Bengaluru)</a:t>
+            </a:r>
+          </a:p>
+        </p:txBody>
+      </p:sp>
+      <p:sp>
+        <p:nvSpPr>
+          <p:cNvPr id="4" name="Rounded Rectangle 3"/>
+          <p:cNvSpPr/>
           <p:nvPr/>
         </p:nvSpPr>
         <p:spPr>
           <a:xfrm>
-            <a:off x="1051560" y="4389120"/>
-            <a:ext cx="2834640" cy="1280160"/>
-          </a:xfrm>
-          <a:prstGeom prst="rect">
-            <a:avLst/>
-          </a:prstGeom>
-          <a:noFill/>
-        </p:spPr>
-        <p:txBody>
-          <a:bodyPr wrap="square" lIns="0" tIns="0" rIns="0" bIns="0">
-            <a:spAutoFit/>
-          </a:bodyPr>
-          <a:lstStyle/>
-          <a:p>
-            <a:pPr>
-              <a:spcAft>
-                <a:spcPts val="400"/>
-              </a:spcAft>
-              <a:defRPr sz="1000" b="1">
-                <a:solidFill>
-                  <a:srgbClr val="2563EB"/>
-                </a:solidFill>
-              </a:defRPr>
-            </a:pPr>
-            <a:r>
-              <a:t>FOUNDER &amp; ARCHITECT</a:t>
-            </a:r>
-          </a:p>
-          <a:p>
-            <a:pPr>
-              <a:spcAft>
-                <a:spcPts val="400"/>
-              </a:spcAft>
-              <a:defRPr sz="1600" b="1">
-                <a:solidFill>
-                  <a:srgbClr val="0F172A"/>
-                </a:solidFill>
-              </a:defRPr>
-            </a:pPr>
-            <a:r>
-              <a:t>Pavan Kumar Sadashiv</a:t>
-            </a:r>
-          </a:p>
-          <a:p>
-            <a:pPr>
-              <a:defRPr sz="1050">
-                <a:solidFill>
-                  <a:srgbClr val="64748B"/>
-                </a:solidFill>
-              </a:defRPr>
-            </a:pPr>
-            <a:r>
-              <a:t>B.E. CSE (AI &amp; ML) • Mangaluru, Karnataka</a:t>
-            </a:r>
-          </a:p>
-        </p:txBody>
-      </p:sp>
-      <p:sp>
-        <p:nvSpPr>
-          <p:cNvPr id="7" name="Rounded Rectangle 6"/>
-          <p:cNvSpPr/>
-          <p:nvPr/>
-        </p:nvSpPr>
-        <p:spPr>
-          <a:xfrm>
-            <a:off x="4434840" y="4206240"/>
-            <a:ext cx="3291840" cy="1645920"/>
+            <a:off x="4425696" y="4114800"/>
+            <a:ext cx="3328416" cy="2011680"/>
           </a:xfrm>
           <a:prstGeom prst="roundRect">
             <a:avLst/>
@@ -3392,88 +3292,66 @@
           </a:fontRef>
         </p:style>
         <p:txBody>
-          <a:bodyPr rtlCol="0" anchor="ctr"/>
-          <a:lstStyle/>
-          <a:p>
-            <a:pPr algn="ctr"/>
-          </a:p>
-        </p:txBody>
-      </p:sp>
-      <p:sp>
-        <p:nvSpPr>
-          <p:cNvPr id="8" name="TextBox 7"/>
-          <p:cNvSpPr txBox="1"/>
+          <a:bodyPr rtlCol="0" anchor="ctr" wrap="square" lIns="182880" rIns="182880" tIns="182880" bIns="182880"/>
+          <a:lstStyle/>
+          <a:p>
+            <a:pPr algn="ctr">
+              <a:spcAft>
+                <a:spcPts val="400"/>
+              </a:spcAft>
+              <a:defRPr sz="1000" b="1">
+                <a:solidFill>
+                  <a:srgbClr val="7C3AED"/>
+                </a:solidFill>
+              </a:defRPr>
+            </a:pPr>
+            <a:r>
+              <a:t>SECTOR &amp; INITIATIVE</a:t>
+            </a:r>
+          </a:p>
+          <a:p>
+            <a:pPr>
+              <a:spcAft>
+                <a:spcPts val="400"/>
+              </a:spcAft>
+              <a:defRPr sz="1500" b="1">
+                <a:solidFill>
+                  <a:srgbClr val="0F172A"/>
+                </a:solidFill>
+              </a:defRPr>
+            </a:pPr>
+            <a:r>
+              <a:t>Deep-Tech / AVGC Sector</a:t>
+            </a:r>
+          </a:p>
+          <a:p>
+            <a:pPr>
+              <a:defRPr sz="1050">
+                <a:solidFill>
+                  <a:srgbClr val="334155"/>
+                </a:solidFill>
+              </a:defRPr>
+            </a:pPr>
+            <a:r>
+              <a:t>Make in India Indigenous Software</a:t>
+            </a:r>
+            <a:br/>
+            <a:r>
+              <a:t>Target: GENESIS EIR &amp; ELEVATE Grant</a:t>
+            </a:r>
+          </a:p>
+        </p:txBody>
+      </p:sp>
+      <p:sp>
+        <p:nvSpPr>
+          <p:cNvPr id="5" name="Rounded Rectangle 4"/>
+          <p:cNvSpPr/>
           <p:nvPr/>
         </p:nvSpPr>
         <p:spPr>
           <a:xfrm>
-            <a:off x="4663440" y="4389120"/>
-            <a:ext cx="2834640" cy="1280160"/>
-          </a:xfrm>
-          <a:prstGeom prst="rect">
-            <a:avLst/>
-          </a:prstGeom>
-          <a:noFill/>
-        </p:spPr>
-        <p:txBody>
-          <a:bodyPr wrap="square" lIns="0" tIns="0" rIns="0" bIns="0">
-            <a:spAutoFit/>
-          </a:bodyPr>
-          <a:lstStyle/>
-          <a:p>
-            <a:pPr>
-              <a:spcAft>
-                <a:spcPts val="400"/>
-              </a:spcAft>
-              <a:defRPr sz="1000" b="1">
-                <a:solidFill>
-                  <a:srgbClr val="059669"/>
-                </a:solidFill>
-              </a:defRPr>
-            </a:pPr>
-            <a:r>
-              <a:t>KEY VALIDATION</a:t>
-            </a:r>
-          </a:p>
-          <a:p>
-            <a:pPr>
-              <a:spcAft>
-                <a:spcPts val="400"/>
-              </a:spcAft>
-              <a:defRPr sz="1600" b="1">
-                <a:solidFill>
-                  <a:srgbClr val="0F172A"/>
-                </a:solidFill>
-              </a:defRPr>
-            </a:pPr>
-            <a:r>
-              <a:t>2.5M+ Organic Reach</a:t>
-            </a:r>
-          </a:p>
-          <a:p>
-            <a:pPr>
-              <a:defRPr sz="1050">
-                <a:solidFill>
-                  <a:srgbClr val="64748B"/>
-                </a:solidFill>
-              </a:defRPr>
-            </a:pPr>
-            <a:r>
-              <a:t>Certified by Blackmagic Design, JPMorgan &amp; Deloitte</a:t>
-            </a:r>
-          </a:p>
-        </p:txBody>
-      </p:sp>
-      <p:sp>
-        <p:nvSpPr>
-          <p:cNvPr id="9" name="Rounded Rectangle 8"/>
-          <p:cNvSpPr/>
-          <p:nvPr/>
-        </p:nvSpPr>
-        <p:spPr>
-          <a:xfrm>
-            <a:off x="8046720" y="4206240"/>
-            <a:ext cx="3291840" cy="1645920"/>
+            <a:off x="8119872" y="4114800"/>
+            <a:ext cx="3328416" cy="2011680"/>
           </a:xfrm>
           <a:prstGeom prst="roundRect">
             <a:avLst/>
@@ -3502,47 +3380,21 @@
           </a:fontRef>
         </p:style>
         <p:txBody>
-          <a:bodyPr rtlCol="0" anchor="ctr"/>
-          <a:lstStyle/>
-          <a:p>
-            <a:pPr algn="ctr"/>
-          </a:p>
-        </p:txBody>
-      </p:sp>
-      <p:sp>
-        <p:nvSpPr>
-          <p:cNvPr id="10" name="TextBox 9"/>
-          <p:cNvSpPr txBox="1"/>
-          <p:nvPr/>
-        </p:nvSpPr>
-        <p:spPr>
-          <a:xfrm>
-            <a:off x="8275320" y="4389120"/>
-            <a:ext cx="2834640" cy="1280160"/>
-          </a:xfrm>
-          <a:prstGeom prst="rect">
-            <a:avLst/>
-          </a:prstGeom>
-          <a:noFill/>
-        </p:spPr>
-        <p:txBody>
-          <a:bodyPr wrap="square" lIns="0" tIns="0" rIns="0" bIns="0">
-            <a:spAutoFit/>
-          </a:bodyPr>
-          <a:lstStyle/>
-          <a:p>
-            <a:pPr>
+          <a:bodyPr rtlCol="0" anchor="ctr" wrap="square" lIns="182880" rIns="182880" tIns="182880" bIns="182880"/>
+          <a:lstStyle/>
+          <a:p>
+            <a:pPr algn="ctr">
               <a:spcAft>
                 <a:spcPts val="400"/>
               </a:spcAft>
               <a:defRPr sz="1000" b="1">
                 <a:solidFill>
-                  <a:srgbClr val="7C3AED"/>
-                </a:solidFill>
-              </a:defRPr>
-            </a:pPr>
-            <a:r>
-              <a:t>TARGET GRANT</a:t>
+                  <a:srgbClr val="059669"/>
+                </a:solidFill>
+              </a:defRPr>
+            </a:pPr>
+            <a:r>
+              <a:t>PROVEN TRACTION</a:t>
             </a:r>
           </a:p>
           <a:p>
@@ -3550,26 +3402,30 @@
               <a:spcAft>
                 <a:spcPts val="400"/>
               </a:spcAft>
-              <a:defRPr sz="1600" b="1">
+              <a:defRPr sz="1500" b="1">
                 <a:solidFill>
                   <a:srgbClr val="0F172A"/>
                 </a:solidFill>
               </a:defRPr>
             </a:pPr>
             <a:r>
-              <a:t>GENESIS EIR / ELEVATE</a:t>
+              <a:t>2.5M+ Organic Reach</a:t>
             </a:r>
           </a:p>
           <a:p>
             <a:pPr>
               <a:defRPr sz="1050">
                 <a:solidFill>
-                  <a:srgbClr val="64748B"/>
-                </a:solidFill>
-              </a:defRPr>
-            </a:pPr>
-            <a:r>
-              <a:t>Seed Funding for GPU R&amp;D &amp; Patent Filings</a:t>
+                  <a:srgbClr val="334155"/>
+                </a:solidFill>
+              </a:defRPr>
+            </a:pPr>
+            <a:r>
+              <a:t>Blackmagic Design Certified</a:t>
+            </a:r>
+            <a:br/>
+            <a:r>
+              <a:t>JPMorgan &amp; Deloitte Qualified</a:t>
             </a:r>
           </a:p>
         </p:txBody>
@@ -3594,57 +3450,14 @@
       <p:grpSpPr/>
       <p:sp>
         <p:nvSpPr>
-          <p:cNvPr id="2" name="Rectangle 1"/>
+          <p:cNvPr id="2" name="Rounded Rectangle 1"/>
           <p:cNvSpPr/>
           <p:nvPr/>
         </p:nvSpPr>
         <p:spPr>
           <a:xfrm>
-            <a:off x="0" y="0"/>
-            <a:ext cx="12191695" cy="6858000"/>
-          </a:xfrm>
-          <a:prstGeom prst="rect">
-            <a:avLst/>
-          </a:prstGeom>
-          <a:solidFill>
-            <a:srgbClr val="FFFFFF"/>
-          </a:solidFill>
-          <a:ln>
-            <a:noFill/>
-          </a:ln>
-        </p:spPr>
-        <p:style>
-          <a:lnRef idx="1">
-            <a:schemeClr val="accent1"/>
-          </a:lnRef>
-          <a:fillRef idx="3">
-            <a:schemeClr val="accent1"/>
-          </a:fillRef>
-          <a:effectRef idx="2">
-            <a:schemeClr val="accent1"/>
-          </a:effectRef>
-          <a:fontRef idx="minor">
-            <a:schemeClr val="lt1"/>
-          </a:fontRef>
-        </p:style>
-        <p:txBody>
-          <a:bodyPr rtlCol="0" anchor="ctr"/>
-          <a:lstStyle/>
-          <a:p>
-            <a:pPr algn="ctr"/>
-          </a:p>
-        </p:txBody>
-      </p:sp>
-      <p:sp>
-        <p:nvSpPr>
-          <p:cNvPr id="3" name="Rounded Rectangle 2"/>
-          <p:cNvSpPr/>
-          <p:nvPr/>
-        </p:nvSpPr>
-        <p:spPr>
-          <a:xfrm>
-            <a:off x="822960" y="640080"/>
-            <a:ext cx="10515600" cy="5577840"/>
+            <a:off x="731520" y="731520"/>
+            <a:ext cx="10728655" cy="5394960"/>
           </a:xfrm>
           <a:prstGeom prst="roundRect">
             <a:avLst/>
@@ -3673,23 +3486,65 @@
           </a:fontRef>
         </p:style>
         <p:txBody>
-          <a:bodyPr rtlCol="0" anchor="ctr"/>
-          <a:lstStyle/>
-          <a:p>
-            <a:pPr algn="ctr"/>
-          </a:p>
-        </p:txBody>
-      </p:sp>
-      <p:sp>
-        <p:nvSpPr>
-          <p:cNvPr id="4" name="TextBox 3"/>
+          <a:bodyPr rtlCol="0" anchor="ctr" wrap="square" lIns="365760" rIns="365760" tIns="365760" bIns="365760"/>
+          <a:lstStyle/>
+          <a:p>
+            <a:pPr algn="ctr">
+              <a:spcAft>
+                <a:spcPts val="600"/>
+              </a:spcAft>
+              <a:defRPr sz="1200" b="1">
+                <a:solidFill>
+                  <a:srgbClr val="2563EB"/>
+                </a:solidFill>
+              </a:defRPr>
+            </a:pPr>
+            <a:r>
+              <a:t>HRL INTERNATIONAL PRIVATE LIMITED</a:t>
+            </a:r>
+          </a:p>
+          <a:p>
+            <a:pPr algn="ctr">
+              <a:spcAft>
+                <a:spcPts val="800"/>
+              </a:spcAft>
+              <a:defRPr sz="2800" b="1">
+                <a:solidFill>
+                  <a:srgbClr val="0F172A"/>
+                </a:solidFill>
+              </a:defRPr>
+            </a:pPr>
+            <a:r>
+              <a:t>Democratizing Cinema-Grade Visual Computing</a:t>
+            </a:r>
+          </a:p>
+          <a:p>
+            <a:pPr algn="ctr">
+              <a:spcAft>
+                <a:spcPts val="2400"/>
+              </a:spcAft>
+              <a:defRPr sz="1400" i="1">
+                <a:solidFill>
+                  <a:srgbClr val="7C3AED"/>
+                </a:solidFill>
+              </a:defRPr>
+            </a:pPr>
+            <a:r>
+              <a:t>"We Can Do Everything Related To Software Sector Without Any Excuses!"</a:t>
+            </a:r>
+          </a:p>
+        </p:txBody>
+      </p:sp>
+      <p:sp>
+        <p:nvSpPr>
+          <p:cNvPr id="3" name="TextBox 2"/>
           <p:cNvSpPr txBox="1"/>
           <p:nvPr/>
         </p:nvSpPr>
         <p:spPr>
           <a:xfrm>
-            <a:off x="1188720" y="1005840"/>
-            <a:ext cx="9784080" cy="4846320"/>
+            <a:off x="1097280" y="3291840"/>
+            <a:ext cx="3200400" cy="2286000"/>
           </a:xfrm>
           <a:prstGeom prst="rect">
             <a:avLst/>
@@ -3697,67 +3552,61 @@
           <a:noFill/>
         </p:spPr>
         <p:txBody>
-          <a:bodyPr wrap="square" lIns="0" tIns="0" rIns="0" bIns="0">
+          <a:bodyPr wrap="square">
             <a:spAutoFit/>
           </a:bodyPr>
           <a:lstStyle/>
           <a:p>
-            <a:pPr algn="ctr">
-              <a:spcAft>
-                <a:spcPts val="600"/>
-              </a:spcAft>
-              <a:defRPr sz="1200" b="1">
+            <a:pPr>
+              <a:spcAft>
+                <a:spcPts val="400"/>
+              </a:spcAft>
+              <a:defRPr sz="1100" b="1">
                 <a:solidFill>
                   <a:srgbClr val="2563EB"/>
                 </a:solidFill>
               </a:defRPr>
             </a:pPr>
             <a:r>
-              <a:t>HRL INTERNATIONAL PRIVATE LIMITED</a:t>
-            </a:r>
-          </a:p>
-          <a:p>
-            <a:pPr algn="ctr">
-              <a:spcAft>
-                <a:spcPts val="1000"/>
-              </a:spcAft>
-              <a:defRPr sz="2800" b="1">
-                <a:solidFill>
-                  <a:srgbClr val="0F172A"/>
-                </a:solidFill>
-              </a:defRPr>
-            </a:pPr>
-            <a:r>
-              <a:t>Democratizing Cinema-Grade Visual Computing</a:t>
-            </a:r>
-          </a:p>
-          <a:p>
-            <a:pPr algn="ctr">
-              <a:spcAft>
-                <a:spcPts val="2400"/>
-              </a:spcAft>
-              <a:defRPr sz="1400" i="1">
-                <a:solidFill>
-                  <a:srgbClr val="7C3AED"/>
-                </a:solidFill>
-              </a:defRPr>
-            </a:pPr>
-            <a:r>
-              <a:t>"We Can Do Everything Related To Software Sector Without Any Excuses!"</a:t>
-            </a:r>
-          </a:p>
-        </p:txBody>
-      </p:sp>
-      <p:sp>
-        <p:nvSpPr>
-          <p:cNvPr id="5" name="TextBox 4"/>
+              <a:t>FOUNDER &amp; CONTACT</a:t>
+            </a:r>
+          </a:p>
+          <a:p>
+            <a:pPr>
+              <a:defRPr sz="1050">
+                <a:solidFill>
+                  <a:srgbClr val="334155"/>
+                </a:solidFill>
+              </a:defRPr>
+            </a:pPr>
+            <a:r>
+              <a:t>Pavan Kumar Sadashiv</a:t>
+            </a:r>
+            <a:br/>
+            <a:r>
+              <a:t>Founder &amp; Managing Director</a:t>
+            </a:r>
+            <a:br/>
+            <a:r>
+              <a:t>Email: hrlinternationalprivatelimited@gmail.com</a:t>
+            </a:r>
+            <a:br/>
+            <a:r>
+              <a:t>Direct: pavankcet@gmail.com</a:t>
+            </a:r>
+          </a:p>
+        </p:txBody>
+      </p:sp>
+      <p:sp>
+        <p:nvSpPr>
+          <p:cNvPr id="4" name="TextBox 3"/>
           <p:cNvSpPr txBox="1"/>
           <p:nvPr/>
         </p:nvSpPr>
         <p:spPr>
           <a:xfrm>
-            <a:off x="1371600" y="3108960"/>
-            <a:ext cx="3108960" cy="2377440"/>
+            <a:off x="4480560" y="3291840"/>
+            <a:ext cx="3200400" cy="2286000"/>
           </a:xfrm>
           <a:prstGeom prst="rect">
             <a:avLst/>
@@ -3781,45 +3630,45 @@
               </a:defRPr>
             </a:pPr>
             <a:r>
-              <a:t>FOUNDER &amp; CONTACT</a:t>
-            </a:r>
-          </a:p>
-          <a:p>
-            <a:pPr>
-              <a:defRPr sz="1100">
+              <a:t>REGISTERED OFFICE</a:t>
+            </a:r>
+          </a:p>
+          <a:p>
+            <a:pPr>
+              <a:defRPr sz="1050">
                 <a:solidFill>
                   <a:srgbClr val="334155"/>
                 </a:solidFill>
               </a:defRPr>
             </a:pPr>
             <a:r>
-              <a:t>Pavan Kumar Sadashiv</a:t>
+              <a:t>HRL International Private Limited</a:t>
             </a:r>
             <a:br/>
             <a:r>
-              <a:t>Founder &amp; Managing Director</a:t>
+              <a:t>Mangaluru, Karnataka - 575007</a:t>
             </a:r>
             <a:br/>
             <a:r>
-              <a:t>Email: hrlinternationalprivatelimited@gmail.com</a:t>
+              <a:t>Beyond Bengaluru Tier-2 Hub</a:t>
             </a:r>
             <a:br/>
             <a:r>
-              <a:t>Direct: pavankcet@gmail.com</a:t>
-            </a:r>
-          </a:p>
-        </p:txBody>
-      </p:sp>
-      <p:sp>
-        <p:nvSpPr>
-          <p:cNvPr id="6" name="TextBox 5"/>
+              <a:t>Make In India Deep-Tech Startup</a:t>
+            </a:r>
+          </a:p>
+        </p:txBody>
+      </p:sp>
+      <p:sp>
+        <p:nvSpPr>
+          <p:cNvPr id="5" name="TextBox 4"/>
           <p:cNvSpPr txBox="1"/>
           <p:nvPr/>
         </p:nvSpPr>
         <p:spPr>
           <a:xfrm>
-            <a:off x="4572000" y="3108960"/>
-            <a:ext cx="3108960" cy="2377440"/>
+            <a:off x="7863840" y="3291840"/>
+            <a:ext cx="3200400" cy="2286000"/>
           </a:xfrm>
           <a:prstGeom prst="rect">
             <a:avLst/>
@@ -3843,74 +3692,12 @@
               </a:defRPr>
             </a:pPr>
             <a:r>
-              <a:t>REGISTERED OFFICE</a:t>
-            </a:r>
-          </a:p>
-          <a:p>
-            <a:pPr>
-              <a:defRPr sz="1100">
-                <a:solidFill>
-                  <a:srgbClr val="334155"/>
-                </a:solidFill>
-              </a:defRPr>
-            </a:pPr>
-            <a:r>
-              <a:t>HRL International Private Limited</a:t>
-            </a:r>
-            <a:br/>
-            <a:r>
-              <a:t>Mangaluru, Karnataka - 575007</a:t>
-            </a:r>
-            <a:br/>
-            <a:r>
-              <a:t>Beyond Bengaluru Tier-2 Hub</a:t>
-            </a:r>
-            <a:br/>
-            <a:r>
-              <a:t>Make In India Deep-Tech Startup</a:t>
-            </a:r>
-          </a:p>
-        </p:txBody>
-      </p:sp>
-      <p:sp>
-        <p:nvSpPr>
-          <p:cNvPr id="7" name="TextBox 6"/>
-          <p:cNvSpPr txBox="1"/>
-          <p:nvPr/>
-        </p:nvSpPr>
-        <p:spPr>
-          <a:xfrm>
-            <a:off x="7772400" y="3108960"/>
-            <a:ext cx="3108960" cy="2377440"/>
-          </a:xfrm>
-          <a:prstGeom prst="rect">
-            <a:avLst/>
-          </a:prstGeom>
-          <a:noFill/>
-        </p:spPr>
-        <p:txBody>
-          <a:bodyPr wrap="square">
-            <a:spAutoFit/>
-          </a:bodyPr>
-          <a:lstStyle/>
-          <a:p>
-            <a:pPr>
-              <a:spcAft>
-                <a:spcPts val="400"/>
-              </a:spcAft>
-              <a:defRPr sz="1100" b="1">
-                <a:solidFill>
-                  <a:srgbClr val="2563EB"/>
-                </a:solidFill>
-              </a:defRPr>
-            </a:pPr>
-            <a:r>
               <a:t>WEB &amp; REPOSITORIES</a:t>
             </a:r>
           </a:p>
           <a:p>
             <a:pPr>
-              <a:defRPr sz="1100">
+              <a:defRPr sz="1050">
                 <a:solidFill>
                   <a:srgbClr val="334155"/>
                 </a:solidFill>
@@ -3954,20 +3741,88 @@
       <p:grpSpPr/>
       <p:sp>
         <p:nvSpPr>
-          <p:cNvPr id="2" name="Rectangle 1"/>
+          <p:cNvPr id="2" name="TextBox 1"/>
+          <p:cNvSpPr txBox="1"/>
+          <p:nvPr/>
+        </p:nvSpPr>
+        <p:spPr>
+          <a:xfrm>
+            <a:off x="731520" y="411480"/>
+            <a:ext cx="10728655" cy="1097280"/>
+          </a:xfrm>
+          <a:prstGeom prst="rect">
+            <a:avLst/>
+          </a:prstGeom>
+          <a:noFill/>
+        </p:spPr>
+        <p:txBody>
+          <a:bodyPr wrap="square" lIns="0" tIns="0" rIns="0" bIns="0">
+            <a:spAutoFit/>
+          </a:bodyPr>
+          <a:lstStyle/>
+          <a:p>
+            <a:pPr>
+              <a:spcAft>
+                <a:spcPts val="200"/>
+              </a:spcAft>
+              <a:defRPr sz="1000" b="1">
+                <a:solidFill>
+                  <a:srgbClr val="2563EB"/>
+                </a:solidFill>
+                <a:latin typeface="Arial"/>
+              </a:defRPr>
+            </a:pPr>
+            <a:r>
+              <a:t>THE CHALLENGE</a:t>
+            </a:r>
+          </a:p>
+          <a:p>
+            <a:pPr>
+              <a:spcAft>
+                <a:spcPts val="200"/>
+              </a:spcAft>
+              <a:defRPr sz="2200" b="1">
+                <a:solidFill>
+                  <a:srgbClr val="0F172A"/>
+                </a:solidFill>
+                <a:latin typeface="Arial"/>
+              </a:defRPr>
+            </a:pPr>
+            <a:r>
+              <a:t>The Problem — Critical Industry Bottlenecks</a:t>
+            </a:r>
+          </a:p>
+          <a:p>
+            <a:pPr>
+              <a:defRPr sz="1150">
+                <a:solidFill>
+                  <a:srgbClr val="64748B"/>
+                </a:solidFill>
+                <a:latin typeface="Arial"/>
+              </a:defRPr>
+            </a:pPr>
+            <a:r>
+              <a:t>High software costs and disconnected AI workflows are crippling independent creators.</a:t>
+            </a:r>
+          </a:p>
+        </p:txBody>
+      </p:sp>
+      <p:sp>
+        <p:nvSpPr>
+          <p:cNvPr id="3" name="Rectangle 2"/>
           <p:cNvSpPr/>
           <p:nvPr/>
         </p:nvSpPr>
         <p:spPr>
           <a:xfrm>
-            <a:off x="0" y="0"/>
-            <a:ext cx="12191695" cy="6858000"/>
+            <a:off x="731520" y="1554480"/>
+            <a:ext cx="10728655" cy="13716"/>
           </a:xfrm>
           <a:prstGeom prst="rect">
             <a:avLst/>
           </a:prstGeom>
           <a:solidFill>
-            <a:srgbClr val="FFFFFF"/>
+            <a:srgbClr val="E2E8F0"/>
           </a:solidFill>
           <a:ln>
             <a:noFill/>
@@ -3997,122 +3852,14 @@
       </p:sp>
       <p:sp>
         <p:nvSpPr>
-          <p:cNvPr id="3" name="TextBox 2"/>
-          <p:cNvSpPr txBox="1"/>
+          <p:cNvPr id="4" name="Rounded Rectangle 3"/>
+          <p:cNvSpPr/>
           <p:nvPr/>
         </p:nvSpPr>
         <p:spPr>
           <a:xfrm>
-            <a:off x="822960" y="457200"/>
-            <a:ext cx="10515600" cy="274320"/>
-          </a:xfrm>
-          <a:prstGeom prst="rect">
-            <a:avLst/>
-          </a:prstGeom>
-          <a:noFill/>
-        </p:spPr>
-        <p:txBody>
-          <a:bodyPr wrap="square" lIns="0" tIns="0" rIns="0" bIns="0">
-            <a:spAutoFit/>
-          </a:bodyPr>
-          <a:lstStyle/>
-          <a:p>
-            <a:pPr>
-              <a:defRPr sz="1000" b="1">
-                <a:solidFill>
-                  <a:srgbClr val="2563EB"/>
-                </a:solidFill>
-                <a:latin typeface="Arial"/>
-              </a:defRPr>
-            </a:pPr>
-            <a:r>
-              <a:t>THE CHALLENGE</a:t>
-            </a:r>
-          </a:p>
-        </p:txBody>
-      </p:sp>
-      <p:sp>
-        <p:nvSpPr>
-          <p:cNvPr id="4" name="TextBox 3"/>
-          <p:cNvSpPr txBox="1"/>
-          <p:nvPr/>
-        </p:nvSpPr>
-        <p:spPr>
-          <a:xfrm>
-            <a:off x="822960" y="731520"/>
-            <a:ext cx="10515600" cy="548640"/>
-          </a:xfrm>
-          <a:prstGeom prst="rect">
-            <a:avLst/>
-          </a:prstGeom>
-          <a:noFill/>
-        </p:spPr>
-        <p:txBody>
-          <a:bodyPr wrap="square" lIns="0" tIns="0" rIns="0" bIns="0">
-            <a:spAutoFit/>
-          </a:bodyPr>
-          <a:lstStyle/>
-          <a:p>
-            <a:pPr>
-              <a:defRPr sz="2200" b="1">
-                <a:solidFill>
-                  <a:srgbClr val="0F172A"/>
-                </a:solidFill>
-                <a:latin typeface="Arial"/>
-              </a:defRPr>
-            </a:pPr>
-            <a:r>
-              <a:t>The Problem We Are Solving</a:t>
-            </a:r>
-          </a:p>
-        </p:txBody>
-      </p:sp>
-      <p:sp>
-        <p:nvSpPr>
-          <p:cNvPr id="5" name="TextBox 4"/>
-          <p:cNvSpPr txBox="1"/>
-          <p:nvPr/>
-        </p:nvSpPr>
-        <p:spPr>
-          <a:xfrm>
-            <a:off x="822960" y="1280160"/>
-            <a:ext cx="10515600" cy="274320"/>
-          </a:xfrm>
-          <a:prstGeom prst="rect">
-            <a:avLst/>
-          </a:prstGeom>
-          <a:noFill/>
-        </p:spPr>
-        <p:txBody>
-          <a:bodyPr wrap="square" lIns="0" tIns="0" rIns="0" bIns="0">
-            <a:spAutoFit/>
-          </a:bodyPr>
-          <a:lstStyle/>
-          <a:p>
-            <a:pPr>
-              <a:defRPr sz="1200">
-                <a:solidFill>
-                  <a:srgbClr val="64748B"/>
-                </a:solidFill>
-                <a:latin typeface="Arial"/>
-              </a:defRPr>
-            </a:pPr>
-            <a:r>
-              <a:t>Three critical bottlenecks stopping creators from producing broadcast-grade cinema content.</a:t>
-            </a:r>
-          </a:p>
-        </p:txBody>
-      </p:sp>
-      <p:sp>
-        <p:nvSpPr>
-          <p:cNvPr id="6" name="Rounded Rectangle 5"/>
-          <p:cNvSpPr/>
-          <p:nvPr/>
-        </p:nvSpPr>
-        <p:spPr>
-          <a:xfrm>
-            <a:off x="822960" y="1828800"/>
-            <a:ext cx="3291840" cy="4297680"/>
+            <a:off x="731520" y="1828800"/>
+            <a:ext cx="3328416" cy="4389120"/>
           </a:xfrm>
           <a:prstGeom prst="roundRect">
             <a:avLst/>
@@ -4141,204 +3888,95 @@
           </a:fontRef>
         </p:style>
         <p:txBody>
-          <a:bodyPr rtlCol="0" anchor="ctr"/>
-          <a:lstStyle/>
-          <a:p>
-            <a:pPr algn="ctr"/>
-          </a:p>
-        </p:txBody>
-      </p:sp>
-      <p:sp>
-        <p:nvSpPr>
-          <p:cNvPr id="7" name="TextBox 6"/>
-          <p:cNvSpPr txBox="1"/>
+          <a:bodyPr rtlCol="0" anchor="ctr" wrap="square" lIns="228600" rIns="228600" tIns="228600" bIns="228600"/>
+          <a:lstStyle/>
+          <a:p>
+            <a:pPr algn="ctr">
+              <a:spcAft>
+                <a:spcPts val="200"/>
+              </a:spcAft>
+              <a:defRPr sz="2400" b="1">
+                <a:solidFill>
+                  <a:srgbClr val="D97706"/>
+                </a:solidFill>
+              </a:defRPr>
+            </a:pPr>
+            <a:r>
+              <a:t>01</a:t>
+            </a:r>
+          </a:p>
+          <a:p>
+            <a:pPr>
+              <a:spcAft>
+                <a:spcPts val="1400"/>
+              </a:spcAft>
+              <a:defRPr sz="1600" b="1">
+                <a:solidFill>
+                  <a:srgbClr val="0F172A"/>
+                </a:solidFill>
+              </a:defRPr>
+            </a:pPr>
+            <a:r>
+              <a:t>₹30K+ License Barrier</a:t>
+            </a:r>
+          </a:p>
+          <a:p>
+            <a:pPr>
+              <a:spcAft>
+                <a:spcPts val="1000"/>
+              </a:spcAft>
+              <a:defRPr sz="1100">
+                <a:solidFill>
+                  <a:srgbClr val="334155"/>
+                </a:solidFill>
+              </a:defRPr>
+            </a:pPr>
+            <a:r>
+              <a:t>• Studio-grade VFX plugins cost ₹30,000–₹1,00,000 per seat.</a:t>
+            </a:r>
+          </a:p>
+          <a:p>
+            <a:pPr>
+              <a:spcAft>
+                <a:spcPts val="1000"/>
+              </a:spcAft>
+              <a:defRPr sz="1100">
+                <a:solidFill>
+                  <a:srgbClr val="334155"/>
+                </a:solidFill>
+              </a:defRPr>
+            </a:pPr>
+            <a:r>
+              <a:t>• Locks out 95% of indie creators, students, and regional studios.</a:t>
+            </a:r>
+          </a:p>
+          <a:p>
+            <a:pPr>
+              <a:spcAft>
+                <a:spcPts val="1000"/>
+              </a:spcAft>
+              <a:defRPr sz="1100">
+                <a:solidFill>
+                  <a:srgbClr val="334155"/>
+                </a:solidFill>
+              </a:defRPr>
+            </a:pPr>
+            <a:r>
+              <a:t>• Forces heavy reliance on pirated or outdated software.</a:t>
+            </a:r>
+          </a:p>
+        </p:txBody>
+      </p:sp>
+      <p:sp>
+        <p:nvSpPr>
+          <p:cNvPr id="5" name="Rounded Rectangle 4"/>
+          <p:cNvSpPr/>
           <p:nvPr/>
         </p:nvSpPr>
         <p:spPr>
           <a:xfrm>
-            <a:off x="1051560" y="2011680"/>
-            <a:ext cx="914400" cy="548640"/>
-          </a:xfrm>
-          <a:prstGeom prst="rect">
-            <a:avLst/>
-          </a:prstGeom>
-          <a:noFill/>
-        </p:spPr>
-        <p:txBody>
-          <a:bodyPr wrap="none" lIns="0" tIns="0" rIns="0" bIns="0">
-            <a:spAutoFit/>
-          </a:bodyPr>
-          <a:lstStyle/>
-          <a:p>
-            <a:pPr>
-              <a:defRPr sz="2800" b="1">
-                <a:solidFill>
-                  <a:srgbClr val="D97706"/>
-                </a:solidFill>
-              </a:defRPr>
-            </a:pPr>
-            <a:r>
-              <a:t>01</a:t>
-            </a:r>
-          </a:p>
-        </p:txBody>
-      </p:sp>
-      <p:sp>
-        <p:nvSpPr>
-          <p:cNvPr id="8" name="TextBox 7"/>
-          <p:cNvSpPr txBox="1"/>
-          <p:nvPr/>
-        </p:nvSpPr>
-        <p:spPr>
-          <a:xfrm>
-            <a:off x="1051560" y="2651760"/>
-            <a:ext cx="2834640" cy="640080"/>
-          </a:xfrm>
-          <a:prstGeom prst="rect">
-            <a:avLst/>
-          </a:prstGeom>
-          <a:noFill/>
-        </p:spPr>
-        <p:txBody>
-          <a:bodyPr wrap="square" lIns="0" tIns="0" rIns="0" bIns="0">
-            <a:spAutoFit/>
-          </a:bodyPr>
-          <a:lstStyle/>
-          <a:p>
-            <a:pPr>
-              <a:defRPr sz="1600" b="1">
-                <a:solidFill>
-                  <a:srgbClr val="0F172A"/>
-                </a:solidFill>
-              </a:defRPr>
-            </a:pPr>
-            <a:r>
-              <a:t>₹30K+ License Barrier</a:t>
-            </a:r>
-          </a:p>
-        </p:txBody>
-      </p:sp>
-      <p:sp>
-        <p:nvSpPr>
-          <p:cNvPr id="9" name="Rectangle 8"/>
-          <p:cNvSpPr/>
-          <p:nvPr/>
-        </p:nvSpPr>
-        <p:spPr>
-          <a:xfrm>
-            <a:off x="1051560" y="3383280"/>
-            <a:ext cx="2834640" cy="13716"/>
-          </a:xfrm>
-          <a:prstGeom prst="rect">
-            <a:avLst/>
-          </a:prstGeom>
-          <a:solidFill>
-            <a:srgbClr val="E2E8F0"/>
-          </a:solidFill>
-          <a:ln>
-            <a:noFill/>
-          </a:ln>
-        </p:spPr>
-        <p:style>
-          <a:lnRef idx="1">
-            <a:schemeClr val="accent1"/>
-          </a:lnRef>
-          <a:fillRef idx="3">
-            <a:schemeClr val="accent1"/>
-          </a:fillRef>
-          <a:effectRef idx="2">
-            <a:schemeClr val="accent1"/>
-          </a:effectRef>
-          <a:fontRef idx="minor">
-            <a:schemeClr val="lt1"/>
-          </a:fontRef>
-        </p:style>
-        <p:txBody>
-          <a:bodyPr rtlCol="0" anchor="ctr"/>
-          <a:lstStyle/>
-          <a:p>
-            <a:pPr algn="ctr"/>
-          </a:p>
-        </p:txBody>
-      </p:sp>
-      <p:sp>
-        <p:nvSpPr>
-          <p:cNvPr id="10" name="TextBox 9"/>
-          <p:cNvSpPr txBox="1"/>
-          <p:nvPr/>
-        </p:nvSpPr>
-        <p:spPr>
-          <a:xfrm>
-            <a:off x="1051560" y="3566160"/>
-            <a:ext cx="2834640" cy="2286000"/>
-          </a:xfrm>
-          <a:prstGeom prst="rect">
-            <a:avLst/>
-          </a:prstGeom>
-          <a:noFill/>
-        </p:spPr>
-        <p:txBody>
-          <a:bodyPr wrap="square" lIns="0" tIns="0" rIns="0" bIns="0">
-            <a:spAutoFit/>
-          </a:bodyPr>
-          <a:lstStyle/>
-          <a:p>
-            <a:pPr>
-              <a:spcAft>
-                <a:spcPts val="1200"/>
-              </a:spcAft>
-              <a:defRPr sz="1200">
-                <a:solidFill>
-                  <a:srgbClr val="334155"/>
-                </a:solidFill>
-              </a:defRPr>
-            </a:pPr>
-            <a:r>
-              <a:t>• Studio-grade VFX plugins cost ₹30,000–₹1,00,000 per seat.</a:t>
-            </a:r>
-          </a:p>
-          <a:p>
-            <a:pPr>
-              <a:spcAft>
-                <a:spcPts val="1200"/>
-              </a:spcAft>
-              <a:defRPr sz="1200">
-                <a:solidFill>
-                  <a:srgbClr val="334155"/>
-                </a:solidFill>
-              </a:defRPr>
-            </a:pPr>
-            <a:r>
-              <a:t>• Locks out 95% of indie creators, students, and regional studios.</a:t>
-            </a:r>
-          </a:p>
-          <a:p>
-            <a:pPr>
-              <a:spcAft>
-                <a:spcPts val="1200"/>
-              </a:spcAft>
-              <a:defRPr sz="1200">
-                <a:solidFill>
-                  <a:srgbClr val="334155"/>
-                </a:solidFill>
-              </a:defRPr>
-            </a:pPr>
-            <a:r>
-              <a:t>• Creates heavy reliance on pirated or outdated tools.</a:t>
-            </a:r>
-          </a:p>
-        </p:txBody>
-      </p:sp>
-      <p:sp>
-        <p:nvSpPr>
-          <p:cNvPr id="11" name="Rounded Rectangle 10"/>
-          <p:cNvSpPr/>
-          <p:nvPr/>
-        </p:nvSpPr>
-        <p:spPr>
-          <a:xfrm>
-            <a:off x="4434840" y="1828800"/>
-            <a:ext cx="3291840" cy="4297680"/>
+            <a:off x="4425696" y="1828800"/>
+            <a:ext cx="3328416" cy="4389120"/>
           </a:xfrm>
           <a:prstGeom prst="roundRect">
             <a:avLst/>
@@ -4367,204 +4005,95 @@
           </a:fontRef>
         </p:style>
         <p:txBody>
-          <a:bodyPr rtlCol="0" anchor="ctr"/>
-          <a:lstStyle/>
-          <a:p>
-            <a:pPr algn="ctr"/>
-          </a:p>
-        </p:txBody>
-      </p:sp>
-      <p:sp>
-        <p:nvSpPr>
-          <p:cNvPr id="12" name="TextBox 11"/>
-          <p:cNvSpPr txBox="1"/>
+          <a:bodyPr rtlCol="0" anchor="ctr" wrap="square" lIns="228600" rIns="228600" tIns="228600" bIns="228600"/>
+          <a:lstStyle/>
+          <a:p>
+            <a:pPr algn="ctr">
+              <a:spcAft>
+                <a:spcPts val="200"/>
+              </a:spcAft>
+              <a:defRPr sz="2400" b="1">
+                <a:solidFill>
+                  <a:srgbClr val="2563EB"/>
+                </a:solidFill>
+              </a:defRPr>
+            </a:pPr>
+            <a:r>
+              <a:t>02</a:t>
+            </a:r>
+          </a:p>
+          <a:p>
+            <a:pPr>
+              <a:spcAft>
+                <a:spcPts val="1400"/>
+              </a:spcAft>
+              <a:defRPr sz="1600" b="1">
+                <a:solidFill>
+                  <a:srgbClr val="0F172A"/>
+                </a:solidFill>
+              </a:defRPr>
+            </a:pPr>
+            <a:r>
+              <a:t>4K Compression Loss</a:t>
+            </a:r>
+          </a:p>
+          <a:p>
+            <a:pPr>
+              <a:spcAft>
+                <a:spcPts val="1000"/>
+              </a:spcAft>
+              <a:defRPr sz="1100">
+                <a:solidFill>
+                  <a:srgbClr val="334155"/>
+                </a:solidFill>
+              </a:defRPr>
+            </a:pPr>
+            <a:r>
+              <a:t>• Mainstream pipelines heavily compress 4K 60FPS high-framerate footage.</a:t>
+            </a:r>
+          </a:p>
+          <a:p>
+            <a:pPr>
+              <a:spcAft>
+                <a:spcPts val="1000"/>
+              </a:spcAft>
+              <a:defRPr sz="1100">
+                <a:solidFill>
+                  <a:srgbClr val="334155"/>
+                </a:solidFill>
+              </a:defRPr>
+            </a:pPr>
+            <a:r>
+              <a:t>• Causes severe motion artifacts and loss of camera sensor dynamic range.</a:t>
+            </a:r>
+          </a:p>
+          <a:p>
+            <a:pPr>
+              <a:spcAft>
+                <a:spcPts val="1000"/>
+              </a:spcAft>
+              <a:defRPr sz="1100">
+                <a:solidFill>
+                  <a:srgbClr val="334155"/>
+                </a:solidFill>
+              </a:defRPr>
+            </a:pPr>
+            <a:r>
+              <a:t>• Lack of accessible uncompressed 12-bit DPX frame renderers.</a:t>
+            </a:r>
+          </a:p>
+        </p:txBody>
+      </p:sp>
+      <p:sp>
+        <p:nvSpPr>
+          <p:cNvPr id="6" name="Rounded Rectangle 5"/>
+          <p:cNvSpPr/>
           <p:nvPr/>
         </p:nvSpPr>
         <p:spPr>
           <a:xfrm>
-            <a:off x="4663440" y="2011680"/>
-            <a:ext cx="914400" cy="548640"/>
-          </a:xfrm>
-          <a:prstGeom prst="rect">
-            <a:avLst/>
-          </a:prstGeom>
-          <a:noFill/>
-        </p:spPr>
-        <p:txBody>
-          <a:bodyPr wrap="none" lIns="0" tIns="0" rIns="0" bIns="0">
-            <a:spAutoFit/>
-          </a:bodyPr>
-          <a:lstStyle/>
-          <a:p>
-            <a:pPr>
-              <a:defRPr sz="2800" b="1">
-                <a:solidFill>
-                  <a:srgbClr val="2563EB"/>
-                </a:solidFill>
-              </a:defRPr>
-            </a:pPr>
-            <a:r>
-              <a:t>02</a:t>
-            </a:r>
-          </a:p>
-        </p:txBody>
-      </p:sp>
-      <p:sp>
-        <p:nvSpPr>
-          <p:cNvPr id="13" name="TextBox 12"/>
-          <p:cNvSpPr txBox="1"/>
-          <p:nvPr/>
-        </p:nvSpPr>
-        <p:spPr>
-          <a:xfrm>
-            <a:off x="4663440" y="2651760"/>
-            <a:ext cx="2834640" cy="640080"/>
-          </a:xfrm>
-          <a:prstGeom prst="rect">
-            <a:avLst/>
-          </a:prstGeom>
-          <a:noFill/>
-        </p:spPr>
-        <p:txBody>
-          <a:bodyPr wrap="square" lIns="0" tIns="0" rIns="0" bIns="0">
-            <a:spAutoFit/>
-          </a:bodyPr>
-          <a:lstStyle/>
-          <a:p>
-            <a:pPr>
-              <a:defRPr sz="1600" b="1">
-                <a:solidFill>
-                  <a:srgbClr val="0F172A"/>
-                </a:solidFill>
-              </a:defRPr>
-            </a:pPr>
-            <a:r>
-              <a:t>4K Video Compression Loss</a:t>
-            </a:r>
-          </a:p>
-        </p:txBody>
-      </p:sp>
-      <p:sp>
-        <p:nvSpPr>
-          <p:cNvPr id="14" name="Rectangle 13"/>
-          <p:cNvSpPr/>
-          <p:nvPr/>
-        </p:nvSpPr>
-        <p:spPr>
-          <a:xfrm>
-            <a:off x="4663440" y="3383280"/>
-            <a:ext cx="2834640" cy="13716"/>
-          </a:xfrm>
-          <a:prstGeom prst="rect">
-            <a:avLst/>
-          </a:prstGeom>
-          <a:solidFill>
-            <a:srgbClr val="E2E8F0"/>
-          </a:solidFill>
-          <a:ln>
-            <a:noFill/>
-          </a:ln>
-        </p:spPr>
-        <p:style>
-          <a:lnRef idx="1">
-            <a:schemeClr val="accent1"/>
-          </a:lnRef>
-          <a:fillRef idx="3">
-            <a:schemeClr val="accent1"/>
-          </a:fillRef>
-          <a:effectRef idx="2">
-            <a:schemeClr val="accent1"/>
-          </a:effectRef>
-          <a:fontRef idx="minor">
-            <a:schemeClr val="lt1"/>
-          </a:fontRef>
-        </p:style>
-        <p:txBody>
-          <a:bodyPr rtlCol="0" anchor="ctr"/>
-          <a:lstStyle/>
-          <a:p>
-            <a:pPr algn="ctr"/>
-          </a:p>
-        </p:txBody>
-      </p:sp>
-      <p:sp>
-        <p:nvSpPr>
-          <p:cNvPr id="15" name="TextBox 14"/>
-          <p:cNvSpPr txBox="1"/>
-          <p:nvPr/>
-        </p:nvSpPr>
-        <p:spPr>
-          <a:xfrm>
-            <a:off x="4663440" y="3566160"/>
-            <a:ext cx="2834640" cy="2286000"/>
-          </a:xfrm>
-          <a:prstGeom prst="rect">
-            <a:avLst/>
-          </a:prstGeom>
-          <a:noFill/>
-        </p:spPr>
-        <p:txBody>
-          <a:bodyPr wrap="square" lIns="0" tIns="0" rIns="0" bIns="0">
-            <a:spAutoFit/>
-          </a:bodyPr>
-          <a:lstStyle/>
-          <a:p>
-            <a:pPr>
-              <a:spcAft>
-                <a:spcPts val="1200"/>
-              </a:spcAft>
-              <a:defRPr sz="1200">
-                <a:solidFill>
-                  <a:srgbClr val="334155"/>
-                </a:solidFill>
-              </a:defRPr>
-            </a:pPr>
-            <a:r>
-              <a:t>• Mainstream pipelines compress 4K 60FPS video heavily.</a:t>
-            </a:r>
-          </a:p>
-          <a:p>
-            <a:pPr>
-              <a:spcAft>
-                <a:spcPts val="1200"/>
-              </a:spcAft>
-              <a:defRPr sz="1200">
-                <a:solidFill>
-                  <a:srgbClr val="334155"/>
-                </a:solidFill>
-              </a:defRPr>
-            </a:pPr>
-            <a:r>
-              <a:t>• Causes motion artifacts, color banding, and sensor detail loss.</a:t>
-            </a:r>
-          </a:p>
-          <a:p>
-            <a:pPr>
-              <a:spcAft>
-                <a:spcPts val="1200"/>
-              </a:spcAft>
-              <a:defRPr sz="1200">
-                <a:solidFill>
-                  <a:srgbClr val="334155"/>
-                </a:solidFill>
-              </a:defRPr>
-            </a:pPr>
-            <a:r>
-              <a:t>• Lack of accessible 12-bit uncompressed DPX frame renderers.</a:t>
-            </a:r>
-          </a:p>
-        </p:txBody>
-      </p:sp>
-      <p:sp>
-        <p:nvSpPr>
-          <p:cNvPr id="16" name="Rounded Rectangle 15"/>
-          <p:cNvSpPr/>
-          <p:nvPr/>
-        </p:nvSpPr>
-        <p:spPr>
-          <a:xfrm>
-            <a:off x="8046720" y="1828800"/>
-            <a:ext cx="3291840" cy="4297680"/>
+            <a:off x="8119872" y="1828800"/>
+            <a:ext cx="3328416" cy="4389120"/>
           </a:xfrm>
           <a:prstGeom prst="roundRect">
             <a:avLst/>
@@ -4593,37 +4122,14 @@
           </a:fontRef>
         </p:style>
         <p:txBody>
-          <a:bodyPr rtlCol="0" anchor="ctr"/>
-          <a:lstStyle/>
-          <a:p>
-            <a:pPr algn="ctr"/>
-          </a:p>
-        </p:txBody>
-      </p:sp>
-      <p:sp>
-        <p:nvSpPr>
-          <p:cNvPr id="17" name="TextBox 16"/>
-          <p:cNvSpPr txBox="1"/>
-          <p:nvPr/>
-        </p:nvSpPr>
-        <p:spPr>
-          <a:xfrm>
-            <a:off x="8275320" y="2011680"/>
-            <a:ext cx="914400" cy="548640"/>
-          </a:xfrm>
-          <a:prstGeom prst="rect">
-            <a:avLst/>
-          </a:prstGeom>
-          <a:noFill/>
-        </p:spPr>
-        <p:txBody>
-          <a:bodyPr wrap="none" lIns="0" tIns="0" rIns="0" bIns="0">
-            <a:spAutoFit/>
-          </a:bodyPr>
-          <a:lstStyle/>
-          <a:p>
-            <a:pPr>
-              <a:defRPr sz="2800" b="1">
+          <a:bodyPr rtlCol="0" anchor="ctr" wrap="square" lIns="228600" rIns="228600" tIns="228600" bIns="228600"/>
+          <a:lstStyle/>
+          <a:p>
+            <a:pPr algn="ctr">
+              <a:spcAft>
+                <a:spcPts val="200"/>
+              </a:spcAft>
+              <a:defRPr sz="2400" b="1">
                 <a:solidFill>
                   <a:srgbClr val="7C3AED"/>
                 </a:solidFill>
@@ -4633,31 +4139,11 @@
               <a:t>03</a:t>
             </a:r>
           </a:p>
-        </p:txBody>
-      </p:sp>
-      <p:sp>
-        <p:nvSpPr>
-          <p:cNvPr id="18" name="TextBox 17"/>
-          <p:cNvSpPr txBox="1"/>
-          <p:nvPr/>
-        </p:nvSpPr>
-        <p:spPr>
-          <a:xfrm>
-            <a:off x="8275320" y="2651760"/>
-            <a:ext cx="2834640" cy="640080"/>
-          </a:xfrm>
-          <a:prstGeom prst="rect">
-            <a:avLst/>
-          </a:prstGeom>
-          <a:noFill/>
-        </p:spPr>
-        <p:txBody>
-          <a:bodyPr wrap="square" lIns="0" tIns="0" rIns="0" bIns="0">
-            <a:spAutoFit/>
-          </a:bodyPr>
-          <a:lstStyle/>
-          <a:p>
-            <a:pPr>
+          <a:p>
+            <a:pPr>
+              <a:spcAft>
+                <a:spcPts val="1400"/>
+              </a:spcAft>
               <a:defRPr sz="1600" b="1">
                 <a:solidFill>
                   <a:srgbClr val="0F172A"/>
@@ -4665,81 +4151,15 @@
               </a:defRPr>
             </a:pPr>
             <a:r>
-              <a:t>Disconnected AI Tools</a:t>
-            </a:r>
-          </a:p>
-        </p:txBody>
-      </p:sp>
-      <p:sp>
-        <p:nvSpPr>
-          <p:cNvPr id="19" name="Rectangle 18"/>
-          <p:cNvSpPr/>
-          <p:nvPr/>
-        </p:nvSpPr>
-        <p:spPr>
-          <a:xfrm>
-            <a:off x="8275320" y="3383280"/>
-            <a:ext cx="2834640" cy="13716"/>
-          </a:xfrm>
-          <a:prstGeom prst="rect">
-            <a:avLst/>
-          </a:prstGeom>
-          <a:solidFill>
-            <a:srgbClr val="E2E8F0"/>
-          </a:solidFill>
-          <a:ln>
-            <a:noFill/>
-          </a:ln>
-        </p:spPr>
-        <p:style>
-          <a:lnRef idx="1">
-            <a:schemeClr val="accent1"/>
-          </a:lnRef>
-          <a:fillRef idx="3">
-            <a:schemeClr val="accent1"/>
-          </a:fillRef>
-          <a:effectRef idx="2">
-            <a:schemeClr val="accent1"/>
-          </a:effectRef>
-          <a:fontRef idx="minor">
-            <a:schemeClr val="lt1"/>
-          </a:fontRef>
-        </p:style>
-        <p:txBody>
-          <a:bodyPr rtlCol="0" anchor="ctr"/>
-          <a:lstStyle/>
-          <a:p>
-            <a:pPr algn="ctr"/>
-          </a:p>
-        </p:txBody>
-      </p:sp>
-      <p:sp>
-        <p:nvSpPr>
-          <p:cNvPr id="20" name="TextBox 19"/>
-          <p:cNvSpPr txBox="1"/>
-          <p:nvPr/>
-        </p:nvSpPr>
-        <p:spPr>
-          <a:xfrm>
-            <a:off x="8275320" y="3566160"/>
-            <a:ext cx="2834640" cy="2286000"/>
-          </a:xfrm>
-          <a:prstGeom prst="rect">
-            <a:avLst/>
-          </a:prstGeom>
-          <a:noFill/>
-        </p:spPr>
-        <p:txBody>
-          <a:bodyPr wrap="square" lIns="0" tIns="0" rIns="0" bIns="0">
-            <a:spAutoFit/>
-          </a:bodyPr>
-          <a:lstStyle/>
-          <a:p>
-            <a:pPr>
-              <a:spcAft>
-                <a:spcPts val="1200"/>
-              </a:spcAft>
-              <a:defRPr sz="1200">
+              <a:t>Disconnected AI Tooling</a:t>
+            </a:r>
+          </a:p>
+          <a:p>
+            <a:pPr>
+              <a:spcAft>
+                <a:spcPts val="1000"/>
+              </a:spcAft>
+              <a:defRPr sz="1100">
                 <a:solidFill>
                   <a:srgbClr val="334155"/>
                 </a:solidFill>
@@ -4752,31 +4172,31 @@
           <a:p>
             <a:pPr>
               <a:spcAft>
-                <a:spcPts val="1200"/>
-              </a:spcAft>
-              <a:defRPr sz="1200">
+                <a:spcPts val="1000"/>
+              </a:spcAft>
+              <a:defRPr sz="1100">
                 <a:solidFill>
                   <a:srgbClr val="334155"/>
                 </a:solidFill>
               </a:defRPr>
             </a:pPr>
             <a:r>
-              <a:t>• No native integration inside DaVinci Resolve or Adobe Premiere.</a:t>
-            </a:r>
-          </a:p>
-          <a:p>
-            <a:pPr>
-              <a:spcAft>
-                <a:spcPts val="1200"/>
-              </a:spcAft>
-              <a:defRPr sz="1200">
+              <a:t>• No native integration into editors like DaVinci Resolve &amp; Premiere.</a:t>
+            </a:r>
+          </a:p>
+          <a:p>
+            <a:pPr>
+              <a:spcAft>
+                <a:spcPts val="1000"/>
+              </a:spcAft>
+              <a:defRPr sz="1100">
                 <a:solidFill>
                   <a:srgbClr val="334155"/>
                 </a:solidFill>
               </a:defRPr>
             </a:pPr>
             <a:r>
-              <a:t>• Forces tedious multi-step export and upload workflows.</a:t>
+              <a:t>• Forces tedious multi-step manual export and upload workflows.</a:t>
             </a:r>
           </a:p>
         </p:txBody>
@@ -4801,20 +4221,88 @@
       <p:grpSpPr/>
       <p:sp>
         <p:nvSpPr>
-          <p:cNvPr id="2" name="Rectangle 1"/>
+          <p:cNvPr id="2" name="TextBox 1"/>
+          <p:cNvSpPr txBox="1"/>
+          <p:nvPr/>
+        </p:nvSpPr>
+        <p:spPr>
+          <a:xfrm>
+            <a:off x="731520" y="411480"/>
+            <a:ext cx="10728655" cy="1097280"/>
+          </a:xfrm>
+          <a:prstGeom prst="rect">
+            <a:avLst/>
+          </a:prstGeom>
+          <a:noFill/>
+        </p:spPr>
+        <p:txBody>
+          <a:bodyPr wrap="square" lIns="0" tIns="0" rIns="0" bIns="0">
+            <a:spAutoFit/>
+          </a:bodyPr>
+          <a:lstStyle/>
+          <a:p>
+            <a:pPr>
+              <a:spcAft>
+                <a:spcPts val="200"/>
+              </a:spcAft>
+              <a:defRPr sz="1000" b="1">
+                <a:solidFill>
+                  <a:srgbClr val="2563EB"/>
+                </a:solidFill>
+                <a:latin typeface="Arial"/>
+              </a:defRPr>
+            </a:pPr>
+            <a:r>
+              <a:t>PROPRIETARY PRODUCTS</a:t>
+            </a:r>
+          </a:p>
+          <a:p>
+            <a:pPr>
+              <a:spcAft>
+                <a:spcPts val="200"/>
+              </a:spcAft>
+              <a:defRPr sz="2200" b="1">
+                <a:solidFill>
+                  <a:srgbClr val="0F172A"/>
+                </a:solidFill>
+                <a:latin typeface="Arial"/>
+              </a:defRPr>
+            </a:pPr>
+            <a:r>
+              <a:t>The Solution — Symmetrical Media-Tech Infrastructure</a:t>
+            </a:r>
+          </a:p>
+          <a:p>
+            <a:pPr>
+              <a:defRPr sz="1150">
+                <a:solidFill>
+                  <a:srgbClr val="64748B"/>
+                </a:solidFill>
+                <a:latin typeface="Arial"/>
+              </a:defRPr>
+            </a:pPr>
+            <a:r>
+              <a:t>High-performance, hardware-accelerated software engineered for local GPU execution.</a:t>
+            </a:r>
+          </a:p>
+        </p:txBody>
+      </p:sp>
+      <p:sp>
+        <p:nvSpPr>
+          <p:cNvPr id="3" name="Rectangle 2"/>
           <p:cNvSpPr/>
           <p:nvPr/>
         </p:nvSpPr>
         <p:spPr>
           <a:xfrm>
-            <a:off x="0" y="0"/>
-            <a:ext cx="12191695" cy="6858000"/>
+            <a:off x="731520" y="1554480"/>
+            <a:ext cx="10728655" cy="13716"/>
           </a:xfrm>
           <a:prstGeom prst="rect">
             <a:avLst/>
           </a:prstGeom>
           <a:solidFill>
-            <a:srgbClr val="FFFFFF"/>
+            <a:srgbClr val="E2E8F0"/>
           </a:solidFill>
           <a:ln>
             <a:noFill/>
@@ -4844,122 +4332,14 @@
       </p:sp>
       <p:sp>
         <p:nvSpPr>
-          <p:cNvPr id="3" name="TextBox 2"/>
-          <p:cNvSpPr txBox="1"/>
+          <p:cNvPr id="4" name="Rounded Rectangle 3"/>
+          <p:cNvSpPr/>
           <p:nvPr/>
         </p:nvSpPr>
         <p:spPr>
           <a:xfrm>
-            <a:off x="822960" y="457200"/>
-            <a:ext cx="10515600" cy="274320"/>
-          </a:xfrm>
-          <a:prstGeom prst="rect">
-            <a:avLst/>
-          </a:prstGeom>
-          <a:noFill/>
-        </p:spPr>
-        <p:txBody>
-          <a:bodyPr wrap="square" lIns="0" tIns="0" rIns="0" bIns="0">
-            <a:spAutoFit/>
-          </a:bodyPr>
-          <a:lstStyle/>
-          <a:p>
-            <a:pPr>
-              <a:defRPr sz="1000" b="1">
-                <a:solidFill>
-                  <a:srgbClr val="2563EB"/>
-                </a:solidFill>
-                <a:latin typeface="Arial"/>
-              </a:defRPr>
-            </a:pPr>
-            <a:r>
-              <a:t>THE SOLUTION</a:t>
-            </a:r>
-          </a:p>
-        </p:txBody>
-      </p:sp>
-      <p:sp>
-        <p:nvSpPr>
-          <p:cNvPr id="4" name="TextBox 3"/>
-          <p:cNvSpPr txBox="1"/>
-          <p:nvPr/>
-        </p:nvSpPr>
-        <p:spPr>
-          <a:xfrm>
-            <a:off x="822960" y="731520"/>
-            <a:ext cx="10515600" cy="548640"/>
-          </a:xfrm>
-          <a:prstGeom prst="rect">
-            <a:avLst/>
-          </a:prstGeom>
-          <a:noFill/>
-        </p:spPr>
-        <p:txBody>
-          <a:bodyPr wrap="square" lIns="0" tIns="0" rIns="0" bIns="0">
-            <a:spAutoFit/>
-          </a:bodyPr>
-          <a:lstStyle/>
-          <a:p>
-            <a:pPr>
-              <a:defRPr sz="2200" b="1">
-                <a:solidFill>
-                  <a:srgbClr val="0F172A"/>
-                </a:solidFill>
-                <a:latin typeface="Arial"/>
-              </a:defRPr>
-            </a:pPr>
-            <a:r>
-              <a:t>Our Proprietary Product Suite</a:t>
-            </a:r>
-          </a:p>
-        </p:txBody>
-      </p:sp>
-      <p:sp>
-        <p:nvSpPr>
-          <p:cNvPr id="5" name="TextBox 4"/>
-          <p:cNvSpPr txBox="1"/>
-          <p:nvPr/>
-        </p:nvSpPr>
-        <p:spPr>
-          <a:xfrm>
-            <a:off x="822960" y="1280160"/>
-            <a:ext cx="10515600" cy="274320"/>
-          </a:xfrm>
-          <a:prstGeom prst="rect">
-            <a:avLst/>
-          </a:prstGeom>
-          <a:noFill/>
-        </p:spPr>
-        <p:txBody>
-          <a:bodyPr wrap="square" lIns="0" tIns="0" rIns="0" bIns="0">
-            <a:spAutoFit/>
-          </a:bodyPr>
-          <a:lstStyle/>
-          <a:p>
-            <a:pPr>
-              <a:defRPr sz="1200">
-                <a:solidFill>
-                  <a:srgbClr val="64748B"/>
-                </a:solidFill>
-                <a:latin typeface="Arial"/>
-              </a:defRPr>
-            </a:pPr>
-            <a:r>
-              <a:t>Native GPU-accelerated tools built for local execution without cloud lag.</a:t>
-            </a:r>
-          </a:p>
-        </p:txBody>
-      </p:sp>
-      <p:sp>
-        <p:nvSpPr>
-          <p:cNvPr id="6" name="Rounded Rectangle 5"/>
-          <p:cNvSpPr/>
-          <p:nvPr/>
-        </p:nvSpPr>
-        <p:spPr>
-          <a:xfrm>
-            <a:off x="822960" y="1828800"/>
-            <a:ext cx="3291840" cy="4297680"/>
+            <a:off x="731520" y="1828800"/>
+            <a:ext cx="3328416" cy="4389120"/>
           </a:xfrm>
           <a:prstGeom prst="roundRect">
             <a:avLst/>
@@ -4988,219 +4368,110 @@
           </a:fontRef>
         </p:style>
         <p:txBody>
-          <a:bodyPr rtlCol="0" anchor="ctr"/>
-          <a:lstStyle/>
-          <a:p>
-            <a:pPr algn="ctr"/>
-          </a:p>
-        </p:txBody>
-      </p:sp>
-      <p:sp>
-        <p:nvSpPr>
-          <p:cNvPr id="7" name="TextBox 6"/>
-          <p:cNvSpPr txBox="1"/>
+          <a:bodyPr rtlCol="0" anchor="ctr" wrap="square" lIns="228600" rIns="228600" tIns="228600" bIns="228600"/>
+          <a:lstStyle/>
+          <a:p>
+            <a:pPr algn="ctr">
+              <a:spcAft>
+                <a:spcPts val="200"/>
+              </a:spcAft>
+              <a:defRPr sz="950" b="1">
+                <a:solidFill>
+                  <a:srgbClr val="2563EB"/>
+                </a:solidFill>
+              </a:defRPr>
+            </a:pPr>
+            <a:r>
+              <a:t>OFX PLUGIN FOR DAVINCI</a:t>
+            </a:r>
+          </a:p>
+          <a:p>
+            <a:pPr>
+              <a:spcAft>
+                <a:spcPts val="1400"/>
+              </a:spcAft>
+              <a:defRPr sz="1600" b="1">
+                <a:solidFill>
+                  <a:srgbClr val="0F172A"/>
+                </a:solidFill>
+              </a:defRPr>
+            </a:pPr>
+            <a:r>
+              <a:t>AI Cinematic Haze</a:t>
+            </a:r>
+          </a:p>
+          <a:p>
+            <a:pPr>
+              <a:spcAft>
+                <a:spcPts val="1000"/>
+              </a:spcAft>
+              <a:defRPr sz="1100">
+                <a:solidFill>
+                  <a:srgbClr val="334155"/>
+                </a:solidFill>
+              </a:defRPr>
+            </a:pPr>
+            <a:r>
+              <a:t>✔  Native C++ / Apple Metal / CUDA GPU compute.</a:t>
+            </a:r>
+          </a:p>
+          <a:p>
+            <a:pPr>
+              <a:spcAft>
+                <a:spcPts val="1000"/>
+              </a:spcAft>
+              <a:defRPr sz="1100">
+                <a:solidFill>
+                  <a:srgbClr val="334155"/>
+                </a:solidFill>
+              </a:defRPr>
+            </a:pPr>
+            <a:r>
+              <a:t>✔  Embedded neural depth AI for real-time volumetric haze.</a:t>
+            </a:r>
+          </a:p>
+          <a:p>
+            <a:pPr>
+              <a:spcAft>
+                <a:spcPts val="1000"/>
+              </a:spcAft>
+              <a:defRPr sz="1100">
+                <a:solidFill>
+                  <a:srgbClr val="334155"/>
+                </a:solidFill>
+              </a:defRPr>
+            </a:pPr>
+            <a:r>
+              <a:t>✔  Preserves uncompressed 12-bit DPX sensor dynamic range.</a:t>
+            </a:r>
+          </a:p>
+          <a:p>
+            <a:pPr>
+              <a:spcAft>
+                <a:spcPts val="1000"/>
+              </a:spcAft>
+              <a:defRPr sz="1100">
+                <a:solidFill>
+                  <a:srgbClr val="334155"/>
+                </a:solidFill>
+              </a:defRPr>
+            </a:pPr>
+            <a:r>
+              <a:t>✔  100% on-device GPU execution with zero cloud latency.</a:t>
+            </a:r>
+          </a:p>
+        </p:txBody>
+      </p:sp>
+      <p:sp>
+        <p:nvSpPr>
+          <p:cNvPr id="5" name="Rounded Rectangle 4"/>
+          <p:cNvSpPr/>
           <p:nvPr/>
         </p:nvSpPr>
         <p:spPr>
           <a:xfrm>
-            <a:off x="1051560" y="2103120"/>
-            <a:ext cx="2834640" cy="274320"/>
-          </a:xfrm>
-          <a:prstGeom prst="rect">
-            <a:avLst/>
-          </a:prstGeom>
-          <a:noFill/>
-        </p:spPr>
-        <p:txBody>
-          <a:bodyPr wrap="none" lIns="0" tIns="0" rIns="0" bIns="0">
-            <a:spAutoFit/>
-          </a:bodyPr>
-          <a:lstStyle/>
-          <a:p>
-            <a:pPr>
-              <a:defRPr sz="950" b="1">
-                <a:solidFill>
-                  <a:srgbClr val="2563EB"/>
-                </a:solidFill>
-              </a:defRPr>
-            </a:pPr>
-            <a:r>
-              <a:t>DAVINCI RESOLVE OPENFX PLUGIN</a:t>
-            </a:r>
-          </a:p>
-        </p:txBody>
-      </p:sp>
-      <p:sp>
-        <p:nvSpPr>
-          <p:cNvPr id="8" name="TextBox 7"/>
-          <p:cNvSpPr txBox="1"/>
-          <p:nvPr/>
-        </p:nvSpPr>
-        <p:spPr>
-          <a:xfrm>
-            <a:off x="1051560" y="2377440"/>
-            <a:ext cx="2834640" cy="548640"/>
-          </a:xfrm>
-          <a:prstGeom prst="rect">
-            <a:avLst/>
-          </a:prstGeom>
-          <a:noFill/>
-        </p:spPr>
-        <p:txBody>
-          <a:bodyPr wrap="square" lIns="0" tIns="0" rIns="0" bIns="0">
-            <a:spAutoFit/>
-          </a:bodyPr>
-          <a:lstStyle/>
-          <a:p>
-            <a:pPr>
-              <a:defRPr sz="1700" b="1">
-                <a:solidFill>
-                  <a:srgbClr val="0F172A"/>
-                </a:solidFill>
-              </a:defRPr>
-            </a:pPr>
-            <a:r>
-              <a:t>AI Cinematic Haze</a:t>
-            </a:r>
-          </a:p>
-        </p:txBody>
-      </p:sp>
-      <p:sp>
-        <p:nvSpPr>
-          <p:cNvPr id="9" name="Rectangle 8"/>
-          <p:cNvSpPr/>
-          <p:nvPr/>
-        </p:nvSpPr>
-        <p:spPr>
-          <a:xfrm>
-            <a:off x="1051560" y="3017520"/>
-            <a:ext cx="2834640" cy="13716"/>
-          </a:xfrm>
-          <a:prstGeom prst="rect">
-            <a:avLst/>
-          </a:prstGeom>
-          <a:solidFill>
-            <a:srgbClr val="E2E8F0"/>
-          </a:solidFill>
-          <a:ln>
-            <a:noFill/>
-          </a:ln>
-        </p:spPr>
-        <p:style>
-          <a:lnRef idx="1">
-            <a:schemeClr val="accent1"/>
-          </a:lnRef>
-          <a:fillRef idx="3">
-            <a:schemeClr val="accent1"/>
-          </a:fillRef>
-          <a:effectRef idx="2">
-            <a:schemeClr val="accent1"/>
-          </a:effectRef>
-          <a:fontRef idx="minor">
-            <a:schemeClr val="lt1"/>
-          </a:fontRef>
-        </p:style>
-        <p:txBody>
-          <a:bodyPr rtlCol="0" anchor="ctr"/>
-          <a:lstStyle/>
-          <a:p>
-            <a:pPr algn="ctr"/>
-          </a:p>
-        </p:txBody>
-      </p:sp>
-      <p:sp>
-        <p:nvSpPr>
-          <p:cNvPr id="10" name="TextBox 9"/>
-          <p:cNvSpPr txBox="1"/>
-          <p:nvPr/>
-        </p:nvSpPr>
-        <p:spPr>
-          <a:xfrm>
-            <a:off x="1051560" y="3200400"/>
-            <a:ext cx="2834640" cy="2651760"/>
-          </a:xfrm>
-          <a:prstGeom prst="rect">
-            <a:avLst/>
-          </a:prstGeom>
-          <a:noFill/>
-        </p:spPr>
-        <p:txBody>
-          <a:bodyPr wrap="square" lIns="0" tIns="0" rIns="0" bIns="0">
-            <a:spAutoFit/>
-          </a:bodyPr>
-          <a:lstStyle/>
-          <a:p>
-            <a:pPr>
-              <a:spcAft>
-                <a:spcPts val="1000"/>
-              </a:spcAft>
-              <a:defRPr sz="1150">
-                <a:solidFill>
-                  <a:srgbClr val="334155"/>
-                </a:solidFill>
-              </a:defRPr>
-            </a:pPr>
-            <a:r>
-              <a:t>✔  Native C++ / Apple Metal / CUDA GPU compute.</a:t>
-            </a:r>
-          </a:p>
-          <a:p>
-            <a:pPr>
-              <a:spcAft>
-                <a:spcPts val="1000"/>
-              </a:spcAft>
-              <a:defRPr sz="1150">
-                <a:solidFill>
-                  <a:srgbClr val="334155"/>
-                </a:solidFill>
-              </a:defRPr>
-            </a:pPr>
-            <a:r>
-              <a:t>✔  Embedded neural depth AI for real-time volumetric haze.</a:t>
-            </a:r>
-          </a:p>
-          <a:p>
-            <a:pPr>
-              <a:spcAft>
-                <a:spcPts val="1000"/>
-              </a:spcAft>
-              <a:defRPr sz="1150">
-                <a:solidFill>
-                  <a:srgbClr val="334155"/>
-                </a:solidFill>
-              </a:defRPr>
-            </a:pPr>
-            <a:r>
-              <a:t>✔  Preserves 12-bit uncompressed DPX sensor dynamic range.</a:t>
-            </a:r>
-          </a:p>
-          <a:p>
-            <a:pPr>
-              <a:spcAft>
-                <a:spcPts val="1000"/>
-              </a:spcAft>
-              <a:defRPr sz="1150">
-                <a:solidFill>
-                  <a:srgbClr val="334155"/>
-                </a:solidFill>
-              </a:defRPr>
-            </a:pPr>
-            <a:r>
-              <a:t>✔  100% on-device execution with zero cloud latency.</a:t>
-            </a:r>
-          </a:p>
-        </p:txBody>
-      </p:sp>
-      <p:sp>
-        <p:nvSpPr>
-          <p:cNvPr id="11" name="Rounded Rectangle 10"/>
-          <p:cNvSpPr/>
-          <p:nvPr/>
-        </p:nvSpPr>
-        <p:spPr>
-          <a:xfrm>
-            <a:off x="4434840" y="1828800"/>
-            <a:ext cx="3291840" cy="4297680"/>
+            <a:off x="4425696" y="1828800"/>
+            <a:ext cx="3328416" cy="4389120"/>
           </a:xfrm>
           <a:prstGeom prst="roundRect">
             <a:avLst/>
@@ -5229,219 +4500,110 @@
           </a:fontRef>
         </p:style>
         <p:txBody>
-          <a:bodyPr rtlCol="0" anchor="ctr"/>
-          <a:lstStyle/>
-          <a:p>
-            <a:pPr algn="ctr"/>
-          </a:p>
-        </p:txBody>
-      </p:sp>
-      <p:sp>
-        <p:nvSpPr>
-          <p:cNvPr id="12" name="TextBox 11"/>
-          <p:cNvSpPr txBox="1"/>
+          <a:bodyPr rtlCol="0" anchor="ctr" wrap="square" lIns="228600" rIns="228600" tIns="228600" bIns="228600"/>
+          <a:lstStyle/>
+          <a:p>
+            <a:pPr algn="ctr">
+              <a:spcAft>
+                <a:spcPts val="200"/>
+              </a:spcAft>
+              <a:defRPr sz="950" b="1">
+                <a:solidFill>
+                  <a:srgbClr val="059669"/>
+                </a:solidFill>
+              </a:defRPr>
+            </a:pPr>
+            <a:r>
+              <a:t>ALGORITHMIC CSP SOLVER</a:t>
+            </a:r>
+          </a:p>
+          <a:p>
+            <a:pPr>
+              <a:spcAft>
+                <a:spcPts val="1400"/>
+              </a:spcAft>
+              <a:defRPr sz="1600" b="1">
+                <a:solidFill>
+                  <a:srgbClr val="0F172A"/>
+                </a:solidFill>
+              </a:defRPr>
+            </a:pPr>
+            <a:r>
+              <a:t>InvigiMatrix Platform</a:t>
+            </a:r>
+          </a:p>
+          <a:p>
+            <a:pPr>
+              <a:spcAft>
+                <a:spcPts val="1000"/>
+              </a:spcAft>
+              <a:defRPr sz="1100">
+                <a:solidFill>
+                  <a:srgbClr val="334155"/>
+                </a:solidFill>
+              </a:defRPr>
+            </a:pPr>
+            <a:r>
+              <a:t>✔  Combinatorial NP-hard CSP backtracking solver.</a:t>
+            </a:r>
+          </a:p>
+          <a:p>
+            <a:pPr>
+              <a:spcAft>
+                <a:spcPts val="1000"/>
+              </a:spcAft>
+              <a:defRPr sz="1100">
+                <a:solidFill>
+                  <a:srgbClr val="334155"/>
+                </a:solidFill>
+              </a:defRPr>
+            </a:pPr>
+            <a:r>
+              <a:t>✔  AI/ML Smart Batch Planner with dynamic K-Means (k=3).</a:t>
+            </a:r>
+          </a:p>
+          <a:p>
+            <a:pPr>
+              <a:spcAft>
+                <a:spcPts val="1000"/>
+              </a:spcAft>
+              <a:defRPr sz="1100">
+                <a:solidFill>
+                  <a:srgbClr val="334155"/>
+                </a:solidFill>
+              </a:defRPr>
+            </a:pPr>
+            <a:r>
+              <a:t>✔  Zero-framework native Node.js + SQLite ACID transactions.</a:t>
+            </a:r>
+          </a:p>
+          <a:p>
+            <a:pPr>
+              <a:spcAft>
+                <a:spcPts val="1000"/>
+              </a:spcAft>
+              <a:defRPr sz="1100">
+                <a:solidFill>
+                  <a:srgbClr val="334155"/>
+                </a:solidFill>
+              </a:defRPr>
+            </a:pPr>
+            <a:r>
+              <a:t>✔  Live institutional deployment at Sahyadri College (SCEM).</a:t>
+            </a:r>
+          </a:p>
+        </p:txBody>
+      </p:sp>
+      <p:sp>
+        <p:nvSpPr>
+          <p:cNvPr id="6" name="Rounded Rectangle 5"/>
+          <p:cNvSpPr/>
           <p:nvPr/>
         </p:nvSpPr>
         <p:spPr>
           <a:xfrm>
-            <a:off x="4663440" y="2103120"/>
-            <a:ext cx="2834640" cy="274320"/>
-          </a:xfrm>
-          <a:prstGeom prst="rect">
-            <a:avLst/>
-          </a:prstGeom>
-          <a:noFill/>
-        </p:spPr>
-        <p:txBody>
-          <a:bodyPr wrap="none" lIns="0" tIns="0" rIns="0" bIns="0">
-            <a:spAutoFit/>
-          </a:bodyPr>
-          <a:lstStyle/>
-          <a:p>
-            <a:pPr>
-              <a:defRPr sz="950" b="1">
-                <a:solidFill>
-                  <a:srgbClr val="059669"/>
-                </a:solidFill>
-              </a:defRPr>
-            </a:pPr>
-            <a:r>
-              <a:t>INSTITUTIONAL OPTIMIZATION SOLVER</a:t>
-            </a:r>
-          </a:p>
-        </p:txBody>
-      </p:sp>
-      <p:sp>
-        <p:nvSpPr>
-          <p:cNvPr id="13" name="TextBox 12"/>
-          <p:cNvSpPr txBox="1"/>
-          <p:nvPr/>
-        </p:nvSpPr>
-        <p:spPr>
-          <a:xfrm>
-            <a:off x="4663440" y="2377440"/>
-            <a:ext cx="2834640" cy="548640"/>
-          </a:xfrm>
-          <a:prstGeom prst="rect">
-            <a:avLst/>
-          </a:prstGeom>
-          <a:noFill/>
-        </p:spPr>
-        <p:txBody>
-          <a:bodyPr wrap="square" lIns="0" tIns="0" rIns="0" bIns="0">
-            <a:spAutoFit/>
-          </a:bodyPr>
-          <a:lstStyle/>
-          <a:p>
-            <a:pPr>
-              <a:defRPr sz="1700" b="1">
-                <a:solidFill>
-                  <a:srgbClr val="0F172A"/>
-                </a:solidFill>
-              </a:defRPr>
-            </a:pPr>
-            <a:r>
-              <a:t>InvigiMatrix</a:t>
-            </a:r>
-          </a:p>
-        </p:txBody>
-      </p:sp>
-      <p:sp>
-        <p:nvSpPr>
-          <p:cNvPr id="14" name="Rectangle 13"/>
-          <p:cNvSpPr/>
-          <p:nvPr/>
-        </p:nvSpPr>
-        <p:spPr>
-          <a:xfrm>
-            <a:off x="4663440" y="3017520"/>
-            <a:ext cx="2834640" cy="13716"/>
-          </a:xfrm>
-          <a:prstGeom prst="rect">
-            <a:avLst/>
-          </a:prstGeom>
-          <a:solidFill>
-            <a:srgbClr val="E2E8F0"/>
-          </a:solidFill>
-          <a:ln>
-            <a:noFill/>
-          </a:ln>
-        </p:spPr>
-        <p:style>
-          <a:lnRef idx="1">
-            <a:schemeClr val="accent1"/>
-          </a:lnRef>
-          <a:fillRef idx="3">
-            <a:schemeClr val="accent1"/>
-          </a:fillRef>
-          <a:effectRef idx="2">
-            <a:schemeClr val="accent1"/>
-          </a:effectRef>
-          <a:fontRef idx="minor">
-            <a:schemeClr val="lt1"/>
-          </a:fontRef>
-        </p:style>
-        <p:txBody>
-          <a:bodyPr rtlCol="0" anchor="ctr"/>
-          <a:lstStyle/>
-          <a:p>
-            <a:pPr algn="ctr"/>
-          </a:p>
-        </p:txBody>
-      </p:sp>
-      <p:sp>
-        <p:nvSpPr>
-          <p:cNvPr id="15" name="TextBox 14"/>
-          <p:cNvSpPr txBox="1"/>
-          <p:nvPr/>
-        </p:nvSpPr>
-        <p:spPr>
-          <a:xfrm>
-            <a:off x="4663440" y="3200400"/>
-            <a:ext cx="2834640" cy="2651760"/>
-          </a:xfrm>
-          <a:prstGeom prst="rect">
-            <a:avLst/>
-          </a:prstGeom>
-          <a:noFill/>
-        </p:spPr>
-        <p:txBody>
-          <a:bodyPr wrap="square" lIns="0" tIns="0" rIns="0" bIns="0">
-            <a:spAutoFit/>
-          </a:bodyPr>
-          <a:lstStyle/>
-          <a:p>
-            <a:pPr>
-              <a:spcAft>
-                <a:spcPts val="1000"/>
-              </a:spcAft>
-              <a:defRPr sz="1150">
-                <a:solidFill>
-                  <a:srgbClr val="334155"/>
-                </a:solidFill>
-              </a:defRPr>
-            </a:pPr>
-            <a:r>
-              <a:t>✔  Combinatorial NP-hard CSP backtracking solver.</a:t>
-            </a:r>
-          </a:p>
-          <a:p>
-            <a:pPr>
-              <a:spcAft>
-                <a:spcPts val="1000"/>
-              </a:spcAft>
-              <a:defRPr sz="1150">
-                <a:solidFill>
-                  <a:srgbClr val="334155"/>
-                </a:solidFill>
-              </a:defRPr>
-            </a:pPr>
-            <a:r>
-              <a:t>✔  AI/ML Smart Batch Planner with dynamic K-Means (k=3).</a:t>
-            </a:r>
-          </a:p>
-          <a:p>
-            <a:pPr>
-              <a:spcAft>
-                <a:spcPts val="1000"/>
-              </a:spcAft>
-              <a:defRPr sz="1150">
-                <a:solidFill>
-                  <a:srgbClr val="334155"/>
-                </a:solidFill>
-              </a:defRPr>
-            </a:pPr>
-            <a:r>
-              <a:t>✔  Zero-framework native Node.js + SQLite ACID transactions.</a:t>
-            </a:r>
-          </a:p>
-          <a:p>
-            <a:pPr>
-              <a:spcAft>
-                <a:spcPts val="1000"/>
-              </a:spcAft>
-              <a:defRPr sz="1150">
-                <a:solidFill>
-                  <a:srgbClr val="334155"/>
-                </a:solidFill>
-              </a:defRPr>
-            </a:pPr>
-            <a:r>
-              <a:t>✔  Live institutional deployment at Sahyadri College (SCEM).</a:t>
-            </a:r>
-          </a:p>
-        </p:txBody>
-      </p:sp>
-      <p:sp>
-        <p:nvSpPr>
-          <p:cNvPr id="16" name="Rounded Rectangle 15"/>
-          <p:cNvSpPr/>
-          <p:nvPr/>
-        </p:nvSpPr>
-        <p:spPr>
-          <a:xfrm>
-            <a:off x="8046720" y="1828800"/>
-            <a:ext cx="3291840" cy="4297680"/>
+            <a:off x="8119872" y="1828800"/>
+            <a:ext cx="3328416" cy="4389120"/>
           </a:xfrm>
           <a:prstGeom prst="roundRect">
             <a:avLst/>
@@ -5470,36 +4632,13 @@
           </a:fontRef>
         </p:style>
         <p:txBody>
-          <a:bodyPr rtlCol="0" anchor="ctr"/>
-          <a:lstStyle/>
-          <a:p>
-            <a:pPr algn="ctr"/>
-          </a:p>
-        </p:txBody>
-      </p:sp>
-      <p:sp>
-        <p:nvSpPr>
-          <p:cNvPr id="17" name="TextBox 16"/>
-          <p:cNvSpPr txBox="1"/>
-          <p:nvPr/>
-        </p:nvSpPr>
-        <p:spPr>
-          <a:xfrm>
-            <a:off x="8275320" y="2103120"/>
-            <a:ext cx="2834640" cy="274320"/>
-          </a:xfrm>
-          <a:prstGeom prst="rect">
-            <a:avLst/>
-          </a:prstGeom>
-          <a:noFill/>
-        </p:spPr>
-        <p:txBody>
-          <a:bodyPr wrap="none" lIns="0" tIns="0" rIns="0" bIns="0">
-            <a:spAutoFit/>
-          </a:bodyPr>
-          <a:lstStyle/>
-          <a:p>
-            <a:pPr>
+          <a:bodyPr rtlCol="0" anchor="ctr" wrap="square" lIns="228600" rIns="228600" tIns="228600" bIns="228600"/>
+          <a:lstStyle/>
+          <a:p>
+            <a:pPr algn="ctr">
+              <a:spcAft>
+                <a:spcPts val="200"/>
+              </a:spcAft>
               <a:defRPr sz="950" b="1">
                 <a:solidFill>
                   <a:srgbClr val="7C3AED"/>
@@ -5507,35 +4646,15 @@
               </a:defRPr>
             </a:pPr>
             <a:r>
-              <a:t>AUTONOMOUS MEDIA ENGINE</a:t>
-            </a:r>
-          </a:p>
-        </p:txBody>
-      </p:sp>
-      <p:sp>
-        <p:nvSpPr>
-          <p:cNvPr id="18" name="TextBox 17"/>
-          <p:cNvSpPr txBox="1"/>
-          <p:nvPr/>
-        </p:nvSpPr>
-        <p:spPr>
-          <a:xfrm>
-            <a:off x="8275320" y="2377440"/>
-            <a:ext cx="2834640" cy="548640"/>
-          </a:xfrm>
-          <a:prstGeom prst="rect">
-            <a:avLst/>
-          </a:prstGeom>
-          <a:noFill/>
-        </p:spPr>
-        <p:txBody>
-          <a:bodyPr wrap="square" lIns="0" tIns="0" rIns="0" bIns="0">
-            <a:spAutoFit/>
-          </a:bodyPr>
-          <a:lstStyle/>
-          <a:p>
-            <a:pPr>
-              <a:defRPr sz="1700" b="1">
+              <a:t>AUTONOMOUS AGENTIC STUDIO</a:t>
+            </a:r>
+          </a:p>
+          <a:p>
+            <a:pPr>
+              <a:spcAft>
+                <a:spcPts val="1400"/>
+              </a:spcAft>
+              <a:defRPr sz="1600" b="1">
                 <a:solidFill>
                   <a:srgbClr val="0F172A"/>
                 </a:solidFill>
@@ -5545,78 +4664,12 @@
               <a:t>OmniTransform AI</a:t>
             </a:r>
           </a:p>
-        </p:txBody>
-      </p:sp>
-      <p:sp>
-        <p:nvSpPr>
-          <p:cNvPr id="19" name="Rectangle 18"/>
-          <p:cNvSpPr/>
-          <p:nvPr/>
-        </p:nvSpPr>
-        <p:spPr>
-          <a:xfrm>
-            <a:off x="8275320" y="3017520"/>
-            <a:ext cx="2834640" cy="13716"/>
-          </a:xfrm>
-          <a:prstGeom prst="rect">
-            <a:avLst/>
-          </a:prstGeom>
-          <a:solidFill>
-            <a:srgbClr val="E2E8F0"/>
-          </a:solidFill>
-          <a:ln>
-            <a:noFill/>
-          </a:ln>
-        </p:spPr>
-        <p:style>
-          <a:lnRef idx="1">
-            <a:schemeClr val="accent1"/>
-          </a:lnRef>
-          <a:fillRef idx="3">
-            <a:schemeClr val="accent1"/>
-          </a:fillRef>
-          <a:effectRef idx="2">
-            <a:schemeClr val="accent1"/>
-          </a:effectRef>
-          <a:fontRef idx="minor">
-            <a:schemeClr val="lt1"/>
-          </a:fontRef>
-        </p:style>
-        <p:txBody>
-          <a:bodyPr rtlCol="0" anchor="ctr"/>
-          <a:lstStyle/>
-          <a:p>
-            <a:pPr algn="ctr"/>
-          </a:p>
-        </p:txBody>
-      </p:sp>
-      <p:sp>
-        <p:nvSpPr>
-          <p:cNvPr id="20" name="TextBox 19"/>
-          <p:cNvSpPr txBox="1"/>
-          <p:nvPr/>
-        </p:nvSpPr>
-        <p:spPr>
-          <a:xfrm>
-            <a:off x="8275320" y="3200400"/>
-            <a:ext cx="2834640" cy="2651760"/>
-          </a:xfrm>
-          <a:prstGeom prst="rect">
-            <a:avLst/>
-          </a:prstGeom>
-          <a:noFill/>
-        </p:spPr>
-        <p:txBody>
-          <a:bodyPr wrap="square" lIns="0" tIns="0" rIns="0" bIns="0">
-            <a:spAutoFit/>
-          </a:bodyPr>
-          <a:lstStyle/>
           <a:p>
             <a:pPr>
               <a:spcAft>
                 <a:spcPts val="1000"/>
               </a:spcAft>
-              <a:defRPr sz="1150">
+              <a:defRPr sz="1100">
                 <a:solidFill>
                   <a:srgbClr val="334155"/>
                 </a:solidFill>
@@ -5631,7 +4684,7 @@
               <a:spcAft>
                 <a:spcPts val="1000"/>
               </a:spcAft>
-              <a:defRPr sz="1150">
+              <a:defRPr sz="1100">
                 <a:solidFill>
                   <a:srgbClr val="334155"/>
                 </a:solidFill>
@@ -5646,7 +4699,7 @@
               <a:spcAft>
                 <a:spcPts val="1000"/>
               </a:spcAft>
-              <a:defRPr sz="1150">
+              <a:defRPr sz="1100">
                 <a:solidFill>
                   <a:srgbClr val="334155"/>
                 </a:solidFill>
@@ -5661,7 +4714,7 @@
               <a:spcAft>
                 <a:spcPts val="1000"/>
               </a:spcAft>
-              <a:defRPr sz="1150">
+              <a:defRPr sz="1100">
                 <a:solidFill>
                   <a:srgbClr val="334155"/>
                 </a:solidFill>
@@ -5693,20 +4746,88 @@
       <p:grpSpPr/>
       <p:sp>
         <p:nvSpPr>
-          <p:cNvPr id="2" name="Rectangle 1"/>
+          <p:cNvPr id="2" name="TextBox 1"/>
+          <p:cNvSpPr txBox="1"/>
+          <p:nvPr/>
+        </p:nvSpPr>
+        <p:spPr>
+          <a:xfrm>
+            <a:off x="731520" y="411480"/>
+            <a:ext cx="10728655" cy="1097280"/>
+          </a:xfrm>
+          <a:prstGeom prst="rect">
+            <a:avLst/>
+          </a:prstGeom>
+          <a:noFill/>
+        </p:spPr>
+        <p:txBody>
+          <a:bodyPr wrap="square" lIns="0" tIns="0" rIns="0" bIns="0">
+            <a:spAutoFit/>
+          </a:bodyPr>
+          <a:lstStyle/>
+          <a:p>
+            <a:pPr>
+              <a:spcAft>
+                <a:spcPts val="200"/>
+              </a:spcAft>
+              <a:defRPr sz="1000" b="1">
+                <a:solidFill>
+                  <a:srgbClr val="2563EB"/>
+                </a:solidFill>
+                <a:latin typeface="Arial"/>
+              </a:defRPr>
+            </a:pPr>
+            <a:r>
+              <a:t>PROVEN RESULTS</a:t>
+            </a:r>
+          </a:p>
+          <a:p>
+            <a:pPr>
+              <a:spcAft>
+                <a:spcPts val="200"/>
+              </a:spcAft>
+              <a:defRPr sz="2200" b="1">
+                <a:solidFill>
+                  <a:srgbClr val="0F172A"/>
+                </a:solidFill>
+                <a:latin typeface="Arial"/>
+              </a:defRPr>
+            </a:pPr>
+            <a:r>
+              <a:t>Traction, Metrics &amp; Institutional Validation</a:t>
+            </a:r>
+          </a:p>
+          <a:p>
+            <a:pPr>
+              <a:defRPr sz="1150">
+                <a:solidFill>
+                  <a:srgbClr val="64748B"/>
+                </a:solidFill>
+                <a:latin typeface="Arial"/>
+              </a:defRPr>
+            </a:pPr>
+            <a:r>
+              <a:t>Measurable reach, certified technical rigor, and live institutional deployment.</a:t>
+            </a:r>
+          </a:p>
+        </p:txBody>
+      </p:sp>
+      <p:sp>
+        <p:nvSpPr>
+          <p:cNvPr id="3" name="Rectangle 2"/>
           <p:cNvSpPr/>
           <p:nvPr/>
         </p:nvSpPr>
         <p:spPr>
           <a:xfrm>
-            <a:off x="0" y="0"/>
-            <a:ext cx="12191695" cy="6858000"/>
+            <a:off x="731520" y="1554480"/>
+            <a:ext cx="10728655" cy="13716"/>
           </a:xfrm>
           <a:prstGeom prst="rect">
             <a:avLst/>
           </a:prstGeom>
           <a:solidFill>
-            <a:srgbClr val="FFFFFF"/>
+            <a:srgbClr val="E2E8F0"/>
           </a:solidFill>
           <a:ln>
             <a:noFill/>
@@ -5736,122 +4857,14 @@
       </p:sp>
       <p:sp>
         <p:nvSpPr>
-          <p:cNvPr id="3" name="TextBox 2"/>
-          <p:cNvSpPr txBox="1"/>
+          <p:cNvPr id="4" name="Rounded Rectangle 3"/>
+          <p:cNvSpPr/>
           <p:nvPr/>
         </p:nvSpPr>
         <p:spPr>
           <a:xfrm>
-            <a:off x="822960" y="457200"/>
-            <a:ext cx="10515600" cy="274320"/>
-          </a:xfrm>
-          <a:prstGeom prst="rect">
-            <a:avLst/>
-          </a:prstGeom>
-          <a:noFill/>
-        </p:spPr>
-        <p:txBody>
-          <a:bodyPr wrap="square" lIns="0" tIns="0" rIns="0" bIns="0">
-            <a:spAutoFit/>
-          </a:bodyPr>
-          <a:lstStyle/>
-          <a:p>
-            <a:pPr>
-              <a:defRPr sz="1000" b="1">
-                <a:solidFill>
-                  <a:srgbClr val="2563EB"/>
-                </a:solidFill>
-                <a:latin typeface="Arial"/>
-              </a:defRPr>
-            </a:pPr>
-            <a:r>
-              <a:t>TRACTION &amp; PROOF</a:t>
-            </a:r>
-          </a:p>
-        </p:txBody>
-      </p:sp>
-      <p:sp>
-        <p:nvSpPr>
-          <p:cNvPr id="4" name="TextBox 3"/>
-          <p:cNvSpPr txBox="1"/>
-          <p:nvPr/>
-        </p:nvSpPr>
-        <p:spPr>
-          <a:xfrm>
-            <a:off x="822960" y="731520"/>
-            <a:ext cx="10515600" cy="548640"/>
-          </a:xfrm>
-          <a:prstGeom prst="rect">
-            <a:avLst/>
-          </a:prstGeom>
-          <a:noFill/>
-        </p:spPr>
-        <p:txBody>
-          <a:bodyPr wrap="square" lIns="0" tIns="0" rIns="0" bIns="0">
-            <a:spAutoFit/>
-          </a:bodyPr>
-          <a:lstStyle/>
-          <a:p>
-            <a:pPr>
-              <a:defRPr sz="2200" b="1">
-                <a:solidFill>
-                  <a:srgbClr val="0F172A"/>
-                </a:solidFill>
-                <a:latin typeface="Arial"/>
-              </a:defRPr>
-            </a:pPr>
-            <a:r>
-              <a:t>Proven Traction &amp; Real-World Validation</a:t>
-            </a:r>
-          </a:p>
-        </p:txBody>
-      </p:sp>
-      <p:sp>
-        <p:nvSpPr>
-          <p:cNvPr id="5" name="TextBox 4"/>
-          <p:cNvSpPr txBox="1"/>
-          <p:nvPr/>
-        </p:nvSpPr>
-        <p:spPr>
-          <a:xfrm>
-            <a:off x="822960" y="1280160"/>
-            <a:ext cx="10515600" cy="274320"/>
-          </a:xfrm>
-          <a:prstGeom prst="rect">
-            <a:avLst/>
-          </a:prstGeom>
-          <a:noFill/>
-        </p:spPr>
-        <p:txBody>
-          <a:bodyPr wrap="square" lIns="0" tIns="0" rIns="0" bIns="0">
-            <a:spAutoFit/>
-          </a:bodyPr>
-          <a:lstStyle/>
-          <a:p>
-            <a:pPr>
-              <a:defRPr sz="1200">
-                <a:solidFill>
-                  <a:srgbClr val="64748B"/>
-                </a:solidFill>
-                <a:latin typeface="Arial"/>
-              </a:defRPr>
-            </a:pPr>
-            <a:r>
-              <a:t>Demonstrated user engagement, live deployment, and accredited engineering standards.</a:t>
-            </a:r>
-          </a:p>
-        </p:txBody>
-      </p:sp>
-      <p:sp>
-        <p:nvSpPr>
-          <p:cNvPr id="6" name="Rounded Rectangle 5"/>
-          <p:cNvSpPr/>
-          <p:nvPr/>
-        </p:nvSpPr>
-        <p:spPr>
-          <a:xfrm>
-            <a:off x="822960" y="1828800"/>
-            <a:ext cx="5120640" cy="2011680"/>
+            <a:off x="731520" y="1828800"/>
+            <a:ext cx="5166360" cy="2057400"/>
           </a:xfrm>
           <a:prstGeom prst="roundRect">
             <a:avLst/>
@@ -5880,108 +4893,62 @@
           </a:fontRef>
         </p:style>
         <p:txBody>
-          <a:bodyPr rtlCol="0" anchor="ctr"/>
-          <a:lstStyle/>
-          <a:p>
-            <a:pPr algn="ctr"/>
-          </a:p>
-        </p:txBody>
-      </p:sp>
-      <p:sp>
-        <p:nvSpPr>
-          <p:cNvPr id="7" name="TextBox 6"/>
-          <p:cNvSpPr txBox="1"/>
+          <a:bodyPr rtlCol="0" anchor="ctr" wrap="square" lIns="228600" rIns="228600" tIns="228600" bIns="228600"/>
+          <a:lstStyle/>
+          <a:p>
+            <a:pPr algn="ctr">
+              <a:spcAft>
+                <a:spcPts val="200"/>
+              </a:spcAft>
+              <a:defRPr sz="2600" b="1">
+                <a:solidFill>
+                  <a:srgbClr val="059669"/>
+                </a:solidFill>
+              </a:defRPr>
+            </a:pPr>
+            <a:r>
+              <a:t>2.5M+</a:t>
+            </a:r>
+          </a:p>
+          <a:p>
+            <a:pPr>
+              <a:spcAft>
+                <a:spcPts val="400"/>
+              </a:spcAft>
+              <a:defRPr sz="1400" b="1">
+                <a:solidFill>
+                  <a:srgbClr val="0F172A"/>
+                </a:solidFill>
+              </a:defRPr>
+            </a:pPr>
+            <a:r>
+              <a:t>Organic Creator Reach</a:t>
+            </a:r>
+          </a:p>
+          <a:p>
+            <a:pPr>
+              <a:defRPr sz="1050">
+                <a:solidFill>
+                  <a:srgbClr val="334155"/>
+                </a:solidFill>
+              </a:defRPr>
+            </a:pPr>
+            <a:r>
+              <a:t>Driven across active creative channels (@hrlpremiumstudio, @hrlefx) with proven viral retention.</a:t>
+            </a:r>
+          </a:p>
+        </p:txBody>
+      </p:sp>
+      <p:sp>
+        <p:nvSpPr>
+          <p:cNvPr id="5" name="Rounded Rectangle 4"/>
+          <p:cNvSpPr/>
           <p:nvPr/>
         </p:nvSpPr>
         <p:spPr>
           <a:xfrm>
-            <a:off x="1097280" y="2103120"/>
-            <a:ext cx="1645920" cy="1463040"/>
-          </a:xfrm>
-          <a:prstGeom prst="rect">
-            <a:avLst/>
-          </a:prstGeom>
-          <a:noFill/>
-        </p:spPr>
-        <p:txBody>
-          <a:bodyPr wrap="none" lIns="0" tIns="0" rIns="0" bIns="0">
-            <a:spAutoFit/>
-          </a:bodyPr>
-          <a:lstStyle/>
-          <a:p>
-            <a:pPr>
-              <a:defRPr sz="3000" b="1">
-                <a:solidFill>
-                  <a:srgbClr val="059669"/>
-                </a:solidFill>
-              </a:defRPr>
-            </a:pPr>
-            <a:r>
-              <a:t>2.5M+</a:t>
-            </a:r>
-          </a:p>
-        </p:txBody>
-      </p:sp>
-      <p:sp>
-        <p:nvSpPr>
-          <p:cNvPr id="8" name="TextBox 7"/>
-          <p:cNvSpPr txBox="1"/>
-          <p:nvPr/>
-        </p:nvSpPr>
-        <p:spPr>
-          <a:xfrm>
-            <a:off x="2651760" y="2103120"/>
-            <a:ext cx="3017520" cy="1463040"/>
-          </a:xfrm>
-          <a:prstGeom prst="rect">
-            <a:avLst/>
-          </a:prstGeom>
-          <a:noFill/>
-        </p:spPr>
-        <p:txBody>
-          <a:bodyPr wrap="square" lIns="0" tIns="0" rIns="0" bIns="0">
-            <a:spAutoFit/>
-          </a:bodyPr>
-          <a:lstStyle/>
-          <a:p>
-            <a:pPr>
-              <a:spcAft>
-                <a:spcPts val="400"/>
-              </a:spcAft>
-              <a:defRPr sz="1400" b="1">
-                <a:solidFill>
-                  <a:srgbClr val="0F172A"/>
-                </a:solidFill>
-              </a:defRPr>
-            </a:pPr>
-            <a:r>
-              <a:t>Organic Creator Impressions</a:t>
-            </a:r>
-          </a:p>
-          <a:p>
-            <a:pPr>
-              <a:defRPr sz="1100">
-                <a:solidFill>
-                  <a:srgbClr val="334155"/>
-                </a:solidFill>
-              </a:defRPr>
-            </a:pPr>
-            <a:r>
-              <a:t>Driven across active creative channels (@hrlpremiumstudio, @hrlefx) with proven viral retention.</a:t>
-            </a:r>
-          </a:p>
-        </p:txBody>
-      </p:sp>
-      <p:sp>
-        <p:nvSpPr>
-          <p:cNvPr id="9" name="Rounded Rectangle 8"/>
-          <p:cNvSpPr/>
-          <p:nvPr/>
-        </p:nvSpPr>
-        <p:spPr>
-          <a:xfrm>
-            <a:off x="6263640" y="1828800"/>
-            <a:ext cx="5120640" cy="2011680"/>
+            <a:off x="6293815" y="1828800"/>
+            <a:ext cx="5166360" cy="2057400"/>
           </a:xfrm>
           <a:prstGeom prst="roundRect">
             <a:avLst/>
@@ -6010,108 +4977,62 @@
           </a:fontRef>
         </p:style>
         <p:txBody>
-          <a:bodyPr rtlCol="0" anchor="ctr"/>
-          <a:lstStyle/>
-          <a:p>
-            <a:pPr algn="ctr"/>
-          </a:p>
-        </p:txBody>
-      </p:sp>
-      <p:sp>
-        <p:nvSpPr>
-          <p:cNvPr id="10" name="TextBox 9"/>
-          <p:cNvSpPr txBox="1"/>
+          <a:bodyPr rtlCol="0" anchor="ctr" wrap="square" lIns="228600" rIns="228600" tIns="228600" bIns="228600"/>
+          <a:lstStyle/>
+          <a:p>
+            <a:pPr algn="ctr">
+              <a:spcAft>
+                <a:spcPts val="200"/>
+              </a:spcAft>
+              <a:defRPr sz="2600" b="1">
+                <a:solidFill>
+                  <a:srgbClr val="2563EB"/>
+                </a:solidFill>
+              </a:defRPr>
+            </a:pPr>
+            <a:r>
+              <a:t>100+ Faculty</a:t>
+            </a:r>
+          </a:p>
+          <a:p>
+            <a:pPr>
+              <a:spcAft>
+                <a:spcPts val="400"/>
+              </a:spcAft>
+              <a:defRPr sz="1400" b="1">
+                <a:solidFill>
+                  <a:srgbClr val="0F172A"/>
+                </a:solidFill>
+              </a:defRPr>
+            </a:pPr>
+            <a:r>
+              <a:t>Institutional Software Deployed</a:t>
+            </a:r>
+          </a:p>
+          <a:p>
+            <a:pPr>
+              <a:defRPr sz="1050">
+                <a:solidFill>
+                  <a:srgbClr val="334155"/>
+                </a:solidFill>
+              </a:defRPr>
+            </a:pPr>
+            <a:r>
+              <a:t>Live exam scheduling and anti-cheating batch planner deployed at Sahyadri College (SCEM).</a:t>
+            </a:r>
+          </a:p>
+        </p:txBody>
+      </p:sp>
+      <p:sp>
+        <p:nvSpPr>
+          <p:cNvPr id="6" name="Rounded Rectangle 5"/>
+          <p:cNvSpPr/>
           <p:nvPr/>
         </p:nvSpPr>
         <p:spPr>
           <a:xfrm>
-            <a:off x="6537960" y="2103120"/>
-            <a:ext cx="1645920" cy="1463040"/>
-          </a:xfrm>
-          <a:prstGeom prst="rect">
-            <a:avLst/>
-          </a:prstGeom>
-          <a:noFill/>
-        </p:spPr>
-        <p:txBody>
-          <a:bodyPr wrap="none" lIns="0" tIns="0" rIns="0" bIns="0">
-            <a:spAutoFit/>
-          </a:bodyPr>
-          <a:lstStyle/>
-          <a:p>
-            <a:pPr>
-              <a:defRPr sz="3000" b="1">
-                <a:solidFill>
-                  <a:srgbClr val="2563EB"/>
-                </a:solidFill>
-              </a:defRPr>
-            </a:pPr>
-            <a:r>
-              <a:t>100+</a:t>
-            </a:r>
-          </a:p>
-        </p:txBody>
-      </p:sp>
-      <p:sp>
-        <p:nvSpPr>
-          <p:cNvPr id="11" name="TextBox 10"/>
-          <p:cNvSpPr txBox="1"/>
-          <p:nvPr/>
-        </p:nvSpPr>
-        <p:spPr>
-          <a:xfrm>
-            <a:off x="8092440" y="2103120"/>
-            <a:ext cx="3017520" cy="1463040"/>
-          </a:xfrm>
-          <a:prstGeom prst="rect">
-            <a:avLst/>
-          </a:prstGeom>
-          <a:noFill/>
-        </p:spPr>
-        <p:txBody>
-          <a:bodyPr wrap="square" lIns="0" tIns="0" rIns="0" bIns="0">
-            <a:spAutoFit/>
-          </a:bodyPr>
-          <a:lstStyle/>
-          <a:p>
-            <a:pPr>
-              <a:spcAft>
-                <a:spcPts val="400"/>
-              </a:spcAft>
-              <a:defRPr sz="1400" b="1">
-                <a:solidFill>
-                  <a:srgbClr val="0F172A"/>
-                </a:solidFill>
-              </a:defRPr>
-            </a:pPr>
-            <a:r>
-              <a:t>Institutional Users Deployed</a:t>
-            </a:r>
-          </a:p>
-          <a:p>
-            <a:pPr>
-              <a:defRPr sz="1100">
-                <a:solidFill>
-                  <a:srgbClr val="334155"/>
-                </a:solidFill>
-              </a:defRPr>
-            </a:pPr>
-            <a:r>
-              <a:t>Live exam scheduling and batch allocation solver deployed and running at Sahyadri College (SCEM).</a:t>
-            </a:r>
-          </a:p>
-        </p:txBody>
-      </p:sp>
-      <p:sp>
-        <p:nvSpPr>
-          <p:cNvPr id="12" name="Rounded Rectangle 11"/>
-          <p:cNvSpPr/>
-          <p:nvPr/>
-        </p:nvSpPr>
-        <p:spPr>
-          <a:xfrm>
-            <a:off x="822960" y="4114800"/>
-            <a:ext cx="5120640" cy="2011680"/>
+            <a:off x="731520" y="4160520"/>
+            <a:ext cx="5166360" cy="2057400"/>
           </a:xfrm>
           <a:prstGeom prst="roundRect">
             <a:avLst/>
@@ -6140,108 +5061,62 @@
           </a:fontRef>
         </p:style>
         <p:txBody>
-          <a:bodyPr rtlCol="0" anchor="ctr"/>
-          <a:lstStyle/>
-          <a:p>
-            <a:pPr algn="ctr"/>
-          </a:p>
-        </p:txBody>
-      </p:sp>
-      <p:sp>
-        <p:nvSpPr>
-          <p:cNvPr id="13" name="TextBox 12"/>
-          <p:cNvSpPr txBox="1"/>
+          <a:bodyPr rtlCol="0" anchor="ctr" wrap="square" lIns="228600" rIns="228600" tIns="228600" bIns="228600"/>
+          <a:lstStyle/>
+          <a:p>
+            <a:pPr algn="ctr">
+              <a:spcAft>
+                <a:spcPts val="200"/>
+              </a:spcAft>
+              <a:defRPr sz="2600" b="1">
+                <a:solidFill>
+                  <a:srgbClr val="7C3AED"/>
+                </a:solidFill>
+              </a:defRPr>
+            </a:pPr>
+            <a:r>
+              <a:t>100% Certified</a:t>
+            </a:r>
+          </a:p>
+          <a:p>
+            <a:pPr>
+              <a:spcAft>
+                <a:spcPts val="400"/>
+              </a:spcAft>
+              <a:defRPr sz="1400" b="1">
+                <a:solidFill>
+                  <a:srgbClr val="0F172A"/>
+                </a:solidFill>
+              </a:defRPr>
+            </a:pPr>
+            <a:r>
+              <a:t>Elite Corporate &amp; Industry Standards</a:t>
+            </a:r>
+          </a:p>
+          <a:p>
+            <a:pPr>
+              <a:defRPr sz="1050">
+                <a:solidFill>
+                  <a:srgbClr val="334155"/>
+                </a:solidFill>
+              </a:defRPr>
+            </a:pPr>
+            <a:r>
+              <a:t>Certified by Blackmagic Design (DaVinci Resolve), JPMorgan Chase &amp; Co. (Systems), and Deloitte (Cyber).</a:t>
+            </a:r>
+          </a:p>
+        </p:txBody>
+      </p:sp>
+      <p:sp>
+        <p:nvSpPr>
+          <p:cNvPr id="7" name="Rounded Rectangle 6"/>
+          <p:cNvSpPr/>
           <p:nvPr/>
         </p:nvSpPr>
         <p:spPr>
           <a:xfrm>
-            <a:off x="1097280" y="4389120"/>
-            <a:ext cx="1645920" cy="1463040"/>
-          </a:xfrm>
-          <a:prstGeom prst="rect">
-            <a:avLst/>
-          </a:prstGeom>
-          <a:noFill/>
-        </p:spPr>
-        <p:txBody>
-          <a:bodyPr wrap="none" lIns="0" tIns="0" rIns="0" bIns="0">
-            <a:spAutoFit/>
-          </a:bodyPr>
-          <a:lstStyle/>
-          <a:p>
-            <a:pPr>
-              <a:defRPr sz="3000" b="1">
-                <a:solidFill>
-                  <a:srgbClr val="7C3AED"/>
-                </a:solidFill>
-              </a:defRPr>
-            </a:pPr>
-            <a:r>
-              <a:t>100%</a:t>
-            </a:r>
-          </a:p>
-        </p:txBody>
-      </p:sp>
-      <p:sp>
-        <p:nvSpPr>
-          <p:cNvPr id="14" name="TextBox 13"/>
-          <p:cNvSpPr txBox="1"/>
-          <p:nvPr/>
-        </p:nvSpPr>
-        <p:spPr>
-          <a:xfrm>
-            <a:off x="2651760" y="4389120"/>
-            <a:ext cx="3017520" cy="1463040"/>
-          </a:xfrm>
-          <a:prstGeom prst="rect">
-            <a:avLst/>
-          </a:prstGeom>
-          <a:noFill/>
-        </p:spPr>
-        <p:txBody>
-          <a:bodyPr wrap="square" lIns="0" tIns="0" rIns="0" bIns="0">
-            <a:spAutoFit/>
-          </a:bodyPr>
-          <a:lstStyle/>
-          <a:p>
-            <a:pPr>
-              <a:spcAft>
-                <a:spcPts val="400"/>
-              </a:spcAft>
-              <a:defRPr sz="1400" b="1">
-                <a:solidFill>
-                  <a:srgbClr val="0F172A"/>
-                </a:solidFill>
-              </a:defRPr>
-            </a:pPr>
-            <a:r>
-              <a:t>Certified Technical Standards</a:t>
-            </a:r>
-          </a:p>
-          <a:p>
-            <a:pPr>
-              <a:defRPr sz="1100">
-                <a:solidFill>
-                  <a:srgbClr val="334155"/>
-                </a:solidFill>
-              </a:defRPr>
-            </a:pPr>
-            <a:r>
-              <a:t>Certified by Blackmagic Design (DaVinci Resolve), JPMorgan Chase (Systems), and Deloitte (Cyber).</a:t>
-            </a:r>
-          </a:p>
-        </p:txBody>
-      </p:sp>
-      <p:sp>
-        <p:nvSpPr>
-          <p:cNvPr id="15" name="Rounded Rectangle 14"/>
-          <p:cNvSpPr/>
-          <p:nvPr/>
-        </p:nvSpPr>
-        <p:spPr>
-          <a:xfrm>
-            <a:off x="6263640" y="4114800"/>
-            <a:ext cx="5120640" cy="2011680"/>
+            <a:off x="6293815" y="4160520"/>
+            <a:ext cx="5166360" cy="2057400"/>
           </a:xfrm>
           <a:prstGeom prst="roundRect">
             <a:avLst/>
@@ -6270,37 +5145,14 @@
           </a:fontRef>
         </p:style>
         <p:txBody>
-          <a:bodyPr rtlCol="0" anchor="ctr"/>
-          <a:lstStyle/>
-          <a:p>
-            <a:pPr algn="ctr"/>
-          </a:p>
-        </p:txBody>
-      </p:sp>
-      <p:sp>
-        <p:nvSpPr>
-          <p:cNvPr id="16" name="TextBox 15"/>
-          <p:cNvSpPr txBox="1"/>
-          <p:nvPr/>
-        </p:nvSpPr>
-        <p:spPr>
-          <a:xfrm>
-            <a:off x="6537960" y="4389120"/>
-            <a:ext cx="1645920" cy="1463040"/>
-          </a:xfrm>
-          <a:prstGeom prst="rect">
-            <a:avLst/>
-          </a:prstGeom>
-          <a:noFill/>
-        </p:spPr>
-        <p:txBody>
-          <a:bodyPr wrap="none" lIns="0" tIns="0" rIns="0" bIns="0">
-            <a:spAutoFit/>
-          </a:bodyPr>
-          <a:lstStyle/>
-          <a:p>
-            <a:pPr>
-              <a:defRPr sz="3000" b="1">
+          <a:bodyPr rtlCol="0" anchor="ctr" wrap="square" lIns="228600" rIns="228600" tIns="228600" bIns="228600"/>
+          <a:lstStyle/>
+          <a:p>
+            <a:pPr algn="ctr">
+              <a:spcAft>
+                <a:spcPts val="200"/>
+              </a:spcAft>
+              <a:defRPr sz="2600" b="1">
                 <a:solidFill>
                   <a:srgbClr val="D97706"/>
                 </a:solidFill>
@@ -6310,29 +5162,6 @@
               <a:t>0 ms</a:t>
             </a:r>
           </a:p>
-        </p:txBody>
-      </p:sp>
-      <p:sp>
-        <p:nvSpPr>
-          <p:cNvPr id="17" name="TextBox 16"/>
-          <p:cNvSpPr txBox="1"/>
-          <p:nvPr/>
-        </p:nvSpPr>
-        <p:spPr>
-          <a:xfrm>
-            <a:off x="8092440" y="4389120"/>
-            <a:ext cx="3017520" cy="1463040"/>
-          </a:xfrm>
-          <a:prstGeom prst="rect">
-            <a:avLst/>
-          </a:prstGeom>
-          <a:noFill/>
-        </p:spPr>
-        <p:txBody>
-          <a:bodyPr wrap="square" lIns="0" tIns="0" rIns="0" bIns="0">
-            <a:spAutoFit/>
-          </a:bodyPr>
-          <a:lstStyle/>
           <a:p>
             <a:pPr>
               <a:spcAft>
@@ -6345,19 +5174,19 @@
               </a:defRPr>
             </a:pPr>
             <a:r>
-              <a:t>Cloud Rendering Latency</a:t>
-            </a:r>
-          </a:p>
-          <a:p>
-            <a:pPr>
-              <a:defRPr sz="1100">
+              <a:t>Cloud Latency &amp; Subscription Cost</a:t>
+            </a:r>
+          </a:p>
+          <a:p>
+            <a:pPr>
+              <a:defRPr sz="1050">
                 <a:solidFill>
                   <a:srgbClr val="334155"/>
                 </a:solidFill>
               </a:defRPr>
             </a:pPr>
             <a:r>
-              <a:t>100% on-device GPU acceleration delivering real-time 4K 60FPS execution with zero server cost.</a:t>
+              <a:t>100% local GPU execution via Apple Metal and NVIDIA CUDA shaders with zero server bills.</a:t>
             </a:r>
           </a:p>
         </p:txBody>
@@ -6382,20 +5211,88 @@
       <p:grpSpPr/>
       <p:sp>
         <p:nvSpPr>
-          <p:cNvPr id="2" name="Rectangle 1"/>
+          <p:cNvPr id="2" name="TextBox 1"/>
+          <p:cNvSpPr txBox="1"/>
+          <p:nvPr/>
+        </p:nvSpPr>
+        <p:spPr>
+          <a:xfrm>
+            <a:off x="731520" y="411480"/>
+            <a:ext cx="10728655" cy="1097280"/>
+          </a:xfrm>
+          <a:prstGeom prst="rect">
+            <a:avLst/>
+          </a:prstGeom>
+          <a:noFill/>
+        </p:spPr>
+        <p:txBody>
+          <a:bodyPr wrap="square" lIns="0" tIns="0" rIns="0" bIns="0">
+            <a:spAutoFit/>
+          </a:bodyPr>
+          <a:lstStyle/>
+          <a:p>
+            <a:pPr>
+              <a:spcAft>
+                <a:spcPts val="200"/>
+              </a:spcAft>
+              <a:defRPr sz="1000" b="1">
+                <a:solidFill>
+                  <a:srgbClr val="2563EB"/>
+                </a:solidFill>
+                <a:latin typeface="Arial"/>
+              </a:defRPr>
+            </a:pPr>
+            <a:r>
+              <a:t>MARKET POTENTIAL</a:t>
+            </a:r>
+          </a:p>
+          <a:p>
+            <a:pPr>
+              <a:spcAft>
+                <a:spcPts val="200"/>
+              </a:spcAft>
+              <a:defRPr sz="2200" b="1">
+                <a:solidFill>
+                  <a:srgbClr val="0F172A"/>
+                </a:solidFill>
+                <a:latin typeface="Arial"/>
+              </a:defRPr>
+            </a:pPr>
+            <a:r>
+              <a:t>Market Opportunity — Sizing &amp; Growth</a:t>
+            </a:r>
+          </a:p>
+          <a:p>
+            <a:pPr>
+              <a:defRPr sz="1150">
+                <a:solidFill>
+                  <a:srgbClr val="64748B"/>
+                </a:solidFill>
+                <a:latin typeface="Arial"/>
+              </a:defRPr>
+            </a:pPr>
+            <a:r>
+              <a:t>Positioned at the intersection of the creator economy and high-growth Indian AVGC.</a:t>
+            </a:r>
+          </a:p>
+        </p:txBody>
+      </p:sp>
+      <p:sp>
+        <p:nvSpPr>
+          <p:cNvPr id="3" name="Rectangle 2"/>
           <p:cNvSpPr/>
           <p:nvPr/>
         </p:nvSpPr>
         <p:spPr>
           <a:xfrm>
-            <a:off x="0" y="0"/>
-            <a:ext cx="12191695" cy="6858000"/>
+            <a:off x="731520" y="1554480"/>
+            <a:ext cx="10728655" cy="13716"/>
           </a:xfrm>
           <a:prstGeom prst="rect">
             <a:avLst/>
           </a:prstGeom>
           <a:solidFill>
-            <a:srgbClr val="FFFFFF"/>
+            <a:srgbClr val="E2E8F0"/>
           </a:solidFill>
           <a:ln>
             <a:noFill/>
@@ -6425,122 +5322,14 @@
       </p:sp>
       <p:sp>
         <p:nvSpPr>
-          <p:cNvPr id="3" name="TextBox 2"/>
-          <p:cNvSpPr txBox="1"/>
+          <p:cNvPr id="4" name="Rounded Rectangle 3"/>
+          <p:cNvSpPr/>
           <p:nvPr/>
         </p:nvSpPr>
         <p:spPr>
           <a:xfrm>
-            <a:off x="822960" y="457200"/>
-            <a:ext cx="10515600" cy="274320"/>
-          </a:xfrm>
-          <a:prstGeom prst="rect">
-            <a:avLst/>
-          </a:prstGeom>
-          <a:noFill/>
-        </p:spPr>
-        <p:txBody>
-          <a:bodyPr wrap="square" lIns="0" tIns="0" rIns="0" bIns="0">
-            <a:spAutoFit/>
-          </a:bodyPr>
-          <a:lstStyle/>
-          <a:p>
-            <a:pPr>
-              <a:defRPr sz="1000" b="1">
-                <a:solidFill>
-                  <a:srgbClr val="2563EB"/>
-                </a:solidFill>
-                <a:latin typeface="Arial"/>
-              </a:defRPr>
-            </a:pPr>
-            <a:r>
-              <a:t>MARKET POTENTIAL</a:t>
-            </a:r>
-          </a:p>
-        </p:txBody>
-      </p:sp>
-      <p:sp>
-        <p:nvSpPr>
-          <p:cNvPr id="4" name="TextBox 3"/>
-          <p:cNvSpPr txBox="1"/>
-          <p:nvPr/>
-        </p:nvSpPr>
-        <p:spPr>
-          <a:xfrm>
-            <a:off x="822960" y="731520"/>
-            <a:ext cx="10515600" cy="548640"/>
-          </a:xfrm>
-          <a:prstGeom prst="rect">
-            <a:avLst/>
-          </a:prstGeom>
-          <a:noFill/>
-        </p:spPr>
-        <p:txBody>
-          <a:bodyPr wrap="square" lIns="0" tIns="0" rIns="0" bIns="0">
-            <a:spAutoFit/>
-          </a:bodyPr>
-          <a:lstStyle/>
-          <a:p>
-            <a:pPr>
-              <a:defRPr sz="2200" b="1">
-                <a:solidFill>
-                  <a:srgbClr val="0F172A"/>
-                </a:solidFill>
-                <a:latin typeface="Arial"/>
-              </a:defRPr>
-            </a:pPr>
-            <a:r>
-              <a:t>Market Opportunity — Sizing &amp; Expansion</a:t>
-            </a:r>
-          </a:p>
-        </p:txBody>
-      </p:sp>
-      <p:sp>
-        <p:nvSpPr>
-          <p:cNvPr id="5" name="TextBox 4"/>
-          <p:cNvSpPr txBox="1"/>
-          <p:nvPr/>
-        </p:nvSpPr>
-        <p:spPr>
-          <a:xfrm>
-            <a:off x="822960" y="1280160"/>
-            <a:ext cx="10515600" cy="274320"/>
-          </a:xfrm>
-          <a:prstGeom prst="rect">
-            <a:avLst/>
-          </a:prstGeom>
-          <a:noFill/>
-        </p:spPr>
-        <p:txBody>
-          <a:bodyPr wrap="square" lIns="0" tIns="0" rIns="0" bIns="0">
-            <a:spAutoFit/>
-          </a:bodyPr>
-          <a:lstStyle/>
-          <a:p>
-            <a:pPr>
-              <a:defRPr sz="1200">
-                <a:solidFill>
-                  <a:srgbClr val="64748B"/>
-                </a:solidFill>
-                <a:latin typeface="Arial"/>
-              </a:defRPr>
-            </a:pPr>
-            <a:r>
-              <a:t>Positioned at the intersection of the creator economy and high-growth Indian AVGC.</a:t>
-            </a:r>
-          </a:p>
-        </p:txBody>
-      </p:sp>
-      <p:sp>
-        <p:nvSpPr>
-          <p:cNvPr id="6" name="Rounded Rectangle 5"/>
-          <p:cNvSpPr/>
-          <p:nvPr/>
-        </p:nvSpPr>
-        <p:spPr>
-          <a:xfrm>
-            <a:off x="822960" y="1828800"/>
-            <a:ext cx="3291840" cy="4297680"/>
+            <a:off x="731520" y="1828800"/>
+            <a:ext cx="3328416" cy="4389120"/>
           </a:xfrm>
           <a:prstGeom prst="roundRect">
             <a:avLst/>
@@ -6569,233 +5358,107 @@
           </a:fontRef>
         </p:style>
         <p:txBody>
-          <a:bodyPr rtlCol="0" anchor="ctr"/>
-          <a:lstStyle/>
-          <a:p>
-            <a:pPr algn="ctr"/>
-          </a:p>
-        </p:txBody>
-      </p:sp>
-      <p:sp>
-        <p:nvSpPr>
-          <p:cNvPr id="7" name="Rounded Rectangle 6"/>
+          <a:bodyPr rtlCol="0" anchor="ctr" wrap="square" lIns="228600" rIns="228600" tIns="228600" bIns="228600"/>
+          <a:lstStyle/>
+          <a:p>
+            <a:pPr algn="ctr">
+              <a:spcAft>
+                <a:spcPts val="200"/>
+              </a:spcAft>
+              <a:defRPr sz="1200" b="1">
+                <a:solidFill>
+                  <a:srgbClr val="2563EB"/>
+                </a:solidFill>
+              </a:defRPr>
+            </a:pPr>
+            <a:r>
+              <a:t>TAM</a:t>
+            </a:r>
+          </a:p>
+          <a:p>
+            <a:pPr>
+              <a:defRPr sz="2200" b="1">
+                <a:solidFill>
+                  <a:srgbClr val="0F172A"/>
+                </a:solidFill>
+              </a:defRPr>
+            </a:pPr>
+            <a:r>
+              <a:t>$250 Billion+</a:t>
+            </a:r>
+          </a:p>
+          <a:p>
+            <a:pPr>
+              <a:spcAft>
+                <a:spcPts val="1400"/>
+              </a:spcAft>
+              <a:defRPr sz="1050" b="1">
+                <a:solidFill>
+                  <a:srgbClr val="2563EB"/>
+                </a:solidFill>
+              </a:defRPr>
+            </a:pPr>
+            <a:r>
+              <a:t>Global Creator &amp; Video Market</a:t>
+            </a:r>
+          </a:p>
+          <a:p>
+            <a:pPr>
+              <a:spcAft>
+                <a:spcPts val="1000"/>
+              </a:spcAft>
+              <a:defRPr sz="1100">
+                <a:solidFill>
+                  <a:srgbClr val="334155"/>
+                </a:solidFill>
+              </a:defRPr>
+            </a:pPr>
+            <a:r>
+              <a:t>• 50M+ digital content creators worldwide.</a:t>
+            </a:r>
+          </a:p>
+          <a:p>
+            <a:pPr>
+              <a:spcAft>
+                <a:spcPts val="1000"/>
+              </a:spcAft>
+              <a:defRPr sz="1100">
+                <a:solidFill>
+                  <a:srgbClr val="334155"/>
+                </a:solidFill>
+              </a:defRPr>
+            </a:pPr>
+            <a:r>
+              <a:t>• $40B+ dedicated video editing and VFX plugin sector.</a:t>
+            </a:r>
+          </a:p>
+          <a:p>
+            <a:pPr>
+              <a:spcAft>
+                <a:spcPts val="1000"/>
+              </a:spcAft>
+              <a:defRPr sz="1100">
+                <a:solidFill>
+                  <a:srgbClr val="334155"/>
+                </a:solidFill>
+              </a:defRPr>
+            </a:pPr>
+            <a:r>
+              <a:t>• Surge in demand for 4K 60FPS cinematic content.</a:t>
+            </a:r>
+          </a:p>
+        </p:txBody>
+      </p:sp>
+      <p:sp>
+        <p:nvSpPr>
+          <p:cNvPr id="5" name="Rounded Rectangle 4"/>
           <p:cNvSpPr/>
           <p:nvPr/>
         </p:nvSpPr>
         <p:spPr>
           <a:xfrm>
-            <a:off x="1051560" y="2011680"/>
-            <a:ext cx="822960" cy="320040"/>
-          </a:xfrm>
-          <a:prstGeom prst="roundRect">
-            <a:avLst/>
-          </a:prstGeom>
-          <a:solidFill>
-            <a:srgbClr val="2563EB"/>
-          </a:solidFill>
-          <a:ln>
-            <a:noFill/>
-          </a:ln>
-        </p:spPr>
-        <p:style>
-          <a:lnRef idx="1">
-            <a:schemeClr val="accent1"/>
-          </a:lnRef>
-          <a:fillRef idx="3">
-            <a:schemeClr val="accent1"/>
-          </a:fillRef>
-          <a:effectRef idx="2">
-            <a:schemeClr val="accent1"/>
-          </a:effectRef>
-          <a:fontRef idx="minor">
-            <a:schemeClr val="lt1"/>
-          </a:fontRef>
-        </p:style>
-        <p:txBody>
-          <a:bodyPr rtlCol="0" anchor="ctr"/>
-          <a:lstStyle/>
-          <a:p>
-            <a:pPr algn="ctr">
-              <a:defRPr sz="1100" b="1">
-                <a:solidFill>
-                  <a:srgbClr val="FFFFFF"/>
-                </a:solidFill>
-              </a:defRPr>
-            </a:pPr>
-            <a:r>
-              <a:t>TAM</a:t>
-            </a:r>
-          </a:p>
-        </p:txBody>
-      </p:sp>
-      <p:sp>
-        <p:nvSpPr>
-          <p:cNvPr id="8" name="TextBox 7"/>
-          <p:cNvSpPr txBox="1"/>
-          <p:nvPr/>
-        </p:nvSpPr>
-        <p:spPr>
-          <a:xfrm>
-            <a:off x="1051560" y="2468880"/>
-            <a:ext cx="2834640" cy="822960"/>
-          </a:xfrm>
-          <a:prstGeom prst="rect">
-            <a:avLst/>
-          </a:prstGeom>
-          <a:noFill/>
-        </p:spPr>
-        <p:txBody>
-          <a:bodyPr wrap="square" lIns="0" tIns="0" rIns="0" bIns="0">
-            <a:spAutoFit/>
-          </a:bodyPr>
-          <a:lstStyle/>
-          <a:p>
-            <a:pPr>
-              <a:defRPr sz="2600" b="1">
-                <a:solidFill>
-                  <a:srgbClr val="0F172A"/>
-                </a:solidFill>
-              </a:defRPr>
-            </a:pPr>
-            <a:r>
-              <a:t>$250 Billion+</a:t>
-            </a:r>
-          </a:p>
-          <a:p>
-            <a:pPr>
-              <a:defRPr sz="1100" b="1">
-                <a:solidFill>
-                  <a:srgbClr val="2563EB"/>
-                </a:solidFill>
-              </a:defRPr>
-            </a:pPr>
-            <a:r>
-              <a:t>Global Creator &amp; Video Market</a:t>
-            </a:r>
-          </a:p>
-        </p:txBody>
-      </p:sp>
-      <p:sp>
-        <p:nvSpPr>
-          <p:cNvPr id="9" name="Rectangle 8"/>
-          <p:cNvSpPr/>
-          <p:nvPr/>
-        </p:nvSpPr>
-        <p:spPr>
-          <a:xfrm>
-            <a:off x="1051560" y="3474720"/>
-            <a:ext cx="2834640" cy="13716"/>
-          </a:xfrm>
-          <a:prstGeom prst="rect">
-            <a:avLst/>
-          </a:prstGeom>
-          <a:solidFill>
-            <a:srgbClr val="E2E8F0"/>
-          </a:solidFill>
-          <a:ln>
-            <a:noFill/>
-          </a:ln>
-        </p:spPr>
-        <p:style>
-          <a:lnRef idx="1">
-            <a:schemeClr val="accent1"/>
-          </a:lnRef>
-          <a:fillRef idx="3">
-            <a:schemeClr val="accent1"/>
-          </a:fillRef>
-          <a:effectRef idx="2">
-            <a:schemeClr val="accent1"/>
-          </a:effectRef>
-          <a:fontRef idx="minor">
-            <a:schemeClr val="lt1"/>
-          </a:fontRef>
-        </p:style>
-        <p:txBody>
-          <a:bodyPr rtlCol="0" anchor="ctr"/>
-          <a:lstStyle/>
-          <a:p>
-            <a:pPr algn="ctr"/>
-          </a:p>
-        </p:txBody>
-      </p:sp>
-      <p:sp>
-        <p:nvSpPr>
-          <p:cNvPr id="10" name="TextBox 9"/>
-          <p:cNvSpPr txBox="1"/>
-          <p:nvPr/>
-        </p:nvSpPr>
-        <p:spPr>
-          <a:xfrm>
-            <a:off x="1051560" y="3657600"/>
-            <a:ext cx="2834640" cy="2286000"/>
-          </a:xfrm>
-          <a:prstGeom prst="rect">
-            <a:avLst/>
-          </a:prstGeom>
-          <a:noFill/>
-        </p:spPr>
-        <p:txBody>
-          <a:bodyPr wrap="square" lIns="0" tIns="0" rIns="0" bIns="0">
-            <a:spAutoFit/>
-          </a:bodyPr>
-          <a:lstStyle/>
-          <a:p>
-            <a:pPr>
-              <a:spcAft>
-                <a:spcPts val="1000"/>
-              </a:spcAft>
-              <a:defRPr sz="1200">
-                <a:solidFill>
-                  <a:srgbClr val="334155"/>
-                </a:solidFill>
-              </a:defRPr>
-            </a:pPr>
-            <a:r>
-              <a:t>• 50M+ digital content creators worldwide.</a:t>
-            </a:r>
-          </a:p>
-          <a:p>
-            <a:pPr>
-              <a:spcAft>
-                <a:spcPts val="1000"/>
-              </a:spcAft>
-              <a:defRPr sz="1200">
-                <a:solidFill>
-                  <a:srgbClr val="334155"/>
-                </a:solidFill>
-              </a:defRPr>
-            </a:pPr>
-            <a:r>
-              <a:t>• $40B+ post-production &amp; plugin software sector.</a:t>
-            </a:r>
-          </a:p>
-          <a:p>
-            <a:pPr>
-              <a:spcAft>
-                <a:spcPts val="1000"/>
-              </a:spcAft>
-              <a:defRPr sz="1200">
-                <a:solidFill>
-                  <a:srgbClr val="334155"/>
-                </a:solidFill>
-              </a:defRPr>
-            </a:pPr>
-            <a:r>
-              <a:t>• Surge in demand for 4K 60FPS cinematic video.</a:t>
-            </a:r>
-          </a:p>
-        </p:txBody>
-      </p:sp>
-      <p:sp>
-        <p:nvSpPr>
-          <p:cNvPr id="11" name="Rounded Rectangle 10"/>
-          <p:cNvSpPr/>
-          <p:nvPr/>
-        </p:nvSpPr>
-        <p:spPr>
-          <a:xfrm>
-            <a:off x="4434840" y="1828800"/>
-            <a:ext cx="3291840" cy="4297680"/>
+            <a:off x="4425696" y="1828800"/>
+            <a:ext cx="3328416" cy="4389120"/>
           </a:xfrm>
           <a:prstGeom prst="roundRect">
             <a:avLst/>
@@ -6824,233 +5487,107 @@
           </a:fontRef>
         </p:style>
         <p:txBody>
-          <a:bodyPr rtlCol="0" anchor="ctr"/>
-          <a:lstStyle/>
-          <a:p>
-            <a:pPr algn="ctr"/>
-          </a:p>
-        </p:txBody>
-      </p:sp>
-      <p:sp>
-        <p:nvSpPr>
-          <p:cNvPr id="12" name="Rounded Rectangle 11"/>
+          <a:bodyPr rtlCol="0" anchor="ctr" wrap="square" lIns="228600" rIns="228600" tIns="228600" bIns="228600"/>
+          <a:lstStyle/>
+          <a:p>
+            <a:pPr algn="ctr">
+              <a:spcAft>
+                <a:spcPts val="200"/>
+              </a:spcAft>
+              <a:defRPr sz="1200" b="1">
+                <a:solidFill>
+                  <a:srgbClr val="059669"/>
+                </a:solidFill>
+              </a:defRPr>
+            </a:pPr>
+            <a:r>
+              <a:t>SAM</a:t>
+            </a:r>
+          </a:p>
+          <a:p>
+            <a:pPr>
+              <a:defRPr sz="2200" b="1">
+                <a:solidFill>
+                  <a:srgbClr val="0F172A"/>
+                </a:solidFill>
+              </a:defRPr>
+            </a:pPr>
+            <a:r>
+              <a:t>$4.2 Billion</a:t>
+            </a:r>
+          </a:p>
+          <a:p>
+            <a:pPr>
+              <a:spcAft>
+                <a:spcPts val="1400"/>
+              </a:spcAft>
+              <a:defRPr sz="1050" b="1">
+                <a:solidFill>
+                  <a:srgbClr val="059669"/>
+                </a:solidFill>
+              </a:defRPr>
+            </a:pPr>
+            <a:r>
+              <a:t>Indian AVGC &amp; Media Ecosystem</a:t>
+            </a:r>
+          </a:p>
+          <a:p>
+            <a:pPr>
+              <a:spcAft>
+                <a:spcPts val="1000"/>
+              </a:spcAft>
+              <a:defRPr sz="1100">
+                <a:solidFill>
+                  <a:srgbClr val="334155"/>
+                </a:solidFill>
+              </a:defRPr>
+            </a:pPr>
+            <a:r>
+              <a:t>• India's Animation, Visual Effects &amp; Gaming market.</a:t>
+            </a:r>
+          </a:p>
+          <a:p>
+            <a:pPr>
+              <a:spcAft>
+                <a:spcPts val="1000"/>
+              </a:spcAft>
+              <a:defRPr sz="1100">
+                <a:solidFill>
+                  <a:srgbClr val="334155"/>
+                </a:solidFill>
+              </a:defRPr>
+            </a:pPr>
+            <a:r>
+              <a:t>• 1.5M+ active digital video creators and editors in India.</a:t>
+            </a:r>
+          </a:p>
+          <a:p>
+            <a:pPr>
+              <a:spcAft>
+                <a:spcPts val="1000"/>
+              </a:spcAft>
+              <a:defRPr sz="1100">
+                <a:solidFill>
+                  <a:srgbClr val="334155"/>
+                </a:solidFill>
+              </a:defRPr>
+            </a:pPr>
+            <a:r>
+              <a:t>• Booming regional OTT and digital ad production.</a:t>
+            </a:r>
+          </a:p>
+        </p:txBody>
+      </p:sp>
+      <p:sp>
+        <p:nvSpPr>
+          <p:cNvPr id="6" name="Rounded Rectangle 5"/>
           <p:cNvSpPr/>
           <p:nvPr/>
         </p:nvSpPr>
         <p:spPr>
           <a:xfrm>
-            <a:off x="4663440" y="2011680"/>
-            <a:ext cx="822960" cy="320040"/>
-          </a:xfrm>
-          <a:prstGeom prst="roundRect">
-            <a:avLst/>
-          </a:prstGeom>
-          <a:solidFill>
-            <a:srgbClr val="059669"/>
-          </a:solidFill>
-          <a:ln>
-            <a:noFill/>
-          </a:ln>
-        </p:spPr>
-        <p:style>
-          <a:lnRef idx="1">
-            <a:schemeClr val="accent1"/>
-          </a:lnRef>
-          <a:fillRef idx="3">
-            <a:schemeClr val="accent1"/>
-          </a:fillRef>
-          <a:effectRef idx="2">
-            <a:schemeClr val="accent1"/>
-          </a:effectRef>
-          <a:fontRef idx="minor">
-            <a:schemeClr val="lt1"/>
-          </a:fontRef>
-        </p:style>
-        <p:txBody>
-          <a:bodyPr rtlCol="0" anchor="ctr"/>
-          <a:lstStyle/>
-          <a:p>
-            <a:pPr algn="ctr">
-              <a:defRPr sz="1100" b="1">
-                <a:solidFill>
-                  <a:srgbClr val="FFFFFF"/>
-                </a:solidFill>
-              </a:defRPr>
-            </a:pPr>
-            <a:r>
-              <a:t>SAM</a:t>
-            </a:r>
-          </a:p>
-        </p:txBody>
-      </p:sp>
-      <p:sp>
-        <p:nvSpPr>
-          <p:cNvPr id="13" name="TextBox 12"/>
-          <p:cNvSpPr txBox="1"/>
-          <p:nvPr/>
-        </p:nvSpPr>
-        <p:spPr>
-          <a:xfrm>
-            <a:off x="4663440" y="2468880"/>
-            <a:ext cx="2834640" cy="822960"/>
-          </a:xfrm>
-          <a:prstGeom prst="rect">
-            <a:avLst/>
-          </a:prstGeom>
-          <a:noFill/>
-        </p:spPr>
-        <p:txBody>
-          <a:bodyPr wrap="square" lIns="0" tIns="0" rIns="0" bIns="0">
-            <a:spAutoFit/>
-          </a:bodyPr>
-          <a:lstStyle/>
-          <a:p>
-            <a:pPr>
-              <a:defRPr sz="2600" b="1">
-                <a:solidFill>
-                  <a:srgbClr val="0F172A"/>
-                </a:solidFill>
-              </a:defRPr>
-            </a:pPr>
-            <a:r>
-              <a:t>$4.2 Billion</a:t>
-            </a:r>
-          </a:p>
-          <a:p>
-            <a:pPr>
-              <a:defRPr sz="1100" b="1">
-                <a:solidFill>
-                  <a:srgbClr val="059669"/>
-                </a:solidFill>
-              </a:defRPr>
-            </a:pPr>
-            <a:r>
-              <a:t>Indian AVGC &amp; Media Sector</a:t>
-            </a:r>
-          </a:p>
-        </p:txBody>
-      </p:sp>
-      <p:sp>
-        <p:nvSpPr>
-          <p:cNvPr id="14" name="Rectangle 13"/>
-          <p:cNvSpPr/>
-          <p:nvPr/>
-        </p:nvSpPr>
-        <p:spPr>
-          <a:xfrm>
-            <a:off x="4663440" y="3474720"/>
-            <a:ext cx="2834640" cy="13716"/>
-          </a:xfrm>
-          <a:prstGeom prst="rect">
-            <a:avLst/>
-          </a:prstGeom>
-          <a:solidFill>
-            <a:srgbClr val="E2E8F0"/>
-          </a:solidFill>
-          <a:ln>
-            <a:noFill/>
-          </a:ln>
-        </p:spPr>
-        <p:style>
-          <a:lnRef idx="1">
-            <a:schemeClr val="accent1"/>
-          </a:lnRef>
-          <a:fillRef idx="3">
-            <a:schemeClr val="accent1"/>
-          </a:fillRef>
-          <a:effectRef idx="2">
-            <a:schemeClr val="accent1"/>
-          </a:effectRef>
-          <a:fontRef idx="minor">
-            <a:schemeClr val="lt1"/>
-          </a:fontRef>
-        </p:style>
-        <p:txBody>
-          <a:bodyPr rtlCol="0" anchor="ctr"/>
-          <a:lstStyle/>
-          <a:p>
-            <a:pPr algn="ctr"/>
-          </a:p>
-        </p:txBody>
-      </p:sp>
-      <p:sp>
-        <p:nvSpPr>
-          <p:cNvPr id="15" name="TextBox 14"/>
-          <p:cNvSpPr txBox="1"/>
-          <p:nvPr/>
-        </p:nvSpPr>
-        <p:spPr>
-          <a:xfrm>
-            <a:off x="4663440" y="3657600"/>
-            <a:ext cx="2834640" cy="2286000"/>
-          </a:xfrm>
-          <a:prstGeom prst="rect">
-            <a:avLst/>
-          </a:prstGeom>
-          <a:noFill/>
-        </p:spPr>
-        <p:txBody>
-          <a:bodyPr wrap="square" lIns="0" tIns="0" rIns="0" bIns="0">
-            <a:spAutoFit/>
-          </a:bodyPr>
-          <a:lstStyle/>
-          <a:p>
-            <a:pPr>
-              <a:spcAft>
-                <a:spcPts val="1000"/>
-              </a:spcAft>
-              <a:defRPr sz="1200">
-                <a:solidFill>
-                  <a:srgbClr val="334155"/>
-                </a:solidFill>
-              </a:defRPr>
-            </a:pPr>
-            <a:r>
-              <a:t>• India's Animation, VFX &amp; Gaming ecosystem.</a:t>
-            </a:r>
-          </a:p>
-          <a:p>
-            <a:pPr>
-              <a:spcAft>
-                <a:spcPts val="1000"/>
-              </a:spcAft>
-              <a:defRPr sz="1200">
-                <a:solidFill>
-                  <a:srgbClr val="334155"/>
-                </a:solidFill>
-              </a:defRPr>
-            </a:pPr>
-            <a:r>
-              <a:t>• 1.5M+ active Indian digital video creators.</a:t>
-            </a:r>
-          </a:p>
-          <a:p>
-            <a:pPr>
-              <a:spcAft>
-                <a:spcPts val="1000"/>
-              </a:spcAft>
-              <a:defRPr sz="1200">
-                <a:solidFill>
-                  <a:srgbClr val="334155"/>
-                </a:solidFill>
-              </a:defRPr>
-            </a:pPr>
-            <a:r>
-              <a:t>• Rapidly expanding OTT and digital ad production.</a:t>
-            </a:r>
-          </a:p>
-        </p:txBody>
-      </p:sp>
-      <p:sp>
-        <p:nvSpPr>
-          <p:cNvPr id="16" name="Rounded Rectangle 15"/>
-          <p:cNvSpPr/>
-          <p:nvPr/>
-        </p:nvSpPr>
-        <p:spPr>
-          <a:xfrm>
-            <a:off x="8046720" y="1828800"/>
-            <a:ext cx="3291840" cy="4297680"/>
+            <a:off x="8119872" y="1828800"/>
+            <a:ext cx="3328416" cy="4389120"/>
           </a:xfrm>
           <a:prstGeom prst="roundRect">
             <a:avLst/>
@@ -7079,56 +5616,16 @@
           </a:fontRef>
         </p:style>
         <p:txBody>
-          <a:bodyPr rtlCol="0" anchor="ctr"/>
-          <a:lstStyle/>
-          <a:p>
-            <a:pPr algn="ctr"/>
-          </a:p>
-        </p:txBody>
-      </p:sp>
-      <p:sp>
-        <p:nvSpPr>
-          <p:cNvPr id="17" name="Rounded Rectangle 16"/>
-          <p:cNvSpPr/>
-          <p:nvPr/>
-        </p:nvSpPr>
-        <p:spPr>
-          <a:xfrm>
-            <a:off x="8275320" y="2011680"/>
-            <a:ext cx="822960" cy="320040"/>
-          </a:xfrm>
-          <a:prstGeom prst="roundRect">
-            <a:avLst/>
-          </a:prstGeom>
-          <a:solidFill>
-            <a:srgbClr val="7C3AED"/>
-          </a:solidFill>
-          <a:ln>
-            <a:noFill/>
-          </a:ln>
-        </p:spPr>
-        <p:style>
-          <a:lnRef idx="1">
-            <a:schemeClr val="accent1"/>
-          </a:lnRef>
-          <a:fillRef idx="3">
-            <a:schemeClr val="accent1"/>
-          </a:fillRef>
-          <a:effectRef idx="2">
-            <a:schemeClr val="accent1"/>
-          </a:effectRef>
-          <a:fontRef idx="minor">
-            <a:schemeClr val="lt1"/>
-          </a:fontRef>
-        </p:style>
-        <p:txBody>
-          <a:bodyPr rtlCol="0" anchor="ctr"/>
+          <a:bodyPr rtlCol="0" anchor="ctr" wrap="square" lIns="228600" rIns="228600" tIns="228600" bIns="228600"/>
           <a:lstStyle/>
           <a:p>
             <a:pPr algn="ctr">
-              <a:defRPr sz="1100" b="1">
-                <a:solidFill>
-                  <a:srgbClr val="FFFFFF"/>
+              <a:spcAft>
+                <a:spcPts val="200"/>
+              </a:spcAft>
+              <a:defRPr sz="1200" b="1">
+                <a:solidFill>
+                  <a:srgbClr val="7C3AED"/>
                 </a:solidFill>
               </a:defRPr>
             </a:pPr>
@@ -7136,32 +5633,9 @@
               <a:t>SOM</a:t>
             </a:r>
           </a:p>
-        </p:txBody>
-      </p:sp>
-      <p:sp>
-        <p:nvSpPr>
-          <p:cNvPr id="18" name="TextBox 17"/>
-          <p:cNvSpPr txBox="1"/>
-          <p:nvPr/>
-        </p:nvSpPr>
-        <p:spPr>
-          <a:xfrm>
-            <a:off x="8275320" y="2468880"/>
-            <a:ext cx="2834640" cy="822960"/>
-          </a:xfrm>
-          <a:prstGeom prst="rect">
-            <a:avLst/>
-          </a:prstGeom>
-          <a:noFill/>
-        </p:spPr>
-        <p:txBody>
-          <a:bodyPr wrap="square" lIns="0" tIns="0" rIns="0" bIns="0">
-            <a:spAutoFit/>
-          </a:bodyPr>
-          <a:lstStyle/>
-          <a:p>
-            <a:pPr>
-              <a:defRPr sz="2600" b="1">
+          <a:p>
+            <a:pPr>
+              <a:defRPr sz="2200" b="1">
                 <a:solidFill>
                   <a:srgbClr val="0F172A"/>
                 </a:solidFill>
@@ -7173,7 +5647,10 @@
           </a:p>
           <a:p>
             <a:pPr>
-              <a:defRPr sz="1100" b="1">
+              <a:spcAft>
+                <a:spcPts val="1400"/>
+              </a:spcAft>
+              <a:defRPr sz="1050" b="1">
                 <a:solidFill>
                   <a:srgbClr val="7C3AED"/>
                 </a:solidFill>
@@ -7183,78 +5660,12 @@
               <a:t>36-Month Addressable Target</a:t>
             </a:r>
           </a:p>
-        </p:txBody>
-      </p:sp>
-      <p:sp>
-        <p:nvSpPr>
-          <p:cNvPr id="19" name="Rectangle 18"/>
-          <p:cNvSpPr/>
-          <p:nvPr/>
-        </p:nvSpPr>
-        <p:spPr>
-          <a:xfrm>
-            <a:off x="8275320" y="3474720"/>
-            <a:ext cx="2834640" cy="13716"/>
-          </a:xfrm>
-          <a:prstGeom prst="rect">
-            <a:avLst/>
-          </a:prstGeom>
-          <a:solidFill>
-            <a:srgbClr val="E2E8F0"/>
-          </a:solidFill>
-          <a:ln>
-            <a:noFill/>
-          </a:ln>
-        </p:spPr>
-        <p:style>
-          <a:lnRef idx="1">
-            <a:schemeClr val="accent1"/>
-          </a:lnRef>
-          <a:fillRef idx="3">
-            <a:schemeClr val="accent1"/>
-          </a:fillRef>
-          <a:effectRef idx="2">
-            <a:schemeClr val="accent1"/>
-          </a:effectRef>
-          <a:fontRef idx="minor">
-            <a:schemeClr val="lt1"/>
-          </a:fontRef>
-        </p:style>
-        <p:txBody>
-          <a:bodyPr rtlCol="0" anchor="ctr"/>
-          <a:lstStyle/>
-          <a:p>
-            <a:pPr algn="ctr"/>
-          </a:p>
-        </p:txBody>
-      </p:sp>
-      <p:sp>
-        <p:nvSpPr>
-          <p:cNvPr id="20" name="TextBox 19"/>
-          <p:cNvSpPr txBox="1"/>
-          <p:nvPr/>
-        </p:nvSpPr>
-        <p:spPr>
-          <a:xfrm>
-            <a:off x="8275320" y="3657600"/>
-            <a:ext cx="2834640" cy="2286000"/>
-          </a:xfrm>
-          <a:prstGeom prst="rect">
-            <a:avLst/>
-          </a:prstGeom>
-          <a:noFill/>
-        </p:spPr>
-        <p:txBody>
-          <a:bodyPr wrap="square" lIns="0" tIns="0" rIns="0" bIns="0">
-            <a:spAutoFit/>
-          </a:bodyPr>
-          <a:lstStyle/>
           <a:p>
             <a:pPr>
               <a:spcAft>
                 <a:spcPts val="1000"/>
               </a:spcAft>
-              <a:defRPr sz="1200">
+              <a:defRPr sz="1100">
                 <a:solidFill>
                   <a:srgbClr val="334155"/>
                 </a:solidFill>
@@ -7269,7 +5680,7 @@
               <a:spcAft>
                 <a:spcPts val="1000"/>
               </a:spcAft>
-              <a:defRPr sz="1200">
+              <a:defRPr sz="1100">
                 <a:solidFill>
                   <a:srgbClr val="334155"/>
                 </a:solidFill>
@@ -7284,7 +5695,7 @@
               <a:spcAft>
                 <a:spcPts val="1000"/>
               </a:spcAft>
-              <a:defRPr sz="1200">
+              <a:defRPr sz="1100">
                 <a:solidFill>
                   <a:srgbClr val="334155"/>
                 </a:solidFill>
@@ -7316,20 +5727,88 @@
       <p:grpSpPr/>
       <p:sp>
         <p:nvSpPr>
-          <p:cNvPr id="2" name="Rectangle 1"/>
+          <p:cNvPr id="2" name="TextBox 1"/>
+          <p:cNvSpPr txBox="1"/>
+          <p:nvPr/>
+        </p:nvSpPr>
+        <p:spPr>
+          <a:xfrm>
+            <a:off x="731520" y="411480"/>
+            <a:ext cx="10728655" cy="1097280"/>
+          </a:xfrm>
+          <a:prstGeom prst="rect">
+            <a:avLst/>
+          </a:prstGeom>
+          <a:noFill/>
+        </p:spPr>
+        <p:txBody>
+          <a:bodyPr wrap="square" lIns="0" tIns="0" rIns="0" bIns="0">
+            <a:spAutoFit/>
+          </a:bodyPr>
+          <a:lstStyle/>
+          <a:p>
+            <a:pPr>
+              <a:spcAft>
+                <a:spcPts val="200"/>
+              </a:spcAft>
+              <a:defRPr sz="1000" b="1">
+                <a:solidFill>
+                  <a:srgbClr val="2563EB"/>
+                </a:solidFill>
+                <a:latin typeface="Arial"/>
+              </a:defRPr>
+            </a:pPr>
+            <a:r>
+              <a:t>COMMERCIAL STRATEGY</a:t>
+            </a:r>
+          </a:p>
+          <a:p>
+            <a:pPr>
+              <a:spcAft>
+                <a:spcPts val="200"/>
+              </a:spcAft>
+              <a:defRPr sz="2200" b="1">
+                <a:solidFill>
+                  <a:srgbClr val="0F172A"/>
+                </a:solidFill>
+                <a:latin typeface="Arial"/>
+              </a:defRPr>
+            </a:pPr>
+            <a:r>
+              <a:t>Business &amp; Monetization Model</a:t>
+            </a:r>
+          </a:p>
+          <a:p>
+            <a:pPr>
+              <a:defRPr sz="1150">
+                <a:solidFill>
+                  <a:srgbClr val="64748B"/>
+                </a:solidFill>
+                <a:latin typeface="Arial"/>
+              </a:defRPr>
+            </a:pPr>
+            <a:r>
+              <a:t>A multi-tiered monetization strategy capturing individual creators and enterprise studios.</a:t>
+            </a:r>
+          </a:p>
+        </p:txBody>
+      </p:sp>
+      <p:sp>
+        <p:nvSpPr>
+          <p:cNvPr id="3" name="Rectangle 2"/>
           <p:cNvSpPr/>
           <p:nvPr/>
         </p:nvSpPr>
         <p:spPr>
           <a:xfrm>
-            <a:off x="0" y="0"/>
-            <a:ext cx="12191695" cy="6858000"/>
+            <a:off x="731520" y="1554480"/>
+            <a:ext cx="10728655" cy="13716"/>
           </a:xfrm>
           <a:prstGeom prst="rect">
             <a:avLst/>
           </a:prstGeom>
           <a:solidFill>
-            <a:srgbClr val="FFFFFF"/>
+            <a:srgbClr val="E2E8F0"/>
           </a:solidFill>
           <a:ln>
             <a:noFill/>
@@ -7359,122 +5838,14 @@
       </p:sp>
       <p:sp>
         <p:nvSpPr>
-          <p:cNvPr id="3" name="TextBox 2"/>
-          <p:cNvSpPr txBox="1"/>
+          <p:cNvPr id="4" name="Rounded Rectangle 3"/>
+          <p:cNvSpPr/>
           <p:nvPr/>
         </p:nvSpPr>
         <p:spPr>
           <a:xfrm>
-            <a:off x="822960" y="457200"/>
-            <a:ext cx="10515600" cy="274320"/>
-          </a:xfrm>
-          <a:prstGeom prst="rect">
-            <a:avLst/>
-          </a:prstGeom>
-          <a:noFill/>
-        </p:spPr>
-        <p:txBody>
-          <a:bodyPr wrap="square" lIns="0" tIns="0" rIns="0" bIns="0">
-            <a:spAutoFit/>
-          </a:bodyPr>
-          <a:lstStyle/>
-          <a:p>
-            <a:pPr>
-              <a:defRPr sz="1000" b="1">
-                <a:solidFill>
-                  <a:srgbClr val="2563EB"/>
-                </a:solidFill>
-                <a:latin typeface="Arial"/>
-              </a:defRPr>
-            </a:pPr>
-            <a:r>
-              <a:t>BUSINESS MODEL</a:t>
-            </a:r>
-          </a:p>
-        </p:txBody>
-      </p:sp>
-      <p:sp>
-        <p:nvSpPr>
-          <p:cNvPr id="4" name="TextBox 3"/>
-          <p:cNvSpPr txBox="1"/>
-          <p:nvPr/>
-        </p:nvSpPr>
-        <p:spPr>
-          <a:xfrm>
-            <a:off x="822960" y="731520"/>
-            <a:ext cx="10515600" cy="548640"/>
-          </a:xfrm>
-          <a:prstGeom prst="rect">
-            <a:avLst/>
-          </a:prstGeom>
-          <a:noFill/>
-        </p:spPr>
-        <p:txBody>
-          <a:bodyPr wrap="square" lIns="0" tIns="0" rIns="0" bIns="0">
-            <a:spAutoFit/>
-          </a:bodyPr>
-          <a:lstStyle/>
-          <a:p>
-            <a:pPr>
-              <a:defRPr sz="2200" b="1">
-                <a:solidFill>
-                  <a:srgbClr val="0F172A"/>
-                </a:solidFill>
-                <a:latin typeface="Arial"/>
-              </a:defRPr>
-            </a:pPr>
-            <a:r>
-              <a:t>Commercial Business &amp; Revenue Model</a:t>
-            </a:r>
-          </a:p>
-        </p:txBody>
-      </p:sp>
-      <p:sp>
-        <p:nvSpPr>
-          <p:cNvPr id="5" name="TextBox 4"/>
-          <p:cNvSpPr txBox="1"/>
-          <p:nvPr/>
-        </p:nvSpPr>
-        <p:spPr>
-          <a:xfrm>
-            <a:off x="822960" y="1280160"/>
-            <a:ext cx="10515600" cy="274320"/>
-          </a:xfrm>
-          <a:prstGeom prst="rect">
-            <a:avLst/>
-          </a:prstGeom>
-          <a:noFill/>
-        </p:spPr>
-        <p:txBody>
-          <a:bodyPr wrap="square" lIns="0" tIns="0" rIns="0" bIns="0">
-            <a:spAutoFit/>
-          </a:bodyPr>
-          <a:lstStyle/>
-          <a:p>
-            <a:pPr>
-              <a:defRPr sz="1200">
-                <a:solidFill>
-                  <a:srgbClr val="64748B"/>
-                </a:solidFill>
-                <a:latin typeface="Arial"/>
-              </a:defRPr>
-            </a:pPr>
-            <a:r>
-              <a:t>A multi-tiered monetization strategy capturing individual creators and enterprise studios.</a:t>
-            </a:r>
-          </a:p>
-        </p:txBody>
-      </p:sp>
-      <p:sp>
-        <p:nvSpPr>
-          <p:cNvPr id="6" name="Rounded Rectangle 5"/>
-          <p:cNvSpPr/>
-          <p:nvPr/>
-        </p:nvSpPr>
-        <p:spPr>
-          <a:xfrm>
-            <a:off x="822960" y="1828800"/>
-            <a:ext cx="3291840" cy="4297680"/>
+            <a:off x="731520" y="1828800"/>
+            <a:ext cx="3328416" cy="4389120"/>
           </a:xfrm>
           <a:prstGeom prst="roundRect">
             <a:avLst/>
@@ -7503,219 +5874,110 @@
           </a:fontRef>
         </p:style>
         <p:txBody>
-          <a:bodyPr rtlCol="0" anchor="ctr"/>
-          <a:lstStyle/>
-          <a:p>
-            <a:pPr algn="ctr"/>
-          </a:p>
-        </p:txBody>
-      </p:sp>
-      <p:sp>
-        <p:nvSpPr>
-          <p:cNvPr id="7" name="TextBox 6"/>
-          <p:cNvSpPr txBox="1"/>
+          <a:bodyPr rtlCol="0" anchor="ctr" wrap="square" lIns="228600" rIns="228600" tIns="228600" bIns="228600"/>
+          <a:lstStyle/>
+          <a:p>
+            <a:pPr algn="ctr">
+              <a:spcAft>
+                <a:spcPts val="200"/>
+              </a:spcAft>
+              <a:defRPr sz="950" b="1">
+                <a:solidFill>
+                  <a:srgbClr val="2563EB"/>
+                </a:solidFill>
+              </a:defRPr>
+            </a:pPr>
+            <a:r>
+              <a:t>DIRECT ASSET SALES</a:t>
+            </a:r>
+          </a:p>
+          <a:p>
+            <a:pPr>
+              <a:spcAft>
+                <a:spcPts val="1400"/>
+              </a:spcAft>
+              <a:defRPr sz="1600" b="1">
+                <a:solidFill>
+                  <a:srgbClr val="0F172A"/>
+                </a:solidFill>
+              </a:defRPr>
+            </a:pPr>
+            <a:r>
+              <a:t>Plugin Marketplace</a:t>
+            </a:r>
+          </a:p>
+          <a:p>
+            <a:pPr>
+              <a:spcAft>
+                <a:spcPts val="1000"/>
+              </a:spcAft>
+              <a:defRPr sz="1100">
+                <a:solidFill>
+                  <a:srgbClr val="334155"/>
+                </a:solidFill>
+              </a:defRPr>
+            </a:pPr>
+            <a:r>
+              <a:t>✔  Affordable perpetual licenses for DaVinci Resolve &amp; After Effects plugins.</a:t>
+            </a:r>
+          </a:p>
+          <a:p>
+            <a:pPr>
+              <a:spcAft>
+                <a:spcPts val="1000"/>
+              </a:spcAft>
+              <a:defRPr sz="1100">
+                <a:solidFill>
+                  <a:srgbClr val="334155"/>
+                </a:solidFill>
+              </a:defRPr>
+            </a:pPr>
+            <a:r>
+              <a:t>✔  Priced at ₹1,499 – ₹4,999 (disrupting ₹30k+ foreign tools).</a:t>
+            </a:r>
+          </a:p>
+          <a:p>
+            <a:pPr>
+              <a:spcAft>
+                <a:spcPts val="1000"/>
+              </a:spcAft>
+              <a:defRPr sz="1100">
+                <a:solidFill>
+                  <a:srgbClr val="334155"/>
+                </a:solidFill>
+              </a:defRPr>
+            </a:pPr>
+            <a:r>
+              <a:t>✔  Targeting freelance video editors &amp; YouTube creators.</a:t>
+            </a:r>
+          </a:p>
+          <a:p>
+            <a:pPr>
+              <a:spcAft>
+                <a:spcPts val="1000"/>
+              </a:spcAft>
+              <a:defRPr sz="1100">
+                <a:solidFill>
+                  <a:srgbClr val="334155"/>
+                </a:solidFill>
+              </a:defRPr>
+            </a:pPr>
+            <a:r>
+              <a:t>✔  High gross margin (&gt;90%) digital software delivery.</a:t>
+            </a:r>
+          </a:p>
+        </p:txBody>
+      </p:sp>
+      <p:sp>
+        <p:nvSpPr>
+          <p:cNvPr id="5" name="Rounded Rectangle 4"/>
+          <p:cNvSpPr/>
           <p:nvPr/>
         </p:nvSpPr>
         <p:spPr>
           <a:xfrm>
-            <a:off x="1051560" y="2103120"/>
-            <a:ext cx="2834640" cy="274320"/>
-          </a:xfrm>
-          <a:prstGeom prst="rect">
-            <a:avLst/>
-          </a:prstGeom>
-          <a:noFill/>
-        </p:spPr>
-        <p:txBody>
-          <a:bodyPr wrap="none" lIns="0" tIns="0" rIns="0" bIns="0">
-            <a:spAutoFit/>
-          </a:bodyPr>
-          <a:lstStyle/>
-          <a:p>
-            <a:pPr>
-              <a:defRPr sz="950" b="1">
-                <a:solidFill>
-                  <a:srgbClr val="2563EB"/>
-                </a:solidFill>
-              </a:defRPr>
-            </a:pPr>
-            <a:r>
-              <a:t>ONE-TIME ASSET SALES</a:t>
-            </a:r>
-          </a:p>
-        </p:txBody>
-      </p:sp>
-      <p:sp>
-        <p:nvSpPr>
-          <p:cNvPr id="8" name="TextBox 7"/>
-          <p:cNvSpPr txBox="1"/>
-          <p:nvPr/>
-        </p:nvSpPr>
-        <p:spPr>
-          <a:xfrm>
-            <a:off x="1051560" y="2377440"/>
-            <a:ext cx="2834640" cy="548640"/>
-          </a:xfrm>
-          <a:prstGeom prst="rect">
-            <a:avLst/>
-          </a:prstGeom>
-          <a:noFill/>
-        </p:spPr>
-        <p:txBody>
-          <a:bodyPr wrap="square" lIns="0" tIns="0" rIns="0" bIns="0">
-            <a:spAutoFit/>
-          </a:bodyPr>
-          <a:lstStyle/>
-          <a:p>
-            <a:pPr>
-              <a:defRPr sz="1700" b="1">
-                <a:solidFill>
-                  <a:srgbClr val="0F172A"/>
-                </a:solidFill>
-              </a:defRPr>
-            </a:pPr>
-            <a:r>
-              <a:t>Direct Plugin Sales</a:t>
-            </a:r>
-          </a:p>
-        </p:txBody>
-      </p:sp>
-      <p:sp>
-        <p:nvSpPr>
-          <p:cNvPr id="9" name="Rectangle 8"/>
-          <p:cNvSpPr/>
-          <p:nvPr/>
-        </p:nvSpPr>
-        <p:spPr>
-          <a:xfrm>
-            <a:off x="1051560" y="3017520"/>
-            <a:ext cx="2834640" cy="13716"/>
-          </a:xfrm>
-          <a:prstGeom prst="rect">
-            <a:avLst/>
-          </a:prstGeom>
-          <a:solidFill>
-            <a:srgbClr val="E2E8F0"/>
-          </a:solidFill>
-          <a:ln>
-            <a:noFill/>
-          </a:ln>
-        </p:spPr>
-        <p:style>
-          <a:lnRef idx="1">
-            <a:schemeClr val="accent1"/>
-          </a:lnRef>
-          <a:fillRef idx="3">
-            <a:schemeClr val="accent1"/>
-          </a:fillRef>
-          <a:effectRef idx="2">
-            <a:schemeClr val="accent1"/>
-          </a:effectRef>
-          <a:fontRef idx="minor">
-            <a:schemeClr val="lt1"/>
-          </a:fontRef>
-        </p:style>
-        <p:txBody>
-          <a:bodyPr rtlCol="0" anchor="ctr"/>
-          <a:lstStyle/>
-          <a:p>
-            <a:pPr algn="ctr"/>
-          </a:p>
-        </p:txBody>
-      </p:sp>
-      <p:sp>
-        <p:nvSpPr>
-          <p:cNvPr id="10" name="TextBox 9"/>
-          <p:cNvSpPr txBox="1"/>
-          <p:nvPr/>
-        </p:nvSpPr>
-        <p:spPr>
-          <a:xfrm>
-            <a:off x="1051560" y="3200400"/>
-            <a:ext cx="2834640" cy="2651760"/>
-          </a:xfrm>
-          <a:prstGeom prst="rect">
-            <a:avLst/>
-          </a:prstGeom>
-          <a:noFill/>
-        </p:spPr>
-        <p:txBody>
-          <a:bodyPr wrap="square" lIns="0" tIns="0" rIns="0" bIns="0">
-            <a:spAutoFit/>
-          </a:bodyPr>
-          <a:lstStyle/>
-          <a:p>
-            <a:pPr>
-              <a:spcAft>
-                <a:spcPts val="1000"/>
-              </a:spcAft>
-              <a:defRPr sz="1150">
-                <a:solidFill>
-                  <a:srgbClr val="334155"/>
-                </a:solidFill>
-              </a:defRPr>
-            </a:pPr>
-            <a:r>
-              <a:t>✔  Affordable perpetual licenses for DaVinci Resolve &amp; After Effects OFX plugins.</a:t>
-            </a:r>
-          </a:p>
-          <a:p>
-            <a:pPr>
-              <a:spcAft>
-                <a:spcPts val="1000"/>
-              </a:spcAft>
-              <a:defRPr sz="1150">
-                <a:solidFill>
-                  <a:srgbClr val="334155"/>
-                </a:solidFill>
-              </a:defRPr>
-            </a:pPr>
-            <a:r>
-              <a:t>✔  Priced at ₹1,499 – ₹4,999 (vs. ₹30,000+ foreign suites).</a:t>
-            </a:r>
-          </a:p>
-          <a:p>
-            <a:pPr>
-              <a:spcAft>
-                <a:spcPts val="1000"/>
-              </a:spcAft>
-              <a:defRPr sz="1150">
-                <a:solidFill>
-                  <a:srgbClr val="334155"/>
-                </a:solidFill>
-              </a:defRPr>
-            </a:pPr>
-            <a:r>
-              <a:t>✔  Targeting freelance video editors and creators.</a:t>
-            </a:r>
-          </a:p>
-          <a:p>
-            <a:pPr>
-              <a:spcAft>
-                <a:spcPts val="1000"/>
-              </a:spcAft>
-              <a:defRPr sz="1150">
-                <a:solidFill>
-                  <a:srgbClr val="334155"/>
-                </a:solidFill>
-              </a:defRPr>
-            </a:pPr>
-            <a:r>
-              <a:t>✔  High gross margin (&gt;90%) digital software delivery.</a:t>
-            </a:r>
-          </a:p>
-        </p:txBody>
-      </p:sp>
-      <p:sp>
-        <p:nvSpPr>
-          <p:cNvPr id="11" name="Rounded Rectangle 10"/>
-          <p:cNvSpPr/>
-          <p:nvPr/>
-        </p:nvSpPr>
-        <p:spPr>
-          <a:xfrm>
-            <a:off x="4434840" y="1828800"/>
-            <a:ext cx="3291840" cy="4297680"/>
+            <a:off x="4425696" y="1828800"/>
+            <a:ext cx="3328416" cy="4389120"/>
           </a:xfrm>
           <a:prstGeom prst="roundRect">
             <a:avLst/>
@@ -7744,219 +6006,110 @@
           </a:fontRef>
         </p:style>
         <p:txBody>
-          <a:bodyPr rtlCol="0" anchor="ctr"/>
-          <a:lstStyle/>
-          <a:p>
-            <a:pPr algn="ctr"/>
-          </a:p>
-        </p:txBody>
-      </p:sp>
-      <p:sp>
-        <p:nvSpPr>
-          <p:cNvPr id="12" name="TextBox 11"/>
-          <p:cNvSpPr txBox="1"/>
+          <a:bodyPr rtlCol="0" anchor="ctr" wrap="square" lIns="228600" rIns="228600" tIns="228600" bIns="228600"/>
+          <a:lstStyle/>
+          <a:p>
+            <a:pPr algn="ctr">
+              <a:spcAft>
+                <a:spcPts val="200"/>
+              </a:spcAft>
+              <a:defRPr sz="950" b="1">
+                <a:solidFill>
+                  <a:srgbClr val="7C3AED"/>
+                </a:solidFill>
+              </a:defRPr>
+            </a:pPr>
+            <a:r>
+              <a:t>RECURRING SUBSCRIPTION</a:t>
+            </a:r>
+          </a:p>
+          <a:p>
+            <a:pPr>
+              <a:spcAft>
+                <a:spcPts val="1400"/>
+              </a:spcAft>
+              <a:defRPr sz="1600" b="1">
+                <a:solidFill>
+                  <a:srgbClr val="0F172A"/>
+                </a:solidFill>
+              </a:defRPr>
+            </a:pPr>
+            <a:r>
+              <a:t>Creator All-Access SaaS</a:t>
+            </a:r>
+          </a:p>
+          <a:p>
+            <a:pPr>
+              <a:spcAft>
+                <a:spcPts val="1000"/>
+              </a:spcAft>
+              <a:defRPr sz="1100">
+                <a:solidFill>
+                  <a:srgbClr val="334155"/>
+                </a:solidFill>
+              </a:defRPr>
+            </a:pPr>
+            <a:r>
+              <a:t>✔  Monthly (₹499/mo) and Annual (₹4,999/yr) all-access plans.</a:t>
+            </a:r>
+          </a:p>
+          <a:p>
+            <a:pPr>
+              <a:spcAft>
+                <a:spcPts val="1000"/>
+              </a:spcAft>
+              <a:defRPr sz="1100">
+                <a:solidFill>
+                  <a:srgbClr val="334155"/>
+                </a:solidFill>
+              </a:defRPr>
+            </a:pPr>
+            <a:r>
+              <a:t>✔  Unlimited access to new monthly VFX packs &amp; AI tools.</a:t>
+            </a:r>
+          </a:p>
+          <a:p>
+            <a:pPr>
+              <a:spcAft>
+                <a:spcPts val="1000"/>
+              </a:spcAft>
+              <a:defRPr sz="1100">
+                <a:solidFill>
+                  <a:srgbClr val="334155"/>
+                </a:solidFill>
+              </a:defRPr>
+            </a:pPr>
+            <a:r>
+              <a:t>✔  Predictable recurring MRR with high customer lifetime value.</a:t>
+            </a:r>
+          </a:p>
+          <a:p>
+            <a:pPr>
+              <a:spcAft>
+                <a:spcPts val="1000"/>
+              </a:spcAft>
+              <a:defRPr sz="1100">
+                <a:solidFill>
+                  <a:srgbClr val="334155"/>
+                </a:solidFill>
+              </a:defRPr>
+            </a:pPr>
+            <a:r>
+              <a:t>✔  Continuous automated preset &amp; model updates.</a:t>
+            </a:r>
+          </a:p>
+        </p:txBody>
+      </p:sp>
+      <p:sp>
+        <p:nvSpPr>
+          <p:cNvPr id="6" name="Rounded Rectangle 5"/>
+          <p:cNvSpPr/>
           <p:nvPr/>
         </p:nvSpPr>
         <p:spPr>
           <a:xfrm>
-            <a:off x="4663440" y="2103120"/>
-            <a:ext cx="2834640" cy="274320"/>
-          </a:xfrm>
-          <a:prstGeom prst="rect">
-            <a:avLst/>
-          </a:prstGeom>
-          <a:noFill/>
-        </p:spPr>
-        <p:txBody>
-          <a:bodyPr wrap="none" lIns="0" tIns="0" rIns="0" bIns="0">
-            <a:spAutoFit/>
-          </a:bodyPr>
-          <a:lstStyle/>
-          <a:p>
-            <a:pPr>
-              <a:defRPr sz="950" b="1">
-                <a:solidFill>
-                  <a:srgbClr val="7C3AED"/>
-                </a:solidFill>
-              </a:defRPr>
-            </a:pPr>
-            <a:r>
-              <a:t>RECURRING SUBSCRIPTION</a:t>
-            </a:r>
-          </a:p>
-        </p:txBody>
-      </p:sp>
-      <p:sp>
-        <p:nvSpPr>
-          <p:cNvPr id="13" name="TextBox 12"/>
-          <p:cNvSpPr txBox="1"/>
-          <p:nvPr/>
-        </p:nvSpPr>
-        <p:spPr>
-          <a:xfrm>
-            <a:off x="4663440" y="2377440"/>
-            <a:ext cx="2834640" cy="548640"/>
-          </a:xfrm>
-          <a:prstGeom prst="rect">
-            <a:avLst/>
-          </a:prstGeom>
-          <a:noFill/>
-        </p:spPr>
-        <p:txBody>
-          <a:bodyPr wrap="square" lIns="0" tIns="0" rIns="0" bIns="0">
-            <a:spAutoFit/>
-          </a:bodyPr>
-          <a:lstStyle/>
-          <a:p>
-            <a:pPr>
-              <a:defRPr sz="1700" b="1">
-                <a:solidFill>
-                  <a:srgbClr val="0F172A"/>
-                </a:solidFill>
-              </a:defRPr>
-            </a:pPr>
-            <a:r>
-              <a:t>Creator All-Access SaaS</a:t>
-            </a:r>
-          </a:p>
-        </p:txBody>
-      </p:sp>
-      <p:sp>
-        <p:nvSpPr>
-          <p:cNvPr id="14" name="Rectangle 13"/>
-          <p:cNvSpPr/>
-          <p:nvPr/>
-        </p:nvSpPr>
-        <p:spPr>
-          <a:xfrm>
-            <a:off x="4663440" y="3017520"/>
-            <a:ext cx="2834640" cy="13716"/>
-          </a:xfrm>
-          <a:prstGeom prst="rect">
-            <a:avLst/>
-          </a:prstGeom>
-          <a:solidFill>
-            <a:srgbClr val="E2E8F0"/>
-          </a:solidFill>
-          <a:ln>
-            <a:noFill/>
-          </a:ln>
-        </p:spPr>
-        <p:style>
-          <a:lnRef idx="1">
-            <a:schemeClr val="accent1"/>
-          </a:lnRef>
-          <a:fillRef idx="3">
-            <a:schemeClr val="accent1"/>
-          </a:fillRef>
-          <a:effectRef idx="2">
-            <a:schemeClr val="accent1"/>
-          </a:effectRef>
-          <a:fontRef idx="minor">
-            <a:schemeClr val="lt1"/>
-          </a:fontRef>
-        </p:style>
-        <p:txBody>
-          <a:bodyPr rtlCol="0" anchor="ctr"/>
-          <a:lstStyle/>
-          <a:p>
-            <a:pPr algn="ctr"/>
-          </a:p>
-        </p:txBody>
-      </p:sp>
-      <p:sp>
-        <p:nvSpPr>
-          <p:cNvPr id="15" name="TextBox 14"/>
-          <p:cNvSpPr txBox="1"/>
-          <p:nvPr/>
-        </p:nvSpPr>
-        <p:spPr>
-          <a:xfrm>
-            <a:off x="4663440" y="3200400"/>
-            <a:ext cx="2834640" cy="2651760"/>
-          </a:xfrm>
-          <a:prstGeom prst="rect">
-            <a:avLst/>
-          </a:prstGeom>
-          <a:noFill/>
-        </p:spPr>
-        <p:txBody>
-          <a:bodyPr wrap="square" lIns="0" tIns="0" rIns="0" bIns="0">
-            <a:spAutoFit/>
-          </a:bodyPr>
-          <a:lstStyle/>
-          <a:p>
-            <a:pPr>
-              <a:spcAft>
-                <a:spcPts val="1000"/>
-              </a:spcAft>
-              <a:defRPr sz="1150">
-                <a:solidFill>
-                  <a:srgbClr val="334155"/>
-                </a:solidFill>
-              </a:defRPr>
-            </a:pPr>
-            <a:r>
-              <a:t>✔  Monthly (₹499/mo) and Annual (₹4,999/yr) plans.</a:t>
-            </a:r>
-          </a:p>
-          <a:p>
-            <a:pPr>
-              <a:spcAft>
-                <a:spcPts val="1000"/>
-              </a:spcAft>
-              <a:defRPr sz="1150">
-                <a:solidFill>
-                  <a:srgbClr val="334155"/>
-                </a:solidFill>
-              </a:defRPr>
-            </a:pPr>
-            <a:r>
-              <a:t>✔  Unlimited access to new VFX packs and neural AI tools.</a:t>
-            </a:r>
-          </a:p>
-          <a:p>
-            <a:pPr>
-              <a:spcAft>
-                <a:spcPts val="1000"/>
-              </a:spcAft>
-              <a:defRPr sz="1150">
-                <a:solidFill>
-                  <a:srgbClr val="334155"/>
-                </a:solidFill>
-              </a:defRPr>
-            </a:pPr>
-            <a:r>
-              <a:t>✔  Predictable recurring MRR and high lifetime value.</a:t>
-            </a:r>
-          </a:p>
-          <a:p>
-            <a:pPr>
-              <a:spcAft>
-                <a:spcPts val="1000"/>
-              </a:spcAft>
-              <a:defRPr sz="1150">
-                <a:solidFill>
-                  <a:srgbClr val="334155"/>
-                </a:solidFill>
-              </a:defRPr>
-            </a:pPr>
-            <a:r>
-              <a:t>✔  Continuous automated preset &amp; model updates.</a:t>
-            </a:r>
-          </a:p>
-        </p:txBody>
-      </p:sp>
-      <p:sp>
-        <p:nvSpPr>
-          <p:cNvPr id="16" name="Rounded Rectangle 15"/>
-          <p:cNvSpPr/>
-          <p:nvPr/>
-        </p:nvSpPr>
-        <p:spPr>
-          <a:xfrm>
-            <a:off x="8046720" y="1828800"/>
-            <a:ext cx="3291840" cy="4297680"/>
+            <a:off x="8119872" y="1828800"/>
+            <a:ext cx="3328416" cy="4389120"/>
           </a:xfrm>
           <a:prstGeom prst="roundRect">
             <a:avLst/>
@@ -7985,36 +6138,13 @@
           </a:fontRef>
         </p:style>
         <p:txBody>
-          <a:bodyPr rtlCol="0" anchor="ctr"/>
-          <a:lstStyle/>
-          <a:p>
-            <a:pPr algn="ctr"/>
-          </a:p>
-        </p:txBody>
-      </p:sp>
-      <p:sp>
-        <p:nvSpPr>
-          <p:cNvPr id="17" name="TextBox 16"/>
-          <p:cNvSpPr txBox="1"/>
-          <p:nvPr/>
-        </p:nvSpPr>
-        <p:spPr>
-          <a:xfrm>
-            <a:off x="8275320" y="2103120"/>
-            <a:ext cx="2834640" cy="274320"/>
-          </a:xfrm>
-          <a:prstGeom prst="rect">
-            <a:avLst/>
-          </a:prstGeom>
-          <a:noFill/>
-        </p:spPr>
-        <p:txBody>
-          <a:bodyPr wrap="none" lIns="0" tIns="0" rIns="0" bIns="0">
-            <a:spAutoFit/>
-          </a:bodyPr>
-          <a:lstStyle/>
-          <a:p>
-            <a:pPr>
+          <a:bodyPr rtlCol="0" anchor="ctr" wrap="square" lIns="228600" rIns="228600" tIns="228600" bIns="228600"/>
+          <a:lstStyle/>
+          <a:p>
+            <a:pPr algn="ctr">
+              <a:spcAft>
+                <a:spcPts val="200"/>
+              </a:spcAft>
               <a:defRPr sz="950" b="1">
                 <a:solidFill>
                   <a:srgbClr val="059669"/>
@@ -8022,123 +6152,37 @@
               </a:defRPr>
             </a:pPr>
             <a:r>
-              <a:t>STUDIO ENGINEERING</a:t>
-            </a:r>
-          </a:p>
-        </p:txBody>
-      </p:sp>
-      <p:sp>
-        <p:nvSpPr>
-          <p:cNvPr id="18" name="TextBox 17"/>
-          <p:cNvSpPr txBox="1"/>
-          <p:nvPr/>
-        </p:nvSpPr>
-        <p:spPr>
-          <a:xfrm>
-            <a:off x="8275320" y="2377440"/>
-            <a:ext cx="2834640" cy="548640"/>
-          </a:xfrm>
-          <a:prstGeom prst="rect">
-            <a:avLst/>
-          </a:prstGeom>
-          <a:noFill/>
-        </p:spPr>
-        <p:txBody>
-          <a:bodyPr wrap="square" lIns="0" tIns="0" rIns="0" bIns="0">
-            <a:spAutoFit/>
-          </a:bodyPr>
-          <a:lstStyle/>
-          <a:p>
-            <a:pPr>
-              <a:defRPr sz="1700" b="1">
+              <a:t>B2B &amp; MEDIA CONTRACTS</a:t>
+            </a:r>
+          </a:p>
+          <a:p>
+            <a:pPr>
+              <a:spcAft>
+                <a:spcPts val="1400"/>
+              </a:spcAft>
+              <a:defRPr sz="1600" b="1">
                 <a:solidFill>
                   <a:srgbClr val="0F172A"/>
                 </a:solidFill>
               </a:defRPr>
             </a:pPr>
             <a:r>
-              <a:t>Enterprise B2B Retainers</a:t>
-            </a:r>
-          </a:p>
-        </p:txBody>
-      </p:sp>
-      <p:sp>
-        <p:nvSpPr>
-          <p:cNvPr id="19" name="Rectangle 18"/>
-          <p:cNvSpPr/>
-          <p:nvPr/>
-        </p:nvSpPr>
-        <p:spPr>
-          <a:xfrm>
-            <a:off x="8275320" y="3017520"/>
-            <a:ext cx="2834640" cy="13716"/>
-          </a:xfrm>
-          <a:prstGeom prst="rect">
-            <a:avLst/>
-          </a:prstGeom>
-          <a:solidFill>
-            <a:srgbClr val="E2E8F0"/>
-          </a:solidFill>
-          <a:ln>
-            <a:noFill/>
-          </a:ln>
-        </p:spPr>
-        <p:style>
-          <a:lnRef idx="1">
-            <a:schemeClr val="accent1"/>
-          </a:lnRef>
-          <a:fillRef idx="3">
-            <a:schemeClr val="accent1"/>
-          </a:fillRef>
-          <a:effectRef idx="2">
-            <a:schemeClr val="accent1"/>
-          </a:effectRef>
-          <a:fontRef idx="minor">
-            <a:schemeClr val="lt1"/>
-          </a:fontRef>
-        </p:style>
-        <p:txBody>
-          <a:bodyPr rtlCol="0" anchor="ctr"/>
-          <a:lstStyle/>
-          <a:p>
-            <a:pPr algn="ctr"/>
-          </a:p>
-        </p:txBody>
-      </p:sp>
-      <p:sp>
-        <p:nvSpPr>
-          <p:cNvPr id="20" name="TextBox 19"/>
-          <p:cNvSpPr txBox="1"/>
-          <p:nvPr/>
-        </p:nvSpPr>
-        <p:spPr>
-          <a:xfrm>
-            <a:off x="8275320" y="3200400"/>
-            <a:ext cx="2834640" cy="2651760"/>
-          </a:xfrm>
-          <a:prstGeom prst="rect">
-            <a:avLst/>
-          </a:prstGeom>
-          <a:noFill/>
-        </p:spPr>
-        <p:txBody>
-          <a:bodyPr wrap="square" lIns="0" tIns="0" rIns="0" bIns="0">
-            <a:spAutoFit/>
-          </a:bodyPr>
-          <a:lstStyle/>
+              <a:t>Enterprise Retainers</a:t>
+            </a:r>
+          </a:p>
           <a:p>
             <a:pPr>
               <a:spcAft>
                 <a:spcPts val="1000"/>
               </a:spcAft>
-              <a:defRPr sz="1150">
+              <a:defRPr sz="1100">
                 <a:solidFill>
                   <a:srgbClr val="334155"/>
                 </a:solidFill>
               </a:defRPr>
             </a:pPr>
             <a:r>
-              <a:t>✔  Custom OFX pipeline builds for film &amp; ad production.</a:t>
+              <a:t>✔  Custom OFX pipeline builds for film &amp; ad production studios.</a:t>
             </a:r>
           </a:p>
           <a:p>
@@ -8146,14 +6190,14 @@
               <a:spcAft>
                 <a:spcPts val="1000"/>
               </a:spcAft>
-              <a:defRPr sz="1150">
+              <a:defRPr sz="1100">
                 <a:solidFill>
                   <a:srgbClr val="334155"/>
                 </a:solidFill>
               </a:defRPr>
             </a:pPr>
             <a:r>
-              <a:t>✔  Viral media syndication contracts (@hrlflix).</a:t>
+              <a:t>✔  Viral media syndication contracts via @hrlflix network.</a:t>
             </a:r>
           </a:p>
           <a:p>
@@ -8161,7 +6205,7 @@
               <a:spcAft>
                 <a:spcPts val="1000"/>
               </a:spcAft>
-              <a:defRPr sz="1150">
+              <a:defRPr sz="1100">
                 <a:solidFill>
                   <a:srgbClr val="334155"/>
                 </a:solidFill>
@@ -8176,7 +6220,7 @@
               <a:spcAft>
                 <a:spcPts val="1000"/>
               </a:spcAft>
-              <a:defRPr sz="1150">
+              <a:defRPr sz="1100">
                 <a:solidFill>
                   <a:srgbClr val="334155"/>
                 </a:solidFill>
@@ -8208,20 +6252,88 @@
       <p:grpSpPr/>
       <p:sp>
         <p:nvSpPr>
-          <p:cNvPr id="2" name="Rectangle 1"/>
+          <p:cNvPr id="2" name="TextBox 1"/>
+          <p:cNvSpPr txBox="1"/>
+          <p:nvPr/>
+        </p:nvSpPr>
+        <p:spPr>
+          <a:xfrm>
+            <a:off x="731520" y="411480"/>
+            <a:ext cx="10728655" cy="1097280"/>
+          </a:xfrm>
+          <a:prstGeom prst="rect">
+            <a:avLst/>
+          </a:prstGeom>
+          <a:noFill/>
+        </p:spPr>
+        <p:txBody>
+          <a:bodyPr wrap="square" lIns="0" tIns="0" rIns="0" bIns="0">
+            <a:spAutoFit/>
+          </a:bodyPr>
+          <a:lstStyle/>
+          <a:p>
+            <a:pPr>
+              <a:spcAft>
+                <a:spcPts val="200"/>
+              </a:spcAft>
+              <a:defRPr sz="1000" b="1">
+                <a:solidFill>
+                  <a:srgbClr val="2563EB"/>
+                </a:solidFill>
+                <a:latin typeface="Arial"/>
+              </a:defRPr>
+            </a:pPr>
+            <a:r>
+              <a:t>WHY WE WIN</a:t>
+            </a:r>
+          </a:p>
+          <a:p>
+            <a:pPr>
+              <a:spcAft>
+                <a:spcPts val="200"/>
+              </a:spcAft>
+              <a:defRPr sz="2200" b="1">
+                <a:solidFill>
+                  <a:srgbClr val="0F172A"/>
+                </a:solidFill>
+                <a:latin typeface="Arial"/>
+              </a:defRPr>
+            </a:pPr>
+            <a:r>
+              <a:t>Competitive Moat — Defensible Advantages</a:t>
+            </a:r>
+          </a:p>
+          <a:p>
+            <a:pPr>
+              <a:defRPr sz="1150">
+                <a:solidFill>
+                  <a:srgbClr val="64748B"/>
+                </a:solidFill>
+                <a:latin typeface="Arial"/>
+              </a:defRPr>
+            </a:pPr>
+            <a:r>
+              <a:t>Core structural advantages that cannot be easily replicated by web apps or legacy suites.</a:t>
+            </a:r>
+          </a:p>
+        </p:txBody>
+      </p:sp>
+      <p:sp>
+        <p:nvSpPr>
+          <p:cNvPr id="3" name="Rectangle 2"/>
           <p:cNvSpPr/>
           <p:nvPr/>
         </p:nvSpPr>
         <p:spPr>
           <a:xfrm>
-            <a:off x="0" y="0"/>
-            <a:ext cx="12191695" cy="6858000"/>
+            <a:off x="731520" y="1554480"/>
+            <a:ext cx="10728655" cy="13716"/>
           </a:xfrm>
           <a:prstGeom prst="rect">
             <a:avLst/>
           </a:prstGeom>
           <a:solidFill>
-            <a:srgbClr val="FFFFFF"/>
+            <a:srgbClr val="E2E8F0"/>
           </a:solidFill>
           <a:ln>
             <a:noFill/>
@@ -8251,122 +6363,14 @@
       </p:sp>
       <p:sp>
         <p:nvSpPr>
-          <p:cNvPr id="3" name="TextBox 2"/>
-          <p:cNvSpPr txBox="1"/>
+          <p:cNvPr id="4" name="Rounded Rectangle 3"/>
+          <p:cNvSpPr/>
           <p:nvPr/>
         </p:nvSpPr>
         <p:spPr>
           <a:xfrm>
-            <a:off x="822960" y="457200"/>
-            <a:ext cx="10515600" cy="274320"/>
-          </a:xfrm>
-          <a:prstGeom prst="rect">
-            <a:avLst/>
-          </a:prstGeom>
-          <a:noFill/>
-        </p:spPr>
-        <p:txBody>
-          <a:bodyPr wrap="square" lIns="0" tIns="0" rIns="0" bIns="0">
-            <a:spAutoFit/>
-          </a:bodyPr>
-          <a:lstStyle/>
-          <a:p>
-            <a:pPr>
-              <a:defRPr sz="1000" b="1">
-                <a:solidFill>
-                  <a:srgbClr val="2563EB"/>
-                </a:solidFill>
-                <a:latin typeface="Arial"/>
-              </a:defRPr>
-            </a:pPr>
-            <a:r>
-              <a:t>WHY WE WIN</a:t>
-            </a:r>
-          </a:p>
-        </p:txBody>
-      </p:sp>
-      <p:sp>
-        <p:nvSpPr>
-          <p:cNvPr id="4" name="TextBox 3"/>
-          <p:cNvSpPr txBox="1"/>
-          <p:nvPr/>
-        </p:nvSpPr>
-        <p:spPr>
-          <a:xfrm>
-            <a:off x="822960" y="731520"/>
-            <a:ext cx="10515600" cy="548640"/>
-          </a:xfrm>
-          <a:prstGeom prst="rect">
-            <a:avLst/>
-          </a:prstGeom>
-          <a:noFill/>
-        </p:spPr>
-        <p:txBody>
-          <a:bodyPr wrap="square" lIns="0" tIns="0" rIns="0" bIns="0">
-            <a:spAutoFit/>
-          </a:bodyPr>
-          <a:lstStyle/>
-          <a:p>
-            <a:pPr>
-              <a:defRPr sz="2200" b="1">
-                <a:solidFill>
-                  <a:srgbClr val="0F172A"/>
-                </a:solidFill>
-                <a:latin typeface="Arial"/>
-              </a:defRPr>
-            </a:pPr>
-            <a:r>
-              <a:t>Competitive Moat — Defensible Advantages</a:t>
-            </a:r>
-          </a:p>
-        </p:txBody>
-      </p:sp>
-      <p:sp>
-        <p:nvSpPr>
-          <p:cNvPr id="5" name="TextBox 4"/>
-          <p:cNvSpPr txBox="1"/>
-          <p:nvPr/>
-        </p:nvSpPr>
-        <p:spPr>
-          <a:xfrm>
-            <a:off x="822960" y="1280160"/>
-            <a:ext cx="10515600" cy="274320"/>
-          </a:xfrm>
-          <a:prstGeom prst="rect">
-            <a:avLst/>
-          </a:prstGeom>
-          <a:noFill/>
-        </p:spPr>
-        <p:txBody>
-          <a:bodyPr wrap="square" lIns="0" tIns="0" rIns="0" bIns="0">
-            <a:spAutoFit/>
-          </a:bodyPr>
-          <a:lstStyle/>
-          <a:p>
-            <a:pPr>
-              <a:defRPr sz="1200">
-                <a:solidFill>
-                  <a:srgbClr val="64748B"/>
-                </a:solidFill>
-                <a:latin typeface="Arial"/>
-              </a:defRPr>
-            </a:pPr>
-            <a:r>
-              <a:t>Core structural advantages that cannot be easily replicated by web apps or legacy suites.</a:t>
-            </a:r>
-          </a:p>
-        </p:txBody>
-      </p:sp>
-      <p:sp>
-        <p:nvSpPr>
-          <p:cNvPr id="6" name="Rounded Rectangle 5"/>
-          <p:cNvSpPr/>
-          <p:nvPr/>
-        </p:nvSpPr>
-        <p:spPr>
-          <a:xfrm>
-            <a:off x="822960" y="1828800"/>
-            <a:ext cx="5120640" cy="2011680"/>
+            <a:off x="731520" y="1828800"/>
+            <a:ext cx="5166360" cy="2057400"/>
           </a:xfrm>
           <a:prstGeom prst="roundRect">
             <a:avLst/>
@@ -8395,73 +6399,47 @@
           </a:fontRef>
         </p:style>
         <p:txBody>
-          <a:bodyPr rtlCol="0" anchor="ctr"/>
-          <a:lstStyle/>
-          <a:p>
-            <a:pPr algn="ctr"/>
-          </a:p>
-        </p:txBody>
-      </p:sp>
-      <p:sp>
-        <p:nvSpPr>
-          <p:cNvPr id="7" name="TextBox 6"/>
-          <p:cNvSpPr txBox="1"/>
+          <a:bodyPr rtlCol="0" anchor="ctr" wrap="square" lIns="228600" rIns="228600" tIns="228600" bIns="228600"/>
+          <a:lstStyle/>
+          <a:p>
+            <a:pPr algn="ctr">
+              <a:spcAft>
+                <a:spcPts val="600"/>
+              </a:spcAft>
+              <a:defRPr sz="1400" b="1">
+                <a:solidFill>
+                  <a:srgbClr val="2563EB"/>
+                </a:solidFill>
+              </a:defRPr>
+            </a:pPr>
+            <a:r>
+              <a:t>Native GPU vs. Slow Cloud Wrappers</a:t>
+            </a:r>
+          </a:p>
+          <a:p>
+            <a:pPr>
+              <a:defRPr sz="1100">
+                <a:solidFill>
+                  <a:srgbClr val="334155"/>
+                </a:solidFill>
+              </a:defRPr>
+            </a:pPr>
+            <a:r>
+              <a:t>Direct Metal/CUDA execution on user hardware. 0ms latency, zero cloud operational bills, and instant scrubbing.</a:t>
+            </a:r>
+          </a:p>
+        </p:txBody>
+      </p:sp>
+      <p:sp>
+        <p:nvSpPr>
+          <p:cNvPr id="5" name="Rounded Rectangle 4"/>
+          <p:cNvSpPr/>
           <p:nvPr/>
         </p:nvSpPr>
         <p:spPr>
           <a:xfrm>
-            <a:off x="1097280" y="2103120"/>
-            <a:ext cx="4572000" cy="1463040"/>
-          </a:xfrm>
-          <a:prstGeom prst="rect">
-            <a:avLst/>
-          </a:prstGeom>
-          <a:noFill/>
-        </p:spPr>
-        <p:txBody>
-          <a:bodyPr wrap="square" lIns="0" tIns="0" rIns="0" bIns="0">
-            <a:spAutoFit/>
-          </a:bodyPr>
-          <a:lstStyle/>
-          <a:p>
-            <a:pPr>
-              <a:spcAft>
-                <a:spcPts val="600"/>
-              </a:spcAft>
-              <a:defRPr sz="1400" b="1">
-                <a:solidFill>
-                  <a:srgbClr val="2563EB"/>
-                </a:solidFill>
-              </a:defRPr>
-            </a:pPr>
-            <a:r>
-              <a:t>Native GPU vs. Slow Cloud Wrappers</a:t>
-            </a:r>
-          </a:p>
-          <a:p>
-            <a:pPr>
-              <a:defRPr sz="1150">
-                <a:solidFill>
-                  <a:srgbClr val="334155"/>
-                </a:solidFill>
-              </a:defRPr>
-            </a:pPr>
-            <a:r>
-              <a:t>Direct Metal/CUDA execution on user hardware. 0ms latency, zero cloud operational bills, and instant scrubbing.</a:t>
-            </a:r>
-          </a:p>
-        </p:txBody>
-      </p:sp>
-      <p:sp>
-        <p:nvSpPr>
-          <p:cNvPr id="8" name="Rounded Rectangle 7"/>
-          <p:cNvSpPr/>
-          <p:nvPr/>
-        </p:nvSpPr>
-        <p:spPr>
-          <a:xfrm>
-            <a:off x="6263640" y="1828800"/>
-            <a:ext cx="5120640" cy="2011680"/>
+            <a:off x="6293815" y="1828800"/>
+            <a:ext cx="5166360" cy="2057400"/>
           </a:xfrm>
           <a:prstGeom prst="roundRect">
             <a:avLst/>
@@ -8490,73 +6468,47 @@
           </a:fontRef>
         </p:style>
         <p:txBody>
-          <a:bodyPr rtlCol="0" anchor="ctr"/>
-          <a:lstStyle/>
-          <a:p>
-            <a:pPr algn="ctr"/>
-          </a:p>
-        </p:txBody>
-      </p:sp>
-      <p:sp>
-        <p:nvSpPr>
-          <p:cNvPr id="9" name="TextBox 8"/>
-          <p:cNvSpPr txBox="1"/>
+          <a:bodyPr rtlCol="0" anchor="ctr" wrap="square" lIns="228600" rIns="228600" tIns="228600" bIns="228600"/>
+          <a:lstStyle/>
+          <a:p>
+            <a:pPr algn="ctr">
+              <a:spcAft>
+                <a:spcPts val="600"/>
+              </a:spcAft>
+              <a:defRPr sz="1400" b="1">
+                <a:solidFill>
+                  <a:srgbClr val="059669"/>
+                </a:solidFill>
+              </a:defRPr>
+            </a:pPr>
+            <a:r>
+              <a:t>Certified Hollywood Color Science</a:t>
+            </a:r>
+          </a:p>
+          <a:p>
+            <a:pPr>
+              <a:defRPr sz="1100">
+                <a:solidFill>
+                  <a:srgbClr val="334155"/>
+                </a:solidFill>
+              </a:defRPr>
+            </a:pPr>
+            <a:r>
+              <a:t>Blackmagic Design certified color science preserving 12-bit DPX sensor data with ACEScc dynamic range.</a:t>
+            </a:r>
+          </a:p>
+        </p:txBody>
+      </p:sp>
+      <p:sp>
+        <p:nvSpPr>
+          <p:cNvPr id="6" name="Rounded Rectangle 5"/>
+          <p:cNvSpPr/>
           <p:nvPr/>
         </p:nvSpPr>
         <p:spPr>
           <a:xfrm>
-            <a:off x="6537960" y="2103120"/>
-            <a:ext cx="4572000" cy="1463040"/>
-          </a:xfrm>
-          <a:prstGeom prst="rect">
-            <a:avLst/>
-          </a:prstGeom>
-          <a:noFill/>
-        </p:spPr>
-        <p:txBody>
-          <a:bodyPr wrap="square" lIns="0" tIns="0" rIns="0" bIns="0">
-            <a:spAutoFit/>
-          </a:bodyPr>
-          <a:lstStyle/>
-          <a:p>
-            <a:pPr>
-              <a:spcAft>
-                <a:spcPts val="600"/>
-              </a:spcAft>
-              <a:defRPr sz="1400" b="1">
-                <a:solidFill>
-                  <a:srgbClr val="059669"/>
-                </a:solidFill>
-              </a:defRPr>
-            </a:pPr>
-            <a:r>
-              <a:t>Certified Hollywood Color Science</a:t>
-            </a:r>
-          </a:p>
-          <a:p>
-            <a:pPr>
-              <a:defRPr sz="1150">
-                <a:solidFill>
-                  <a:srgbClr val="334155"/>
-                </a:solidFill>
-              </a:defRPr>
-            </a:pPr>
-            <a:r>
-              <a:t>Blackmagic Design certified color science preserving 12-bit DPX sensor data with ACEScc dynamic range.</a:t>
-            </a:r>
-          </a:p>
-        </p:txBody>
-      </p:sp>
-      <p:sp>
-        <p:nvSpPr>
-          <p:cNvPr id="10" name="Rounded Rectangle 9"/>
-          <p:cNvSpPr/>
-          <p:nvPr/>
-        </p:nvSpPr>
-        <p:spPr>
-          <a:xfrm>
-            <a:off x="822960" y="4114800"/>
-            <a:ext cx="5120640" cy="2011680"/>
+            <a:off x="731520" y="4160520"/>
+            <a:ext cx="5166360" cy="2057400"/>
           </a:xfrm>
           <a:prstGeom prst="roundRect">
             <a:avLst/>
@@ -8585,73 +6537,47 @@
           </a:fontRef>
         </p:style>
         <p:txBody>
-          <a:bodyPr rtlCol="0" anchor="ctr"/>
-          <a:lstStyle/>
-          <a:p>
-            <a:pPr algn="ctr"/>
-          </a:p>
-        </p:txBody>
-      </p:sp>
-      <p:sp>
-        <p:nvSpPr>
-          <p:cNvPr id="11" name="TextBox 10"/>
-          <p:cNvSpPr txBox="1"/>
+          <a:bodyPr rtlCol="0" anchor="ctr" wrap="square" lIns="228600" rIns="228600" tIns="228600" bIns="228600"/>
+          <a:lstStyle/>
+          <a:p>
+            <a:pPr algn="ctr">
+              <a:spcAft>
+                <a:spcPts val="600"/>
+              </a:spcAft>
+              <a:defRPr sz="1400" b="1">
+                <a:solidFill>
+                  <a:srgbClr val="7C3AED"/>
+                </a:solidFill>
+              </a:defRPr>
+            </a:pPr>
+            <a:r>
+              <a:t>High-Velocity Zero-Bloat Architecture</a:t>
+            </a:r>
+          </a:p>
+          <a:p>
+            <a:pPr>
+              <a:defRPr sz="1100">
+                <a:solidFill>
+                  <a:srgbClr val="334155"/>
+                </a:solidFill>
+              </a:defRPr>
+            </a:pPr>
+            <a:r>
+              <a:t>Proprietary C++ engines &amp; ACID-safe backends built in-house for maximum throughput without third-party bloat.</a:t>
+            </a:r>
+          </a:p>
+        </p:txBody>
+      </p:sp>
+      <p:sp>
+        <p:nvSpPr>
+          <p:cNvPr id="7" name="Rounded Rectangle 6"/>
+          <p:cNvSpPr/>
           <p:nvPr/>
         </p:nvSpPr>
         <p:spPr>
           <a:xfrm>
-            <a:off x="1097280" y="4389120"/>
-            <a:ext cx="4572000" cy="1463040"/>
-          </a:xfrm>
-          <a:prstGeom prst="rect">
-            <a:avLst/>
-          </a:prstGeom>
-          <a:noFill/>
-        </p:spPr>
-        <p:txBody>
-          <a:bodyPr wrap="square" lIns="0" tIns="0" rIns="0" bIns="0">
-            <a:spAutoFit/>
-          </a:bodyPr>
-          <a:lstStyle/>
-          <a:p>
-            <a:pPr>
-              <a:spcAft>
-                <a:spcPts val="600"/>
-              </a:spcAft>
-              <a:defRPr sz="1400" b="1">
-                <a:solidFill>
-                  <a:srgbClr val="7C3AED"/>
-                </a:solidFill>
-              </a:defRPr>
-            </a:pPr>
-            <a:r>
-              <a:t>High-Velocity Zero-Bloat Architecture</a:t>
-            </a:r>
-          </a:p>
-          <a:p>
-            <a:pPr>
-              <a:defRPr sz="1150">
-                <a:solidFill>
-                  <a:srgbClr val="334155"/>
-                </a:solidFill>
-              </a:defRPr>
-            </a:pPr>
-            <a:r>
-              <a:t>Proprietary C++ engines &amp; ACID-safe backends built in-house for maximum throughput without third-party bloat.</a:t>
-            </a:r>
-          </a:p>
-        </p:txBody>
-      </p:sp>
-      <p:sp>
-        <p:nvSpPr>
-          <p:cNvPr id="12" name="Rounded Rectangle 11"/>
-          <p:cNvSpPr/>
-          <p:nvPr/>
-        </p:nvSpPr>
-        <p:spPr>
-          <a:xfrm>
-            <a:off x="6263640" y="4114800"/>
-            <a:ext cx="5120640" cy="2011680"/>
+            <a:off x="6293815" y="4160520"/>
+            <a:ext cx="5166360" cy="2057400"/>
           </a:xfrm>
           <a:prstGeom prst="roundRect">
             <a:avLst/>
@@ -8680,36 +6606,10 @@
           </a:fontRef>
         </p:style>
         <p:txBody>
-          <a:bodyPr rtlCol="0" anchor="ctr"/>
-          <a:lstStyle/>
-          <a:p>
-            <a:pPr algn="ctr"/>
-          </a:p>
-        </p:txBody>
-      </p:sp>
-      <p:sp>
-        <p:nvSpPr>
-          <p:cNvPr id="13" name="TextBox 12"/>
-          <p:cNvSpPr txBox="1"/>
-          <p:nvPr/>
-        </p:nvSpPr>
-        <p:spPr>
-          <a:xfrm>
-            <a:off x="6537960" y="4389120"/>
-            <a:ext cx="4572000" cy="1463040"/>
-          </a:xfrm>
-          <a:prstGeom prst="rect">
-            <a:avLst/>
-          </a:prstGeom>
-          <a:noFill/>
-        </p:spPr>
-        <p:txBody>
-          <a:bodyPr wrap="square" lIns="0" tIns="0" rIns="0" bIns="0">
-            <a:spAutoFit/>
-          </a:bodyPr>
-          <a:lstStyle/>
-          <a:p>
-            <a:pPr>
+          <a:bodyPr rtlCol="0" anchor="ctr" wrap="square" lIns="228600" rIns="228600" tIns="228600" bIns="228600"/>
+          <a:lstStyle/>
+          <a:p>
+            <a:pPr algn="ctr">
               <a:spcAft>
                 <a:spcPts val="600"/>
               </a:spcAft>
@@ -8725,7 +6625,7 @@
           </a:p>
           <a:p>
             <a:pPr>
-              <a:defRPr sz="1150">
+              <a:defRPr sz="1100">
                 <a:solidFill>
                   <a:srgbClr val="334155"/>
                 </a:solidFill>
@@ -8757,20 +6657,88 @@
       <p:grpSpPr/>
       <p:sp>
         <p:nvSpPr>
-          <p:cNvPr id="2" name="Rectangle 1"/>
+          <p:cNvPr id="2" name="TextBox 1"/>
+          <p:cNvSpPr txBox="1"/>
+          <p:nvPr/>
+        </p:nvSpPr>
+        <p:spPr>
+          <a:xfrm>
+            <a:off x="731520" y="411480"/>
+            <a:ext cx="10728655" cy="1097280"/>
+          </a:xfrm>
+          <a:prstGeom prst="rect">
+            <a:avLst/>
+          </a:prstGeom>
+          <a:noFill/>
+        </p:spPr>
+        <p:txBody>
+          <a:bodyPr wrap="square" lIns="0" tIns="0" rIns="0" bIns="0">
+            <a:spAutoFit/>
+          </a:bodyPr>
+          <a:lstStyle/>
+          <a:p>
+            <a:pPr>
+              <a:spcAft>
+                <a:spcPts val="200"/>
+              </a:spcAft>
+              <a:defRPr sz="1000" b="1">
+                <a:solidFill>
+                  <a:srgbClr val="2563EB"/>
+                </a:solidFill>
+                <a:latin typeface="Arial"/>
+              </a:defRPr>
+            </a:pPr>
+            <a:r>
+              <a:t>LEADERSHIP</a:t>
+            </a:r>
+          </a:p>
+          <a:p>
+            <a:pPr>
+              <a:spcAft>
+                <a:spcPts val="200"/>
+              </a:spcAft>
+              <a:defRPr sz="2200" b="1">
+                <a:solidFill>
+                  <a:srgbClr val="0F172A"/>
+                </a:solidFill>
+                <a:latin typeface="Arial"/>
+              </a:defRPr>
+            </a:pPr>
+            <a:r>
+              <a:t>Founder &amp; Leadership Profile</a:t>
+            </a:r>
+          </a:p>
+          <a:p>
+            <a:pPr>
+              <a:defRPr sz="1150">
+                <a:solidFill>
+                  <a:srgbClr val="64748B"/>
+                </a:solidFill>
+                <a:latin typeface="Arial"/>
+              </a:defRPr>
+            </a:pPr>
+            <a:r>
+              <a:t>Combining deep algorithmic systems engineering with certified media production.</a:t>
+            </a:r>
+          </a:p>
+        </p:txBody>
+      </p:sp>
+      <p:sp>
+        <p:nvSpPr>
+          <p:cNvPr id="3" name="Rectangle 2"/>
           <p:cNvSpPr/>
           <p:nvPr/>
         </p:nvSpPr>
         <p:spPr>
           <a:xfrm>
-            <a:off x="0" y="0"/>
-            <a:ext cx="12191695" cy="6858000"/>
+            <a:off x="731520" y="1554480"/>
+            <a:ext cx="10728655" cy="13716"/>
           </a:xfrm>
           <a:prstGeom prst="rect">
             <a:avLst/>
           </a:prstGeom>
           <a:solidFill>
-            <a:srgbClr val="FFFFFF"/>
+            <a:srgbClr val="E2E8F0"/>
           </a:solidFill>
           <a:ln>
             <a:noFill/>
@@ -8800,122 +6768,14 @@
       </p:sp>
       <p:sp>
         <p:nvSpPr>
-          <p:cNvPr id="3" name="TextBox 2"/>
-          <p:cNvSpPr txBox="1"/>
+          <p:cNvPr id="4" name="Rounded Rectangle 3"/>
+          <p:cNvSpPr/>
           <p:nvPr/>
         </p:nvSpPr>
         <p:spPr>
           <a:xfrm>
-            <a:off x="822960" y="457200"/>
-            <a:ext cx="10515600" cy="274320"/>
-          </a:xfrm>
-          <a:prstGeom prst="rect">
-            <a:avLst/>
-          </a:prstGeom>
-          <a:noFill/>
-        </p:spPr>
-        <p:txBody>
-          <a:bodyPr wrap="square" lIns="0" tIns="0" rIns="0" bIns="0">
-            <a:spAutoFit/>
-          </a:bodyPr>
-          <a:lstStyle/>
-          <a:p>
-            <a:pPr>
-              <a:defRPr sz="1000" b="1">
-                <a:solidFill>
-                  <a:srgbClr val="2563EB"/>
-                </a:solidFill>
-                <a:latin typeface="Arial"/>
-              </a:defRPr>
-            </a:pPr>
-            <a:r>
-              <a:t>LEADERSHIP</a:t>
-            </a:r>
-          </a:p>
-        </p:txBody>
-      </p:sp>
-      <p:sp>
-        <p:nvSpPr>
-          <p:cNvPr id="4" name="TextBox 3"/>
-          <p:cNvSpPr txBox="1"/>
-          <p:nvPr/>
-        </p:nvSpPr>
-        <p:spPr>
-          <a:xfrm>
-            <a:off x="822960" y="731520"/>
-            <a:ext cx="10515600" cy="548640"/>
-          </a:xfrm>
-          <a:prstGeom prst="rect">
-            <a:avLst/>
-          </a:prstGeom>
-          <a:noFill/>
-        </p:spPr>
-        <p:txBody>
-          <a:bodyPr wrap="square" lIns="0" tIns="0" rIns="0" bIns="0">
-            <a:spAutoFit/>
-          </a:bodyPr>
-          <a:lstStyle/>
-          <a:p>
-            <a:pPr>
-              <a:defRPr sz="2200" b="1">
-                <a:solidFill>
-                  <a:srgbClr val="0F172A"/>
-                </a:solidFill>
-                <a:latin typeface="Arial"/>
-              </a:defRPr>
-            </a:pPr>
-            <a:r>
-              <a:t>Founder &amp; Leadership Profile</a:t>
-            </a:r>
-          </a:p>
-        </p:txBody>
-      </p:sp>
-      <p:sp>
-        <p:nvSpPr>
-          <p:cNvPr id="5" name="TextBox 4"/>
-          <p:cNvSpPr txBox="1"/>
-          <p:nvPr/>
-        </p:nvSpPr>
-        <p:spPr>
-          <a:xfrm>
-            <a:off x="822960" y="1280160"/>
-            <a:ext cx="10515600" cy="274320"/>
-          </a:xfrm>
-          <a:prstGeom prst="rect">
-            <a:avLst/>
-          </a:prstGeom>
-          <a:noFill/>
-        </p:spPr>
-        <p:txBody>
-          <a:bodyPr wrap="square" lIns="0" tIns="0" rIns="0" bIns="0">
-            <a:spAutoFit/>
-          </a:bodyPr>
-          <a:lstStyle/>
-          <a:p>
-            <a:pPr>
-              <a:defRPr sz="1200">
-                <a:solidFill>
-                  <a:srgbClr val="64748B"/>
-                </a:solidFill>
-                <a:latin typeface="Arial"/>
-              </a:defRPr>
-            </a:pPr>
-            <a:r>
-              <a:t>Combining deep algorithmic systems engineering with certified media production.</a:t>
-            </a:r>
-          </a:p>
-        </p:txBody>
-      </p:sp>
-      <p:sp>
-        <p:nvSpPr>
-          <p:cNvPr id="6" name="Rounded Rectangle 5"/>
-          <p:cNvSpPr/>
-          <p:nvPr/>
-        </p:nvSpPr>
-        <p:spPr>
-          <a:xfrm>
-            <a:off x="822960" y="1828800"/>
-            <a:ext cx="4114800" cy="4297680"/>
+            <a:off x="731520" y="1828800"/>
+            <a:ext cx="4389120" cy="4389120"/>
           </a:xfrm>
           <a:prstGeom prst="roundRect">
             <a:avLst/>
@@ -8944,136 +6804,110 @@
           </a:fontRef>
         </p:style>
         <p:txBody>
-          <a:bodyPr rtlCol="0" anchor="ctr"/>
-          <a:lstStyle/>
-          <a:p>
-            <a:pPr algn="ctr"/>
-          </a:p>
-        </p:txBody>
-      </p:sp>
-      <p:sp>
-        <p:nvSpPr>
-          <p:cNvPr id="7" name="TextBox 6"/>
-          <p:cNvSpPr txBox="1"/>
+          <a:bodyPr rtlCol="0" anchor="ctr" wrap="square" lIns="274320" rIns="274320" tIns="274320" bIns="274320"/>
+          <a:lstStyle/>
+          <a:p>
+            <a:pPr algn="ctr">
+              <a:spcAft>
+                <a:spcPts val="200"/>
+              </a:spcAft>
+              <a:defRPr sz="1000" b="1">
+                <a:solidFill>
+                  <a:srgbClr val="2563EB"/>
+                </a:solidFill>
+              </a:defRPr>
+            </a:pPr>
+            <a:r>
+              <a:t>FOUNDER &amp; MANAGING DIRECTOR</a:t>
+            </a:r>
+          </a:p>
+          <a:p>
+            <a:pPr>
+              <a:spcAft>
+                <a:spcPts val="1200"/>
+              </a:spcAft>
+              <a:defRPr sz="2000" b="1">
+                <a:solidFill>
+                  <a:srgbClr val="0F172A"/>
+                </a:solidFill>
+              </a:defRPr>
+            </a:pPr>
+            <a:r>
+              <a:t>Pavan Kumar Sadashiv</a:t>
+            </a:r>
+          </a:p>
+          <a:p>
+            <a:pPr>
+              <a:spcAft>
+                <a:spcPts val="800"/>
+              </a:spcAft>
+              <a:defRPr sz="1100">
+                <a:solidFill>
+                  <a:srgbClr val="334155"/>
+                </a:solidFill>
+              </a:defRPr>
+            </a:pPr>
+            <a:r>
+              <a:t>• B.E. Computer Science &amp; Engg (AI &amp; ML) — Sahyadri College (SCEM), Mangaluru.</a:t>
+            </a:r>
+          </a:p>
+          <a:p>
+            <a:pPr>
+              <a:spcAft>
+                <a:spcPts val="800"/>
+              </a:spcAft>
+              <a:defRPr sz="1100">
+                <a:solidFill>
+                  <a:srgbClr val="334155"/>
+                </a:solidFill>
+              </a:defRPr>
+            </a:pPr>
+            <a:r>
+              <a:t>• AI Systems Chief Architect &amp; Full-Stack Systems Engineer.</a:t>
+            </a:r>
+          </a:p>
+          <a:p>
+            <a:pPr>
+              <a:spcAft>
+                <a:spcPts val="800"/>
+              </a:spcAft>
+              <a:defRPr sz="1100">
+                <a:solidFill>
+                  <a:srgbClr val="334155"/>
+                </a:solidFill>
+              </a:defRPr>
+            </a:pPr>
+            <a:r>
+              <a:t>• Specialized in low-level GPU compute (C++, Metal, CUDA), discrete optimization, and AI agents.</a:t>
+            </a:r>
+          </a:p>
+          <a:p>
+            <a:pPr>
+              <a:spcAft>
+                <a:spcPts val="800"/>
+              </a:spcAft>
+              <a:defRPr sz="1100">
+                <a:solidFill>
+                  <a:srgbClr val="334155"/>
+                </a:solidFill>
+              </a:defRPr>
+            </a:pPr>
+            <a:r>
+              <a:t>• Location: Mangaluru, Karnataka (Beyond Bengaluru Tier-2 Hub).</a:t>
+            </a:r>
+          </a:p>
+        </p:txBody>
+      </p:sp>
+      <p:sp>
+        <p:nvSpPr>
+          <p:cNvPr id="5" name="Rounded Rectangle 4"/>
+          <p:cNvSpPr/>
           <p:nvPr/>
         </p:nvSpPr>
         <p:spPr>
           <a:xfrm>
-            <a:off x="1097280" y="2103120"/>
-            <a:ext cx="3566160" cy="3749039"/>
-          </a:xfrm>
-          <a:prstGeom prst="rect">
-            <a:avLst/>
-          </a:prstGeom>
-          <a:noFill/>
-        </p:spPr>
-        <p:txBody>
-          <a:bodyPr wrap="square" lIns="0" tIns="0" rIns="0" bIns="0">
-            <a:spAutoFit/>
-          </a:bodyPr>
-          <a:lstStyle/>
-          <a:p>
-            <a:pPr>
-              <a:spcAft>
-                <a:spcPts val="200"/>
-              </a:spcAft>
-              <a:defRPr sz="1000" b="1">
-                <a:solidFill>
-                  <a:srgbClr val="2563EB"/>
-                </a:solidFill>
-              </a:defRPr>
-            </a:pPr>
-            <a:r>
-              <a:t>FOUNDER &amp; MANAGING DIRECTOR</a:t>
-            </a:r>
-          </a:p>
-          <a:p>
-            <a:pPr>
-              <a:spcAft>
-                <a:spcPts val="1200"/>
-              </a:spcAft>
-              <a:defRPr sz="2200" b="1">
-                <a:solidFill>
-                  <a:srgbClr val="0F172A"/>
-                </a:solidFill>
-              </a:defRPr>
-            </a:pPr>
-            <a:r>
-              <a:t>Pavan Kumar Sadashiv</a:t>
-            </a:r>
-          </a:p>
-          <a:p>
-            <a:pPr>
-              <a:spcAft>
-                <a:spcPts val="800"/>
-              </a:spcAft>
-              <a:defRPr sz="1100">
-                <a:solidFill>
-                  <a:srgbClr val="334155"/>
-                </a:solidFill>
-              </a:defRPr>
-            </a:pPr>
-            <a:r>
-              <a:t>• B.E. Computer Science &amp; Engg (AI &amp; ML) — Sahyadri College (SCEM), Mangaluru.</a:t>
-            </a:r>
-          </a:p>
-          <a:p>
-            <a:pPr>
-              <a:spcAft>
-                <a:spcPts val="800"/>
-              </a:spcAft>
-              <a:defRPr sz="1100">
-                <a:solidFill>
-                  <a:srgbClr val="334155"/>
-                </a:solidFill>
-              </a:defRPr>
-            </a:pPr>
-            <a:r>
-              <a:t>• AI Systems Chief Architect &amp; Full-Stack Systems Engineer.</a:t>
-            </a:r>
-          </a:p>
-          <a:p>
-            <a:pPr>
-              <a:spcAft>
-                <a:spcPts val="800"/>
-              </a:spcAft>
-              <a:defRPr sz="1100">
-                <a:solidFill>
-                  <a:srgbClr val="334155"/>
-                </a:solidFill>
-              </a:defRPr>
-            </a:pPr>
-            <a:r>
-              <a:t>• Specialized in low-level GPU compute (C++, Metal, CUDA), discrete optimization, and AI agents.</a:t>
-            </a:r>
-          </a:p>
-          <a:p>
-            <a:pPr>
-              <a:spcAft>
-                <a:spcPts val="800"/>
-              </a:spcAft>
-              <a:defRPr sz="1100">
-                <a:solidFill>
-                  <a:srgbClr val="334155"/>
-                </a:solidFill>
-              </a:defRPr>
-            </a:pPr>
-            <a:r>
-              <a:t>• Tier-2 Hub: Mangaluru, Karnataka (Beyond Bengaluru Hub).</a:t>
-            </a:r>
-          </a:p>
-        </p:txBody>
-      </p:sp>
-      <p:sp>
-        <p:nvSpPr>
-          <p:cNvPr id="8" name="Rounded Rectangle 7"/>
-          <p:cNvSpPr/>
-          <p:nvPr/>
-        </p:nvSpPr>
-        <p:spPr>
-          <a:xfrm>
-            <a:off x="5303520" y="1828800"/>
-            <a:ext cx="6035040" cy="1280160"/>
+            <a:off x="5486400" y="1828800"/>
+            <a:ext cx="5943600" cy="1280160"/>
           </a:xfrm>
           <a:prstGeom prst="roundRect">
             <a:avLst/>
@@ -9102,73 +6936,47 @@
           </a:fontRef>
         </p:style>
         <p:txBody>
-          <a:bodyPr rtlCol="0" anchor="ctr"/>
-          <a:lstStyle/>
-          <a:p>
-            <a:pPr algn="ctr"/>
-          </a:p>
-        </p:txBody>
-      </p:sp>
-      <p:sp>
-        <p:nvSpPr>
-          <p:cNvPr id="9" name="TextBox 8"/>
-          <p:cNvSpPr txBox="1"/>
+          <a:bodyPr rtlCol="0" anchor="ctr" wrap="square" lIns="182880" rIns="182880" tIns="182880" bIns="182880"/>
+          <a:lstStyle/>
+          <a:p>
+            <a:pPr algn="ctr">
+              <a:spcAft>
+                <a:spcPts val="200"/>
+              </a:spcAft>
+              <a:defRPr sz="1300" b="1">
+                <a:solidFill>
+                  <a:srgbClr val="2563EB"/>
+                </a:solidFill>
+              </a:defRPr>
+            </a:pPr>
+            <a:r>
+              <a:t>Blackmagic Design — Certified User</a:t>
+            </a:r>
+          </a:p>
+          <a:p>
+            <a:pPr>
+              <a:defRPr sz="1050">
+                <a:solidFill>
+                  <a:srgbClr val="334155"/>
+                </a:solidFill>
+              </a:defRPr>
+            </a:pPr>
+            <a:r>
+              <a:t>Validated mastery of Hollywood ACEScc color science, node graphs, and DaVinci Resolve OFX integration.</a:t>
+            </a:r>
+          </a:p>
+        </p:txBody>
+      </p:sp>
+      <p:sp>
+        <p:nvSpPr>
+          <p:cNvPr id="6" name="Rounded Rectangle 5"/>
+          <p:cNvSpPr/>
           <p:nvPr/>
         </p:nvSpPr>
         <p:spPr>
           <a:xfrm>
-            <a:off x="5577840" y="2011680"/>
-            <a:ext cx="5486400" cy="914400"/>
-          </a:xfrm>
-          <a:prstGeom prst="rect">
-            <a:avLst/>
-          </a:prstGeom>
-          <a:noFill/>
-        </p:spPr>
-        <p:txBody>
-          <a:bodyPr wrap="square" lIns="0" tIns="0" rIns="0" bIns="0">
-            <a:spAutoFit/>
-          </a:bodyPr>
-          <a:lstStyle/>
-          <a:p>
-            <a:pPr>
-              <a:spcAft>
-                <a:spcPts val="200"/>
-              </a:spcAft>
-              <a:defRPr sz="1300" b="1">
-                <a:solidFill>
-                  <a:srgbClr val="2563EB"/>
-                </a:solidFill>
-              </a:defRPr>
-            </a:pPr>
-            <a:r>
-              <a:t>Blackmagic Design — Certified User</a:t>
-            </a:r>
-          </a:p>
-          <a:p>
-            <a:pPr>
-              <a:defRPr sz="1100">
-                <a:solidFill>
-                  <a:srgbClr val="334155"/>
-                </a:solidFill>
-              </a:defRPr>
-            </a:pPr>
-            <a:r>
-              <a:t>Validated mastery of Hollywood ACEScc color science, node graphs, and DaVinci Resolve OFX integration.</a:t>
-            </a:r>
-          </a:p>
-        </p:txBody>
-      </p:sp>
-      <p:sp>
-        <p:nvSpPr>
-          <p:cNvPr id="10" name="Rounded Rectangle 9"/>
-          <p:cNvSpPr/>
-          <p:nvPr/>
-        </p:nvSpPr>
-        <p:spPr>
-          <a:xfrm>
-            <a:off x="5303520" y="3337560"/>
-            <a:ext cx="6035040" cy="1280160"/>
+            <a:off x="5486400" y="3383280"/>
+            <a:ext cx="5943600" cy="1280160"/>
           </a:xfrm>
           <a:prstGeom prst="roundRect">
             <a:avLst/>
@@ -9197,73 +7005,47 @@
           </a:fontRef>
         </p:style>
         <p:txBody>
-          <a:bodyPr rtlCol="0" anchor="ctr"/>
-          <a:lstStyle/>
-          <a:p>
-            <a:pPr algn="ctr"/>
-          </a:p>
-        </p:txBody>
-      </p:sp>
-      <p:sp>
-        <p:nvSpPr>
-          <p:cNvPr id="11" name="TextBox 10"/>
-          <p:cNvSpPr txBox="1"/>
+          <a:bodyPr rtlCol="0" anchor="ctr" wrap="square" lIns="182880" rIns="182880" tIns="182880" bIns="182880"/>
+          <a:lstStyle/>
+          <a:p>
+            <a:pPr algn="ctr">
+              <a:spcAft>
+                <a:spcPts val="200"/>
+              </a:spcAft>
+              <a:defRPr sz="1300" b="1">
+                <a:solidFill>
+                  <a:srgbClr val="7C3AED"/>
+                </a:solidFill>
+              </a:defRPr>
+            </a:pPr>
+            <a:r>
+              <a:t>JPMorgan Chase &amp; Co. — Software Engineering</a:t>
+            </a:r>
+          </a:p>
+          <a:p>
+            <a:pPr>
+              <a:defRPr sz="1050">
+                <a:solidFill>
+                  <a:srgbClr val="334155"/>
+                </a:solidFill>
+              </a:defRPr>
+            </a:pPr>
+            <a:r>
+              <a:t>Accreditation in Kafka distributed streaming, low-latency API design, and transaction integrity.</a:t>
+            </a:r>
+          </a:p>
+        </p:txBody>
+      </p:sp>
+      <p:sp>
+        <p:nvSpPr>
+          <p:cNvPr id="7" name="Rounded Rectangle 6"/>
+          <p:cNvSpPr/>
           <p:nvPr/>
         </p:nvSpPr>
         <p:spPr>
           <a:xfrm>
-            <a:off x="5577840" y="3520440"/>
-            <a:ext cx="5486400" cy="914400"/>
-          </a:xfrm>
-          <a:prstGeom prst="rect">
-            <a:avLst/>
-          </a:prstGeom>
-          <a:noFill/>
-        </p:spPr>
-        <p:txBody>
-          <a:bodyPr wrap="square" lIns="0" tIns="0" rIns="0" bIns="0">
-            <a:spAutoFit/>
-          </a:bodyPr>
-          <a:lstStyle/>
-          <a:p>
-            <a:pPr>
-              <a:spcAft>
-                <a:spcPts val="200"/>
-              </a:spcAft>
-              <a:defRPr sz="1300" b="1">
-                <a:solidFill>
-                  <a:srgbClr val="7C3AED"/>
-                </a:solidFill>
-              </a:defRPr>
-            </a:pPr>
-            <a:r>
-              <a:t>JPMorgan Chase &amp; Co. — Software Engineering</a:t>
-            </a:r>
-          </a:p>
-          <a:p>
-            <a:pPr>
-              <a:defRPr sz="1100">
-                <a:solidFill>
-                  <a:srgbClr val="334155"/>
-                </a:solidFill>
-              </a:defRPr>
-            </a:pPr>
-            <a:r>
-              <a:t>Accreditation in Kafka distributed streaming, low-latency API design, and transaction integrity.</a:t>
-            </a:r>
-          </a:p>
-        </p:txBody>
-      </p:sp>
-      <p:sp>
-        <p:nvSpPr>
-          <p:cNvPr id="12" name="Rounded Rectangle 11"/>
-          <p:cNvSpPr/>
-          <p:nvPr/>
-        </p:nvSpPr>
-        <p:spPr>
-          <a:xfrm>
-            <a:off x="5303520" y="4846320"/>
-            <a:ext cx="6035040" cy="1280160"/>
+            <a:off x="5486400" y="4937760"/>
+            <a:ext cx="5943600" cy="1280160"/>
           </a:xfrm>
           <a:prstGeom prst="roundRect">
             <a:avLst/>
@@ -9292,36 +7074,10 @@
           </a:fontRef>
         </p:style>
         <p:txBody>
-          <a:bodyPr rtlCol="0" anchor="ctr"/>
-          <a:lstStyle/>
-          <a:p>
-            <a:pPr algn="ctr"/>
-          </a:p>
-        </p:txBody>
-      </p:sp>
-      <p:sp>
-        <p:nvSpPr>
-          <p:cNvPr id="13" name="TextBox 12"/>
-          <p:cNvSpPr txBox="1"/>
-          <p:nvPr/>
-        </p:nvSpPr>
-        <p:spPr>
-          <a:xfrm>
-            <a:off x="5577840" y="5029200"/>
-            <a:ext cx="5486400" cy="914400"/>
-          </a:xfrm>
-          <a:prstGeom prst="rect">
-            <a:avLst/>
-          </a:prstGeom>
-          <a:noFill/>
-        </p:spPr>
-        <p:txBody>
-          <a:bodyPr wrap="square" lIns="0" tIns="0" rIns="0" bIns="0">
-            <a:spAutoFit/>
-          </a:bodyPr>
-          <a:lstStyle/>
-          <a:p>
-            <a:pPr>
+          <a:bodyPr rtlCol="0" anchor="ctr" wrap="square" lIns="182880" rIns="182880" tIns="182880" bIns="182880"/>
+          <a:lstStyle/>
+          <a:p>
+            <a:pPr algn="ctr">
               <a:spcAft>
                 <a:spcPts val="200"/>
               </a:spcAft>
@@ -9337,7 +7093,7 @@
           </a:p>
           <a:p>
             <a:pPr>
-              <a:defRPr sz="1100">
+              <a:defRPr sz="1050">
                 <a:solidFill>
                   <a:srgbClr val="334155"/>
                 </a:solidFill>
@@ -9369,20 +7125,88 @@
       <p:grpSpPr/>
       <p:sp>
         <p:nvSpPr>
-          <p:cNvPr id="2" name="Rectangle 1"/>
+          <p:cNvPr id="2" name="TextBox 1"/>
+          <p:cNvSpPr txBox="1"/>
+          <p:nvPr/>
+        </p:nvSpPr>
+        <p:spPr>
+          <a:xfrm>
+            <a:off x="731520" y="411480"/>
+            <a:ext cx="10728655" cy="1097280"/>
+          </a:xfrm>
+          <a:prstGeom prst="rect">
+            <a:avLst/>
+          </a:prstGeom>
+          <a:noFill/>
+        </p:spPr>
+        <p:txBody>
+          <a:bodyPr wrap="square" lIns="0" tIns="0" rIns="0" bIns="0">
+            <a:spAutoFit/>
+          </a:bodyPr>
+          <a:lstStyle/>
+          <a:p>
+            <a:pPr>
+              <a:spcAft>
+                <a:spcPts val="200"/>
+              </a:spcAft>
+              <a:defRPr sz="1000" b="1">
+                <a:solidFill>
+                  <a:srgbClr val="2563EB"/>
+                </a:solidFill>
+                <a:latin typeface="Arial"/>
+              </a:defRPr>
+            </a:pPr>
+            <a:r>
+              <a:t>FUNDING &amp; ROADMAP</a:t>
+            </a:r>
+          </a:p>
+          <a:p>
+            <a:pPr>
+              <a:spcAft>
+                <a:spcPts val="200"/>
+              </a:spcAft>
+              <a:defRPr sz="2200" b="1">
+                <a:solidFill>
+                  <a:srgbClr val="0F172A"/>
+                </a:solidFill>
+                <a:latin typeface="Arial"/>
+              </a:defRPr>
+            </a:pPr>
+            <a:r>
+              <a:t>Fund Utilization &amp; Milestone Roadmap</a:t>
+            </a:r>
+          </a:p>
+          <a:p>
+            <a:pPr>
+              <a:defRPr sz="1150">
+                <a:solidFill>
+                  <a:srgbClr val="64748B"/>
+                </a:solidFill>
+                <a:latin typeface="Arial"/>
+              </a:defRPr>
+            </a:pPr>
+            <a:r>
+              <a:t>Targeting ₹20L – ₹50L non-dilutive grant support (GENESIS EIR / ELEVATE / SISFS).</a:t>
+            </a:r>
+          </a:p>
+        </p:txBody>
+      </p:sp>
+      <p:sp>
+        <p:nvSpPr>
+          <p:cNvPr id="3" name="Rectangle 2"/>
           <p:cNvSpPr/>
           <p:nvPr/>
         </p:nvSpPr>
         <p:spPr>
           <a:xfrm>
-            <a:off x="0" y="0"/>
-            <a:ext cx="12191695" cy="6858000"/>
+            <a:off x="731520" y="1554480"/>
+            <a:ext cx="10728655" cy="13716"/>
           </a:xfrm>
           <a:prstGeom prst="rect">
             <a:avLst/>
           </a:prstGeom>
           <a:solidFill>
-            <a:srgbClr val="FFFFFF"/>
+            <a:srgbClr val="E2E8F0"/>
           </a:solidFill>
           <a:ln>
             <a:noFill/>
@@ -9412,122 +7236,14 @@
       </p:sp>
       <p:sp>
         <p:nvSpPr>
-          <p:cNvPr id="3" name="TextBox 2"/>
-          <p:cNvSpPr txBox="1"/>
+          <p:cNvPr id="4" name="Rounded Rectangle 3"/>
+          <p:cNvSpPr/>
           <p:nvPr/>
         </p:nvSpPr>
         <p:spPr>
           <a:xfrm>
-            <a:off x="822960" y="457200"/>
-            <a:ext cx="10515600" cy="274320"/>
-          </a:xfrm>
-          <a:prstGeom prst="rect">
-            <a:avLst/>
-          </a:prstGeom>
-          <a:noFill/>
-        </p:spPr>
-        <p:txBody>
-          <a:bodyPr wrap="square" lIns="0" tIns="0" rIns="0" bIns="0">
-            <a:spAutoFit/>
-          </a:bodyPr>
-          <a:lstStyle/>
-          <a:p>
-            <a:pPr>
-              <a:defRPr sz="1000" b="1">
-                <a:solidFill>
-                  <a:srgbClr val="2563EB"/>
-                </a:solidFill>
-                <a:latin typeface="Arial"/>
-              </a:defRPr>
-            </a:pPr>
-            <a:r>
-              <a:t>FUNDING &amp; ROADMAP</a:t>
-            </a:r>
-          </a:p>
-        </p:txBody>
-      </p:sp>
-      <p:sp>
-        <p:nvSpPr>
-          <p:cNvPr id="4" name="TextBox 3"/>
-          <p:cNvSpPr txBox="1"/>
-          <p:nvPr/>
-        </p:nvSpPr>
-        <p:spPr>
-          <a:xfrm>
-            <a:off x="822960" y="731520"/>
-            <a:ext cx="10515600" cy="548640"/>
-          </a:xfrm>
-          <a:prstGeom prst="rect">
-            <a:avLst/>
-          </a:prstGeom>
-          <a:noFill/>
-        </p:spPr>
-        <p:txBody>
-          <a:bodyPr wrap="square" lIns="0" tIns="0" rIns="0" bIns="0">
-            <a:spAutoFit/>
-          </a:bodyPr>
-          <a:lstStyle/>
-          <a:p>
-            <a:pPr>
-              <a:defRPr sz="2200" b="1">
-                <a:solidFill>
-                  <a:srgbClr val="0F172A"/>
-                </a:solidFill>
-                <a:latin typeface="Arial"/>
-              </a:defRPr>
-            </a:pPr>
-            <a:r>
-              <a:t>Fund Utilization &amp; Milestone Roadmap</a:t>
-            </a:r>
-          </a:p>
-        </p:txBody>
-      </p:sp>
-      <p:sp>
-        <p:nvSpPr>
-          <p:cNvPr id="5" name="TextBox 4"/>
-          <p:cNvSpPr txBox="1"/>
-          <p:nvPr/>
-        </p:nvSpPr>
-        <p:spPr>
-          <a:xfrm>
-            <a:off x="822960" y="1280160"/>
-            <a:ext cx="10515600" cy="274320"/>
-          </a:xfrm>
-          <a:prstGeom prst="rect">
-            <a:avLst/>
-          </a:prstGeom>
-          <a:noFill/>
-        </p:spPr>
-        <p:txBody>
-          <a:bodyPr wrap="square" lIns="0" tIns="0" rIns="0" bIns="0">
-            <a:spAutoFit/>
-          </a:bodyPr>
-          <a:lstStyle/>
-          <a:p>
-            <a:pPr>
-              <a:defRPr sz="1200">
-                <a:solidFill>
-                  <a:srgbClr val="64748B"/>
-                </a:solidFill>
-                <a:latin typeface="Arial"/>
-              </a:defRPr>
-            </a:pPr>
-            <a:r>
-              <a:t>Targeting ₹20L – ₹50L non-dilutive grant support (GENESIS EIR / ELEVATE / SISFS).</a:t>
-            </a:r>
-          </a:p>
-        </p:txBody>
-      </p:sp>
-      <p:sp>
-        <p:nvSpPr>
-          <p:cNvPr id="6" name="Rounded Rectangle 5"/>
-          <p:cNvSpPr/>
-          <p:nvPr/>
-        </p:nvSpPr>
-        <p:spPr>
-          <a:xfrm>
-            <a:off x="822960" y="1828800"/>
-            <a:ext cx="5120640" cy="4297680"/>
+            <a:off x="731520" y="1828800"/>
+            <a:ext cx="5166360" cy="4389120"/>
           </a:xfrm>
           <a:prstGeom prst="roundRect">
             <a:avLst/>
@@ -9556,169 +7272,143 @@
           </a:fontRef>
         </p:style>
         <p:txBody>
-          <a:bodyPr rtlCol="0" anchor="ctr"/>
-          <a:lstStyle/>
-          <a:p>
-            <a:pPr algn="ctr"/>
-          </a:p>
-        </p:txBody>
-      </p:sp>
-      <p:sp>
-        <p:nvSpPr>
-          <p:cNvPr id="7" name="TextBox 6"/>
-          <p:cNvSpPr txBox="1"/>
+          <a:bodyPr rtlCol="0" anchor="ctr" wrap="square" lIns="228600" rIns="228600" tIns="228600" bIns="228600"/>
+          <a:lstStyle/>
+          <a:p>
+            <a:pPr algn="ctr">
+              <a:spcAft>
+                <a:spcPts val="1200"/>
+              </a:spcAft>
+              <a:defRPr sz="1200" b="1">
+                <a:solidFill>
+                  <a:srgbClr val="2563EB"/>
+                </a:solidFill>
+              </a:defRPr>
+            </a:pPr>
+            <a:r>
+              <a:t>BUDGET ALLOCATION (₹50 LAKHS)</a:t>
+            </a:r>
+          </a:p>
+          <a:p>
+            <a:pPr>
+              <a:defRPr sz="1150" b="1">
+                <a:solidFill>
+                  <a:srgbClr val="0F172A"/>
+                </a:solidFill>
+              </a:defRPr>
+            </a:pPr>
+            <a:r>
+              <a:t>40%  •  Core R&amp;D &amp; Plugin Engineering (₹20,00,000)</a:t>
+            </a:r>
+          </a:p>
+          <a:p>
+            <a:pPr>
+              <a:spcAft>
+                <a:spcPts val="800"/>
+              </a:spcAft>
+              <a:defRPr sz="1000">
+                <a:solidFill>
+                  <a:srgbClr val="64748B"/>
+                </a:solidFill>
+              </a:defRPr>
+            </a:pPr>
+            <a:r>
+              <a:t>DaVinci Resolve OFX C++/CUDA engine &amp; ONNX depth AI.</a:t>
+            </a:r>
+          </a:p>
+          <a:p>
+            <a:pPr>
+              <a:defRPr sz="1150" b="1">
+                <a:solidFill>
+                  <a:srgbClr val="0F172A"/>
+                </a:solidFill>
+              </a:defRPr>
+            </a:pPr>
+            <a:r>
+              <a:t>30%  •  GPU Hardware &amp; Compute Lab (₹15,00,000)</a:t>
+            </a:r>
+          </a:p>
+          <a:p>
+            <a:pPr>
+              <a:spcAft>
+                <a:spcPts val="800"/>
+              </a:spcAft>
+              <a:defRPr sz="1000">
+                <a:solidFill>
+                  <a:srgbClr val="64748B"/>
+                </a:solidFill>
+              </a:defRPr>
+            </a:pPr>
+            <a:r>
+              <a:t>Dedicated testbeds for real-time 4K 60FPS optimization.</a:t>
+            </a:r>
+          </a:p>
+          <a:p>
+            <a:pPr>
+              <a:defRPr sz="1150" b="1">
+                <a:solidFill>
+                  <a:srgbClr val="0F172A"/>
+                </a:solidFill>
+              </a:defRPr>
+            </a:pPr>
+            <a:r>
+              <a:t>10%  •  IP, Patents &amp; Trademark Filings (₹5,00,000)</a:t>
+            </a:r>
+          </a:p>
+          <a:p>
+            <a:pPr>
+              <a:spcAft>
+                <a:spcPts val="800"/>
+              </a:spcAft>
+              <a:defRPr sz="1000">
+                <a:solidFill>
+                  <a:srgbClr val="64748B"/>
+                </a:solidFill>
+              </a:defRPr>
+            </a:pPr>
+            <a:r>
+              <a:t>Indian Patent Office (IPO) filings &amp; international IP protection.</a:t>
+            </a:r>
+          </a:p>
+          <a:p>
+            <a:pPr>
+              <a:defRPr sz="1150" b="1">
+                <a:solidFill>
+                  <a:srgbClr val="0F172A"/>
+                </a:solidFill>
+              </a:defRPr>
+            </a:pPr>
+            <a:r>
+              <a:t>20%  •  Pilot Trials &amp; Market Launch (₹10,00,000)</a:t>
+            </a:r>
+          </a:p>
+          <a:p>
+            <a:pPr>
+              <a:spcAft>
+                <a:spcPts val="800"/>
+              </a:spcAft>
+              <a:defRPr sz="1000">
+                <a:solidFill>
+                  <a:srgbClr val="64748B"/>
+                </a:solidFill>
+              </a:defRPr>
+            </a:pPr>
+            <a:r>
+              <a:t>Beta onboarding across Karnataka and production studios.</a:t>
+            </a:r>
+          </a:p>
+        </p:txBody>
+      </p:sp>
+      <p:sp>
+        <p:nvSpPr>
+          <p:cNvPr id="5" name="Rounded Rectangle 4"/>
+          <p:cNvSpPr/>
           <p:nvPr/>
         </p:nvSpPr>
         <p:spPr>
           <a:xfrm>
-            <a:off x="1097280" y="2011680"/>
-            <a:ext cx="4572000" cy="3931920"/>
-          </a:xfrm>
-          <a:prstGeom prst="rect">
-            <a:avLst/>
-          </a:prstGeom>
-          <a:noFill/>
-        </p:spPr>
-        <p:txBody>
-          <a:bodyPr wrap="square" lIns="0" tIns="0" rIns="0" bIns="0">
-            <a:spAutoFit/>
-          </a:bodyPr>
-          <a:lstStyle/>
-          <a:p>
-            <a:pPr>
-              <a:spcAft>
-                <a:spcPts val="1200"/>
-              </a:spcAft>
-              <a:defRPr sz="1200" b="1">
-                <a:solidFill>
-                  <a:srgbClr val="2563EB"/>
-                </a:solidFill>
-              </a:defRPr>
-            </a:pPr>
-            <a:r>
-              <a:t>BUDGET ALLOCATION (₹50 LAKHS)</a:t>
-            </a:r>
-          </a:p>
-          <a:p>
-            <a:pPr>
-              <a:defRPr sz="1200" b="1">
-                <a:solidFill>
-                  <a:srgbClr val="0F172A"/>
-                </a:solidFill>
-              </a:defRPr>
-            </a:pPr>
-            <a:r>
-              <a:t>40%  •  Core R&amp;D &amp; Plugin Engineering (₹20,00,000)</a:t>
-            </a:r>
-          </a:p>
-          <a:p>
-            <a:pPr>
-              <a:spcAft>
-                <a:spcPts val="800"/>
-              </a:spcAft>
-              <a:defRPr sz="1000">
-                <a:solidFill>
-                  <a:srgbClr val="64748B"/>
-                </a:solidFill>
-              </a:defRPr>
-            </a:pPr>
-            <a:r>
-              <a:t>DaVinci Resolve OFX C++/CUDA engine &amp; ONNX depth AI.</a:t>
-            </a:r>
-          </a:p>
-          <a:p>
-            <a:pPr>
-              <a:defRPr sz="1200" b="1">
-                <a:solidFill>
-                  <a:srgbClr val="0F172A"/>
-                </a:solidFill>
-              </a:defRPr>
-            </a:pPr>
-            <a:r>
-              <a:t>30%  •  GPU Hardware &amp; Compute Lab (₹15,00,000)</a:t>
-            </a:r>
-          </a:p>
-          <a:p>
-            <a:pPr>
-              <a:spcAft>
-                <a:spcPts val="800"/>
-              </a:spcAft>
-              <a:defRPr sz="1000">
-                <a:solidFill>
-                  <a:srgbClr val="64748B"/>
-                </a:solidFill>
-              </a:defRPr>
-            </a:pPr>
-            <a:r>
-              <a:t>Dedicated testbeds for real-time 4K 60FPS optimization.</a:t>
-            </a:r>
-          </a:p>
-          <a:p>
-            <a:pPr>
-              <a:defRPr sz="1200" b="1">
-                <a:solidFill>
-                  <a:srgbClr val="0F172A"/>
-                </a:solidFill>
-              </a:defRPr>
-            </a:pPr>
-            <a:r>
-              <a:t>10%  •  IP, Patents &amp; Trademark Filings (₹5,00,000)</a:t>
-            </a:r>
-          </a:p>
-          <a:p>
-            <a:pPr>
-              <a:spcAft>
-                <a:spcPts val="800"/>
-              </a:spcAft>
-              <a:defRPr sz="1000">
-                <a:solidFill>
-                  <a:srgbClr val="64748B"/>
-                </a:solidFill>
-              </a:defRPr>
-            </a:pPr>
-            <a:r>
-              <a:t>Indian Patent Office (IPO) filings &amp; international IP protection.</a:t>
-            </a:r>
-          </a:p>
-          <a:p>
-            <a:pPr>
-              <a:defRPr sz="1200" b="1">
-                <a:solidFill>
-                  <a:srgbClr val="0F172A"/>
-                </a:solidFill>
-              </a:defRPr>
-            </a:pPr>
-            <a:r>
-              <a:t>20%  •  Pilot Trials &amp; Market Launch (₹10,00,000)</a:t>
-            </a:r>
-          </a:p>
-          <a:p>
-            <a:pPr>
-              <a:spcAft>
-                <a:spcPts val="800"/>
-              </a:spcAft>
-              <a:defRPr sz="1000">
-                <a:solidFill>
-                  <a:srgbClr val="64748B"/>
-                </a:solidFill>
-              </a:defRPr>
-            </a:pPr>
-            <a:r>
-              <a:t>Beta onboarding across Karnataka and production studios.</a:t>
-            </a:r>
-          </a:p>
-        </p:txBody>
-      </p:sp>
-      <p:sp>
-        <p:nvSpPr>
-          <p:cNvPr id="8" name="Rounded Rectangle 7"/>
-          <p:cNvSpPr/>
-          <p:nvPr/>
-        </p:nvSpPr>
-        <p:spPr>
-          <a:xfrm>
-            <a:off x="6217920" y="1828800"/>
-            <a:ext cx="5120640" cy="4297680"/>
+            <a:off x="6293815" y="1828800"/>
+            <a:ext cx="5166360" cy="4389120"/>
           </a:xfrm>
           <a:prstGeom prst="roundRect">
             <a:avLst/>
@@ -9747,36 +7437,10 @@
           </a:fontRef>
         </p:style>
         <p:txBody>
-          <a:bodyPr rtlCol="0" anchor="ctr"/>
-          <a:lstStyle/>
-          <a:p>
-            <a:pPr algn="ctr"/>
-          </a:p>
-        </p:txBody>
-      </p:sp>
-      <p:sp>
-        <p:nvSpPr>
-          <p:cNvPr id="9" name="TextBox 8"/>
-          <p:cNvSpPr txBox="1"/>
-          <p:nvPr/>
-        </p:nvSpPr>
-        <p:spPr>
-          <a:xfrm>
-            <a:off x="6492240" y="2011680"/>
-            <a:ext cx="4572000" cy="3931920"/>
-          </a:xfrm>
-          <a:prstGeom prst="rect">
-            <a:avLst/>
-          </a:prstGeom>
-          <a:noFill/>
-        </p:spPr>
-        <p:txBody>
-          <a:bodyPr wrap="square" lIns="0" tIns="0" rIns="0" bIns="0">
-            <a:spAutoFit/>
-          </a:bodyPr>
-          <a:lstStyle/>
-          <a:p>
-            <a:pPr>
+          <a:bodyPr rtlCol="0" anchor="ctr" wrap="square" lIns="228600" rIns="228600" tIns="228600" bIns="228600"/>
+          <a:lstStyle/>
+          <a:p>
+            <a:pPr algn="ctr">
               <a:spcAft>
                 <a:spcPts val="1200"/>
               </a:spcAft>
@@ -9792,7 +7456,7 @@
           </a:p>
           <a:p>
             <a:pPr>
-              <a:defRPr sz="1200" b="1">
+              <a:defRPr sz="1150" b="1">
                 <a:solidFill>
                   <a:srgbClr val="0F172A"/>
                 </a:solidFill>
@@ -9819,7 +7483,7 @@
           </a:p>
           <a:p>
             <a:pPr>
-              <a:defRPr sz="1200" b="1">
+              <a:defRPr sz="1150" b="1">
                 <a:solidFill>
                   <a:srgbClr val="0F172A"/>
                 </a:solidFill>
@@ -9846,7 +7510,7 @@
           </a:p>
           <a:p>
             <a:pPr>
-              <a:defRPr sz="1200" b="1">
+              <a:defRPr sz="1150" b="1">
                 <a:solidFill>
                   <a:srgbClr val="0F172A"/>
                 </a:solidFill>
